--- a/docs/pptx/whole/jx-linsubhr-ratio-hosp1.pptx
+++ b/docs/pptx/whole/jx-linsubhr-ratio-hosp1.pptx
@@ -2271,7 +2271,7 @@
           </p:nvSpPr>
           <p:spPr>
             <a:xfrm>
-              <a:off x="817517" y="5114368"/>
+              <a:off x="817517" y="5142518"/>
               <a:ext cx="7799693" cy="0"/>
             </a:xfrm>
             <a:custGeom>
@@ -2314,7 +2314,7 @@
           </p:nvSpPr>
           <p:spPr>
             <a:xfrm>
-              <a:off x="817517" y="4244691"/>
+              <a:off x="817517" y="4313054"/>
               <a:ext cx="7799693" cy="0"/>
             </a:xfrm>
             <a:custGeom>
@@ -2357,7 +2357,7 @@
           </p:nvSpPr>
           <p:spPr>
             <a:xfrm>
-              <a:off x="817517" y="3375014"/>
+              <a:off x="817517" y="3483591"/>
               <a:ext cx="7799693" cy="0"/>
             </a:xfrm>
             <a:custGeom>
@@ -2400,7 +2400,7 @@
           </p:nvSpPr>
           <p:spPr>
             <a:xfrm>
-              <a:off x="817517" y="2505337"/>
+              <a:off x="817517" y="2654127"/>
               <a:ext cx="7799693" cy="0"/>
             </a:xfrm>
             <a:custGeom>
@@ -2443,15 +2443,15 @@
           </p:nvSpPr>
           <p:spPr>
             <a:xfrm>
-              <a:off x="1615213" y="1896563"/>
-              <a:ext cx="0" cy="3826579"/>
+              <a:off x="1615213" y="2073503"/>
+              <a:ext cx="0" cy="3649639"/>
             </a:xfrm>
             <a:custGeom>
               <a:avLst/>
               <a:pathLst>
-                <a:path w="0" h="3826579">
+                <a:path w="0" h="3649639">
                   <a:moveTo>
-                    <a:pt x="0" y="3826579"/>
+                    <a:pt x="0" y="3649639"/>
                   </a:moveTo>
                   <a:lnTo>
                     <a:pt x="0" y="0"/>
@@ -2486,15 +2486,15 @@
           </p:nvSpPr>
           <p:spPr>
             <a:xfrm>
-              <a:off x="3387871" y="1896563"/>
-              <a:ext cx="0" cy="3826579"/>
+              <a:off x="3387871" y="2073503"/>
+              <a:ext cx="0" cy="3649639"/>
             </a:xfrm>
             <a:custGeom>
               <a:avLst/>
               <a:pathLst>
-                <a:path w="0" h="3826579">
+                <a:path w="0" h="3649639">
                   <a:moveTo>
-                    <a:pt x="0" y="3826579"/>
+                    <a:pt x="0" y="3649639"/>
                   </a:moveTo>
                   <a:lnTo>
                     <a:pt x="0" y="0"/>
@@ -2529,15 +2529,15 @@
           </p:nvSpPr>
           <p:spPr>
             <a:xfrm>
-              <a:off x="5160528" y="1896563"/>
-              <a:ext cx="0" cy="3826579"/>
+              <a:off x="5160528" y="2073503"/>
+              <a:ext cx="0" cy="3649639"/>
             </a:xfrm>
             <a:custGeom>
               <a:avLst/>
               <a:pathLst>
-                <a:path w="0" h="3826579">
+                <a:path w="0" h="3649639">
                   <a:moveTo>
-                    <a:pt x="0" y="3826579"/>
+                    <a:pt x="0" y="3649639"/>
                   </a:moveTo>
                   <a:lnTo>
                     <a:pt x="0" y="0"/>
@@ -2572,15 +2572,15 @@
           </p:nvSpPr>
           <p:spPr>
             <a:xfrm>
-              <a:off x="6933186" y="1896563"/>
-              <a:ext cx="0" cy="3826579"/>
+              <a:off x="6933186" y="2073503"/>
+              <a:ext cx="0" cy="3649639"/>
             </a:xfrm>
             <a:custGeom>
               <a:avLst/>
               <a:pathLst>
-                <a:path w="0" h="3826579">
+                <a:path w="0" h="3649639">
                   <a:moveTo>
-                    <a:pt x="0" y="3826579"/>
+                    <a:pt x="0" y="3649639"/>
                   </a:moveTo>
                   <a:lnTo>
                     <a:pt x="0" y="0"/>
@@ -2615,7 +2615,7 @@
           </p:nvSpPr>
           <p:spPr>
             <a:xfrm>
-              <a:off x="817517" y="5549207"/>
+              <a:off x="817517" y="5557249"/>
               <a:ext cx="7799693" cy="0"/>
             </a:xfrm>
             <a:custGeom>
@@ -2658,7 +2658,7 @@
           </p:nvSpPr>
           <p:spPr>
             <a:xfrm>
-              <a:off x="817517" y="4679530"/>
+              <a:off x="817517" y="4727786"/>
               <a:ext cx="7799693" cy="0"/>
             </a:xfrm>
             <a:custGeom>
@@ -2701,7 +2701,7 @@
           </p:nvSpPr>
           <p:spPr>
             <a:xfrm>
-              <a:off x="817517" y="3809853"/>
+              <a:off x="817517" y="3898322"/>
               <a:ext cx="7799693" cy="0"/>
             </a:xfrm>
             <a:custGeom>
@@ -2744,7 +2744,7 @@
           </p:nvSpPr>
           <p:spPr>
             <a:xfrm>
-              <a:off x="817517" y="2940175"/>
+              <a:off x="817517" y="3068859"/>
               <a:ext cx="7799693" cy="0"/>
             </a:xfrm>
             <a:custGeom>
@@ -2787,7 +2787,7 @@
           </p:nvSpPr>
           <p:spPr>
             <a:xfrm>
-              <a:off x="817517" y="2070498"/>
+              <a:off x="817517" y="2239395"/>
               <a:ext cx="7799693" cy="0"/>
             </a:xfrm>
             <a:custGeom>
@@ -2830,15 +2830,15 @@
           </p:nvSpPr>
           <p:spPr>
             <a:xfrm>
-              <a:off x="2501542" y="1896563"/>
-              <a:ext cx="0" cy="3826579"/>
+              <a:off x="2501542" y="2073503"/>
+              <a:ext cx="0" cy="3649639"/>
             </a:xfrm>
             <a:custGeom>
               <a:avLst/>
               <a:pathLst>
-                <a:path w="0" h="3826579">
+                <a:path w="0" h="3649639">
                   <a:moveTo>
-                    <a:pt x="0" y="3826579"/>
+                    <a:pt x="0" y="3649639"/>
                   </a:moveTo>
                   <a:lnTo>
                     <a:pt x="0" y="0"/>
@@ -2873,15 +2873,15 @@
           </p:nvSpPr>
           <p:spPr>
             <a:xfrm>
-              <a:off x="4274200" y="1896563"/>
-              <a:ext cx="0" cy="3826579"/>
+              <a:off x="4274200" y="2073503"/>
+              <a:ext cx="0" cy="3649639"/>
             </a:xfrm>
             <a:custGeom>
               <a:avLst/>
               <a:pathLst>
-                <a:path w="0" h="3826579">
+                <a:path w="0" h="3649639">
                   <a:moveTo>
-                    <a:pt x="0" y="3826579"/>
+                    <a:pt x="0" y="3649639"/>
                   </a:moveTo>
                   <a:lnTo>
                     <a:pt x="0" y="0"/>
@@ -2916,15 +2916,15 @@
           </p:nvSpPr>
           <p:spPr>
             <a:xfrm>
-              <a:off x="6046857" y="1896563"/>
-              <a:ext cx="0" cy="3826579"/>
+              <a:off x="6046857" y="2073503"/>
+              <a:ext cx="0" cy="3649639"/>
             </a:xfrm>
             <a:custGeom>
               <a:avLst/>
               <a:pathLst>
-                <a:path w="0" h="3826579">
+                <a:path w="0" h="3649639">
                   <a:moveTo>
-                    <a:pt x="0" y="3826579"/>
+                    <a:pt x="0" y="3649639"/>
                   </a:moveTo>
                   <a:lnTo>
                     <a:pt x="0" y="0"/>
@@ -2959,15 +2959,15 @@
           </p:nvSpPr>
           <p:spPr>
             <a:xfrm>
-              <a:off x="7819515" y="1896563"/>
-              <a:ext cx="0" cy="3826579"/>
+              <a:off x="7819515" y="2073503"/>
+              <a:ext cx="0" cy="3649639"/>
             </a:xfrm>
             <a:custGeom>
               <a:avLst/>
               <a:pathLst>
-                <a:path w="0" h="3826579">
+                <a:path w="0" h="3649639">
                   <a:moveTo>
-                    <a:pt x="0" y="3826579"/>
+                    <a:pt x="0" y="3649639"/>
                   </a:moveTo>
                   <a:lnTo>
                     <a:pt x="0" y="0"/>
@@ -3002,591 +3002,591 @@
           </p:nvSpPr>
           <p:spPr>
             <a:xfrm>
-              <a:off x="817517" y="1896563"/>
-              <a:ext cx="7235830" cy="3512980"/>
+              <a:off x="817517" y="2073503"/>
+              <a:ext cx="7235830" cy="3350541"/>
             </a:xfrm>
             <a:custGeom>
               <a:avLst/>
               <a:pathLst>
-                <a:path w="7235830" h="3512980">
+                <a:path w="7235830" h="3350541">
                   <a:moveTo>
                     <a:pt x="482597" y="0"/>
                   </a:moveTo>
                   <a:lnTo>
-                    <a:pt x="523667" y="72347"/>
-                  </a:lnTo>
-                  <a:lnTo>
-                    <a:pt x="597427" y="197729"/>
-                  </a:lnTo>
-                  <a:lnTo>
-                    <a:pt x="671187" y="318720"/>
-                  </a:lnTo>
-                  <a:lnTo>
-                    <a:pt x="744947" y="435475"/>
-                  </a:lnTo>
-                  <a:lnTo>
-                    <a:pt x="818707" y="548140"/>
-                  </a:lnTo>
-                  <a:lnTo>
-                    <a:pt x="892467" y="656860"/>
-                  </a:lnTo>
-                  <a:lnTo>
-                    <a:pt x="966227" y="761772"/>
-                  </a:lnTo>
-                  <a:lnTo>
-                    <a:pt x="1039987" y="863011"/>
-                  </a:lnTo>
-                  <a:lnTo>
-                    <a:pt x="1113747" y="960704"/>
-                  </a:lnTo>
-                  <a:lnTo>
-                    <a:pt x="1187508" y="1054976"/>
-                  </a:lnTo>
-                  <a:lnTo>
-                    <a:pt x="1261268" y="1145946"/>
-                  </a:lnTo>
-                  <a:lnTo>
-                    <a:pt x="1335028" y="1233731"/>
-                  </a:lnTo>
-                  <a:lnTo>
-                    <a:pt x="1408788" y="1318442"/>
-                  </a:lnTo>
-                  <a:lnTo>
-                    <a:pt x="1482548" y="1400185"/>
-                  </a:lnTo>
-                  <a:lnTo>
-                    <a:pt x="1556308" y="1479067"/>
-                  </a:lnTo>
-                  <a:lnTo>
-                    <a:pt x="1630068" y="1555185"/>
-                  </a:lnTo>
-                  <a:lnTo>
-                    <a:pt x="1703828" y="1628639"/>
-                  </a:lnTo>
-                  <a:lnTo>
-                    <a:pt x="1777588" y="1699519"/>
-                  </a:lnTo>
-                  <a:lnTo>
-                    <a:pt x="1851348" y="1767918"/>
-                  </a:lnTo>
-                  <a:lnTo>
-                    <a:pt x="1925108" y="1833921"/>
-                  </a:lnTo>
-                  <a:lnTo>
-                    <a:pt x="1998868" y="1897613"/>
-                  </a:lnTo>
-                  <a:lnTo>
-                    <a:pt x="2072628" y="1959074"/>
-                  </a:lnTo>
-                  <a:lnTo>
-                    <a:pt x="2146388" y="2018383"/>
-                  </a:lnTo>
-                  <a:lnTo>
-                    <a:pt x="2220148" y="2075615"/>
-                  </a:lnTo>
-                  <a:lnTo>
-                    <a:pt x="2293908" y="2130843"/>
-                  </a:lnTo>
-                  <a:lnTo>
-                    <a:pt x="2367668" y="2184136"/>
-                  </a:lnTo>
-                  <a:lnTo>
-                    <a:pt x="2441428" y="2235563"/>
-                  </a:lnTo>
-                  <a:lnTo>
-                    <a:pt x="2515188" y="2285190"/>
-                  </a:lnTo>
-                  <a:lnTo>
-                    <a:pt x="2588948" y="2333078"/>
-                  </a:lnTo>
-                  <a:lnTo>
-                    <a:pt x="2662708" y="2379289"/>
-                  </a:lnTo>
-                  <a:lnTo>
-                    <a:pt x="2736468" y="2423882"/>
-                  </a:lnTo>
-                  <a:lnTo>
-                    <a:pt x="2810228" y="2466913"/>
-                  </a:lnTo>
-                  <a:lnTo>
-                    <a:pt x="2883988" y="2508438"/>
-                  </a:lnTo>
-                  <a:lnTo>
-                    <a:pt x="2957748" y="2548508"/>
-                  </a:lnTo>
-                  <a:lnTo>
-                    <a:pt x="3031508" y="2587175"/>
-                  </a:lnTo>
-                  <a:lnTo>
-                    <a:pt x="3105268" y="2624488"/>
-                  </a:lnTo>
-                  <a:lnTo>
-                    <a:pt x="3179028" y="2660494"/>
-                  </a:lnTo>
-                  <a:lnTo>
-                    <a:pt x="3252788" y="2695239"/>
-                  </a:lnTo>
-                  <a:lnTo>
-                    <a:pt x="3326548" y="2728767"/>
-                  </a:lnTo>
-                  <a:lnTo>
-                    <a:pt x="3400308" y="2761121"/>
-                  </a:lnTo>
-                  <a:lnTo>
-                    <a:pt x="3474068" y="2782277"/>
-                  </a:lnTo>
-                  <a:lnTo>
-                    <a:pt x="3547828" y="2780006"/>
-                  </a:lnTo>
-                  <a:lnTo>
-                    <a:pt x="3621588" y="2777728"/>
-                  </a:lnTo>
-                  <a:lnTo>
-                    <a:pt x="3695348" y="2775445"/>
-                  </a:lnTo>
-                  <a:lnTo>
-                    <a:pt x="3769108" y="2773156"/>
-                  </a:lnTo>
-                  <a:lnTo>
-                    <a:pt x="3842868" y="2770861"/>
-                  </a:lnTo>
-                  <a:lnTo>
-                    <a:pt x="3916628" y="2768560"/>
-                  </a:lnTo>
-                  <a:lnTo>
-                    <a:pt x="3990388" y="2766253"/>
-                  </a:lnTo>
-                  <a:lnTo>
-                    <a:pt x="4064149" y="2763940"/>
-                  </a:lnTo>
-                  <a:lnTo>
-                    <a:pt x="4137909" y="2761621"/>
-                  </a:lnTo>
-                  <a:lnTo>
-                    <a:pt x="4211669" y="2759296"/>
-                  </a:lnTo>
-                  <a:lnTo>
-                    <a:pt x="4285429" y="2756965"/>
-                  </a:lnTo>
-                  <a:lnTo>
-                    <a:pt x="4359189" y="2754628"/>
-                  </a:lnTo>
-                  <a:lnTo>
-                    <a:pt x="4432949" y="2752284"/>
-                  </a:lnTo>
-                  <a:lnTo>
-                    <a:pt x="4506709" y="2749935"/>
-                  </a:lnTo>
-                  <a:lnTo>
-                    <a:pt x="4580469" y="2747579"/>
-                  </a:lnTo>
-                  <a:lnTo>
-                    <a:pt x="4654229" y="2745217"/>
-                  </a:lnTo>
-                  <a:lnTo>
-                    <a:pt x="4727989" y="2742849"/>
-                  </a:lnTo>
-                  <a:lnTo>
-                    <a:pt x="4801749" y="2740475"/>
-                  </a:lnTo>
-                  <a:lnTo>
-                    <a:pt x="4875509" y="2738095"/>
-                  </a:lnTo>
-                  <a:lnTo>
-                    <a:pt x="4949269" y="2735708"/>
-                  </a:lnTo>
-                  <a:lnTo>
-                    <a:pt x="5023029" y="2733316"/>
-                  </a:lnTo>
-                  <a:lnTo>
-                    <a:pt x="5096789" y="2730917"/>
-                  </a:lnTo>
-                  <a:lnTo>
-                    <a:pt x="5170549" y="2728511"/>
-                  </a:lnTo>
-                  <a:lnTo>
-                    <a:pt x="5244309" y="2726100"/>
-                  </a:lnTo>
-                  <a:lnTo>
-                    <a:pt x="5318069" y="2723682"/>
-                  </a:lnTo>
-                  <a:lnTo>
-                    <a:pt x="5391829" y="2721258"/>
-                  </a:lnTo>
-                  <a:lnTo>
-                    <a:pt x="5465589" y="2718828"/>
-                  </a:lnTo>
-                  <a:lnTo>
-                    <a:pt x="5539349" y="2716391"/>
-                  </a:lnTo>
-                  <a:lnTo>
-                    <a:pt x="5613109" y="2713948"/>
-                  </a:lnTo>
-                  <a:lnTo>
-                    <a:pt x="5686869" y="2711498"/>
-                  </a:lnTo>
-                  <a:lnTo>
-                    <a:pt x="5760629" y="2709042"/>
-                  </a:lnTo>
-                  <a:lnTo>
-                    <a:pt x="5834389" y="2706580"/>
-                  </a:lnTo>
-                  <a:lnTo>
-                    <a:pt x="5908149" y="2704111"/>
-                  </a:lnTo>
-                  <a:lnTo>
-                    <a:pt x="5981909" y="2701636"/>
-                  </a:lnTo>
-                  <a:lnTo>
-                    <a:pt x="6055669" y="2699154"/>
-                  </a:lnTo>
-                  <a:lnTo>
-                    <a:pt x="6129429" y="2696666"/>
-                  </a:lnTo>
-                  <a:lnTo>
-                    <a:pt x="6203189" y="2694171"/>
-                  </a:lnTo>
-                  <a:lnTo>
-                    <a:pt x="6276949" y="2691670"/>
-                  </a:lnTo>
-                  <a:lnTo>
-                    <a:pt x="6350709" y="2689163"/>
-                  </a:lnTo>
-                  <a:lnTo>
-                    <a:pt x="6424469" y="2686649"/>
-                  </a:lnTo>
-                  <a:lnTo>
-                    <a:pt x="6498229" y="2684128"/>
-                  </a:lnTo>
-                  <a:lnTo>
-                    <a:pt x="6571989" y="2681600"/>
-                  </a:lnTo>
-                  <a:lnTo>
-                    <a:pt x="6645749" y="2679066"/>
-                  </a:lnTo>
-                  <a:lnTo>
-                    <a:pt x="6719509" y="2676526"/>
-                  </a:lnTo>
-                  <a:lnTo>
-                    <a:pt x="6793269" y="2673979"/>
-                  </a:lnTo>
-                  <a:lnTo>
-                    <a:pt x="6867029" y="2671425"/>
-                  </a:lnTo>
-                  <a:lnTo>
-                    <a:pt x="6940789" y="2668864"/>
-                  </a:lnTo>
-                  <a:lnTo>
-                    <a:pt x="7014550" y="2666297"/>
-                  </a:lnTo>
-                  <a:lnTo>
-                    <a:pt x="7088310" y="2663723"/>
-                  </a:lnTo>
-                  <a:lnTo>
-                    <a:pt x="7162070" y="2661143"/>
-                  </a:lnTo>
-                  <a:lnTo>
-                    <a:pt x="7235830" y="2658555"/>
-                  </a:lnTo>
-                  <a:lnTo>
-                    <a:pt x="7235830" y="3512980"/>
-                  </a:lnTo>
-                  <a:lnTo>
-                    <a:pt x="7162070" y="3507911"/>
-                  </a:lnTo>
-                  <a:lnTo>
-                    <a:pt x="7088310" y="3502659"/>
-                  </a:lnTo>
-                  <a:lnTo>
-                    <a:pt x="7014550" y="3497216"/>
-                  </a:lnTo>
-                  <a:lnTo>
-                    <a:pt x="6940789" y="3491575"/>
-                  </a:lnTo>
-                  <a:lnTo>
-                    <a:pt x="6867029" y="3485730"/>
-                  </a:lnTo>
-                  <a:lnTo>
-                    <a:pt x="6793269" y="3479672"/>
-                  </a:lnTo>
-                  <a:lnTo>
-                    <a:pt x="6719509" y="3473395"/>
-                  </a:lnTo>
-                  <a:lnTo>
-                    <a:pt x="6645749" y="3466890"/>
-                  </a:lnTo>
-                  <a:lnTo>
-                    <a:pt x="6571989" y="3460149"/>
-                  </a:lnTo>
-                  <a:lnTo>
-                    <a:pt x="6498229" y="3453163"/>
-                  </a:lnTo>
-                  <a:lnTo>
-                    <a:pt x="6424469" y="3445924"/>
-                  </a:lnTo>
-                  <a:lnTo>
-                    <a:pt x="6350709" y="3438422"/>
-                  </a:lnTo>
-                  <a:lnTo>
-                    <a:pt x="6276949" y="3430647"/>
-                  </a:lnTo>
-                  <a:lnTo>
-                    <a:pt x="6203189" y="3422591"/>
-                  </a:lnTo>
-                  <a:lnTo>
-                    <a:pt x="6129429" y="3414242"/>
-                  </a:lnTo>
-                  <a:lnTo>
-                    <a:pt x="6055669" y="3405590"/>
-                  </a:lnTo>
-                  <a:lnTo>
-                    <a:pt x="5981909" y="3396624"/>
-                  </a:lnTo>
-                  <a:lnTo>
-                    <a:pt x="5908149" y="3387333"/>
-                  </a:lnTo>
-                  <a:lnTo>
-                    <a:pt x="5834389" y="3377705"/>
-                  </a:lnTo>
-                  <a:lnTo>
-                    <a:pt x="5760629" y="3367727"/>
-                  </a:lnTo>
-                  <a:lnTo>
-                    <a:pt x="5686869" y="3357387"/>
-                  </a:lnTo>
-                  <a:lnTo>
-                    <a:pt x="5613109" y="3346672"/>
-                  </a:lnTo>
-                  <a:lnTo>
-                    <a:pt x="5539349" y="3335568"/>
-                  </a:lnTo>
-                  <a:lnTo>
-                    <a:pt x="5465589" y="3324061"/>
-                  </a:lnTo>
-                  <a:lnTo>
-                    <a:pt x="5391829" y="3312137"/>
-                  </a:lnTo>
-                  <a:lnTo>
-                    <a:pt x="5318069" y="3299779"/>
-                  </a:lnTo>
-                  <a:lnTo>
-                    <a:pt x="5244309" y="3286973"/>
-                  </a:lnTo>
-                  <a:lnTo>
-                    <a:pt x="5170549" y="3273703"/>
-                  </a:lnTo>
-                  <a:lnTo>
-                    <a:pt x="5096789" y="3259951"/>
-                  </a:lnTo>
-                  <a:lnTo>
-                    <a:pt x="5023029" y="3245700"/>
-                  </a:lnTo>
-                  <a:lnTo>
-                    <a:pt x="4949269" y="3230931"/>
-                  </a:lnTo>
-                  <a:lnTo>
-                    <a:pt x="4875509" y="3215627"/>
-                  </a:lnTo>
-                  <a:lnTo>
-                    <a:pt x="4801749" y="3199767"/>
-                  </a:lnTo>
-                  <a:lnTo>
-                    <a:pt x="4727989" y="3183332"/>
-                  </a:lnTo>
-                  <a:lnTo>
-                    <a:pt x="4654229" y="3166300"/>
-                  </a:lnTo>
-                  <a:lnTo>
-                    <a:pt x="4580469" y="3148650"/>
-                  </a:lnTo>
-                  <a:lnTo>
-                    <a:pt x="4506709" y="3130360"/>
-                  </a:lnTo>
-                  <a:lnTo>
-                    <a:pt x="4432949" y="3111406"/>
-                  </a:lnTo>
-                  <a:lnTo>
-                    <a:pt x="4359189" y="3091764"/>
-                  </a:lnTo>
-                  <a:lnTo>
-                    <a:pt x="4285429" y="3071409"/>
-                  </a:lnTo>
-                  <a:lnTo>
-                    <a:pt x="4211669" y="3050315"/>
-                  </a:lnTo>
-                  <a:lnTo>
-                    <a:pt x="4137909" y="3028456"/>
-                  </a:lnTo>
-                  <a:lnTo>
-                    <a:pt x="4064149" y="3005804"/>
-                  </a:lnTo>
-                  <a:lnTo>
-                    <a:pt x="3990388" y="2982329"/>
-                  </a:lnTo>
-                  <a:lnTo>
-                    <a:pt x="3916628" y="2958003"/>
-                  </a:lnTo>
-                  <a:lnTo>
-                    <a:pt x="3842868" y="2932794"/>
-                  </a:lnTo>
-                  <a:lnTo>
-                    <a:pt x="3769108" y="2906670"/>
-                  </a:lnTo>
-                  <a:lnTo>
-                    <a:pt x="3695348" y="2879598"/>
-                  </a:lnTo>
-                  <a:lnTo>
-                    <a:pt x="3621588" y="2851543"/>
-                  </a:lnTo>
-                  <a:lnTo>
-                    <a:pt x="3547828" y="2822470"/>
-                  </a:lnTo>
-                  <a:lnTo>
-                    <a:pt x="3474068" y="2792342"/>
-                  </a:lnTo>
-                  <a:lnTo>
-                    <a:pt x="3400308" y="2784542"/>
-                  </a:lnTo>
-                  <a:lnTo>
-                    <a:pt x="3326548" y="2786801"/>
-                  </a:lnTo>
-                  <a:lnTo>
-                    <a:pt x="3252788" y="2789055"/>
-                  </a:lnTo>
-                  <a:lnTo>
-                    <a:pt x="3179028" y="2791303"/>
-                  </a:lnTo>
-                  <a:lnTo>
-                    <a:pt x="3105268" y="2793544"/>
-                  </a:lnTo>
-                  <a:lnTo>
-                    <a:pt x="3031508" y="2795780"/>
-                  </a:lnTo>
-                  <a:lnTo>
-                    <a:pt x="2957748" y="2798011"/>
-                  </a:lnTo>
-                  <a:lnTo>
-                    <a:pt x="2883988" y="2800235"/>
-                  </a:lnTo>
-                  <a:lnTo>
-                    <a:pt x="2810228" y="2802454"/>
-                  </a:lnTo>
-                  <a:lnTo>
-                    <a:pt x="2736468" y="2804666"/>
-                  </a:lnTo>
-                  <a:lnTo>
-                    <a:pt x="2662708" y="2806873"/>
-                  </a:lnTo>
-                  <a:lnTo>
-                    <a:pt x="2588948" y="2809075"/>
-                  </a:lnTo>
-                  <a:lnTo>
-                    <a:pt x="2515188" y="2811270"/>
-                  </a:lnTo>
-                  <a:lnTo>
-                    <a:pt x="2441428" y="2813460"/>
-                  </a:lnTo>
-                  <a:lnTo>
-                    <a:pt x="2367668" y="2815644"/>
-                  </a:lnTo>
-                  <a:lnTo>
-                    <a:pt x="2293908" y="2817823"/>
-                  </a:lnTo>
-                  <a:lnTo>
-                    <a:pt x="2220148" y="2819995"/>
-                  </a:lnTo>
-                  <a:lnTo>
-                    <a:pt x="2146388" y="2822163"/>
-                  </a:lnTo>
-                  <a:lnTo>
-                    <a:pt x="2072628" y="2824324"/>
-                  </a:lnTo>
-                  <a:lnTo>
-                    <a:pt x="1998868" y="2826480"/>
-                  </a:lnTo>
-                  <a:lnTo>
-                    <a:pt x="1925108" y="2828630"/>
-                  </a:lnTo>
-                  <a:lnTo>
-                    <a:pt x="1851348" y="2830775"/>
-                  </a:lnTo>
-                  <a:lnTo>
-                    <a:pt x="1777588" y="2832914"/>
-                  </a:lnTo>
-                  <a:lnTo>
-                    <a:pt x="1703828" y="2835048"/>
-                  </a:lnTo>
-                  <a:lnTo>
-                    <a:pt x="1630068" y="2837175"/>
-                  </a:lnTo>
-                  <a:lnTo>
-                    <a:pt x="1556308" y="2839298"/>
-                  </a:lnTo>
-                  <a:lnTo>
-                    <a:pt x="1482548" y="2841415"/>
-                  </a:lnTo>
-                  <a:lnTo>
-                    <a:pt x="1408788" y="2843526"/>
-                  </a:lnTo>
-                  <a:lnTo>
-                    <a:pt x="1335028" y="2845632"/>
-                  </a:lnTo>
-                  <a:lnTo>
-                    <a:pt x="1261268" y="2847733"/>
-                  </a:lnTo>
-                  <a:lnTo>
-                    <a:pt x="1187508" y="2849827"/>
-                  </a:lnTo>
-                  <a:lnTo>
-                    <a:pt x="1113747" y="2851917"/>
-                  </a:lnTo>
-                  <a:lnTo>
-                    <a:pt x="1039987" y="2854001"/>
-                  </a:lnTo>
-                  <a:lnTo>
-                    <a:pt x="966227" y="2856080"/>
-                  </a:lnTo>
-                  <a:lnTo>
-                    <a:pt x="892467" y="2858153"/>
-                  </a:lnTo>
-                  <a:lnTo>
-                    <a:pt x="818707" y="2860221"/>
-                  </a:lnTo>
-                  <a:lnTo>
-                    <a:pt x="744947" y="2862283"/>
-                  </a:lnTo>
-                  <a:lnTo>
-                    <a:pt x="671187" y="2864340"/>
-                  </a:lnTo>
-                  <a:lnTo>
-                    <a:pt x="597427" y="2866392"/>
-                  </a:lnTo>
-                  <a:lnTo>
-                    <a:pt x="523667" y="2868438"/>
-                  </a:lnTo>
-                  <a:lnTo>
-                    <a:pt x="449907" y="2870479"/>
-                  </a:lnTo>
-                  <a:lnTo>
-                    <a:pt x="376147" y="2872515"/>
-                  </a:lnTo>
-                  <a:lnTo>
-                    <a:pt x="302387" y="2874546"/>
-                  </a:lnTo>
-                  <a:lnTo>
-                    <a:pt x="228627" y="2876571"/>
-                  </a:lnTo>
-                  <a:lnTo>
-                    <a:pt x="154867" y="2878591"/>
-                  </a:lnTo>
-                  <a:lnTo>
-                    <a:pt x="81107" y="2880605"/>
-                  </a:lnTo>
-                  <a:lnTo>
-                    <a:pt x="7347" y="2882615"/>
-                  </a:lnTo>
-                  <a:lnTo>
-                    <a:pt x="0" y="2882814"/>
+                    <a:pt x="523667" y="69002"/>
+                  </a:lnTo>
+                  <a:lnTo>
+                    <a:pt x="597427" y="188586"/>
+                  </a:lnTo>
+                  <a:lnTo>
+                    <a:pt x="671187" y="303983"/>
+                  </a:lnTo>
+                  <a:lnTo>
+                    <a:pt x="744947" y="415338"/>
+                  </a:lnTo>
+                  <a:lnTo>
+                    <a:pt x="818707" y="522794"/>
+                  </a:lnTo>
+                  <a:lnTo>
+                    <a:pt x="892467" y="626487"/>
+                  </a:lnTo>
+                  <a:lnTo>
+                    <a:pt x="966227" y="726548"/>
+                  </a:lnTo>
+                  <a:lnTo>
+                    <a:pt x="1039987" y="823106"/>
+                  </a:lnTo>
+                  <a:lnTo>
+                    <a:pt x="1113747" y="916281"/>
+                  </a:lnTo>
+                  <a:lnTo>
+                    <a:pt x="1187508" y="1006194"/>
+                  </a:lnTo>
+                  <a:lnTo>
+                    <a:pt x="1261268" y="1092958"/>
+                  </a:lnTo>
+                  <a:lnTo>
+                    <a:pt x="1335028" y="1176684"/>
+                  </a:lnTo>
+                  <a:lnTo>
+                    <a:pt x="1408788" y="1257477"/>
+                  </a:lnTo>
+                  <a:lnTo>
+                    <a:pt x="1482548" y="1335441"/>
+                  </a:lnTo>
+                  <a:lnTo>
+                    <a:pt x="1556308" y="1410675"/>
+                  </a:lnTo>
+                  <a:lnTo>
+                    <a:pt x="1630068" y="1483274"/>
+                  </a:lnTo>
+                  <a:lnTo>
+                    <a:pt x="1703828" y="1553331"/>
+                  </a:lnTo>
+                  <a:lnTo>
+                    <a:pt x="1777588" y="1620934"/>
+                  </a:lnTo>
+                  <a:lnTo>
+                    <a:pt x="1851348" y="1686170"/>
+                  </a:lnTo>
+                  <a:lnTo>
+                    <a:pt x="1925108" y="1749121"/>
+                  </a:lnTo>
+                  <a:lnTo>
+                    <a:pt x="1998868" y="1809868"/>
+                  </a:lnTo>
+                  <a:lnTo>
+                    <a:pt x="2072628" y="1868487"/>
+                  </a:lnTo>
+                  <a:lnTo>
+                    <a:pt x="2146388" y="1925054"/>
+                  </a:lnTo>
+                  <a:lnTo>
+                    <a:pt x="2220148" y="1979639"/>
+                  </a:lnTo>
+                  <a:lnTo>
+                    <a:pt x="2293908" y="2032313"/>
+                  </a:lnTo>
+                  <a:lnTo>
+                    <a:pt x="2367668" y="2083142"/>
+                  </a:lnTo>
+                  <a:lnTo>
+                    <a:pt x="2441428" y="2132192"/>
+                  </a:lnTo>
+                  <a:lnTo>
+                    <a:pt x="2515188" y="2179523"/>
+                  </a:lnTo>
+                  <a:lnTo>
+                    <a:pt x="2588948" y="2225197"/>
+                  </a:lnTo>
+                  <a:lnTo>
+                    <a:pt x="2662708" y="2269272"/>
+                  </a:lnTo>
+                  <a:lnTo>
+                    <a:pt x="2736468" y="2311803"/>
+                  </a:lnTo>
+                  <a:lnTo>
+                    <a:pt x="2810228" y="2352844"/>
+                  </a:lnTo>
+                  <a:lnTo>
+                    <a:pt x="2883988" y="2392448"/>
+                  </a:lnTo>
+                  <a:lnTo>
+                    <a:pt x="2957748" y="2430666"/>
+                  </a:lnTo>
+                  <a:lnTo>
+                    <a:pt x="3031508" y="2467545"/>
+                  </a:lnTo>
+                  <a:lnTo>
+                    <a:pt x="3105268" y="2503132"/>
+                  </a:lnTo>
+                  <a:lnTo>
+                    <a:pt x="3179028" y="2537473"/>
+                  </a:lnTo>
+                  <a:lnTo>
+                    <a:pt x="3252788" y="2570612"/>
+                  </a:lnTo>
+                  <a:lnTo>
+                    <a:pt x="3326548" y="2602590"/>
+                  </a:lnTo>
+                  <a:lnTo>
+                    <a:pt x="3400308" y="2633448"/>
+                  </a:lnTo>
+                  <a:lnTo>
+                    <a:pt x="3474068" y="2653625"/>
+                  </a:lnTo>
+                  <a:lnTo>
+                    <a:pt x="3547828" y="2651459"/>
+                  </a:lnTo>
+                  <a:lnTo>
+                    <a:pt x="3621588" y="2649287"/>
+                  </a:lnTo>
+                  <a:lnTo>
+                    <a:pt x="3695348" y="2647110"/>
+                  </a:lnTo>
+                  <a:lnTo>
+                    <a:pt x="3769108" y="2644927"/>
+                  </a:lnTo>
+                  <a:lnTo>
+                    <a:pt x="3842868" y="2642738"/>
+                  </a:lnTo>
+                  <a:lnTo>
+                    <a:pt x="3916628" y="2640543"/>
+                  </a:lnTo>
+                  <a:lnTo>
+                    <a:pt x="3990388" y="2638343"/>
+                  </a:lnTo>
+                  <a:lnTo>
+                    <a:pt x="4064149" y="2636137"/>
+                  </a:lnTo>
+                  <a:lnTo>
+                    <a:pt x="4137909" y="2633925"/>
+                  </a:lnTo>
+                  <a:lnTo>
+                    <a:pt x="4211669" y="2631707"/>
+                  </a:lnTo>
+                  <a:lnTo>
+                    <a:pt x="4285429" y="2629484"/>
+                  </a:lnTo>
+                  <a:lnTo>
+                    <a:pt x="4359189" y="2627255"/>
+                  </a:lnTo>
+                  <a:lnTo>
+                    <a:pt x="4432949" y="2625020"/>
+                  </a:lnTo>
+                  <a:lnTo>
+                    <a:pt x="4506709" y="2622779"/>
+                  </a:lnTo>
+                  <a:lnTo>
+                    <a:pt x="4580469" y="2620532"/>
+                  </a:lnTo>
+                  <a:lnTo>
+                    <a:pt x="4654229" y="2618279"/>
+                  </a:lnTo>
+                  <a:lnTo>
+                    <a:pt x="4727989" y="2616021"/>
+                  </a:lnTo>
+                  <a:lnTo>
+                    <a:pt x="4801749" y="2613757"/>
+                  </a:lnTo>
+                  <a:lnTo>
+                    <a:pt x="4875509" y="2611486"/>
+                  </a:lnTo>
+                  <a:lnTo>
+                    <a:pt x="4949269" y="2609210"/>
+                  </a:lnTo>
+                  <a:lnTo>
+                    <a:pt x="5023029" y="2606928"/>
+                  </a:lnTo>
+                  <a:lnTo>
+                    <a:pt x="5096789" y="2604640"/>
+                  </a:lnTo>
+                  <a:lnTo>
+                    <a:pt x="5170549" y="2602346"/>
+                  </a:lnTo>
+                  <a:lnTo>
+                    <a:pt x="5244309" y="2600046"/>
+                  </a:lnTo>
+                  <a:lnTo>
+                    <a:pt x="5318069" y="2597740"/>
+                  </a:lnTo>
+                  <a:lnTo>
+                    <a:pt x="5391829" y="2595428"/>
+                  </a:lnTo>
+                  <a:lnTo>
+                    <a:pt x="5465589" y="2593110"/>
+                  </a:lnTo>
+                  <a:lnTo>
+                    <a:pt x="5539349" y="2590786"/>
+                  </a:lnTo>
+                  <a:lnTo>
+                    <a:pt x="5613109" y="2588456"/>
+                  </a:lnTo>
+                  <a:lnTo>
+                    <a:pt x="5686869" y="2586119"/>
+                  </a:lnTo>
+                  <a:lnTo>
+                    <a:pt x="5760629" y="2583777"/>
+                  </a:lnTo>
+                  <a:lnTo>
+                    <a:pt x="5834389" y="2581429"/>
+                  </a:lnTo>
+                  <a:lnTo>
+                    <a:pt x="5908149" y="2579074"/>
+                  </a:lnTo>
+                  <a:lnTo>
+                    <a:pt x="5981909" y="2576713"/>
+                  </a:lnTo>
+                  <a:lnTo>
+                    <a:pt x="6055669" y="2574346"/>
+                  </a:lnTo>
+                  <a:lnTo>
+                    <a:pt x="6129429" y="2571973"/>
+                  </a:lnTo>
+                  <a:lnTo>
+                    <a:pt x="6203189" y="2569594"/>
+                  </a:lnTo>
+                  <a:lnTo>
+                    <a:pt x="6276949" y="2567209"/>
+                  </a:lnTo>
+                  <a:lnTo>
+                    <a:pt x="6350709" y="2564817"/>
+                  </a:lnTo>
+                  <a:lnTo>
+                    <a:pt x="6424469" y="2562419"/>
+                  </a:lnTo>
+                  <a:lnTo>
+                    <a:pt x="6498229" y="2560015"/>
+                  </a:lnTo>
+                  <a:lnTo>
+                    <a:pt x="6571989" y="2557604"/>
+                  </a:lnTo>
+                  <a:lnTo>
+                    <a:pt x="6645749" y="2555187"/>
+                  </a:lnTo>
+                  <a:lnTo>
+                    <a:pt x="6719509" y="2552764"/>
+                  </a:lnTo>
+                  <a:lnTo>
+                    <a:pt x="6793269" y="2550335"/>
+                  </a:lnTo>
+                  <a:lnTo>
+                    <a:pt x="6867029" y="2547899"/>
+                  </a:lnTo>
+                  <a:lnTo>
+                    <a:pt x="6940789" y="2545457"/>
+                  </a:lnTo>
+                  <a:lnTo>
+                    <a:pt x="7014550" y="2543009"/>
+                  </a:lnTo>
+                  <a:lnTo>
+                    <a:pt x="7088310" y="2540554"/>
+                  </a:lnTo>
+                  <a:lnTo>
+                    <a:pt x="7162070" y="2538093"/>
+                  </a:lnTo>
+                  <a:lnTo>
+                    <a:pt x="7235830" y="2535625"/>
+                  </a:lnTo>
+                  <a:lnTo>
+                    <a:pt x="7235830" y="3350541"/>
+                  </a:lnTo>
+                  <a:lnTo>
+                    <a:pt x="7162070" y="3345707"/>
+                  </a:lnTo>
+                  <a:lnTo>
+                    <a:pt x="7088310" y="3340697"/>
+                  </a:lnTo>
+                  <a:lnTo>
+                    <a:pt x="7014550" y="3335506"/>
+                  </a:lnTo>
+                  <a:lnTo>
+                    <a:pt x="6940789" y="3330126"/>
+                  </a:lnTo>
+                  <a:lnTo>
+                    <a:pt x="6867029" y="3324551"/>
+                  </a:lnTo>
+                  <a:lnTo>
+                    <a:pt x="6793269" y="3318774"/>
+                  </a:lnTo>
+                  <a:lnTo>
+                    <a:pt x="6719509" y="3312787"/>
+                  </a:lnTo>
+                  <a:lnTo>
+                    <a:pt x="6645749" y="3306582"/>
+                  </a:lnTo>
+                  <a:lnTo>
+                    <a:pt x="6571989" y="3300153"/>
+                  </a:lnTo>
+                  <a:lnTo>
+                    <a:pt x="6498229" y="3293490"/>
+                  </a:lnTo>
+                  <a:lnTo>
+                    <a:pt x="6424469" y="3286585"/>
+                  </a:lnTo>
+                  <a:lnTo>
+                    <a:pt x="6350709" y="3279430"/>
+                  </a:lnTo>
+                  <a:lnTo>
+                    <a:pt x="6276949" y="3272015"/>
+                  </a:lnTo>
+                  <a:lnTo>
+                    <a:pt x="6203189" y="3264331"/>
+                  </a:lnTo>
+                  <a:lnTo>
+                    <a:pt x="6129429" y="3256369"/>
+                  </a:lnTo>
+                  <a:lnTo>
+                    <a:pt x="6055669" y="3248117"/>
+                  </a:lnTo>
+                  <a:lnTo>
+                    <a:pt x="5981909" y="3239566"/>
+                  </a:lnTo>
+                  <a:lnTo>
+                    <a:pt x="5908149" y="3230704"/>
+                  </a:lnTo>
+                  <a:lnTo>
+                    <a:pt x="5834389" y="3221521"/>
+                  </a:lnTo>
+                  <a:lnTo>
+                    <a:pt x="5760629" y="3212005"/>
+                  </a:lnTo>
+                  <a:lnTo>
+                    <a:pt x="5686869" y="3202143"/>
+                  </a:lnTo>
+                  <a:lnTo>
+                    <a:pt x="5613109" y="3191923"/>
+                  </a:lnTo>
+                  <a:lnTo>
+                    <a:pt x="5539349" y="3181333"/>
+                  </a:lnTo>
+                  <a:lnTo>
+                    <a:pt x="5465589" y="3170358"/>
+                  </a:lnTo>
+                  <a:lnTo>
+                    <a:pt x="5391829" y="3158985"/>
+                  </a:lnTo>
+                  <a:lnTo>
+                    <a:pt x="5318069" y="3147199"/>
+                  </a:lnTo>
+                  <a:lnTo>
+                    <a:pt x="5244309" y="3134985"/>
+                  </a:lnTo>
+                  <a:lnTo>
+                    <a:pt x="5170549" y="3122328"/>
+                  </a:lnTo>
+                  <a:lnTo>
+                    <a:pt x="5096789" y="3109212"/>
+                  </a:lnTo>
+                  <a:lnTo>
+                    <a:pt x="5023029" y="3095620"/>
+                  </a:lnTo>
+                  <a:lnTo>
+                    <a:pt x="4949269" y="3081534"/>
+                  </a:lnTo>
+                  <a:lnTo>
+                    <a:pt x="4875509" y="3066937"/>
+                  </a:lnTo>
+                  <a:lnTo>
+                    <a:pt x="4801749" y="3051811"/>
+                  </a:lnTo>
+                  <a:lnTo>
+                    <a:pt x="4727989" y="3036136"/>
+                  </a:lnTo>
+                  <a:lnTo>
+                    <a:pt x="4654229" y="3019891"/>
+                  </a:lnTo>
+                  <a:lnTo>
+                    <a:pt x="4580469" y="3003058"/>
+                  </a:lnTo>
+                  <a:lnTo>
+                    <a:pt x="4506709" y="2985613"/>
+                  </a:lnTo>
+                  <a:lnTo>
+                    <a:pt x="4432949" y="2967535"/>
+                  </a:lnTo>
+                  <a:lnTo>
+                    <a:pt x="4359189" y="2948802"/>
+                  </a:lnTo>
+                  <a:lnTo>
+                    <a:pt x="4285429" y="2929388"/>
+                  </a:lnTo>
+                  <a:lnTo>
+                    <a:pt x="4211669" y="2909270"/>
+                  </a:lnTo>
+                  <a:lnTo>
+                    <a:pt x="4137909" y="2888421"/>
+                  </a:lnTo>
+                  <a:lnTo>
+                    <a:pt x="4064149" y="2866816"/>
+                  </a:lnTo>
+                  <a:lnTo>
+                    <a:pt x="3990388" y="2844427"/>
+                  </a:lnTo>
+                  <a:lnTo>
+                    <a:pt x="3916628" y="2821226"/>
+                  </a:lnTo>
+                  <a:lnTo>
+                    <a:pt x="3842868" y="2797182"/>
+                  </a:lnTo>
+                  <a:lnTo>
+                    <a:pt x="3769108" y="2772266"/>
+                  </a:lnTo>
+                  <a:lnTo>
+                    <a:pt x="3695348" y="2746446"/>
+                  </a:lnTo>
+                  <a:lnTo>
+                    <a:pt x="3621588" y="2719689"/>
+                  </a:lnTo>
+                  <a:lnTo>
+                    <a:pt x="3547828" y="2691960"/>
+                  </a:lnTo>
+                  <a:lnTo>
+                    <a:pt x="3474068" y="2663226"/>
+                  </a:lnTo>
+                  <a:lnTo>
+                    <a:pt x="3400308" y="2655786"/>
+                  </a:lnTo>
+                  <a:lnTo>
+                    <a:pt x="3326548" y="2657941"/>
+                  </a:lnTo>
+                  <a:lnTo>
+                    <a:pt x="3252788" y="2660090"/>
+                  </a:lnTo>
+                  <a:lnTo>
+                    <a:pt x="3179028" y="2662234"/>
+                  </a:lnTo>
+                  <a:lnTo>
+                    <a:pt x="3105268" y="2664372"/>
+                  </a:lnTo>
+                  <a:lnTo>
+                    <a:pt x="3031508" y="2666505"/>
+                  </a:lnTo>
+                  <a:lnTo>
+                    <a:pt x="2957748" y="2668632"/>
+                  </a:lnTo>
+                  <a:lnTo>
+                    <a:pt x="2883988" y="2670753"/>
+                  </a:lnTo>
+                  <a:lnTo>
+                    <a:pt x="2810228" y="2672869"/>
+                  </a:lnTo>
+                  <a:lnTo>
+                    <a:pt x="2736468" y="2674980"/>
+                  </a:lnTo>
+                  <a:lnTo>
+                    <a:pt x="2662708" y="2677085"/>
+                  </a:lnTo>
+                  <a:lnTo>
+                    <a:pt x="2588948" y="2679184"/>
+                  </a:lnTo>
+                  <a:lnTo>
+                    <a:pt x="2515188" y="2681278"/>
+                  </a:lnTo>
+                  <a:lnTo>
+                    <a:pt x="2441428" y="2683367"/>
+                  </a:lnTo>
+                  <a:lnTo>
+                    <a:pt x="2367668" y="2685450"/>
+                  </a:lnTo>
+                  <a:lnTo>
+                    <a:pt x="2293908" y="2687528"/>
+                  </a:lnTo>
+                  <a:lnTo>
+                    <a:pt x="2220148" y="2689600"/>
+                  </a:lnTo>
+                  <a:lnTo>
+                    <a:pt x="2146388" y="2691667"/>
+                  </a:lnTo>
+                  <a:lnTo>
+                    <a:pt x="2072628" y="2693728"/>
+                  </a:lnTo>
+                  <a:lnTo>
+                    <a:pt x="1998868" y="2695785"/>
+                  </a:lnTo>
+                  <a:lnTo>
+                    <a:pt x="1925108" y="2697835"/>
+                  </a:lnTo>
+                  <a:lnTo>
+                    <a:pt x="1851348" y="2699881"/>
+                  </a:lnTo>
+                  <a:lnTo>
+                    <a:pt x="1777588" y="2701921"/>
+                  </a:lnTo>
+                  <a:lnTo>
+                    <a:pt x="1703828" y="2703956"/>
+                  </a:lnTo>
+                  <a:lnTo>
+                    <a:pt x="1630068" y="2705986"/>
+                  </a:lnTo>
+                  <a:lnTo>
+                    <a:pt x="1556308" y="2708010"/>
+                  </a:lnTo>
+                  <a:lnTo>
+                    <a:pt x="1482548" y="2710029"/>
+                  </a:lnTo>
+                  <a:lnTo>
+                    <a:pt x="1408788" y="2712043"/>
+                  </a:lnTo>
+                  <a:lnTo>
+                    <a:pt x="1335028" y="2714051"/>
+                  </a:lnTo>
+                  <a:lnTo>
+                    <a:pt x="1261268" y="2716054"/>
+                  </a:lnTo>
+                  <a:lnTo>
+                    <a:pt x="1187508" y="2718052"/>
+                  </a:lnTo>
+                  <a:lnTo>
+                    <a:pt x="1113747" y="2720045"/>
+                  </a:lnTo>
+                  <a:lnTo>
+                    <a:pt x="1039987" y="2722033"/>
+                  </a:lnTo>
+                  <a:lnTo>
+                    <a:pt x="966227" y="2724016"/>
+                  </a:lnTo>
+                  <a:lnTo>
+                    <a:pt x="892467" y="2725993"/>
+                  </a:lnTo>
+                  <a:lnTo>
+                    <a:pt x="818707" y="2727965"/>
+                  </a:lnTo>
+                  <a:lnTo>
+                    <a:pt x="744947" y="2729932"/>
+                  </a:lnTo>
+                  <a:lnTo>
+                    <a:pt x="671187" y="2731894"/>
+                  </a:lnTo>
+                  <a:lnTo>
+                    <a:pt x="597427" y="2733851"/>
+                  </a:lnTo>
+                  <a:lnTo>
+                    <a:pt x="523667" y="2735803"/>
+                  </a:lnTo>
+                  <a:lnTo>
+                    <a:pt x="449907" y="2737749"/>
+                  </a:lnTo>
+                  <a:lnTo>
+                    <a:pt x="376147" y="2739691"/>
+                  </a:lnTo>
+                  <a:lnTo>
+                    <a:pt x="302387" y="2741628"/>
+                  </a:lnTo>
+                  <a:lnTo>
+                    <a:pt x="228627" y="2743559"/>
+                  </a:lnTo>
+                  <a:lnTo>
+                    <a:pt x="154867" y="2745486"/>
+                  </a:lnTo>
+                  <a:lnTo>
+                    <a:pt x="81107" y="2747407"/>
+                  </a:lnTo>
+                  <a:lnTo>
+                    <a:pt x="7347" y="2749324"/>
+                  </a:lnTo>
+                  <a:lnTo>
+                    <a:pt x="0" y="2749514"/>
                   </a:lnTo>
                   <a:close/>
                 </a:path>
@@ -3612,291 +3612,291 @@
           </p:nvSpPr>
           <p:spPr>
             <a:xfrm>
-              <a:off x="1300115" y="1896563"/>
-              <a:ext cx="6753232" cy="2782277"/>
+              <a:off x="1300115" y="2073503"/>
+              <a:ext cx="6753232" cy="2653625"/>
             </a:xfrm>
             <a:custGeom>
               <a:avLst/>
               <a:pathLst>
-                <a:path w="6753232" h="2782277">
+                <a:path w="6753232" h="2653625">
                   <a:moveTo>
                     <a:pt x="0" y="0"/>
                   </a:moveTo>
                   <a:lnTo>
-                    <a:pt x="41070" y="72347"/>
-                  </a:lnTo>
-                  <a:lnTo>
-                    <a:pt x="114830" y="197729"/>
-                  </a:lnTo>
-                  <a:lnTo>
-                    <a:pt x="188590" y="318720"/>
-                  </a:lnTo>
-                  <a:lnTo>
-                    <a:pt x="262350" y="435475"/>
-                  </a:lnTo>
-                  <a:lnTo>
-                    <a:pt x="336110" y="548140"/>
-                  </a:lnTo>
-                  <a:lnTo>
-                    <a:pt x="409870" y="656860"/>
-                  </a:lnTo>
-                  <a:lnTo>
-                    <a:pt x="483630" y="761772"/>
-                  </a:lnTo>
-                  <a:lnTo>
-                    <a:pt x="557390" y="863011"/>
-                  </a:lnTo>
-                  <a:lnTo>
-                    <a:pt x="631150" y="960704"/>
-                  </a:lnTo>
-                  <a:lnTo>
-                    <a:pt x="704910" y="1054976"/>
-                  </a:lnTo>
-                  <a:lnTo>
-                    <a:pt x="778670" y="1145946"/>
-                  </a:lnTo>
-                  <a:lnTo>
-                    <a:pt x="852430" y="1233731"/>
-                  </a:lnTo>
-                  <a:lnTo>
-                    <a:pt x="926190" y="1318442"/>
-                  </a:lnTo>
-                  <a:lnTo>
-                    <a:pt x="999950" y="1400185"/>
-                  </a:lnTo>
-                  <a:lnTo>
-                    <a:pt x="1073710" y="1479067"/>
-                  </a:lnTo>
-                  <a:lnTo>
-                    <a:pt x="1147470" y="1555185"/>
-                  </a:lnTo>
-                  <a:lnTo>
-                    <a:pt x="1221230" y="1628639"/>
-                  </a:lnTo>
-                  <a:lnTo>
-                    <a:pt x="1294990" y="1699519"/>
-                  </a:lnTo>
-                  <a:lnTo>
-                    <a:pt x="1368750" y="1767918"/>
-                  </a:lnTo>
-                  <a:lnTo>
-                    <a:pt x="1442510" y="1833921"/>
-                  </a:lnTo>
-                  <a:lnTo>
-                    <a:pt x="1516270" y="1897613"/>
-                  </a:lnTo>
-                  <a:lnTo>
-                    <a:pt x="1590030" y="1959074"/>
-                  </a:lnTo>
-                  <a:lnTo>
-                    <a:pt x="1663790" y="2018383"/>
-                  </a:lnTo>
-                  <a:lnTo>
-                    <a:pt x="1737550" y="2075615"/>
-                  </a:lnTo>
-                  <a:lnTo>
-                    <a:pt x="1811310" y="2130843"/>
-                  </a:lnTo>
-                  <a:lnTo>
-                    <a:pt x="1885070" y="2184136"/>
-                  </a:lnTo>
-                  <a:lnTo>
-                    <a:pt x="1958830" y="2235563"/>
-                  </a:lnTo>
-                  <a:lnTo>
-                    <a:pt x="2032590" y="2285190"/>
-                  </a:lnTo>
-                  <a:lnTo>
-                    <a:pt x="2106350" y="2333078"/>
-                  </a:lnTo>
-                  <a:lnTo>
-                    <a:pt x="2180110" y="2379289"/>
-                  </a:lnTo>
-                  <a:lnTo>
-                    <a:pt x="2253870" y="2423882"/>
-                  </a:lnTo>
-                  <a:lnTo>
-                    <a:pt x="2327630" y="2466913"/>
-                  </a:lnTo>
-                  <a:lnTo>
-                    <a:pt x="2401390" y="2508438"/>
-                  </a:lnTo>
-                  <a:lnTo>
-                    <a:pt x="2475150" y="2548508"/>
-                  </a:lnTo>
-                  <a:lnTo>
-                    <a:pt x="2548911" y="2587175"/>
-                  </a:lnTo>
-                  <a:lnTo>
-                    <a:pt x="2622671" y="2624488"/>
-                  </a:lnTo>
-                  <a:lnTo>
-                    <a:pt x="2696431" y="2660494"/>
-                  </a:lnTo>
-                  <a:lnTo>
-                    <a:pt x="2770191" y="2695239"/>
-                  </a:lnTo>
-                  <a:lnTo>
-                    <a:pt x="2843951" y="2728767"/>
-                  </a:lnTo>
-                  <a:lnTo>
-                    <a:pt x="2917711" y="2761121"/>
-                  </a:lnTo>
-                  <a:lnTo>
-                    <a:pt x="2991471" y="2782277"/>
-                  </a:lnTo>
-                  <a:lnTo>
-                    <a:pt x="3065231" y="2780006"/>
-                  </a:lnTo>
-                  <a:lnTo>
-                    <a:pt x="3138991" y="2777728"/>
-                  </a:lnTo>
-                  <a:lnTo>
-                    <a:pt x="3212751" y="2775445"/>
-                  </a:lnTo>
-                  <a:lnTo>
-                    <a:pt x="3286511" y="2773156"/>
-                  </a:lnTo>
-                  <a:lnTo>
-                    <a:pt x="3360271" y="2770861"/>
-                  </a:lnTo>
-                  <a:lnTo>
-                    <a:pt x="3434031" y="2768560"/>
-                  </a:lnTo>
-                  <a:lnTo>
-                    <a:pt x="3507791" y="2766253"/>
-                  </a:lnTo>
-                  <a:lnTo>
-                    <a:pt x="3581551" y="2763940"/>
-                  </a:lnTo>
-                  <a:lnTo>
-                    <a:pt x="3655311" y="2761621"/>
-                  </a:lnTo>
-                  <a:lnTo>
-                    <a:pt x="3729071" y="2759296"/>
-                  </a:lnTo>
-                  <a:lnTo>
-                    <a:pt x="3802831" y="2756965"/>
-                  </a:lnTo>
-                  <a:lnTo>
-                    <a:pt x="3876591" y="2754628"/>
-                  </a:lnTo>
-                  <a:lnTo>
-                    <a:pt x="3950351" y="2752284"/>
-                  </a:lnTo>
-                  <a:lnTo>
-                    <a:pt x="4024111" y="2749935"/>
-                  </a:lnTo>
-                  <a:lnTo>
-                    <a:pt x="4097871" y="2747579"/>
-                  </a:lnTo>
-                  <a:lnTo>
-                    <a:pt x="4171631" y="2745217"/>
-                  </a:lnTo>
-                  <a:lnTo>
-                    <a:pt x="4245391" y="2742849"/>
-                  </a:lnTo>
-                  <a:lnTo>
-                    <a:pt x="4319151" y="2740475"/>
-                  </a:lnTo>
-                  <a:lnTo>
-                    <a:pt x="4392911" y="2738095"/>
-                  </a:lnTo>
-                  <a:lnTo>
-                    <a:pt x="4466671" y="2735708"/>
-                  </a:lnTo>
-                  <a:lnTo>
-                    <a:pt x="4540431" y="2733316"/>
-                  </a:lnTo>
-                  <a:lnTo>
-                    <a:pt x="4614191" y="2730917"/>
-                  </a:lnTo>
-                  <a:lnTo>
-                    <a:pt x="4687951" y="2728511"/>
-                  </a:lnTo>
-                  <a:lnTo>
-                    <a:pt x="4761711" y="2726100"/>
-                  </a:lnTo>
-                  <a:lnTo>
-                    <a:pt x="4835471" y="2723682"/>
-                  </a:lnTo>
-                  <a:lnTo>
-                    <a:pt x="4909231" y="2721258"/>
-                  </a:lnTo>
-                  <a:lnTo>
-                    <a:pt x="4982991" y="2718828"/>
-                  </a:lnTo>
-                  <a:lnTo>
-                    <a:pt x="5056751" y="2716391"/>
-                  </a:lnTo>
-                  <a:lnTo>
-                    <a:pt x="5130511" y="2713948"/>
-                  </a:lnTo>
-                  <a:lnTo>
-                    <a:pt x="5204271" y="2711498"/>
-                  </a:lnTo>
-                  <a:lnTo>
-                    <a:pt x="5278031" y="2709042"/>
-                  </a:lnTo>
-                  <a:lnTo>
-                    <a:pt x="5351791" y="2706580"/>
-                  </a:lnTo>
-                  <a:lnTo>
-                    <a:pt x="5425551" y="2704111"/>
-                  </a:lnTo>
-                  <a:lnTo>
-                    <a:pt x="5499312" y="2701636"/>
-                  </a:lnTo>
-                  <a:lnTo>
-                    <a:pt x="5573072" y="2699154"/>
-                  </a:lnTo>
-                  <a:lnTo>
-                    <a:pt x="5646832" y="2696666"/>
-                  </a:lnTo>
-                  <a:lnTo>
-                    <a:pt x="5720592" y="2694171"/>
-                  </a:lnTo>
-                  <a:lnTo>
-                    <a:pt x="5794352" y="2691670"/>
-                  </a:lnTo>
-                  <a:lnTo>
-                    <a:pt x="5868112" y="2689163"/>
-                  </a:lnTo>
-                  <a:lnTo>
-                    <a:pt x="5941872" y="2686649"/>
-                  </a:lnTo>
-                  <a:lnTo>
-                    <a:pt x="6015632" y="2684128"/>
-                  </a:lnTo>
-                  <a:lnTo>
-                    <a:pt x="6089392" y="2681600"/>
-                  </a:lnTo>
-                  <a:lnTo>
-                    <a:pt x="6163152" y="2679066"/>
-                  </a:lnTo>
-                  <a:lnTo>
-                    <a:pt x="6236912" y="2676526"/>
-                  </a:lnTo>
-                  <a:lnTo>
-                    <a:pt x="6310672" y="2673979"/>
-                  </a:lnTo>
-                  <a:lnTo>
-                    <a:pt x="6384432" y="2671425"/>
-                  </a:lnTo>
-                  <a:lnTo>
-                    <a:pt x="6458192" y="2668864"/>
-                  </a:lnTo>
-                  <a:lnTo>
-                    <a:pt x="6531952" y="2666297"/>
-                  </a:lnTo>
-                  <a:lnTo>
-                    <a:pt x="6605712" y="2663723"/>
-                  </a:lnTo>
-                  <a:lnTo>
-                    <a:pt x="6679472" y="2661143"/>
-                  </a:lnTo>
-                  <a:lnTo>
-                    <a:pt x="6753232" y="2658555"/>
+                    <a:pt x="41070" y="69002"/>
+                  </a:lnTo>
+                  <a:lnTo>
+                    <a:pt x="114830" y="188586"/>
+                  </a:lnTo>
+                  <a:lnTo>
+                    <a:pt x="188590" y="303983"/>
+                  </a:lnTo>
+                  <a:lnTo>
+                    <a:pt x="262350" y="415338"/>
+                  </a:lnTo>
+                  <a:lnTo>
+                    <a:pt x="336110" y="522794"/>
+                  </a:lnTo>
+                  <a:lnTo>
+                    <a:pt x="409870" y="626487"/>
+                  </a:lnTo>
+                  <a:lnTo>
+                    <a:pt x="483630" y="726548"/>
+                  </a:lnTo>
+                  <a:lnTo>
+                    <a:pt x="557390" y="823106"/>
+                  </a:lnTo>
+                  <a:lnTo>
+                    <a:pt x="631150" y="916281"/>
+                  </a:lnTo>
+                  <a:lnTo>
+                    <a:pt x="704910" y="1006194"/>
+                  </a:lnTo>
+                  <a:lnTo>
+                    <a:pt x="778670" y="1092958"/>
+                  </a:lnTo>
+                  <a:lnTo>
+                    <a:pt x="852430" y="1176684"/>
+                  </a:lnTo>
+                  <a:lnTo>
+                    <a:pt x="926190" y="1257477"/>
+                  </a:lnTo>
+                  <a:lnTo>
+                    <a:pt x="999950" y="1335441"/>
+                  </a:lnTo>
+                  <a:lnTo>
+                    <a:pt x="1073710" y="1410675"/>
+                  </a:lnTo>
+                  <a:lnTo>
+                    <a:pt x="1147470" y="1483274"/>
+                  </a:lnTo>
+                  <a:lnTo>
+                    <a:pt x="1221230" y="1553331"/>
+                  </a:lnTo>
+                  <a:lnTo>
+                    <a:pt x="1294990" y="1620934"/>
+                  </a:lnTo>
+                  <a:lnTo>
+                    <a:pt x="1368750" y="1686170"/>
+                  </a:lnTo>
+                  <a:lnTo>
+                    <a:pt x="1442510" y="1749121"/>
+                  </a:lnTo>
+                  <a:lnTo>
+                    <a:pt x="1516270" y="1809868"/>
+                  </a:lnTo>
+                  <a:lnTo>
+                    <a:pt x="1590030" y="1868487"/>
+                  </a:lnTo>
+                  <a:lnTo>
+                    <a:pt x="1663790" y="1925054"/>
+                  </a:lnTo>
+                  <a:lnTo>
+                    <a:pt x="1737550" y="1979639"/>
+                  </a:lnTo>
+                  <a:lnTo>
+                    <a:pt x="1811310" y="2032313"/>
+                  </a:lnTo>
+                  <a:lnTo>
+                    <a:pt x="1885070" y="2083142"/>
+                  </a:lnTo>
+                  <a:lnTo>
+                    <a:pt x="1958830" y="2132192"/>
+                  </a:lnTo>
+                  <a:lnTo>
+                    <a:pt x="2032590" y="2179523"/>
+                  </a:lnTo>
+                  <a:lnTo>
+                    <a:pt x="2106350" y="2225197"/>
+                  </a:lnTo>
+                  <a:lnTo>
+                    <a:pt x="2180110" y="2269272"/>
+                  </a:lnTo>
+                  <a:lnTo>
+                    <a:pt x="2253870" y="2311803"/>
+                  </a:lnTo>
+                  <a:lnTo>
+                    <a:pt x="2327630" y="2352844"/>
+                  </a:lnTo>
+                  <a:lnTo>
+                    <a:pt x="2401390" y="2392448"/>
+                  </a:lnTo>
+                  <a:lnTo>
+                    <a:pt x="2475150" y="2430666"/>
+                  </a:lnTo>
+                  <a:lnTo>
+                    <a:pt x="2548911" y="2467545"/>
+                  </a:lnTo>
+                  <a:lnTo>
+                    <a:pt x="2622671" y="2503132"/>
+                  </a:lnTo>
+                  <a:lnTo>
+                    <a:pt x="2696431" y="2537473"/>
+                  </a:lnTo>
+                  <a:lnTo>
+                    <a:pt x="2770191" y="2570612"/>
+                  </a:lnTo>
+                  <a:lnTo>
+                    <a:pt x="2843951" y="2602590"/>
+                  </a:lnTo>
+                  <a:lnTo>
+                    <a:pt x="2917711" y="2633448"/>
+                  </a:lnTo>
+                  <a:lnTo>
+                    <a:pt x="2991471" y="2653625"/>
+                  </a:lnTo>
+                  <a:lnTo>
+                    <a:pt x="3065231" y="2651459"/>
+                  </a:lnTo>
+                  <a:lnTo>
+                    <a:pt x="3138991" y="2649287"/>
+                  </a:lnTo>
+                  <a:lnTo>
+                    <a:pt x="3212751" y="2647110"/>
+                  </a:lnTo>
+                  <a:lnTo>
+                    <a:pt x="3286511" y="2644927"/>
+                  </a:lnTo>
+                  <a:lnTo>
+                    <a:pt x="3360271" y="2642738"/>
+                  </a:lnTo>
+                  <a:lnTo>
+                    <a:pt x="3434031" y="2640543"/>
+                  </a:lnTo>
+                  <a:lnTo>
+                    <a:pt x="3507791" y="2638343"/>
+                  </a:lnTo>
+                  <a:lnTo>
+                    <a:pt x="3581551" y="2636137"/>
+                  </a:lnTo>
+                  <a:lnTo>
+                    <a:pt x="3655311" y="2633925"/>
+                  </a:lnTo>
+                  <a:lnTo>
+                    <a:pt x="3729071" y="2631707"/>
+                  </a:lnTo>
+                  <a:lnTo>
+                    <a:pt x="3802831" y="2629484"/>
+                  </a:lnTo>
+                  <a:lnTo>
+                    <a:pt x="3876591" y="2627255"/>
+                  </a:lnTo>
+                  <a:lnTo>
+                    <a:pt x="3950351" y="2625020"/>
+                  </a:lnTo>
+                  <a:lnTo>
+                    <a:pt x="4024111" y="2622779"/>
+                  </a:lnTo>
+                  <a:lnTo>
+                    <a:pt x="4097871" y="2620532"/>
+                  </a:lnTo>
+                  <a:lnTo>
+                    <a:pt x="4171631" y="2618279"/>
+                  </a:lnTo>
+                  <a:lnTo>
+                    <a:pt x="4245391" y="2616021"/>
+                  </a:lnTo>
+                  <a:lnTo>
+                    <a:pt x="4319151" y="2613757"/>
+                  </a:lnTo>
+                  <a:lnTo>
+                    <a:pt x="4392911" y="2611486"/>
+                  </a:lnTo>
+                  <a:lnTo>
+                    <a:pt x="4466671" y="2609210"/>
+                  </a:lnTo>
+                  <a:lnTo>
+                    <a:pt x="4540431" y="2606928"/>
+                  </a:lnTo>
+                  <a:lnTo>
+                    <a:pt x="4614191" y="2604640"/>
+                  </a:lnTo>
+                  <a:lnTo>
+                    <a:pt x="4687951" y="2602346"/>
+                  </a:lnTo>
+                  <a:lnTo>
+                    <a:pt x="4761711" y="2600046"/>
+                  </a:lnTo>
+                  <a:lnTo>
+                    <a:pt x="4835471" y="2597740"/>
+                  </a:lnTo>
+                  <a:lnTo>
+                    <a:pt x="4909231" y="2595428"/>
+                  </a:lnTo>
+                  <a:lnTo>
+                    <a:pt x="4982991" y="2593110"/>
+                  </a:lnTo>
+                  <a:lnTo>
+                    <a:pt x="5056751" y="2590786"/>
+                  </a:lnTo>
+                  <a:lnTo>
+                    <a:pt x="5130511" y="2588456"/>
+                  </a:lnTo>
+                  <a:lnTo>
+                    <a:pt x="5204271" y="2586119"/>
+                  </a:lnTo>
+                  <a:lnTo>
+                    <a:pt x="5278031" y="2583777"/>
+                  </a:lnTo>
+                  <a:lnTo>
+                    <a:pt x="5351791" y="2581429"/>
+                  </a:lnTo>
+                  <a:lnTo>
+                    <a:pt x="5425551" y="2579074"/>
+                  </a:lnTo>
+                  <a:lnTo>
+                    <a:pt x="5499312" y="2576713"/>
+                  </a:lnTo>
+                  <a:lnTo>
+                    <a:pt x="5573072" y="2574346"/>
+                  </a:lnTo>
+                  <a:lnTo>
+                    <a:pt x="5646832" y="2571973"/>
+                  </a:lnTo>
+                  <a:lnTo>
+                    <a:pt x="5720592" y="2569594"/>
+                  </a:lnTo>
+                  <a:lnTo>
+                    <a:pt x="5794352" y="2567209"/>
+                  </a:lnTo>
+                  <a:lnTo>
+                    <a:pt x="5868112" y="2564817"/>
+                  </a:lnTo>
+                  <a:lnTo>
+                    <a:pt x="5941872" y="2562419"/>
+                  </a:lnTo>
+                  <a:lnTo>
+                    <a:pt x="6015632" y="2560015"/>
+                  </a:lnTo>
+                  <a:lnTo>
+                    <a:pt x="6089392" y="2557604"/>
+                  </a:lnTo>
+                  <a:lnTo>
+                    <a:pt x="6163152" y="2555187"/>
+                  </a:lnTo>
+                  <a:lnTo>
+                    <a:pt x="6236912" y="2552764"/>
+                  </a:lnTo>
+                  <a:lnTo>
+                    <a:pt x="6310672" y="2550335"/>
+                  </a:lnTo>
+                  <a:lnTo>
+                    <a:pt x="6384432" y="2547899"/>
+                  </a:lnTo>
+                  <a:lnTo>
+                    <a:pt x="6458192" y="2545457"/>
+                  </a:lnTo>
+                  <a:lnTo>
+                    <a:pt x="6531952" y="2543009"/>
+                  </a:lnTo>
+                  <a:lnTo>
+                    <a:pt x="6605712" y="2540554"/>
+                  </a:lnTo>
+                  <a:lnTo>
+                    <a:pt x="6679472" y="2538093"/>
+                  </a:lnTo>
+                  <a:lnTo>
+                    <a:pt x="6753232" y="2535625"/>
                   </a:lnTo>
                 </a:path>
               </a:pathLst>
@@ -3916,312 +3916,312 @@
           </p:nvSpPr>
           <p:spPr>
             <a:xfrm>
-              <a:off x="817517" y="4681105"/>
-              <a:ext cx="7235830" cy="728437"/>
+              <a:off x="817517" y="4729289"/>
+              <a:ext cx="7235830" cy="694755"/>
             </a:xfrm>
             <a:custGeom>
               <a:avLst/>
               <a:pathLst>
-                <a:path w="7235830" h="728437">
+                <a:path w="7235830" h="694755">
                   <a:moveTo>
-                    <a:pt x="7235830" y="728437"/>
+                    <a:pt x="7235830" y="694755"/>
                   </a:moveTo>
                   <a:lnTo>
-                    <a:pt x="7162070" y="723369"/>
-                  </a:lnTo>
-                  <a:lnTo>
-                    <a:pt x="7088310" y="718116"/>
-                  </a:lnTo>
-                  <a:lnTo>
-                    <a:pt x="7014550" y="712673"/>
-                  </a:lnTo>
-                  <a:lnTo>
-                    <a:pt x="6940789" y="707033"/>
-                  </a:lnTo>
-                  <a:lnTo>
-                    <a:pt x="6867029" y="701187"/>
-                  </a:lnTo>
-                  <a:lnTo>
-                    <a:pt x="6793269" y="695130"/>
-                  </a:lnTo>
-                  <a:lnTo>
-                    <a:pt x="6719509" y="688853"/>
-                  </a:lnTo>
-                  <a:lnTo>
-                    <a:pt x="6645749" y="682347"/>
-                  </a:lnTo>
-                  <a:lnTo>
-                    <a:pt x="6571989" y="675606"/>
-                  </a:lnTo>
-                  <a:lnTo>
-                    <a:pt x="6498229" y="668620"/>
-                  </a:lnTo>
-                  <a:lnTo>
-                    <a:pt x="6424469" y="661381"/>
-                  </a:lnTo>
-                  <a:lnTo>
-                    <a:pt x="6350709" y="653879"/>
-                  </a:lnTo>
-                  <a:lnTo>
-                    <a:pt x="6276949" y="646105"/>
-                  </a:lnTo>
-                  <a:lnTo>
-                    <a:pt x="6203189" y="638048"/>
-                  </a:lnTo>
-                  <a:lnTo>
-                    <a:pt x="6129429" y="629699"/>
-                  </a:lnTo>
-                  <a:lnTo>
-                    <a:pt x="6055669" y="621048"/>
-                  </a:lnTo>
-                  <a:lnTo>
-                    <a:pt x="5981909" y="612082"/>
-                  </a:lnTo>
-                  <a:lnTo>
-                    <a:pt x="5908149" y="602791"/>
-                  </a:lnTo>
-                  <a:lnTo>
-                    <a:pt x="5834389" y="593162"/>
-                  </a:lnTo>
-                  <a:lnTo>
-                    <a:pt x="5760629" y="583185"/>
-                  </a:lnTo>
-                  <a:lnTo>
-                    <a:pt x="5686869" y="572845"/>
-                  </a:lnTo>
-                  <a:lnTo>
-                    <a:pt x="5613109" y="562130"/>
-                  </a:lnTo>
-                  <a:lnTo>
-                    <a:pt x="5539349" y="551026"/>
-                  </a:lnTo>
-                  <a:lnTo>
-                    <a:pt x="5465589" y="539519"/>
-                  </a:lnTo>
-                  <a:lnTo>
-                    <a:pt x="5391829" y="527594"/>
-                  </a:lnTo>
-                  <a:lnTo>
-                    <a:pt x="5318069" y="515237"/>
-                  </a:lnTo>
-                  <a:lnTo>
-                    <a:pt x="5244309" y="502431"/>
-                  </a:lnTo>
-                  <a:lnTo>
-                    <a:pt x="5170549" y="489160"/>
-                  </a:lnTo>
-                  <a:lnTo>
-                    <a:pt x="5096789" y="475408"/>
-                  </a:lnTo>
-                  <a:lnTo>
-                    <a:pt x="5023029" y="461157"/>
-                  </a:lnTo>
-                  <a:lnTo>
-                    <a:pt x="4949269" y="446389"/>
-                  </a:lnTo>
-                  <a:lnTo>
-                    <a:pt x="4875509" y="431084"/>
-                  </a:lnTo>
-                  <a:lnTo>
-                    <a:pt x="4801749" y="415225"/>
-                  </a:lnTo>
-                  <a:lnTo>
-                    <a:pt x="4727989" y="398789"/>
-                  </a:lnTo>
-                  <a:lnTo>
-                    <a:pt x="4654229" y="381757"/>
-                  </a:lnTo>
-                  <a:lnTo>
-                    <a:pt x="4580469" y="364108"/>
-                  </a:lnTo>
-                  <a:lnTo>
-                    <a:pt x="4506709" y="345817"/>
-                  </a:lnTo>
-                  <a:lnTo>
-                    <a:pt x="4432949" y="326863"/>
-                  </a:lnTo>
-                  <a:lnTo>
-                    <a:pt x="4359189" y="307221"/>
-                  </a:lnTo>
-                  <a:lnTo>
-                    <a:pt x="4285429" y="286866"/>
-                  </a:lnTo>
-                  <a:lnTo>
-                    <a:pt x="4211669" y="265773"/>
-                  </a:lnTo>
-                  <a:lnTo>
-                    <a:pt x="4137909" y="243913"/>
-                  </a:lnTo>
-                  <a:lnTo>
-                    <a:pt x="4064149" y="221261"/>
-                  </a:lnTo>
-                  <a:lnTo>
-                    <a:pt x="3990388" y="197787"/>
-                  </a:lnTo>
-                  <a:lnTo>
-                    <a:pt x="3916628" y="173460"/>
-                  </a:lnTo>
-                  <a:lnTo>
-                    <a:pt x="3842868" y="148251"/>
-                  </a:lnTo>
-                  <a:lnTo>
-                    <a:pt x="3769108" y="122127"/>
-                  </a:lnTo>
-                  <a:lnTo>
-                    <a:pt x="3695348" y="95055"/>
-                  </a:lnTo>
-                  <a:lnTo>
-                    <a:pt x="3621588" y="67000"/>
-                  </a:lnTo>
-                  <a:lnTo>
-                    <a:pt x="3547828" y="37928"/>
-                  </a:lnTo>
-                  <a:lnTo>
-                    <a:pt x="3474068" y="7800"/>
+                    <a:pt x="7162070" y="689920"/>
+                  </a:lnTo>
+                  <a:lnTo>
+                    <a:pt x="7088310" y="684911"/>
+                  </a:lnTo>
+                  <a:lnTo>
+                    <a:pt x="7014550" y="679719"/>
+                  </a:lnTo>
+                  <a:lnTo>
+                    <a:pt x="6940789" y="674340"/>
+                  </a:lnTo>
+                  <a:lnTo>
+                    <a:pt x="6867029" y="668765"/>
+                  </a:lnTo>
+                  <a:lnTo>
+                    <a:pt x="6793269" y="662987"/>
+                  </a:lnTo>
+                  <a:lnTo>
+                    <a:pt x="6719509" y="657000"/>
+                  </a:lnTo>
+                  <a:lnTo>
+                    <a:pt x="6645749" y="650796"/>
+                  </a:lnTo>
+                  <a:lnTo>
+                    <a:pt x="6571989" y="644366"/>
+                  </a:lnTo>
+                  <a:lnTo>
+                    <a:pt x="6498229" y="637704"/>
+                  </a:lnTo>
+                  <a:lnTo>
+                    <a:pt x="6424469" y="630799"/>
+                  </a:lnTo>
+                  <a:lnTo>
+                    <a:pt x="6350709" y="623644"/>
+                  </a:lnTo>
+                  <a:lnTo>
+                    <a:pt x="6276949" y="616229"/>
+                  </a:lnTo>
+                  <a:lnTo>
+                    <a:pt x="6203189" y="608545"/>
+                  </a:lnTo>
+                  <a:lnTo>
+                    <a:pt x="6129429" y="600582"/>
+                  </a:lnTo>
+                  <a:lnTo>
+                    <a:pt x="6055669" y="592331"/>
+                  </a:lnTo>
+                  <a:lnTo>
+                    <a:pt x="5981909" y="583779"/>
+                  </a:lnTo>
+                  <a:lnTo>
+                    <a:pt x="5908149" y="574918"/>
+                  </a:lnTo>
+                  <a:lnTo>
+                    <a:pt x="5834389" y="565735"/>
+                  </a:lnTo>
+                  <a:lnTo>
+                    <a:pt x="5760629" y="556218"/>
+                  </a:lnTo>
+                  <a:lnTo>
+                    <a:pt x="5686869" y="546357"/>
+                  </a:lnTo>
+                  <a:lnTo>
+                    <a:pt x="5613109" y="536137"/>
+                  </a:lnTo>
+                  <a:lnTo>
+                    <a:pt x="5539349" y="525546"/>
+                  </a:lnTo>
+                  <a:lnTo>
+                    <a:pt x="5465589" y="514571"/>
+                  </a:lnTo>
+                  <a:lnTo>
+                    <a:pt x="5391829" y="503198"/>
+                  </a:lnTo>
+                  <a:lnTo>
+                    <a:pt x="5318069" y="491412"/>
+                  </a:lnTo>
+                  <a:lnTo>
+                    <a:pt x="5244309" y="479199"/>
+                  </a:lnTo>
+                  <a:lnTo>
+                    <a:pt x="5170549" y="466542"/>
+                  </a:lnTo>
+                  <a:lnTo>
+                    <a:pt x="5096789" y="453426"/>
+                  </a:lnTo>
+                  <a:lnTo>
+                    <a:pt x="5023029" y="439833"/>
+                  </a:lnTo>
+                  <a:lnTo>
+                    <a:pt x="4949269" y="425748"/>
+                  </a:lnTo>
+                  <a:lnTo>
+                    <a:pt x="4875509" y="411151"/>
+                  </a:lnTo>
+                  <a:lnTo>
+                    <a:pt x="4801749" y="396025"/>
+                  </a:lnTo>
+                  <a:lnTo>
+                    <a:pt x="4727989" y="380349"/>
+                  </a:lnTo>
+                  <a:lnTo>
+                    <a:pt x="4654229" y="364105"/>
+                  </a:lnTo>
+                  <a:lnTo>
+                    <a:pt x="4580469" y="347271"/>
+                  </a:lnTo>
+                  <a:lnTo>
+                    <a:pt x="4506709" y="329827"/>
+                  </a:lnTo>
+                  <a:lnTo>
+                    <a:pt x="4432949" y="311749"/>
+                  </a:lnTo>
+                  <a:lnTo>
+                    <a:pt x="4359189" y="293015"/>
+                  </a:lnTo>
+                  <a:lnTo>
+                    <a:pt x="4285429" y="273602"/>
+                  </a:lnTo>
+                  <a:lnTo>
+                    <a:pt x="4211669" y="253483"/>
+                  </a:lnTo>
+                  <a:lnTo>
+                    <a:pt x="4137909" y="232635"/>
+                  </a:lnTo>
+                  <a:lnTo>
+                    <a:pt x="4064149" y="211030"/>
+                  </a:lnTo>
+                  <a:lnTo>
+                    <a:pt x="3990388" y="188641"/>
+                  </a:lnTo>
+                  <a:lnTo>
+                    <a:pt x="3916628" y="165440"/>
+                  </a:lnTo>
+                  <a:lnTo>
+                    <a:pt x="3842868" y="141396"/>
+                  </a:lnTo>
+                  <a:lnTo>
+                    <a:pt x="3769108" y="116480"/>
+                  </a:lnTo>
+                  <a:lnTo>
+                    <a:pt x="3695348" y="90660"/>
+                  </a:lnTo>
+                  <a:lnTo>
+                    <a:pt x="3621588" y="63902"/>
+                  </a:lnTo>
+                  <a:lnTo>
+                    <a:pt x="3547828" y="36174"/>
+                  </a:lnTo>
+                  <a:lnTo>
+                    <a:pt x="3474068" y="7439"/>
                   </a:lnTo>
                   <a:lnTo>
                     <a:pt x="3400308" y="0"/>
                   </a:lnTo>
                   <a:lnTo>
-                    <a:pt x="3326548" y="2259"/>
-                  </a:lnTo>
-                  <a:lnTo>
-                    <a:pt x="3252788" y="4512"/>
-                  </a:lnTo>
-                  <a:lnTo>
-                    <a:pt x="3179028" y="6760"/>
-                  </a:lnTo>
-                  <a:lnTo>
-                    <a:pt x="3105268" y="9002"/>
-                  </a:lnTo>
-                  <a:lnTo>
-                    <a:pt x="3031508" y="11238"/>
-                  </a:lnTo>
-                  <a:lnTo>
-                    <a:pt x="2957748" y="13468"/>
-                  </a:lnTo>
-                  <a:lnTo>
-                    <a:pt x="2883988" y="15692"/>
-                  </a:lnTo>
-                  <a:lnTo>
-                    <a:pt x="2810228" y="17911"/>
-                  </a:lnTo>
-                  <a:lnTo>
-                    <a:pt x="2736468" y="20124"/>
-                  </a:lnTo>
-                  <a:lnTo>
-                    <a:pt x="2662708" y="22331"/>
-                  </a:lnTo>
-                  <a:lnTo>
-                    <a:pt x="2588948" y="24532"/>
-                  </a:lnTo>
-                  <a:lnTo>
-                    <a:pt x="2515188" y="26728"/>
-                  </a:lnTo>
-                  <a:lnTo>
-                    <a:pt x="2441428" y="28918"/>
-                  </a:lnTo>
-                  <a:lnTo>
-                    <a:pt x="2367668" y="31102"/>
-                  </a:lnTo>
-                  <a:lnTo>
-                    <a:pt x="2293908" y="33280"/>
-                  </a:lnTo>
-                  <a:lnTo>
-                    <a:pt x="2220148" y="35453"/>
-                  </a:lnTo>
-                  <a:lnTo>
-                    <a:pt x="2146388" y="37620"/>
-                  </a:lnTo>
-                  <a:lnTo>
-                    <a:pt x="2072628" y="39782"/>
-                  </a:lnTo>
-                  <a:lnTo>
-                    <a:pt x="1998868" y="41937"/>
-                  </a:lnTo>
-                  <a:lnTo>
-                    <a:pt x="1925108" y="44088"/>
-                  </a:lnTo>
-                  <a:lnTo>
-                    <a:pt x="1851348" y="46232"/>
-                  </a:lnTo>
-                  <a:lnTo>
-                    <a:pt x="1777588" y="48371"/>
-                  </a:lnTo>
-                  <a:lnTo>
-                    <a:pt x="1703828" y="50505"/>
-                  </a:lnTo>
-                  <a:lnTo>
-                    <a:pt x="1630068" y="52633"/>
-                  </a:lnTo>
-                  <a:lnTo>
-                    <a:pt x="1556308" y="54755"/>
-                  </a:lnTo>
-                  <a:lnTo>
-                    <a:pt x="1482548" y="56872"/>
-                  </a:lnTo>
-                  <a:lnTo>
-                    <a:pt x="1408788" y="58984"/>
-                  </a:lnTo>
-                  <a:lnTo>
-                    <a:pt x="1335028" y="61090"/>
-                  </a:lnTo>
-                  <a:lnTo>
-                    <a:pt x="1261268" y="63190"/>
-                  </a:lnTo>
-                  <a:lnTo>
-                    <a:pt x="1187508" y="65285"/>
-                  </a:lnTo>
-                  <a:lnTo>
-                    <a:pt x="1113747" y="67374"/>
-                  </a:lnTo>
-                  <a:lnTo>
-                    <a:pt x="1039987" y="69458"/>
-                  </a:lnTo>
-                  <a:lnTo>
-                    <a:pt x="966227" y="71537"/>
-                  </a:lnTo>
-                  <a:lnTo>
-                    <a:pt x="892467" y="73610"/>
-                  </a:lnTo>
-                  <a:lnTo>
-                    <a:pt x="818707" y="75678"/>
-                  </a:lnTo>
-                  <a:lnTo>
-                    <a:pt x="744947" y="77741"/>
-                  </a:lnTo>
-                  <a:lnTo>
-                    <a:pt x="671187" y="79798"/>
-                  </a:lnTo>
-                  <a:lnTo>
-                    <a:pt x="597427" y="81849"/>
-                  </a:lnTo>
-                  <a:lnTo>
-                    <a:pt x="523667" y="83896"/>
-                  </a:lnTo>
-                  <a:lnTo>
-                    <a:pt x="449907" y="85937"/>
-                  </a:lnTo>
-                  <a:lnTo>
-                    <a:pt x="376147" y="87973"/>
-                  </a:lnTo>
-                  <a:lnTo>
-                    <a:pt x="302387" y="90003"/>
-                  </a:lnTo>
-                  <a:lnTo>
-                    <a:pt x="228627" y="92028"/>
-                  </a:lnTo>
-                  <a:lnTo>
-                    <a:pt x="154867" y="94048"/>
-                  </a:lnTo>
-                  <a:lnTo>
-                    <a:pt x="81107" y="96063"/>
-                  </a:lnTo>
-                  <a:lnTo>
-                    <a:pt x="7347" y="98072"/>
-                  </a:lnTo>
-                  <a:lnTo>
-                    <a:pt x="0" y="98272"/>
+                    <a:pt x="3326548" y="2154"/>
+                  </a:lnTo>
+                  <a:lnTo>
+                    <a:pt x="3252788" y="4304"/>
+                  </a:lnTo>
+                  <a:lnTo>
+                    <a:pt x="3179028" y="6448"/>
+                  </a:lnTo>
+                  <a:lnTo>
+                    <a:pt x="3105268" y="8586"/>
+                  </a:lnTo>
+                  <a:lnTo>
+                    <a:pt x="3031508" y="10718"/>
+                  </a:lnTo>
+                  <a:lnTo>
+                    <a:pt x="2957748" y="12845"/>
+                  </a:lnTo>
+                  <a:lnTo>
+                    <a:pt x="2883988" y="14967"/>
+                  </a:lnTo>
+                  <a:lnTo>
+                    <a:pt x="2810228" y="17083"/>
+                  </a:lnTo>
+                  <a:lnTo>
+                    <a:pt x="2736468" y="19193"/>
+                  </a:lnTo>
+                  <a:lnTo>
+                    <a:pt x="2662708" y="21298"/>
+                  </a:lnTo>
+                  <a:lnTo>
+                    <a:pt x="2588948" y="23398"/>
+                  </a:lnTo>
+                  <a:lnTo>
+                    <a:pt x="2515188" y="25492"/>
+                  </a:lnTo>
+                  <a:lnTo>
+                    <a:pt x="2441428" y="27580"/>
+                  </a:lnTo>
+                  <a:lnTo>
+                    <a:pt x="2367668" y="29664"/>
+                  </a:lnTo>
+                  <a:lnTo>
+                    <a:pt x="2293908" y="31741"/>
+                  </a:lnTo>
+                  <a:lnTo>
+                    <a:pt x="2220148" y="33814"/>
+                  </a:lnTo>
+                  <a:lnTo>
+                    <a:pt x="2146388" y="35881"/>
+                  </a:lnTo>
+                  <a:lnTo>
+                    <a:pt x="2072628" y="37942"/>
+                  </a:lnTo>
+                  <a:lnTo>
+                    <a:pt x="1998868" y="39998"/>
+                  </a:lnTo>
+                  <a:lnTo>
+                    <a:pt x="1925108" y="42049"/>
+                  </a:lnTo>
+                  <a:lnTo>
+                    <a:pt x="1851348" y="44095"/>
+                  </a:lnTo>
+                  <a:lnTo>
+                    <a:pt x="1777588" y="46135"/>
+                  </a:lnTo>
+                  <a:lnTo>
+                    <a:pt x="1703828" y="48170"/>
+                  </a:lnTo>
+                  <a:lnTo>
+                    <a:pt x="1630068" y="50199"/>
+                  </a:lnTo>
+                  <a:lnTo>
+                    <a:pt x="1556308" y="52223"/>
+                  </a:lnTo>
+                  <a:lnTo>
+                    <a:pt x="1482548" y="54242"/>
+                  </a:lnTo>
+                  <a:lnTo>
+                    <a:pt x="1408788" y="56256"/>
+                  </a:lnTo>
+                  <a:lnTo>
+                    <a:pt x="1335028" y="58265"/>
+                  </a:lnTo>
+                  <a:lnTo>
+                    <a:pt x="1261268" y="60268"/>
+                  </a:lnTo>
+                  <a:lnTo>
+                    <a:pt x="1187508" y="62266"/>
+                  </a:lnTo>
+                  <a:lnTo>
+                    <a:pt x="1113747" y="64259"/>
+                  </a:lnTo>
+                  <a:lnTo>
+                    <a:pt x="1039987" y="66247"/>
+                  </a:lnTo>
+                  <a:lnTo>
+                    <a:pt x="966227" y="68229"/>
+                  </a:lnTo>
+                  <a:lnTo>
+                    <a:pt x="892467" y="70207"/>
+                  </a:lnTo>
+                  <a:lnTo>
+                    <a:pt x="818707" y="72179"/>
+                  </a:lnTo>
+                  <a:lnTo>
+                    <a:pt x="744947" y="74146"/>
+                  </a:lnTo>
+                  <a:lnTo>
+                    <a:pt x="671187" y="76108"/>
+                  </a:lnTo>
+                  <a:lnTo>
+                    <a:pt x="597427" y="78065"/>
+                  </a:lnTo>
+                  <a:lnTo>
+                    <a:pt x="523667" y="80016"/>
+                  </a:lnTo>
+                  <a:lnTo>
+                    <a:pt x="449907" y="81963"/>
+                  </a:lnTo>
+                  <a:lnTo>
+                    <a:pt x="376147" y="83905"/>
+                  </a:lnTo>
+                  <a:lnTo>
+                    <a:pt x="302387" y="85841"/>
+                  </a:lnTo>
+                  <a:lnTo>
+                    <a:pt x="228627" y="87773"/>
+                  </a:lnTo>
+                  <a:lnTo>
+                    <a:pt x="154867" y="89699"/>
+                  </a:lnTo>
+                  <a:lnTo>
+                    <a:pt x="81107" y="91621"/>
+                  </a:lnTo>
+                  <a:lnTo>
+                    <a:pt x="7347" y="93537"/>
+                  </a:lnTo>
+                  <a:lnTo>
+                    <a:pt x="0" y="93728"/>
                   </a:lnTo>
                 </a:path>
               </a:pathLst>
@@ -4241,312 +4241,312 @@
           </p:nvSpPr>
           <p:spPr>
             <a:xfrm>
-              <a:off x="817517" y="3665041"/>
-              <a:ext cx="7235830" cy="1511556"/>
+              <a:off x="817517" y="3760207"/>
+              <a:ext cx="7235830" cy="1441662"/>
             </a:xfrm>
             <a:custGeom>
               <a:avLst/>
               <a:pathLst>
-                <a:path w="7235830" h="1511556">
+                <a:path w="7235830" h="1441662">
                   <a:moveTo>
                     <a:pt x="0" y="0"/>
                   </a:moveTo>
                   <a:lnTo>
-                    <a:pt x="7347" y="3121"/>
-                  </a:lnTo>
-                  <a:lnTo>
-                    <a:pt x="81107" y="33942"/>
-                  </a:lnTo>
-                  <a:lnTo>
-                    <a:pt x="154867" y="64259"/>
-                  </a:lnTo>
-                  <a:lnTo>
-                    <a:pt x="228627" y="94078"/>
-                  </a:lnTo>
-                  <a:lnTo>
-                    <a:pt x="302387" y="123409"/>
-                  </a:lnTo>
-                  <a:lnTo>
-                    <a:pt x="376147" y="152259"/>
-                  </a:lnTo>
-                  <a:lnTo>
-                    <a:pt x="449907" y="180637"/>
-                  </a:lnTo>
-                  <a:lnTo>
-                    <a:pt x="523667" y="208550"/>
-                  </a:lnTo>
-                  <a:lnTo>
-                    <a:pt x="597427" y="236005"/>
-                  </a:lnTo>
-                  <a:lnTo>
-                    <a:pt x="671187" y="263010"/>
-                  </a:lnTo>
-                  <a:lnTo>
-                    <a:pt x="744947" y="289573"/>
-                  </a:lnTo>
-                  <a:lnTo>
-                    <a:pt x="818707" y="315701"/>
-                  </a:lnTo>
-                  <a:lnTo>
-                    <a:pt x="892467" y="341401"/>
-                  </a:lnTo>
-                  <a:lnTo>
-                    <a:pt x="966227" y="366679"/>
-                  </a:lnTo>
-                  <a:lnTo>
-                    <a:pt x="1039987" y="391544"/>
-                  </a:lnTo>
-                  <a:lnTo>
-                    <a:pt x="1113747" y="416000"/>
-                  </a:lnTo>
-                  <a:lnTo>
-                    <a:pt x="1187508" y="440057"/>
-                  </a:lnTo>
-                  <a:lnTo>
-                    <a:pt x="1261268" y="463719"/>
-                  </a:lnTo>
-                  <a:lnTo>
-                    <a:pt x="1335028" y="486993"/>
-                  </a:lnTo>
-                  <a:lnTo>
-                    <a:pt x="1408788" y="509886"/>
-                  </a:lnTo>
-                  <a:lnTo>
-                    <a:pt x="1482548" y="532404"/>
-                  </a:lnTo>
-                  <a:lnTo>
-                    <a:pt x="1556308" y="554553"/>
-                  </a:lnTo>
-                  <a:lnTo>
-                    <a:pt x="1630068" y="576339"/>
-                  </a:lnTo>
-                  <a:lnTo>
-                    <a:pt x="1703828" y="597768"/>
-                  </a:lnTo>
-                  <a:lnTo>
-                    <a:pt x="1777588" y="618846"/>
-                  </a:lnTo>
-                  <a:lnTo>
-                    <a:pt x="1851348" y="639578"/>
-                  </a:lnTo>
-                  <a:lnTo>
-                    <a:pt x="1925108" y="659971"/>
-                  </a:lnTo>
-                  <a:lnTo>
-                    <a:pt x="1998868" y="680030"/>
-                  </a:lnTo>
-                  <a:lnTo>
-                    <a:pt x="2072628" y="699760"/>
-                  </a:lnTo>
-                  <a:lnTo>
-                    <a:pt x="2146388" y="719166"/>
-                  </a:lnTo>
-                  <a:lnTo>
-                    <a:pt x="2220148" y="738255"/>
-                  </a:lnTo>
-                  <a:lnTo>
-                    <a:pt x="2293908" y="757031"/>
-                  </a:lnTo>
-                  <a:lnTo>
-                    <a:pt x="2367668" y="775499"/>
-                  </a:lnTo>
-                  <a:lnTo>
-                    <a:pt x="2441428" y="793665"/>
-                  </a:lnTo>
-                  <a:lnTo>
-                    <a:pt x="2515188" y="811533"/>
-                  </a:lnTo>
-                  <a:lnTo>
-                    <a:pt x="2588948" y="829108"/>
-                  </a:lnTo>
-                  <a:lnTo>
-                    <a:pt x="2662708" y="846396"/>
-                  </a:lnTo>
-                  <a:lnTo>
-                    <a:pt x="2736468" y="863400"/>
-                  </a:lnTo>
-                  <a:lnTo>
-                    <a:pt x="2810228" y="880125"/>
-                  </a:lnTo>
-                  <a:lnTo>
-                    <a:pt x="2883988" y="896577"/>
-                  </a:lnTo>
-                  <a:lnTo>
-                    <a:pt x="2957748" y="912759"/>
-                  </a:lnTo>
-                  <a:lnTo>
-                    <a:pt x="3031508" y="928675"/>
-                  </a:lnTo>
-                  <a:lnTo>
-                    <a:pt x="3105268" y="944331"/>
-                  </a:lnTo>
-                  <a:lnTo>
-                    <a:pt x="3179028" y="959731"/>
-                  </a:lnTo>
-                  <a:lnTo>
-                    <a:pt x="3252788" y="974878"/>
-                  </a:lnTo>
-                  <a:lnTo>
-                    <a:pt x="3326548" y="989776"/>
-                  </a:lnTo>
-                  <a:lnTo>
-                    <a:pt x="3400308" y="1004431"/>
-                  </a:lnTo>
-                  <a:lnTo>
-                    <a:pt x="3474068" y="1018846"/>
-                  </a:lnTo>
-                  <a:lnTo>
-                    <a:pt x="3547828" y="1033024"/>
-                  </a:lnTo>
-                  <a:lnTo>
-                    <a:pt x="3621588" y="1046970"/>
-                  </a:lnTo>
-                  <a:lnTo>
-                    <a:pt x="3695348" y="1060688"/>
-                  </a:lnTo>
-                  <a:lnTo>
-                    <a:pt x="3769108" y="1074181"/>
-                  </a:lnTo>
-                  <a:lnTo>
-                    <a:pt x="3842868" y="1087453"/>
-                  </a:lnTo>
-                  <a:lnTo>
-                    <a:pt x="3916628" y="1100507"/>
-                  </a:lnTo>
-                  <a:lnTo>
-                    <a:pt x="3990388" y="1113347"/>
-                  </a:lnTo>
-                  <a:lnTo>
-                    <a:pt x="4064149" y="1125977"/>
-                  </a:lnTo>
-                  <a:lnTo>
-                    <a:pt x="4137909" y="1138400"/>
-                  </a:lnTo>
-                  <a:lnTo>
-                    <a:pt x="4211669" y="1150620"/>
-                  </a:lnTo>
-                  <a:lnTo>
-                    <a:pt x="4285429" y="1162639"/>
-                  </a:lnTo>
-                  <a:lnTo>
-                    <a:pt x="4359189" y="1174462"/>
-                  </a:lnTo>
-                  <a:lnTo>
-                    <a:pt x="4432949" y="1186090"/>
-                  </a:lnTo>
-                  <a:lnTo>
-                    <a:pt x="4506709" y="1197528"/>
-                  </a:lnTo>
-                  <a:lnTo>
-                    <a:pt x="4580469" y="1208779"/>
-                  </a:lnTo>
-                  <a:lnTo>
-                    <a:pt x="4654229" y="1219845"/>
-                  </a:lnTo>
-                  <a:lnTo>
-                    <a:pt x="4727989" y="1230730"/>
-                  </a:lnTo>
-                  <a:lnTo>
-                    <a:pt x="4801749" y="1241437"/>
-                  </a:lnTo>
-                  <a:lnTo>
-                    <a:pt x="4875509" y="1251968"/>
-                  </a:lnTo>
-                  <a:lnTo>
-                    <a:pt x="4949269" y="1262327"/>
-                  </a:lnTo>
-                  <a:lnTo>
-                    <a:pt x="5023029" y="1272516"/>
-                  </a:lnTo>
-                  <a:lnTo>
-                    <a:pt x="5096789" y="1282538"/>
-                  </a:lnTo>
-                  <a:lnTo>
-                    <a:pt x="5170549" y="1292396"/>
-                  </a:lnTo>
-                  <a:lnTo>
-                    <a:pt x="5244309" y="1302092"/>
-                  </a:lnTo>
-                  <a:lnTo>
-                    <a:pt x="5318069" y="1311629"/>
-                  </a:lnTo>
-                  <a:lnTo>
-                    <a:pt x="5391829" y="1321010"/>
-                  </a:lnTo>
-                  <a:lnTo>
-                    <a:pt x="5465589" y="1330238"/>
-                  </a:lnTo>
-                  <a:lnTo>
-                    <a:pt x="5539349" y="1339314"/>
-                  </a:lnTo>
-                  <a:lnTo>
-                    <a:pt x="5613109" y="1348242"/>
-                  </a:lnTo>
-                  <a:lnTo>
-                    <a:pt x="5686869" y="1357023"/>
-                  </a:lnTo>
-                  <a:lnTo>
-                    <a:pt x="5760629" y="1365660"/>
-                  </a:lnTo>
-                  <a:lnTo>
-                    <a:pt x="5834389" y="1374156"/>
-                  </a:lnTo>
-                  <a:lnTo>
-                    <a:pt x="5908149" y="1382512"/>
-                  </a:lnTo>
-                  <a:lnTo>
-                    <a:pt x="5981909" y="1390732"/>
-                  </a:lnTo>
-                  <a:lnTo>
-                    <a:pt x="6055669" y="1398817"/>
-                  </a:lnTo>
-                  <a:lnTo>
-                    <a:pt x="6129429" y="1406770"/>
-                  </a:lnTo>
-                  <a:lnTo>
-                    <a:pt x="6203189" y="1414592"/>
-                  </a:lnTo>
-                  <a:lnTo>
-                    <a:pt x="6276949" y="1422286"/>
-                  </a:lnTo>
-                  <a:lnTo>
-                    <a:pt x="6350709" y="1429854"/>
-                  </a:lnTo>
-                  <a:lnTo>
-                    <a:pt x="6424469" y="1437298"/>
-                  </a:lnTo>
-                  <a:lnTo>
-                    <a:pt x="6498229" y="1444620"/>
-                  </a:lnTo>
-                  <a:lnTo>
-                    <a:pt x="6571989" y="1451822"/>
-                  </a:lnTo>
-                  <a:lnTo>
-                    <a:pt x="6645749" y="1458906"/>
-                  </a:lnTo>
-                  <a:lnTo>
-                    <a:pt x="6719509" y="1465874"/>
-                  </a:lnTo>
-                  <a:lnTo>
-                    <a:pt x="6793269" y="1472728"/>
-                  </a:lnTo>
-                  <a:lnTo>
-                    <a:pt x="6867029" y="1479469"/>
-                  </a:lnTo>
-                  <a:lnTo>
-                    <a:pt x="6940789" y="1486100"/>
-                  </a:lnTo>
-                  <a:lnTo>
-                    <a:pt x="7014550" y="1492623"/>
-                  </a:lnTo>
-                  <a:lnTo>
-                    <a:pt x="7088310" y="1499038"/>
-                  </a:lnTo>
-                  <a:lnTo>
-                    <a:pt x="7162070" y="1505349"/>
-                  </a:lnTo>
-                  <a:lnTo>
-                    <a:pt x="7235830" y="1511556"/>
+                    <a:pt x="7347" y="2977"/>
+                  </a:lnTo>
+                  <a:lnTo>
+                    <a:pt x="81107" y="32373"/>
+                  </a:lnTo>
+                  <a:lnTo>
+                    <a:pt x="154867" y="61287"/>
+                  </a:lnTo>
+                  <a:lnTo>
+                    <a:pt x="228627" y="89728"/>
+                  </a:lnTo>
+                  <a:lnTo>
+                    <a:pt x="302387" y="117703"/>
+                  </a:lnTo>
+                  <a:lnTo>
+                    <a:pt x="376147" y="145219"/>
+                  </a:lnTo>
+                  <a:lnTo>
+                    <a:pt x="449907" y="172284"/>
+                  </a:lnTo>
+                  <a:lnTo>
+                    <a:pt x="523667" y="198906"/>
+                  </a:lnTo>
+                  <a:lnTo>
+                    <a:pt x="597427" y="225092"/>
+                  </a:lnTo>
+                  <a:lnTo>
+                    <a:pt x="671187" y="250849"/>
+                  </a:lnTo>
+                  <a:lnTo>
+                    <a:pt x="744947" y="276184"/>
+                  </a:lnTo>
+                  <a:lnTo>
+                    <a:pt x="818707" y="301103"/>
+                  </a:lnTo>
+                  <a:lnTo>
+                    <a:pt x="892467" y="325614"/>
+                  </a:lnTo>
+                  <a:lnTo>
+                    <a:pt x="966227" y="349724"/>
+                  </a:lnTo>
+                  <a:lnTo>
+                    <a:pt x="1039987" y="373439"/>
+                  </a:lnTo>
+                  <a:lnTo>
+                    <a:pt x="1113747" y="396765"/>
+                  </a:lnTo>
+                  <a:lnTo>
+                    <a:pt x="1187508" y="419709"/>
+                  </a:lnTo>
+                  <a:lnTo>
+                    <a:pt x="1261268" y="442276"/>
+                  </a:lnTo>
+                  <a:lnTo>
+                    <a:pt x="1335028" y="464475"/>
+                  </a:lnTo>
+                  <a:lnTo>
+                    <a:pt x="1408788" y="486309"/>
+                  </a:lnTo>
+                  <a:lnTo>
+                    <a:pt x="1482548" y="507786"/>
+                  </a:lnTo>
+                  <a:lnTo>
+                    <a:pt x="1556308" y="528910"/>
+                  </a:lnTo>
+                  <a:lnTo>
+                    <a:pt x="1630068" y="549689"/>
+                  </a:lnTo>
+                  <a:lnTo>
+                    <a:pt x="1703828" y="570127"/>
+                  </a:lnTo>
+                  <a:lnTo>
+                    <a:pt x="1777588" y="590230"/>
+                  </a:lnTo>
+                  <a:lnTo>
+                    <a:pt x="1851348" y="610004"/>
+                  </a:lnTo>
+                  <a:lnTo>
+                    <a:pt x="1925108" y="629454"/>
+                  </a:lnTo>
+                  <a:lnTo>
+                    <a:pt x="1998868" y="648585"/>
+                  </a:lnTo>
+                  <a:lnTo>
+                    <a:pt x="2072628" y="667403"/>
+                  </a:lnTo>
+                  <a:lnTo>
+                    <a:pt x="2146388" y="685912"/>
+                  </a:lnTo>
+                  <a:lnTo>
+                    <a:pt x="2220148" y="704118"/>
+                  </a:lnTo>
+                  <a:lnTo>
+                    <a:pt x="2293908" y="722026"/>
+                  </a:lnTo>
+                  <a:lnTo>
+                    <a:pt x="2367668" y="739641"/>
+                  </a:lnTo>
+                  <a:lnTo>
+                    <a:pt x="2441428" y="756966"/>
+                  </a:lnTo>
+                  <a:lnTo>
+                    <a:pt x="2515188" y="774008"/>
+                  </a:lnTo>
+                  <a:lnTo>
+                    <a:pt x="2588948" y="790771"/>
+                  </a:lnTo>
+                  <a:lnTo>
+                    <a:pt x="2662708" y="807259"/>
+                  </a:lnTo>
+                  <a:lnTo>
+                    <a:pt x="2736468" y="823477"/>
+                  </a:lnTo>
+                  <a:lnTo>
+                    <a:pt x="2810228" y="839429"/>
+                  </a:lnTo>
+                  <a:lnTo>
+                    <a:pt x="2883988" y="855119"/>
+                  </a:lnTo>
+                  <a:lnTo>
+                    <a:pt x="2957748" y="870553"/>
+                  </a:lnTo>
+                  <a:lnTo>
+                    <a:pt x="3031508" y="885734"/>
+                  </a:lnTo>
+                  <a:lnTo>
+                    <a:pt x="3105268" y="900666"/>
+                  </a:lnTo>
+                  <a:lnTo>
+                    <a:pt x="3179028" y="915353"/>
+                  </a:lnTo>
+                  <a:lnTo>
+                    <a:pt x="3252788" y="929800"/>
+                  </a:lnTo>
+                  <a:lnTo>
+                    <a:pt x="3326548" y="944010"/>
+                  </a:lnTo>
+                  <a:lnTo>
+                    <a:pt x="3400308" y="957987"/>
+                  </a:lnTo>
+                  <a:lnTo>
+                    <a:pt x="3474068" y="971735"/>
+                  </a:lnTo>
+                  <a:lnTo>
+                    <a:pt x="3547828" y="985258"/>
+                  </a:lnTo>
+                  <a:lnTo>
+                    <a:pt x="3621588" y="998559"/>
+                  </a:lnTo>
+                  <a:lnTo>
+                    <a:pt x="3695348" y="1011642"/>
+                  </a:lnTo>
+                  <a:lnTo>
+                    <a:pt x="3769108" y="1024511"/>
+                  </a:lnTo>
+                  <a:lnTo>
+                    <a:pt x="3842868" y="1037169"/>
+                  </a:lnTo>
+                  <a:lnTo>
+                    <a:pt x="3916628" y="1049620"/>
+                  </a:lnTo>
+                  <a:lnTo>
+                    <a:pt x="3990388" y="1061867"/>
+                  </a:lnTo>
+                  <a:lnTo>
+                    <a:pt x="4064149" y="1073913"/>
+                  </a:lnTo>
+                  <a:lnTo>
+                    <a:pt x="4137909" y="1085761"/>
+                  </a:lnTo>
+                  <a:lnTo>
+                    <a:pt x="4211669" y="1097416"/>
+                  </a:lnTo>
+                  <a:lnTo>
+                    <a:pt x="4285429" y="1108879"/>
+                  </a:lnTo>
+                  <a:lnTo>
+                    <a:pt x="4359189" y="1120155"/>
+                  </a:lnTo>
+                  <a:lnTo>
+                    <a:pt x="4432949" y="1131246"/>
+                  </a:lnTo>
+                  <a:lnTo>
+                    <a:pt x="4506709" y="1142155"/>
+                  </a:lnTo>
+                  <a:lnTo>
+                    <a:pt x="4580469" y="1152885"/>
+                  </a:lnTo>
+                  <a:lnTo>
+                    <a:pt x="4654229" y="1163440"/>
+                  </a:lnTo>
+                  <a:lnTo>
+                    <a:pt x="4727989" y="1173822"/>
+                  </a:lnTo>
+                  <a:lnTo>
+                    <a:pt x="4801749" y="1184033"/>
+                  </a:lnTo>
+                  <a:lnTo>
+                    <a:pt x="4875509" y="1194078"/>
+                  </a:lnTo>
+                  <a:lnTo>
+                    <a:pt x="4949269" y="1203957"/>
+                  </a:lnTo>
+                  <a:lnTo>
+                    <a:pt x="5023029" y="1213675"/>
+                  </a:lnTo>
+                  <a:lnTo>
+                    <a:pt x="5096789" y="1223234"/>
+                  </a:lnTo>
+                  <a:lnTo>
+                    <a:pt x="5170549" y="1232636"/>
+                  </a:lnTo>
+                  <a:lnTo>
+                    <a:pt x="5244309" y="1241884"/>
+                  </a:lnTo>
+                  <a:lnTo>
+                    <a:pt x="5318069" y="1250980"/>
+                  </a:lnTo>
+                  <a:lnTo>
+                    <a:pt x="5391829" y="1259927"/>
+                  </a:lnTo>
+                  <a:lnTo>
+                    <a:pt x="5465589" y="1268728"/>
+                  </a:lnTo>
+                  <a:lnTo>
+                    <a:pt x="5539349" y="1277385"/>
+                  </a:lnTo>
+                  <a:lnTo>
+                    <a:pt x="5613109" y="1285899"/>
+                  </a:lnTo>
+                  <a:lnTo>
+                    <a:pt x="5686869" y="1294274"/>
+                  </a:lnTo>
+                  <a:lnTo>
+                    <a:pt x="5760629" y="1302512"/>
+                  </a:lnTo>
+                  <a:lnTo>
+                    <a:pt x="5834389" y="1310615"/>
+                  </a:lnTo>
+                  <a:lnTo>
+                    <a:pt x="5908149" y="1318586"/>
+                  </a:lnTo>
+                  <a:lnTo>
+                    <a:pt x="5981909" y="1326425"/>
+                  </a:lnTo>
+                  <a:lnTo>
+                    <a:pt x="6055669" y="1334136"/>
+                  </a:lnTo>
+                  <a:lnTo>
+                    <a:pt x="6129429" y="1341721"/>
+                  </a:lnTo>
+                  <a:lnTo>
+                    <a:pt x="6203189" y="1349182"/>
+                  </a:lnTo>
+                  <a:lnTo>
+                    <a:pt x="6276949" y="1356520"/>
+                  </a:lnTo>
+                  <a:lnTo>
+                    <a:pt x="6350709" y="1363738"/>
+                  </a:lnTo>
+                  <a:lnTo>
+                    <a:pt x="6424469" y="1370838"/>
+                  </a:lnTo>
+                  <a:lnTo>
+                    <a:pt x="6498229" y="1377821"/>
+                  </a:lnTo>
+                  <a:lnTo>
+                    <a:pt x="6571989" y="1384690"/>
+                  </a:lnTo>
+                  <a:lnTo>
+                    <a:pt x="6645749" y="1391447"/>
+                  </a:lnTo>
+                  <a:lnTo>
+                    <a:pt x="6719509" y="1398092"/>
+                  </a:lnTo>
+                  <a:lnTo>
+                    <a:pt x="6793269" y="1404629"/>
+                  </a:lnTo>
+                  <a:lnTo>
+                    <a:pt x="6867029" y="1411059"/>
+                  </a:lnTo>
+                  <a:lnTo>
+                    <a:pt x="6940789" y="1417384"/>
+                  </a:lnTo>
+                  <a:lnTo>
+                    <a:pt x="7014550" y="1423604"/>
+                  </a:lnTo>
+                  <a:lnTo>
+                    <a:pt x="7088310" y="1429723"/>
+                  </a:lnTo>
+                  <a:lnTo>
+                    <a:pt x="7162070" y="1435742"/>
+                  </a:lnTo>
+                  <a:lnTo>
+                    <a:pt x="7235830" y="1441662"/>
                   </a:lnTo>
                 </a:path>
               </a:pathLst>
@@ -4575,7 +4575,7 @@
           </p:nvSpPr>
           <p:spPr>
             <a:xfrm>
-              <a:off x="817517" y="4679530"/>
+              <a:off x="817517" y="4727786"/>
               <a:ext cx="7799693" cy="0"/>
             </a:xfrm>
             <a:custGeom>
@@ -4618,15 +4618,15 @@
           </p:nvSpPr>
           <p:spPr>
             <a:xfrm>
-              <a:off x="4269157" y="1896563"/>
-              <a:ext cx="0" cy="3826579"/>
+              <a:off x="4269157" y="2073503"/>
+              <a:ext cx="0" cy="3649639"/>
             </a:xfrm>
             <a:custGeom>
               <a:avLst/>
               <a:pathLst>
-                <a:path w="0" h="3826579">
+                <a:path w="0" h="3649639">
                   <a:moveTo>
-                    <a:pt x="0" y="3826579"/>
+                    <a:pt x="0" y="3649639"/>
                   </a:moveTo>
                   <a:lnTo>
                     <a:pt x="0" y="0"/>
@@ -4661,7 +4661,7 @@
           </p:nvSpPr>
           <p:spPr>
             <a:xfrm>
-              <a:off x="692708" y="5509156"/>
+              <a:off x="692708" y="5517199"/>
               <a:ext cx="62179" cy="80101"/>
             </a:xfrm>
             <a:prstGeom prst="rect">
@@ -4707,7 +4707,7 @@
           </p:nvSpPr>
           <p:spPr>
             <a:xfrm>
-              <a:off x="692708" y="4639479"/>
+              <a:off x="692708" y="4687735"/>
               <a:ext cx="62179" cy="80101"/>
             </a:xfrm>
             <a:prstGeom prst="rect">
@@ -4753,7 +4753,7 @@
           </p:nvSpPr>
           <p:spPr>
             <a:xfrm>
-              <a:off x="692708" y="3769802"/>
+              <a:off x="692708" y="3858272"/>
               <a:ext cx="62179" cy="80101"/>
             </a:xfrm>
             <a:prstGeom prst="rect">
@@ -4799,7 +4799,7 @@
           </p:nvSpPr>
           <p:spPr>
             <a:xfrm>
-              <a:off x="692708" y="2900125"/>
+              <a:off x="692708" y="3028808"/>
               <a:ext cx="62179" cy="80101"/>
             </a:xfrm>
             <a:prstGeom prst="rect">
@@ -4845,7 +4845,7 @@
           </p:nvSpPr>
           <p:spPr>
             <a:xfrm>
-              <a:off x="692708" y="2030448"/>
+              <a:off x="692708" y="2199345"/>
               <a:ext cx="62179" cy="80101"/>
             </a:xfrm>
             <a:prstGeom prst="rect">
@@ -5121,7 +5121,7 @@
           </p:nvSpPr>
           <p:spPr>
             <a:xfrm rot="-5400000">
-              <a:off x="68446" y="3759743"/>
+              <a:off x="68446" y="3848213"/>
               <a:ext cx="1016904" cy="100218"/>
             </a:xfrm>
             <a:prstGeom prst="rect">
@@ -5162,6 +5162,52 @@
         <p:sp>
           <p:nvSpPr>
             <p:cNvPr id="38" name="tx38"/>
+            <p:cNvSpPr/>
+            <p:nvPr/>
+          </p:nvSpPr>
+          <p:spPr>
+            <a:xfrm>
+              <a:off x="817517" y="1896563"/>
+              <a:ext cx="5626211" cy="82021"/>
+            </a:xfrm>
+            <a:prstGeom prst="rect">
+              <a:avLst/>
+            </a:prstGeom>
+            <a:noFill/>
+          </p:spPr>
+          <p:txBody>
+            <a:bodyPr lIns="0" rIns="0" tIns="0" bIns="0" anchorCtr="1" anchor="ctr" wrap="none"/>
+            <a:lstStyle/>
+            <a:p>
+              <a:pPr algn="l" marL="0" marR="0" indent="0">
+                <a:lnSpc>
+                  <a:spcPts val="900"/>
+                </a:lnSpc>
+                <a:spcBef>
+                  <a:spcPts val="0"/>
+                </a:spcBef>
+                <a:spcAft>
+                  <a:spcPts val="0"/>
+                </a:spcAft>
+              </a:pPr>
+              <a:r>
+                <a:rPr sz="900">
+                  <a:solidFill>
+                    <a:srgbClr val="404040">
+                      <a:alpha val="100000"/>
+                    </a:srgbClr>
+                  </a:solidFill>
+                  <a:latin typeface="Helvetica"/>
+                  <a:cs typeface="Helvetica"/>
+                </a:rPr>
+                <a:t>subHR per 0.1 ratio decline: 1.22 (0.97-1.53)  |  per IQR decline (Δ = 0.29): 1.79 (0.91-3.50)  |  IQR: [0.85, 1.15]</a:t>
+              </a:r>
+            </a:p>
+          </p:txBody>
+        </p:sp>
+        <p:sp>
+          <p:nvSpPr>
+            <p:cNvPr id="39" name="tx39"/>
             <p:cNvSpPr/>
             <p:nvPr/>
           </p:nvSpPr>

--- a/docs/pptx/whole/jx-linsubhr-ratio-hosp1.pptx
+++ b/docs/pptx/whole/jx-linsubhr-ratio-hosp1.pptx
@@ -5168,7 +5168,7 @@
           <p:spPr>
             <a:xfrm>
               <a:off x="817517" y="1896563"/>
-              <a:ext cx="5626211" cy="82021"/>
+              <a:ext cx="6169365" cy="82021"/>
             </a:xfrm>
             <a:prstGeom prst="rect">
               <a:avLst/>
@@ -5200,7 +5200,7 @@
                   <a:latin typeface="Helvetica"/>
                   <a:cs typeface="Helvetica"/>
                 </a:rPr>
-                <a:t>subHR per 0.1 ratio decline: 1.22 (0.97-1.53)  |  per IQR decline (Δ = 0.29): 1.79 (0.91-3.50)  |  IQR: [0.85, 1.15]</a:t>
+                <a:t>subHR per 0.1 ratio decline: 1.22 (0.97-1.53), p = 0.090  |  per IQR decline (Δ = 0.29): 1.79 (0.91-3.50)  |  IQR: [0.85, 1.15]</a:t>
               </a:r>
             </a:p>
           </p:txBody>

--- a/docs/pptx/whole/jx-linsubhr-ratio-hosp1.pptx
+++ b/docs/pptx/whole/jx-linsubhr-ratio-hosp1.pptx
@@ -2443,7 +2443,7 @@
           </p:nvSpPr>
           <p:spPr>
             <a:xfrm>
-              <a:off x="1615213" y="2073503"/>
+              <a:off x="1365633" y="2073503"/>
               <a:ext cx="0" cy="3649639"/>
             </a:xfrm>
             <a:custGeom>
@@ -2486,7 +2486,7 @@
           </p:nvSpPr>
           <p:spPr>
             <a:xfrm>
-              <a:off x="3387871" y="2073503"/>
+              <a:off x="3517243" y="2073503"/>
               <a:ext cx="0" cy="3649639"/>
             </a:xfrm>
             <a:custGeom>
@@ -2529,7 +2529,7 @@
           </p:nvSpPr>
           <p:spPr>
             <a:xfrm>
-              <a:off x="5160528" y="2073503"/>
+              <a:off x="5668852" y="2073503"/>
               <a:ext cx="0" cy="3649639"/>
             </a:xfrm>
             <a:custGeom>
@@ -2572,7 +2572,7 @@
           </p:nvSpPr>
           <p:spPr>
             <a:xfrm>
-              <a:off x="6933186" y="2073503"/>
+              <a:off x="7820461" y="2073503"/>
               <a:ext cx="0" cy="3649639"/>
             </a:xfrm>
             <a:custGeom>
@@ -2830,7 +2830,7 @@
           </p:nvSpPr>
           <p:spPr>
             <a:xfrm>
-              <a:off x="2501542" y="2073503"/>
+              <a:off x="2441438" y="2073503"/>
               <a:ext cx="0" cy="3649639"/>
             </a:xfrm>
             <a:custGeom>
@@ -2873,7 +2873,7 @@
           </p:nvSpPr>
           <p:spPr>
             <a:xfrm>
-              <a:off x="4274200" y="2073503"/>
+              <a:off x="4593047" y="2073503"/>
               <a:ext cx="0" cy="3649639"/>
             </a:xfrm>
             <a:custGeom>
@@ -2916,7 +2916,7 @@
           </p:nvSpPr>
           <p:spPr>
             <a:xfrm>
-              <a:off x="6046857" y="2073503"/>
+              <a:off x="6744657" y="2073503"/>
               <a:ext cx="0" cy="3649639"/>
             </a:xfrm>
             <a:custGeom>
@@ -2953,640 +2953,597 @@
         </p:sp>
         <p:sp>
           <p:nvSpPr>
-            <p:cNvPr id="20" name="pl20"/>
+            <p:cNvPr id="20" name="pg20"/>
             <p:cNvSpPr/>
             <p:nvPr/>
           </p:nvSpPr>
           <p:spPr>
             <a:xfrm>
-              <a:off x="7819515" y="2073503"/>
-              <a:ext cx="0" cy="3649639"/>
+              <a:off x="1172049" y="2073503"/>
+              <a:ext cx="7090630" cy="3350541"/>
             </a:xfrm>
             <a:custGeom>
               <a:avLst/>
               <a:pathLst>
-                <a:path w="0" h="3649639">
+                <a:path w="7090630" h="3350541">
                   <a:moveTo>
-                    <a:pt x="0" y="3649639"/>
+                    <a:pt x="533100" y="0"/>
                   </a:moveTo>
                   <a:lnTo>
-                    <a:pt x="0" y="0"/>
-                  </a:lnTo>
-                  <a:lnTo>
-                    <a:pt x="0" y="0"/>
-                  </a:lnTo>
-                </a:path>
-              </a:pathLst>
-            </a:custGeom>
-            <a:ln w="13550" cap="flat">
-              <a:solidFill>
-                <a:srgbClr val="EBEBEB">
-                  <a:alpha val="100000"/>
-                </a:srgbClr>
-              </a:solidFill>
-              <a:prstDash val="solid"/>
-              <a:round/>
-            </a:ln>
-          </p:spPr>
-          <p:txBody>
-            <a:bodyPr/>
-            <a:lstStyle/>
-            <a:p/>
-          </p:txBody>
-        </p:sp>
-        <p:sp>
-          <p:nvSpPr>
-            <p:cNvPr id="21" name="pg21"/>
-            <p:cNvSpPr/>
-            <p:nvPr/>
-          </p:nvSpPr>
-          <p:spPr>
-            <a:xfrm>
-              <a:off x="817517" y="2073503"/>
-              <a:ext cx="7235830" cy="3350541"/>
-            </a:xfrm>
-            <a:custGeom>
-              <a:avLst/>
-              <a:pathLst>
-                <a:path w="7235830" h="3350541">
-                  <a:moveTo>
-                    <a:pt x="482597" y="0"/>
-                  </a:moveTo>
-                  <a:lnTo>
-                    <a:pt x="523667" y="69002"/>
-                  </a:lnTo>
-                  <a:lnTo>
-                    <a:pt x="597427" y="188586"/>
-                  </a:lnTo>
-                  <a:lnTo>
-                    <a:pt x="671187" y="303983"/>
-                  </a:lnTo>
-                  <a:lnTo>
-                    <a:pt x="744947" y="415338"/>
-                  </a:lnTo>
-                  <a:lnTo>
-                    <a:pt x="818707" y="522794"/>
-                  </a:lnTo>
-                  <a:lnTo>
-                    <a:pt x="892467" y="626487"/>
-                  </a:lnTo>
-                  <a:lnTo>
-                    <a:pt x="966227" y="726548"/>
-                  </a:lnTo>
-                  <a:lnTo>
-                    <a:pt x="1039987" y="823106"/>
-                  </a:lnTo>
-                  <a:lnTo>
-                    <a:pt x="1113747" y="916281"/>
-                  </a:lnTo>
-                  <a:lnTo>
-                    <a:pt x="1187508" y="1006194"/>
-                  </a:lnTo>
-                  <a:lnTo>
-                    <a:pt x="1261268" y="1092958"/>
-                  </a:lnTo>
-                  <a:lnTo>
-                    <a:pt x="1335028" y="1176684"/>
-                  </a:lnTo>
-                  <a:lnTo>
-                    <a:pt x="1408788" y="1257477"/>
-                  </a:lnTo>
-                  <a:lnTo>
-                    <a:pt x="1482548" y="1335441"/>
-                  </a:lnTo>
-                  <a:lnTo>
-                    <a:pt x="1556308" y="1410675"/>
-                  </a:lnTo>
-                  <a:lnTo>
-                    <a:pt x="1630068" y="1483274"/>
-                  </a:lnTo>
-                  <a:lnTo>
-                    <a:pt x="1703828" y="1553331"/>
-                  </a:lnTo>
-                  <a:lnTo>
-                    <a:pt x="1777588" y="1620934"/>
-                  </a:lnTo>
-                  <a:lnTo>
-                    <a:pt x="1851348" y="1686170"/>
-                  </a:lnTo>
-                  <a:lnTo>
-                    <a:pt x="1925108" y="1749121"/>
-                  </a:lnTo>
-                  <a:lnTo>
-                    <a:pt x="1998868" y="1809868"/>
-                  </a:lnTo>
-                  <a:lnTo>
-                    <a:pt x="2072628" y="1868487"/>
-                  </a:lnTo>
-                  <a:lnTo>
-                    <a:pt x="2146388" y="1925054"/>
-                  </a:lnTo>
-                  <a:lnTo>
-                    <a:pt x="2220148" y="1979639"/>
-                  </a:lnTo>
-                  <a:lnTo>
-                    <a:pt x="2293908" y="2032313"/>
-                  </a:lnTo>
-                  <a:lnTo>
-                    <a:pt x="2367668" y="2083142"/>
-                  </a:lnTo>
-                  <a:lnTo>
-                    <a:pt x="2441428" y="2132192"/>
-                  </a:lnTo>
-                  <a:lnTo>
-                    <a:pt x="2515188" y="2179523"/>
-                  </a:lnTo>
-                  <a:lnTo>
-                    <a:pt x="2588948" y="2225197"/>
-                  </a:lnTo>
-                  <a:lnTo>
-                    <a:pt x="2662708" y="2269272"/>
-                  </a:lnTo>
-                  <a:lnTo>
-                    <a:pt x="2736468" y="2311803"/>
-                  </a:lnTo>
-                  <a:lnTo>
-                    <a:pt x="2810228" y="2352844"/>
-                  </a:lnTo>
-                  <a:lnTo>
-                    <a:pt x="2883988" y="2392448"/>
-                  </a:lnTo>
-                  <a:lnTo>
-                    <a:pt x="2957748" y="2430666"/>
-                  </a:lnTo>
-                  <a:lnTo>
-                    <a:pt x="3031508" y="2467545"/>
-                  </a:lnTo>
-                  <a:lnTo>
-                    <a:pt x="3105268" y="2503132"/>
-                  </a:lnTo>
-                  <a:lnTo>
-                    <a:pt x="3179028" y="2537473"/>
-                  </a:lnTo>
-                  <a:lnTo>
-                    <a:pt x="3252788" y="2570612"/>
-                  </a:lnTo>
-                  <a:lnTo>
-                    <a:pt x="3326548" y="2602590"/>
-                  </a:lnTo>
-                  <a:lnTo>
-                    <a:pt x="3400308" y="2633448"/>
-                  </a:lnTo>
-                  <a:lnTo>
-                    <a:pt x="3474068" y="2653625"/>
-                  </a:lnTo>
-                  <a:lnTo>
-                    <a:pt x="3547828" y="2651459"/>
-                  </a:lnTo>
-                  <a:lnTo>
-                    <a:pt x="3621588" y="2649287"/>
-                  </a:lnTo>
-                  <a:lnTo>
-                    <a:pt x="3695348" y="2647110"/>
-                  </a:lnTo>
-                  <a:lnTo>
-                    <a:pt x="3769108" y="2644927"/>
-                  </a:lnTo>
-                  <a:lnTo>
-                    <a:pt x="3842868" y="2642738"/>
-                  </a:lnTo>
-                  <a:lnTo>
-                    <a:pt x="3916628" y="2640543"/>
-                  </a:lnTo>
-                  <a:lnTo>
-                    <a:pt x="3990388" y="2638343"/>
-                  </a:lnTo>
-                  <a:lnTo>
-                    <a:pt x="4064149" y="2636137"/>
-                  </a:lnTo>
-                  <a:lnTo>
-                    <a:pt x="4137909" y="2633925"/>
-                  </a:lnTo>
-                  <a:lnTo>
-                    <a:pt x="4211669" y="2631707"/>
-                  </a:lnTo>
-                  <a:lnTo>
-                    <a:pt x="4285429" y="2629484"/>
-                  </a:lnTo>
-                  <a:lnTo>
-                    <a:pt x="4359189" y="2627255"/>
-                  </a:lnTo>
-                  <a:lnTo>
-                    <a:pt x="4432949" y="2625020"/>
-                  </a:lnTo>
-                  <a:lnTo>
-                    <a:pt x="4506709" y="2622779"/>
-                  </a:lnTo>
-                  <a:lnTo>
-                    <a:pt x="4580469" y="2620532"/>
-                  </a:lnTo>
-                  <a:lnTo>
-                    <a:pt x="4654229" y="2618279"/>
-                  </a:lnTo>
-                  <a:lnTo>
-                    <a:pt x="4727989" y="2616021"/>
-                  </a:lnTo>
-                  <a:lnTo>
-                    <a:pt x="4801749" y="2613757"/>
-                  </a:lnTo>
-                  <a:lnTo>
-                    <a:pt x="4875509" y="2611486"/>
-                  </a:lnTo>
-                  <a:lnTo>
-                    <a:pt x="4949269" y="2609210"/>
-                  </a:lnTo>
-                  <a:lnTo>
-                    <a:pt x="5023029" y="2606928"/>
-                  </a:lnTo>
-                  <a:lnTo>
-                    <a:pt x="5096789" y="2604640"/>
-                  </a:lnTo>
-                  <a:lnTo>
-                    <a:pt x="5170549" y="2602346"/>
-                  </a:lnTo>
-                  <a:lnTo>
-                    <a:pt x="5244309" y="2600046"/>
-                  </a:lnTo>
-                  <a:lnTo>
-                    <a:pt x="5318069" y="2597740"/>
-                  </a:lnTo>
-                  <a:lnTo>
-                    <a:pt x="5391829" y="2595428"/>
-                  </a:lnTo>
-                  <a:lnTo>
-                    <a:pt x="5465589" y="2593110"/>
-                  </a:lnTo>
-                  <a:lnTo>
-                    <a:pt x="5539349" y="2590786"/>
-                  </a:lnTo>
-                  <a:lnTo>
-                    <a:pt x="5613109" y="2588456"/>
-                  </a:lnTo>
-                  <a:lnTo>
-                    <a:pt x="5686869" y="2586119"/>
-                  </a:lnTo>
-                  <a:lnTo>
-                    <a:pt x="5760629" y="2583777"/>
-                  </a:lnTo>
-                  <a:lnTo>
-                    <a:pt x="5834389" y="2581429"/>
-                  </a:lnTo>
-                  <a:lnTo>
-                    <a:pt x="5908149" y="2579074"/>
-                  </a:lnTo>
-                  <a:lnTo>
-                    <a:pt x="5981909" y="2576713"/>
-                  </a:lnTo>
-                  <a:lnTo>
-                    <a:pt x="6055669" y="2574346"/>
-                  </a:lnTo>
-                  <a:lnTo>
-                    <a:pt x="6129429" y="2571973"/>
-                  </a:lnTo>
-                  <a:lnTo>
-                    <a:pt x="6203189" y="2569594"/>
-                  </a:lnTo>
-                  <a:lnTo>
-                    <a:pt x="6276949" y="2567209"/>
-                  </a:lnTo>
-                  <a:lnTo>
-                    <a:pt x="6350709" y="2564817"/>
-                  </a:lnTo>
-                  <a:lnTo>
-                    <a:pt x="6424469" y="2562419"/>
-                  </a:lnTo>
-                  <a:lnTo>
-                    <a:pt x="6498229" y="2560015"/>
-                  </a:lnTo>
-                  <a:lnTo>
-                    <a:pt x="6571989" y="2557604"/>
-                  </a:lnTo>
-                  <a:lnTo>
-                    <a:pt x="6645749" y="2555187"/>
-                  </a:lnTo>
-                  <a:lnTo>
-                    <a:pt x="6719509" y="2552764"/>
-                  </a:lnTo>
-                  <a:lnTo>
-                    <a:pt x="6793269" y="2550335"/>
-                  </a:lnTo>
-                  <a:lnTo>
-                    <a:pt x="6867029" y="2547899"/>
-                  </a:lnTo>
-                  <a:lnTo>
-                    <a:pt x="6940789" y="2545457"/>
-                  </a:lnTo>
-                  <a:lnTo>
-                    <a:pt x="7014550" y="2543009"/>
-                  </a:lnTo>
-                  <a:lnTo>
-                    <a:pt x="7088310" y="2540554"/>
-                  </a:lnTo>
-                  <a:lnTo>
-                    <a:pt x="7162070" y="2538093"/>
-                  </a:lnTo>
-                  <a:lnTo>
-                    <a:pt x="7235830" y="2535625"/>
-                  </a:lnTo>
-                  <a:lnTo>
-                    <a:pt x="7235830" y="3350541"/>
-                  </a:lnTo>
-                  <a:lnTo>
-                    <a:pt x="7162070" y="3345707"/>
-                  </a:lnTo>
-                  <a:lnTo>
-                    <a:pt x="7088310" y="3340697"/>
-                  </a:lnTo>
-                  <a:lnTo>
-                    <a:pt x="7014550" y="3335506"/>
-                  </a:lnTo>
-                  <a:lnTo>
-                    <a:pt x="6940789" y="3330126"/>
-                  </a:lnTo>
-                  <a:lnTo>
-                    <a:pt x="6867029" y="3324551"/>
-                  </a:lnTo>
-                  <a:lnTo>
-                    <a:pt x="6793269" y="3318774"/>
-                  </a:lnTo>
-                  <a:lnTo>
-                    <a:pt x="6719509" y="3312787"/>
-                  </a:lnTo>
-                  <a:lnTo>
-                    <a:pt x="6645749" y="3306582"/>
-                  </a:lnTo>
-                  <a:lnTo>
-                    <a:pt x="6571989" y="3300153"/>
-                  </a:lnTo>
-                  <a:lnTo>
-                    <a:pt x="6498229" y="3293490"/>
-                  </a:lnTo>
-                  <a:lnTo>
-                    <a:pt x="6424469" y="3286585"/>
-                  </a:lnTo>
-                  <a:lnTo>
-                    <a:pt x="6350709" y="3279430"/>
-                  </a:lnTo>
-                  <a:lnTo>
-                    <a:pt x="6276949" y="3272015"/>
-                  </a:lnTo>
-                  <a:lnTo>
-                    <a:pt x="6203189" y="3264331"/>
-                  </a:lnTo>
-                  <a:lnTo>
-                    <a:pt x="6129429" y="3256369"/>
-                  </a:lnTo>
-                  <a:lnTo>
-                    <a:pt x="6055669" y="3248117"/>
-                  </a:lnTo>
-                  <a:lnTo>
-                    <a:pt x="5981909" y="3239566"/>
-                  </a:lnTo>
-                  <a:lnTo>
-                    <a:pt x="5908149" y="3230704"/>
-                  </a:lnTo>
-                  <a:lnTo>
-                    <a:pt x="5834389" y="3221521"/>
-                  </a:lnTo>
-                  <a:lnTo>
-                    <a:pt x="5760629" y="3212005"/>
-                  </a:lnTo>
-                  <a:lnTo>
-                    <a:pt x="5686869" y="3202143"/>
-                  </a:lnTo>
-                  <a:lnTo>
-                    <a:pt x="5613109" y="3191923"/>
-                  </a:lnTo>
-                  <a:lnTo>
-                    <a:pt x="5539349" y="3181333"/>
-                  </a:lnTo>
-                  <a:lnTo>
-                    <a:pt x="5465589" y="3170358"/>
-                  </a:lnTo>
-                  <a:lnTo>
-                    <a:pt x="5391829" y="3158985"/>
-                  </a:lnTo>
-                  <a:lnTo>
-                    <a:pt x="5318069" y="3147199"/>
-                  </a:lnTo>
-                  <a:lnTo>
-                    <a:pt x="5244309" y="3134985"/>
-                  </a:lnTo>
-                  <a:lnTo>
-                    <a:pt x="5170549" y="3122328"/>
-                  </a:lnTo>
-                  <a:lnTo>
-                    <a:pt x="5096789" y="3109212"/>
-                  </a:lnTo>
-                  <a:lnTo>
-                    <a:pt x="5023029" y="3095620"/>
-                  </a:lnTo>
-                  <a:lnTo>
-                    <a:pt x="4949269" y="3081534"/>
-                  </a:lnTo>
-                  <a:lnTo>
-                    <a:pt x="4875509" y="3066937"/>
-                  </a:lnTo>
-                  <a:lnTo>
-                    <a:pt x="4801749" y="3051811"/>
-                  </a:lnTo>
-                  <a:lnTo>
-                    <a:pt x="4727989" y="3036136"/>
-                  </a:lnTo>
-                  <a:lnTo>
-                    <a:pt x="4654229" y="3019891"/>
-                  </a:lnTo>
-                  <a:lnTo>
-                    <a:pt x="4580469" y="3003058"/>
-                  </a:lnTo>
-                  <a:lnTo>
-                    <a:pt x="4506709" y="2985613"/>
-                  </a:lnTo>
-                  <a:lnTo>
-                    <a:pt x="4432949" y="2967535"/>
-                  </a:lnTo>
-                  <a:lnTo>
-                    <a:pt x="4359189" y="2948802"/>
-                  </a:lnTo>
-                  <a:lnTo>
-                    <a:pt x="4285429" y="2929388"/>
-                  </a:lnTo>
-                  <a:lnTo>
-                    <a:pt x="4211669" y="2909270"/>
-                  </a:lnTo>
-                  <a:lnTo>
-                    <a:pt x="4137909" y="2888421"/>
-                  </a:lnTo>
-                  <a:lnTo>
-                    <a:pt x="4064149" y="2866816"/>
-                  </a:lnTo>
-                  <a:lnTo>
-                    <a:pt x="3990388" y="2844427"/>
-                  </a:lnTo>
-                  <a:lnTo>
-                    <a:pt x="3916628" y="2821226"/>
-                  </a:lnTo>
-                  <a:lnTo>
-                    <a:pt x="3842868" y="2797182"/>
-                  </a:lnTo>
-                  <a:lnTo>
-                    <a:pt x="3769108" y="2772266"/>
-                  </a:lnTo>
-                  <a:lnTo>
-                    <a:pt x="3695348" y="2746446"/>
-                  </a:lnTo>
-                  <a:lnTo>
-                    <a:pt x="3621588" y="2719689"/>
-                  </a:lnTo>
-                  <a:lnTo>
-                    <a:pt x="3547828" y="2691960"/>
-                  </a:lnTo>
-                  <a:lnTo>
-                    <a:pt x="3474068" y="2663226"/>
-                  </a:lnTo>
-                  <a:lnTo>
-                    <a:pt x="3400308" y="2655786"/>
-                  </a:lnTo>
-                  <a:lnTo>
-                    <a:pt x="3326548" y="2657941"/>
-                  </a:lnTo>
-                  <a:lnTo>
-                    <a:pt x="3252788" y="2660090"/>
-                  </a:lnTo>
-                  <a:lnTo>
-                    <a:pt x="3179028" y="2662234"/>
-                  </a:lnTo>
-                  <a:lnTo>
-                    <a:pt x="3105268" y="2664372"/>
-                  </a:lnTo>
-                  <a:lnTo>
-                    <a:pt x="3031508" y="2666505"/>
-                  </a:lnTo>
-                  <a:lnTo>
-                    <a:pt x="2957748" y="2668632"/>
-                  </a:lnTo>
-                  <a:lnTo>
-                    <a:pt x="2883988" y="2670753"/>
-                  </a:lnTo>
-                  <a:lnTo>
-                    <a:pt x="2810228" y="2672869"/>
-                  </a:lnTo>
-                  <a:lnTo>
-                    <a:pt x="2736468" y="2674980"/>
-                  </a:lnTo>
-                  <a:lnTo>
-                    <a:pt x="2662708" y="2677085"/>
-                  </a:lnTo>
-                  <a:lnTo>
-                    <a:pt x="2588948" y="2679184"/>
-                  </a:lnTo>
-                  <a:lnTo>
-                    <a:pt x="2515188" y="2681278"/>
-                  </a:lnTo>
-                  <a:lnTo>
-                    <a:pt x="2441428" y="2683367"/>
-                  </a:lnTo>
-                  <a:lnTo>
-                    <a:pt x="2367668" y="2685450"/>
-                  </a:lnTo>
-                  <a:lnTo>
-                    <a:pt x="2293908" y="2687528"/>
-                  </a:lnTo>
-                  <a:lnTo>
-                    <a:pt x="2220148" y="2689600"/>
-                  </a:lnTo>
-                  <a:lnTo>
-                    <a:pt x="2146388" y="2691667"/>
-                  </a:lnTo>
-                  <a:lnTo>
-                    <a:pt x="2072628" y="2693728"/>
-                  </a:lnTo>
-                  <a:lnTo>
-                    <a:pt x="1998868" y="2695785"/>
-                  </a:lnTo>
-                  <a:lnTo>
-                    <a:pt x="1925108" y="2697835"/>
-                  </a:lnTo>
-                  <a:lnTo>
-                    <a:pt x="1851348" y="2699881"/>
-                  </a:lnTo>
-                  <a:lnTo>
-                    <a:pt x="1777588" y="2701921"/>
-                  </a:lnTo>
-                  <a:lnTo>
-                    <a:pt x="1703828" y="2703956"/>
-                  </a:lnTo>
-                  <a:lnTo>
-                    <a:pt x="1630068" y="2705986"/>
-                  </a:lnTo>
-                  <a:lnTo>
-                    <a:pt x="1556308" y="2708010"/>
-                  </a:lnTo>
-                  <a:lnTo>
-                    <a:pt x="1482548" y="2710029"/>
-                  </a:lnTo>
-                  <a:lnTo>
-                    <a:pt x="1408788" y="2712043"/>
-                  </a:lnTo>
-                  <a:lnTo>
-                    <a:pt x="1335028" y="2714051"/>
-                  </a:lnTo>
-                  <a:lnTo>
-                    <a:pt x="1261268" y="2716054"/>
-                  </a:lnTo>
-                  <a:lnTo>
-                    <a:pt x="1187508" y="2718052"/>
-                  </a:lnTo>
-                  <a:lnTo>
-                    <a:pt x="1113747" y="2720045"/>
-                  </a:lnTo>
-                  <a:lnTo>
-                    <a:pt x="1039987" y="2722033"/>
-                  </a:lnTo>
-                  <a:lnTo>
-                    <a:pt x="966227" y="2724016"/>
-                  </a:lnTo>
-                  <a:lnTo>
-                    <a:pt x="892467" y="2725993"/>
-                  </a:lnTo>
-                  <a:lnTo>
-                    <a:pt x="818707" y="2727965"/>
-                  </a:lnTo>
-                  <a:lnTo>
-                    <a:pt x="744947" y="2729932"/>
-                  </a:lnTo>
-                  <a:lnTo>
-                    <a:pt x="671187" y="2731894"/>
-                  </a:lnTo>
-                  <a:lnTo>
-                    <a:pt x="597427" y="2733851"/>
-                  </a:lnTo>
-                  <a:lnTo>
-                    <a:pt x="523667" y="2735803"/>
-                  </a:lnTo>
-                  <a:lnTo>
-                    <a:pt x="449907" y="2737749"/>
-                  </a:lnTo>
-                  <a:lnTo>
-                    <a:pt x="376147" y="2739691"/>
-                  </a:lnTo>
-                  <a:lnTo>
-                    <a:pt x="302387" y="2741628"/>
-                  </a:lnTo>
-                  <a:lnTo>
-                    <a:pt x="228627" y="2743559"/>
-                  </a:lnTo>
-                  <a:lnTo>
-                    <a:pt x="154867" y="2745486"/>
-                  </a:lnTo>
-                  <a:lnTo>
-                    <a:pt x="81107" y="2747407"/>
-                  </a:lnTo>
-                  <a:lnTo>
-                    <a:pt x="7347" y="2749324"/>
-                  </a:lnTo>
-                  <a:lnTo>
-                    <a:pt x="0" y="2749514"/>
+                    <a:pt x="572980" y="69002"/>
+                  </a:lnTo>
+                  <a:lnTo>
+                    <a:pt x="644602" y="188586"/>
+                  </a:lnTo>
+                  <a:lnTo>
+                    <a:pt x="716225" y="303983"/>
+                  </a:lnTo>
+                  <a:lnTo>
+                    <a:pt x="787847" y="415338"/>
+                  </a:lnTo>
+                  <a:lnTo>
+                    <a:pt x="859470" y="522794"/>
+                  </a:lnTo>
+                  <a:lnTo>
+                    <a:pt x="931092" y="626487"/>
+                  </a:lnTo>
+                  <a:lnTo>
+                    <a:pt x="1002715" y="726548"/>
+                  </a:lnTo>
+                  <a:lnTo>
+                    <a:pt x="1074337" y="823106"/>
+                  </a:lnTo>
+                  <a:lnTo>
+                    <a:pt x="1145960" y="916281"/>
+                  </a:lnTo>
+                  <a:lnTo>
+                    <a:pt x="1217582" y="1006194"/>
+                  </a:lnTo>
+                  <a:lnTo>
+                    <a:pt x="1289205" y="1092958"/>
+                  </a:lnTo>
+                  <a:lnTo>
+                    <a:pt x="1360827" y="1176684"/>
+                  </a:lnTo>
+                  <a:lnTo>
+                    <a:pt x="1432450" y="1257477"/>
+                  </a:lnTo>
+                  <a:lnTo>
+                    <a:pt x="1504073" y="1335441"/>
+                  </a:lnTo>
+                  <a:lnTo>
+                    <a:pt x="1575695" y="1410675"/>
+                  </a:lnTo>
+                  <a:lnTo>
+                    <a:pt x="1647318" y="1483274"/>
+                  </a:lnTo>
+                  <a:lnTo>
+                    <a:pt x="1718940" y="1553331"/>
+                  </a:lnTo>
+                  <a:lnTo>
+                    <a:pt x="1790563" y="1620934"/>
+                  </a:lnTo>
+                  <a:lnTo>
+                    <a:pt x="1862185" y="1686170"/>
+                  </a:lnTo>
+                  <a:lnTo>
+                    <a:pt x="1933808" y="1749121"/>
+                  </a:lnTo>
+                  <a:lnTo>
+                    <a:pt x="2005430" y="1809868"/>
+                  </a:lnTo>
+                  <a:lnTo>
+                    <a:pt x="2077053" y="1868487"/>
+                  </a:lnTo>
+                  <a:lnTo>
+                    <a:pt x="2148675" y="1925054"/>
+                  </a:lnTo>
+                  <a:lnTo>
+                    <a:pt x="2220298" y="1979639"/>
+                  </a:lnTo>
+                  <a:lnTo>
+                    <a:pt x="2291920" y="2032313"/>
+                  </a:lnTo>
+                  <a:lnTo>
+                    <a:pt x="2363543" y="2083142"/>
+                  </a:lnTo>
+                  <a:lnTo>
+                    <a:pt x="2435165" y="2132192"/>
+                  </a:lnTo>
+                  <a:lnTo>
+                    <a:pt x="2506788" y="2179523"/>
+                  </a:lnTo>
+                  <a:lnTo>
+                    <a:pt x="2578410" y="2225197"/>
+                  </a:lnTo>
+                  <a:lnTo>
+                    <a:pt x="2650033" y="2269272"/>
+                  </a:lnTo>
+                  <a:lnTo>
+                    <a:pt x="2721655" y="2311803"/>
+                  </a:lnTo>
+                  <a:lnTo>
+                    <a:pt x="2793278" y="2352844"/>
+                  </a:lnTo>
+                  <a:lnTo>
+                    <a:pt x="2864901" y="2392448"/>
+                  </a:lnTo>
+                  <a:lnTo>
+                    <a:pt x="2936523" y="2430666"/>
+                  </a:lnTo>
+                  <a:lnTo>
+                    <a:pt x="3008146" y="2467545"/>
+                  </a:lnTo>
+                  <a:lnTo>
+                    <a:pt x="3079768" y="2503132"/>
+                  </a:lnTo>
+                  <a:lnTo>
+                    <a:pt x="3151391" y="2537473"/>
+                  </a:lnTo>
+                  <a:lnTo>
+                    <a:pt x="3223013" y="2570612"/>
+                  </a:lnTo>
+                  <a:lnTo>
+                    <a:pt x="3294636" y="2602590"/>
+                  </a:lnTo>
+                  <a:lnTo>
+                    <a:pt x="3366258" y="2633448"/>
+                  </a:lnTo>
+                  <a:lnTo>
+                    <a:pt x="3437881" y="2653625"/>
+                  </a:lnTo>
+                  <a:lnTo>
+                    <a:pt x="3509503" y="2651459"/>
+                  </a:lnTo>
+                  <a:lnTo>
+                    <a:pt x="3581126" y="2649287"/>
+                  </a:lnTo>
+                  <a:lnTo>
+                    <a:pt x="3652748" y="2647110"/>
+                  </a:lnTo>
+                  <a:lnTo>
+                    <a:pt x="3724371" y="2644927"/>
+                  </a:lnTo>
+                  <a:lnTo>
+                    <a:pt x="3795993" y="2642738"/>
+                  </a:lnTo>
+                  <a:lnTo>
+                    <a:pt x="3867616" y="2640543"/>
+                  </a:lnTo>
+                  <a:lnTo>
+                    <a:pt x="3939238" y="2638343"/>
+                  </a:lnTo>
+                  <a:lnTo>
+                    <a:pt x="4010861" y="2636137"/>
+                  </a:lnTo>
+                  <a:lnTo>
+                    <a:pt x="4082483" y="2633925"/>
+                  </a:lnTo>
+                  <a:lnTo>
+                    <a:pt x="4154106" y="2631707"/>
+                  </a:lnTo>
+                  <a:lnTo>
+                    <a:pt x="4225729" y="2629484"/>
+                  </a:lnTo>
+                  <a:lnTo>
+                    <a:pt x="4297351" y="2627255"/>
+                  </a:lnTo>
+                  <a:lnTo>
+                    <a:pt x="4368974" y="2625020"/>
+                  </a:lnTo>
+                  <a:lnTo>
+                    <a:pt x="4440596" y="2622779"/>
+                  </a:lnTo>
+                  <a:lnTo>
+                    <a:pt x="4512219" y="2620532"/>
+                  </a:lnTo>
+                  <a:lnTo>
+                    <a:pt x="4583841" y="2618279"/>
+                  </a:lnTo>
+                  <a:lnTo>
+                    <a:pt x="4655464" y="2616021"/>
+                  </a:lnTo>
+                  <a:lnTo>
+                    <a:pt x="4727086" y="2613757"/>
+                  </a:lnTo>
+                  <a:lnTo>
+                    <a:pt x="4798709" y="2611486"/>
+                  </a:lnTo>
+                  <a:lnTo>
+                    <a:pt x="4870331" y="2609210"/>
+                  </a:lnTo>
+                  <a:lnTo>
+                    <a:pt x="4941954" y="2606928"/>
+                  </a:lnTo>
+                  <a:lnTo>
+                    <a:pt x="5013576" y="2604640"/>
+                  </a:lnTo>
+                  <a:lnTo>
+                    <a:pt x="5085199" y="2602346"/>
+                  </a:lnTo>
+                  <a:lnTo>
+                    <a:pt x="5156821" y="2600046"/>
+                  </a:lnTo>
+                  <a:lnTo>
+                    <a:pt x="5228444" y="2597740"/>
+                  </a:lnTo>
+                  <a:lnTo>
+                    <a:pt x="5300066" y="2595428"/>
+                  </a:lnTo>
+                  <a:lnTo>
+                    <a:pt x="5371689" y="2593110"/>
+                  </a:lnTo>
+                  <a:lnTo>
+                    <a:pt x="5443311" y="2590786"/>
+                  </a:lnTo>
+                  <a:lnTo>
+                    <a:pt x="5514934" y="2588456"/>
+                  </a:lnTo>
+                  <a:lnTo>
+                    <a:pt x="5586557" y="2586119"/>
+                  </a:lnTo>
+                  <a:lnTo>
+                    <a:pt x="5658179" y="2583777"/>
+                  </a:lnTo>
+                  <a:lnTo>
+                    <a:pt x="5729802" y="2581429"/>
+                  </a:lnTo>
+                  <a:lnTo>
+                    <a:pt x="5801424" y="2579074"/>
+                  </a:lnTo>
+                  <a:lnTo>
+                    <a:pt x="5873047" y="2576713"/>
+                  </a:lnTo>
+                  <a:lnTo>
+                    <a:pt x="5944669" y="2574346"/>
+                  </a:lnTo>
+                  <a:lnTo>
+                    <a:pt x="6016292" y="2571973"/>
+                  </a:lnTo>
+                  <a:lnTo>
+                    <a:pt x="6087914" y="2569594"/>
+                  </a:lnTo>
+                  <a:lnTo>
+                    <a:pt x="6159537" y="2567209"/>
+                  </a:lnTo>
+                  <a:lnTo>
+                    <a:pt x="6231159" y="2564817"/>
+                  </a:lnTo>
+                  <a:lnTo>
+                    <a:pt x="6302782" y="2562419"/>
+                  </a:lnTo>
+                  <a:lnTo>
+                    <a:pt x="6374404" y="2560015"/>
+                  </a:lnTo>
+                  <a:lnTo>
+                    <a:pt x="6446027" y="2557604"/>
+                  </a:lnTo>
+                  <a:lnTo>
+                    <a:pt x="6517649" y="2555187"/>
+                  </a:lnTo>
+                  <a:lnTo>
+                    <a:pt x="6589272" y="2552764"/>
+                  </a:lnTo>
+                  <a:lnTo>
+                    <a:pt x="6660894" y="2550335"/>
+                  </a:lnTo>
+                  <a:lnTo>
+                    <a:pt x="6732517" y="2547899"/>
+                  </a:lnTo>
+                  <a:lnTo>
+                    <a:pt x="6804139" y="2545457"/>
+                  </a:lnTo>
+                  <a:lnTo>
+                    <a:pt x="6875762" y="2543009"/>
+                  </a:lnTo>
+                  <a:lnTo>
+                    <a:pt x="6947385" y="2540554"/>
+                  </a:lnTo>
+                  <a:lnTo>
+                    <a:pt x="7019007" y="2538093"/>
+                  </a:lnTo>
+                  <a:lnTo>
+                    <a:pt x="7090630" y="2535625"/>
+                  </a:lnTo>
+                  <a:lnTo>
+                    <a:pt x="7090630" y="3350541"/>
+                  </a:lnTo>
+                  <a:lnTo>
+                    <a:pt x="7019007" y="3345707"/>
+                  </a:lnTo>
+                  <a:lnTo>
+                    <a:pt x="6947385" y="3340697"/>
+                  </a:lnTo>
+                  <a:lnTo>
+                    <a:pt x="6875762" y="3335506"/>
+                  </a:lnTo>
+                  <a:lnTo>
+                    <a:pt x="6804139" y="3330126"/>
+                  </a:lnTo>
+                  <a:lnTo>
+                    <a:pt x="6732517" y="3324551"/>
+                  </a:lnTo>
+                  <a:lnTo>
+                    <a:pt x="6660894" y="3318774"/>
+                  </a:lnTo>
+                  <a:lnTo>
+                    <a:pt x="6589272" y="3312787"/>
+                  </a:lnTo>
+                  <a:lnTo>
+                    <a:pt x="6517649" y="3306582"/>
+                  </a:lnTo>
+                  <a:lnTo>
+                    <a:pt x="6446027" y="3300153"/>
+                  </a:lnTo>
+                  <a:lnTo>
+                    <a:pt x="6374404" y="3293490"/>
+                  </a:lnTo>
+                  <a:lnTo>
+                    <a:pt x="6302782" y="3286585"/>
+                  </a:lnTo>
+                  <a:lnTo>
+                    <a:pt x="6231159" y="3279430"/>
+                  </a:lnTo>
+                  <a:lnTo>
+                    <a:pt x="6159537" y="3272015"/>
+                  </a:lnTo>
+                  <a:lnTo>
+                    <a:pt x="6087914" y="3264331"/>
+                  </a:lnTo>
+                  <a:lnTo>
+                    <a:pt x="6016292" y="3256369"/>
+                  </a:lnTo>
+                  <a:lnTo>
+                    <a:pt x="5944669" y="3248117"/>
+                  </a:lnTo>
+                  <a:lnTo>
+                    <a:pt x="5873047" y="3239566"/>
+                  </a:lnTo>
+                  <a:lnTo>
+                    <a:pt x="5801424" y="3230704"/>
+                  </a:lnTo>
+                  <a:lnTo>
+                    <a:pt x="5729802" y="3221521"/>
+                  </a:lnTo>
+                  <a:lnTo>
+                    <a:pt x="5658179" y="3212005"/>
+                  </a:lnTo>
+                  <a:lnTo>
+                    <a:pt x="5586557" y="3202143"/>
+                  </a:lnTo>
+                  <a:lnTo>
+                    <a:pt x="5514934" y="3191923"/>
+                  </a:lnTo>
+                  <a:lnTo>
+                    <a:pt x="5443311" y="3181333"/>
+                  </a:lnTo>
+                  <a:lnTo>
+                    <a:pt x="5371689" y="3170358"/>
+                  </a:lnTo>
+                  <a:lnTo>
+                    <a:pt x="5300066" y="3158985"/>
+                  </a:lnTo>
+                  <a:lnTo>
+                    <a:pt x="5228444" y="3147199"/>
+                  </a:lnTo>
+                  <a:lnTo>
+                    <a:pt x="5156821" y="3134985"/>
+                  </a:lnTo>
+                  <a:lnTo>
+                    <a:pt x="5085199" y="3122328"/>
+                  </a:lnTo>
+                  <a:lnTo>
+                    <a:pt x="5013576" y="3109212"/>
+                  </a:lnTo>
+                  <a:lnTo>
+                    <a:pt x="4941954" y="3095620"/>
+                  </a:lnTo>
+                  <a:lnTo>
+                    <a:pt x="4870331" y="3081534"/>
+                  </a:lnTo>
+                  <a:lnTo>
+                    <a:pt x="4798709" y="3066937"/>
+                  </a:lnTo>
+                  <a:lnTo>
+                    <a:pt x="4727086" y="3051811"/>
+                  </a:lnTo>
+                  <a:lnTo>
+                    <a:pt x="4655464" y="3036136"/>
+                  </a:lnTo>
+                  <a:lnTo>
+                    <a:pt x="4583841" y="3019891"/>
+                  </a:lnTo>
+                  <a:lnTo>
+                    <a:pt x="4512219" y="3003058"/>
+                  </a:lnTo>
+                  <a:lnTo>
+                    <a:pt x="4440596" y="2985613"/>
+                  </a:lnTo>
+                  <a:lnTo>
+                    <a:pt x="4368974" y="2967535"/>
+                  </a:lnTo>
+                  <a:lnTo>
+                    <a:pt x="4297351" y="2948802"/>
+                  </a:lnTo>
+                  <a:lnTo>
+                    <a:pt x="4225729" y="2929388"/>
+                  </a:lnTo>
+                  <a:lnTo>
+                    <a:pt x="4154106" y="2909270"/>
+                  </a:lnTo>
+                  <a:lnTo>
+                    <a:pt x="4082483" y="2888421"/>
+                  </a:lnTo>
+                  <a:lnTo>
+                    <a:pt x="4010861" y="2866816"/>
+                  </a:lnTo>
+                  <a:lnTo>
+                    <a:pt x="3939238" y="2844427"/>
+                  </a:lnTo>
+                  <a:lnTo>
+                    <a:pt x="3867616" y="2821226"/>
+                  </a:lnTo>
+                  <a:lnTo>
+                    <a:pt x="3795993" y="2797182"/>
+                  </a:lnTo>
+                  <a:lnTo>
+                    <a:pt x="3724371" y="2772266"/>
+                  </a:lnTo>
+                  <a:lnTo>
+                    <a:pt x="3652748" y="2746446"/>
+                  </a:lnTo>
+                  <a:lnTo>
+                    <a:pt x="3581126" y="2719689"/>
+                  </a:lnTo>
+                  <a:lnTo>
+                    <a:pt x="3509503" y="2691960"/>
+                  </a:lnTo>
+                  <a:lnTo>
+                    <a:pt x="3437881" y="2663226"/>
+                  </a:lnTo>
+                  <a:lnTo>
+                    <a:pt x="3366258" y="2655786"/>
+                  </a:lnTo>
+                  <a:lnTo>
+                    <a:pt x="3294636" y="2657941"/>
+                  </a:lnTo>
+                  <a:lnTo>
+                    <a:pt x="3223013" y="2660090"/>
+                  </a:lnTo>
+                  <a:lnTo>
+                    <a:pt x="3151391" y="2662234"/>
+                  </a:lnTo>
+                  <a:lnTo>
+                    <a:pt x="3079768" y="2664372"/>
+                  </a:lnTo>
+                  <a:lnTo>
+                    <a:pt x="3008146" y="2666505"/>
+                  </a:lnTo>
+                  <a:lnTo>
+                    <a:pt x="2936523" y="2668632"/>
+                  </a:lnTo>
+                  <a:lnTo>
+                    <a:pt x="2864901" y="2670753"/>
+                  </a:lnTo>
+                  <a:lnTo>
+                    <a:pt x="2793278" y="2672869"/>
+                  </a:lnTo>
+                  <a:lnTo>
+                    <a:pt x="2721655" y="2674980"/>
+                  </a:lnTo>
+                  <a:lnTo>
+                    <a:pt x="2650033" y="2677085"/>
+                  </a:lnTo>
+                  <a:lnTo>
+                    <a:pt x="2578410" y="2679184"/>
+                  </a:lnTo>
+                  <a:lnTo>
+                    <a:pt x="2506788" y="2681278"/>
+                  </a:lnTo>
+                  <a:lnTo>
+                    <a:pt x="2435165" y="2683367"/>
+                  </a:lnTo>
+                  <a:lnTo>
+                    <a:pt x="2363543" y="2685450"/>
+                  </a:lnTo>
+                  <a:lnTo>
+                    <a:pt x="2291920" y="2687528"/>
+                  </a:lnTo>
+                  <a:lnTo>
+                    <a:pt x="2220298" y="2689600"/>
+                  </a:lnTo>
+                  <a:lnTo>
+                    <a:pt x="2148675" y="2691667"/>
+                  </a:lnTo>
+                  <a:lnTo>
+                    <a:pt x="2077053" y="2693728"/>
+                  </a:lnTo>
+                  <a:lnTo>
+                    <a:pt x="2005430" y="2695785"/>
+                  </a:lnTo>
+                  <a:lnTo>
+                    <a:pt x="1933808" y="2697835"/>
+                  </a:lnTo>
+                  <a:lnTo>
+                    <a:pt x="1862185" y="2699881"/>
+                  </a:lnTo>
+                  <a:lnTo>
+                    <a:pt x="1790563" y="2701921"/>
+                  </a:lnTo>
+                  <a:lnTo>
+                    <a:pt x="1718940" y="2703956"/>
+                  </a:lnTo>
+                  <a:lnTo>
+                    <a:pt x="1647318" y="2705986"/>
+                  </a:lnTo>
+                  <a:lnTo>
+                    <a:pt x="1575695" y="2708010"/>
+                  </a:lnTo>
+                  <a:lnTo>
+                    <a:pt x="1504073" y="2710029"/>
+                  </a:lnTo>
+                  <a:lnTo>
+                    <a:pt x="1432450" y="2712043"/>
+                  </a:lnTo>
+                  <a:lnTo>
+                    <a:pt x="1360827" y="2714051"/>
+                  </a:lnTo>
+                  <a:lnTo>
+                    <a:pt x="1289205" y="2716054"/>
+                  </a:lnTo>
+                  <a:lnTo>
+                    <a:pt x="1217582" y="2718052"/>
+                  </a:lnTo>
+                  <a:lnTo>
+                    <a:pt x="1145960" y="2720045"/>
+                  </a:lnTo>
+                  <a:lnTo>
+                    <a:pt x="1074337" y="2722033"/>
+                  </a:lnTo>
+                  <a:lnTo>
+                    <a:pt x="1002715" y="2724016"/>
+                  </a:lnTo>
+                  <a:lnTo>
+                    <a:pt x="931092" y="2725993"/>
+                  </a:lnTo>
+                  <a:lnTo>
+                    <a:pt x="859470" y="2727965"/>
+                  </a:lnTo>
+                  <a:lnTo>
+                    <a:pt x="787847" y="2729932"/>
+                  </a:lnTo>
+                  <a:lnTo>
+                    <a:pt x="716225" y="2731894"/>
+                  </a:lnTo>
+                  <a:lnTo>
+                    <a:pt x="644602" y="2733851"/>
+                  </a:lnTo>
+                  <a:lnTo>
+                    <a:pt x="572980" y="2735803"/>
+                  </a:lnTo>
+                  <a:lnTo>
+                    <a:pt x="501357" y="2737749"/>
+                  </a:lnTo>
+                  <a:lnTo>
+                    <a:pt x="429735" y="2739691"/>
+                  </a:lnTo>
+                  <a:lnTo>
+                    <a:pt x="358112" y="2741628"/>
+                  </a:lnTo>
+                  <a:lnTo>
+                    <a:pt x="286490" y="2743559"/>
+                  </a:lnTo>
+                  <a:lnTo>
+                    <a:pt x="214867" y="2745486"/>
+                  </a:lnTo>
+                  <a:lnTo>
+                    <a:pt x="143245" y="2747407"/>
+                  </a:lnTo>
+                  <a:lnTo>
+                    <a:pt x="71622" y="2749324"/>
+                  </a:lnTo>
+                  <a:lnTo>
+                    <a:pt x="0" y="2751235"/>
                   </a:lnTo>
                   <a:close/>
                 </a:path>
@@ -3606,297 +3563,622 @@
         </p:sp>
         <p:sp>
           <p:nvSpPr>
+            <p:cNvPr id="21" name="pl21"/>
+            <p:cNvSpPr/>
+            <p:nvPr/>
+          </p:nvSpPr>
+          <p:spPr>
+            <a:xfrm>
+              <a:off x="1705149" y="2073503"/>
+              <a:ext cx="6557529" cy="2653625"/>
+            </a:xfrm>
+            <a:custGeom>
+              <a:avLst/>
+              <a:pathLst>
+                <a:path w="6557529" h="2653625">
+                  <a:moveTo>
+                    <a:pt x="0" y="0"/>
+                  </a:moveTo>
+                  <a:lnTo>
+                    <a:pt x="39879" y="69002"/>
+                  </a:lnTo>
+                  <a:lnTo>
+                    <a:pt x="111502" y="188586"/>
+                  </a:lnTo>
+                  <a:lnTo>
+                    <a:pt x="183125" y="303983"/>
+                  </a:lnTo>
+                  <a:lnTo>
+                    <a:pt x="254747" y="415338"/>
+                  </a:lnTo>
+                  <a:lnTo>
+                    <a:pt x="326370" y="522794"/>
+                  </a:lnTo>
+                  <a:lnTo>
+                    <a:pt x="397992" y="626487"/>
+                  </a:lnTo>
+                  <a:lnTo>
+                    <a:pt x="469615" y="726548"/>
+                  </a:lnTo>
+                  <a:lnTo>
+                    <a:pt x="541237" y="823106"/>
+                  </a:lnTo>
+                  <a:lnTo>
+                    <a:pt x="612860" y="916281"/>
+                  </a:lnTo>
+                  <a:lnTo>
+                    <a:pt x="684482" y="1006194"/>
+                  </a:lnTo>
+                  <a:lnTo>
+                    <a:pt x="756105" y="1092958"/>
+                  </a:lnTo>
+                  <a:lnTo>
+                    <a:pt x="827727" y="1176684"/>
+                  </a:lnTo>
+                  <a:lnTo>
+                    <a:pt x="899350" y="1257477"/>
+                  </a:lnTo>
+                  <a:lnTo>
+                    <a:pt x="970972" y="1335441"/>
+                  </a:lnTo>
+                  <a:lnTo>
+                    <a:pt x="1042595" y="1410675"/>
+                  </a:lnTo>
+                  <a:lnTo>
+                    <a:pt x="1114217" y="1483274"/>
+                  </a:lnTo>
+                  <a:lnTo>
+                    <a:pt x="1185840" y="1553331"/>
+                  </a:lnTo>
+                  <a:lnTo>
+                    <a:pt x="1257462" y="1620934"/>
+                  </a:lnTo>
+                  <a:lnTo>
+                    <a:pt x="1329085" y="1686170"/>
+                  </a:lnTo>
+                  <a:lnTo>
+                    <a:pt x="1400707" y="1749121"/>
+                  </a:lnTo>
+                  <a:lnTo>
+                    <a:pt x="1472330" y="1809868"/>
+                  </a:lnTo>
+                  <a:lnTo>
+                    <a:pt x="1543953" y="1868487"/>
+                  </a:lnTo>
+                  <a:lnTo>
+                    <a:pt x="1615575" y="1925054"/>
+                  </a:lnTo>
+                  <a:lnTo>
+                    <a:pt x="1687198" y="1979639"/>
+                  </a:lnTo>
+                  <a:lnTo>
+                    <a:pt x="1758820" y="2032313"/>
+                  </a:lnTo>
+                  <a:lnTo>
+                    <a:pt x="1830443" y="2083142"/>
+                  </a:lnTo>
+                  <a:lnTo>
+                    <a:pt x="1902065" y="2132192"/>
+                  </a:lnTo>
+                  <a:lnTo>
+                    <a:pt x="1973688" y="2179523"/>
+                  </a:lnTo>
+                  <a:lnTo>
+                    <a:pt x="2045310" y="2225197"/>
+                  </a:lnTo>
+                  <a:lnTo>
+                    <a:pt x="2116933" y="2269272"/>
+                  </a:lnTo>
+                  <a:lnTo>
+                    <a:pt x="2188555" y="2311803"/>
+                  </a:lnTo>
+                  <a:lnTo>
+                    <a:pt x="2260178" y="2352844"/>
+                  </a:lnTo>
+                  <a:lnTo>
+                    <a:pt x="2331800" y="2392448"/>
+                  </a:lnTo>
+                  <a:lnTo>
+                    <a:pt x="2403423" y="2430666"/>
+                  </a:lnTo>
+                  <a:lnTo>
+                    <a:pt x="2475045" y="2467545"/>
+                  </a:lnTo>
+                  <a:lnTo>
+                    <a:pt x="2546668" y="2503132"/>
+                  </a:lnTo>
+                  <a:lnTo>
+                    <a:pt x="2618290" y="2537473"/>
+                  </a:lnTo>
+                  <a:lnTo>
+                    <a:pt x="2689913" y="2570612"/>
+                  </a:lnTo>
+                  <a:lnTo>
+                    <a:pt x="2761535" y="2602590"/>
+                  </a:lnTo>
+                  <a:lnTo>
+                    <a:pt x="2833158" y="2633448"/>
+                  </a:lnTo>
+                  <a:lnTo>
+                    <a:pt x="2904781" y="2653625"/>
+                  </a:lnTo>
+                  <a:lnTo>
+                    <a:pt x="2976403" y="2651459"/>
+                  </a:lnTo>
+                  <a:lnTo>
+                    <a:pt x="3048026" y="2649287"/>
+                  </a:lnTo>
+                  <a:lnTo>
+                    <a:pt x="3119648" y="2647110"/>
+                  </a:lnTo>
+                  <a:lnTo>
+                    <a:pt x="3191271" y="2644927"/>
+                  </a:lnTo>
+                  <a:lnTo>
+                    <a:pt x="3262893" y="2642738"/>
+                  </a:lnTo>
+                  <a:lnTo>
+                    <a:pt x="3334516" y="2640543"/>
+                  </a:lnTo>
+                  <a:lnTo>
+                    <a:pt x="3406138" y="2638343"/>
+                  </a:lnTo>
+                  <a:lnTo>
+                    <a:pt x="3477761" y="2636137"/>
+                  </a:lnTo>
+                  <a:lnTo>
+                    <a:pt x="3549383" y="2633925"/>
+                  </a:lnTo>
+                  <a:lnTo>
+                    <a:pt x="3621006" y="2631707"/>
+                  </a:lnTo>
+                  <a:lnTo>
+                    <a:pt x="3692628" y="2629484"/>
+                  </a:lnTo>
+                  <a:lnTo>
+                    <a:pt x="3764251" y="2627255"/>
+                  </a:lnTo>
+                  <a:lnTo>
+                    <a:pt x="3835873" y="2625020"/>
+                  </a:lnTo>
+                  <a:lnTo>
+                    <a:pt x="3907496" y="2622779"/>
+                  </a:lnTo>
+                  <a:lnTo>
+                    <a:pt x="3979118" y="2620532"/>
+                  </a:lnTo>
+                  <a:lnTo>
+                    <a:pt x="4050741" y="2618279"/>
+                  </a:lnTo>
+                  <a:lnTo>
+                    <a:pt x="4122363" y="2616021"/>
+                  </a:lnTo>
+                  <a:lnTo>
+                    <a:pt x="4193986" y="2613757"/>
+                  </a:lnTo>
+                  <a:lnTo>
+                    <a:pt x="4265609" y="2611486"/>
+                  </a:lnTo>
+                  <a:lnTo>
+                    <a:pt x="4337231" y="2609210"/>
+                  </a:lnTo>
+                  <a:lnTo>
+                    <a:pt x="4408854" y="2606928"/>
+                  </a:lnTo>
+                  <a:lnTo>
+                    <a:pt x="4480476" y="2604640"/>
+                  </a:lnTo>
+                  <a:lnTo>
+                    <a:pt x="4552099" y="2602346"/>
+                  </a:lnTo>
+                  <a:lnTo>
+                    <a:pt x="4623721" y="2600046"/>
+                  </a:lnTo>
+                  <a:lnTo>
+                    <a:pt x="4695344" y="2597740"/>
+                  </a:lnTo>
+                  <a:lnTo>
+                    <a:pt x="4766966" y="2595428"/>
+                  </a:lnTo>
+                  <a:lnTo>
+                    <a:pt x="4838589" y="2593110"/>
+                  </a:lnTo>
+                  <a:lnTo>
+                    <a:pt x="4910211" y="2590786"/>
+                  </a:lnTo>
+                  <a:lnTo>
+                    <a:pt x="4981834" y="2588456"/>
+                  </a:lnTo>
+                  <a:lnTo>
+                    <a:pt x="5053456" y="2586119"/>
+                  </a:lnTo>
+                  <a:lnTo>
+                    <a:pt x="5125079" y="2583777"/>
+                  </a:lnTo>
+                  <a:lnTo>
+                    <a:pt x="5196701" y="2581429"/>
+                  </a:lnTo>
+                  <a:lnTo>
+                    <a:pt x="5268324" y="2579074"/>
+                  </a:lnTo>
+                  <a:lnTo>
+                    <a:pt x="5339946" y="2576713"/>
+                  </a:lnTo>
+                  <a:lnTo>
+                    <a:pt x="5411569" y="2574346"/>
+                  </a:lnTo>
+                  <a:lnTo>
+                    <a:pt x="5483191" y="2571973"/>
+                  </a:lnTo>
+                  <a:lnTo>
+                    <a:pt x="5554814" y="2569594"/>
+                  </a:lnTo>
+                  <a:lnTo>
+                    <a:pt x="5626437" y="2567209"/>
+                  </a:lnTo>
+                  <a:lnTo>
+                    <a:pt x="5698059" y="2564817"/>
+                  </a:lnTo>
+                  <a:lnTo>
+                    <a:pt x="5769682" y="2562419"/>
+                  </a:lnTo>
+                  <a:lnTo>
+                    <a:pt x="5841304" y="2560015"/>
+                  </a:lnTo>
+                  <a:lnTo>
+                    <a:pt x="5912927" y="2557604"/>
+                  </a:lnTo>
+                  <a:lnTo>
+                    <a:pt x="5984549" y="2555187"/>
+                  </a:lnTo>
+                  <a:lnTo>
+                    <a:pt x="6056172" y="2552764"/>
+                  </a:lnTo>
+                  <a:lnTo>
+                    <a:pt x="6127794" y="2550335"/>
+                  </a:lnTo>
+                  <a:lnTo>
+                    <a:pt x="6199417" y="2547899"/>
+                  </a:lnTo>
+                  <a:lnTo>
+                    <a:pt x="6271039" y="2545457"/>
+                  </a:lnTo>
+                  <a:lnTo>
+                    <a:pt x="6342662" y="2543009"/>
+                  </a:lnTo>
+                  <a:lnTo>
+                    <a:pt x="6414284" y="2540554"/>
+                  </a:lnTo>
+                  <a:lnTo>
+                    <a:pt x="6485907" y="2538093"/>
+                  </a:lnTo>
+                  <a:lnTo>
+                    <a:pt x="6557529" y="2535625"/>
+                  </a:lnTo>
+                </a:path>
+              </a:pathLst>
+            </a:custGeom>
+          </p:spPr>
+          <p:txBody>
+            <a:bodyPr/>
+            <a:lstStyle/>
+            <a:p/>
+          </p:txBody>
+        </p:sp>
+        <p:sp>
+          <p:nvSpPr>
             <p:cNvPr id="22" name="pl22"/>
             <p:cNvSpPr/>
             <p:nvPr/>
           </p:nvSpPr>
           <p:spPr>
             <a:xfrm>
-              <a:off x="1300115" y="2073503"/>
-              <a:ext cx="6753232" cy="2653625"/>
+              <a:off x="1172049" y="4729289"/>
+              <a:ext cx="7090630" cy="694755"/>
             </a:xfrm>
             <a:custGeom>
               <a:avLst/>
               <a:pathLst>
-                <a:path w="6753232" h="2653625">
+                <a:path w="7090630" h="694755">
                   <a:moveTo>
-                    <a:pt x="0" y="0"/>
+                    <a:pt x="7090630" y="694755"/>
                   </a:moveTo>
                   <a:lnTo>
-                    <a:pt x="41070" y="69002"/>
-                  </a:lnTo>
-                  <a:lnTo>
-                    <a:pt x="114830" y="188586"/>
-                  </a:lnTo>
-                  <a:lnTo>
-                    <a:pt x="188590" y="303983"/>
-                  </a:lnTo>
-                  <a:lnTo>
-                    <a:pt x="262350" y="415338"/>
-                  </a:lnTo>
-                  <a:lnTo>
-                    <a:pt x="336110" y="522794"/>
-                  </a:lnTo>
-                  <a:lnTo>
-                    <a:pt x="409870" y="626487"/>
-                  </a:lnTo>
-                  <a:lnTo>
-                    <a:pt x="483630" y="726548"/>
-                  </a:lnTo>
-                  <a:lnTo>
-                    <a:pt x="557390" y="823106"/>
-                  </a:lnTo>
-                  <a:lnTo>
-                    <a:pt x="631150" y="916281"/>
-                  </a:lnTo>
-                  <a:lnTo>
-                    <a:pt x="704910" y="1006194"/>
-                  </a:lnTo>
-                  <a:lnTo>
-                    <a:pt x="778670" y="1092958"/>
-                  </a:lnTo>
-                  <a:lnTo>
-                    <a:pt x="852430" y="1176684"/>
-                  </a:lnTo>
-                  <a:lnTo>
-                    <a:pt x="926190" y="1257477"/>
-                  </a:lnTo>
-                  <a:lnTo>
-                    <a:pt x="999950" y="1335441"/>
-                  </a:lnTo>
-                  <a:lnTo>
-                    <a:pt x="1073710" y="1410675"/>
-                  </a:lnTo>
-                  <a:lnTo>
-                    <a:pt x="1147470" y="1483274"/>
-                  </a:lnTo>
-                  <a:lnTo>
-                    <a:pt x="1221230" y="1553331"/>
-                  </a:lnTo>
-                  <a:lnTo>
-                    <a:pt x="1294990" y="1620934"/>
-                  </a:lnTo>
-                  <a:lnTo>
-                    <a:pt x="1368750" y="1686170"/>
-                  </a:lnTo>
-                  <a:lnTo>
-                    <a:pt x="1442510" y="1749121"/>
-                  </a:lnTo>
-                  <a:lnTo>
-                    <a:pt x="1516270" y="1809868"/>
-                  </a:lnTo>
-                  <a:lnTo>
-                    <a:pt x="1590030" y="1868487"/>
-                  </a:lnTo>
-                  <a:lnTo>
-                    <a:pt x="1663790" y="1925054"/>
-                  </a:lnTo>
-                  <a:lnTo>
-                    <a:pt x="1737550" y="1979639"/>
-                  </a:lnTo>
-                  <a:lnTo>
-                    <a:pt x="1811310" y="2032313"/>
-                  </a:lnTo>
-                  <a:lnTo>
-                    <a:pt x="1885070" y="2083142"/>
-                  </a:lnTo>
-                  <a:lnTo>
-                    <a:pt x="1958830" y="2132192"/>
-                  </a:lnTo>
-                  <a:lnTo>
-                    <a:pt x="2032590" y="2179523"/>
-                  </a:lnTo>
-                  <a:lnTo>
-                    <a:pt x="2106350" y="2225197"/>
-                  </a:lnTo>
-                  <a:lnTo>
-                    <a:pt x="2180110" y="2269272"/>
-                  </a:lnTo>
-                  <a:lnTo>
-                    <a:pt x="2253870" y="2311803"/>
-                  </a:lnTo>
-                  <a:lnTo>
-                    <a:pt x="2327630" y="2352844"/>
-                  </a:lnTo>
-                  <a:lnTo>
-                    <a:pt x="2401390" y="2392448"/>
-                  </a:lnTo>
-                  <a:lnTo>
-                    <a:pt x="2475150" y="2430666"/>
-                  </a:lnTo>
-                  <a:lnTo>
-                    <a:pt x="2548911" y="2467545"/>
-                  </a:lnTo>
-                  <a:lnTo>
-                    <a:pt x="2622671" y="2503132"/>
-                  </a:lnTo>
-                  <a:lnTo>
-                    <a:pt x="2696431" y="2537473"/>
-                  </a:lnTo>
-                  <a:lnTo>
-                    <a:pt x="2770191" y="2570612"/>
-                  </a:lnTo>
-                  <a:lnTo>
-                    <a:pt x="2843951" y="2602590"/>
-                  </a:lnTo>
-                  <a:lnTo>
-                    <a:pt x="2917711" y="2633448"/>
-                  </a:lnTo>
-                  <a:lnTo>
-                    <a:pt x="2991471" y="2653625"/>
-                  </a:lnTo>
-                  <a:lnTo>
-                    <a:pt x="3065231" y="2651459"/>
-                  </a:lnTo>
-                  <a:lnTo>
-                    <a:pt x="3138991" y="2649287"/>
-                  </a:lnTo>
-                  <a:lnTo>
-                    <a:pt x="3212751" y="2647110"/>
-                  </a:lnTo>
-                  <a:lnTo>
-                    <a:pt x="3286511" y="2644927"/>
-                  </a:lnTo>
-                  <a:lnTo>
-                    <a:pt x="3360271" y="2642738"/>
-                  </a:lnTo>
-                  <a:lnTo>
-                    <a:pt x="3434031" y="2640543"/>
-                  </a:lnTo>
-                  <a:lnTo>
-                    <a:pt x="3507791" y="2638343"/>
-                  </a:lnTo>
-                  <a:lnTo>
-                    <a:pt x="3581551" y="2636137"/>
-                  </a:lnTo>
-                  <a:lnTo>
-                    <a:pt x="3655311" y="2633925"/>
-                  </a:lnTo>
-                  <a:lnTo>
-                    <a:pt x="3729071" y="2631707"/>
-                  </a:lnTo>
-                  <a:lnTo>
-                    <a:pt x="3802831" y="2629484"/>
-                  </a:lnTo>
-                  <a:lnTo>
-                    <a:pt x="3876591" y="2627255"/>
-                  </a:lnTo>
-                  <a:lnTo>
-                    <a:pt x="3950351" y="2625020"/>
-                  </a:lnTo>
-                  <a:lnTo>
-                    <a:pt x="4024111" y="2622779"/>
-                  </a:lnTo>
-                  <a:lnTo>
-                    <a:pt x="4097871" y="2620532"/>
-                  </a:lnTo>
-                  <a:lnTo>
-                    <a:pt x="4171631" y="2618279"/>
-                  </a:lnTo>
-                  <a:lnTo>
-                    <a:pt x="4245391" y="2616021"/>
-                  </a:lnTo>
-                  <a:lnTo>
-                    <a:pt x="4319151" y="2613757"/>
-                  </a:lnTo>
-                  <a:lnTo>
-                    <a:pt x="4392911" y="2611486"/>
-                  </a:lnTo>
-                  <a:lnTo>
-                    <a:pt x="4466671" y="2609210"/>
-                  </a:lnTo>
-                  <a:lnTo>
-                    <a:pt x="4540431" y="2606928"/>
-                  </a:lnTo>
-                  <a:lnTo>
-                    <a:pt x="4614191" y="2604640"/>
-                  </a:lnTo>
-                  <a:lnTo>
-                    <a:pt x="4687951" y="2602346"/>
-                  </a:lnTo>
-                  <a:lnTo>
-                    <a:pt x="4761711" y="2600046"/>
-                  </a:lnTo>
-                  <a:lnTo>
-                    <a:pt x="4835471" y="2597740"/>
-                  </a:lnTo>
-                  <a:lnTo>
-                    <a:pt x="4909231" y="2595428"/>
-                  </a:lnTo>
-                  <a:lnTo>
-                    <a:pt x="4982991" y="2593110"/>
-                  </a:lnTo>
-                  <a:lnTo>
-                    <a:pt x="5056751" y="2590786"/>
-                  </a:lnTo>
-                  <a:lnTo>
-                    <a:pt x="5130511" y="2588456"/>
-                  </a:lnTo>
-                  <a:lnTo>
-                    <a:pt x="5204271" y="2586119"/>
-                  </a:lnTo>
-                  <a:lnTo>
-                    <a:pt x="5278031" y="2583777"/>
-                  </a:lnTo>
-                  <a:lnTo>
-                    <a:pt x="5351791" y="2581429"/>
-                  </a:lnTo>
-                  <a:lnTo>
-                    <a:pt x="5425551" y="2579074"/>
-                  </a:lnTo>
-                  <a:lnTo>
-                    <a:pt x="5499312" y="2576713"/>
-                  </a:lnTo>
-                  <a:lnTo>
-                    <a:pt x="5573072" y="2574346"/>
-                  </a:lnTo>
-                  <a:lnTo>
-                    <a:pt x="5646832" y="2571973"/>
-                  </a:lnTo>
-                  <a:lnTo>
-                    <a:pt x="5720592" y="2569594"/>
-                  </a:lnTo>
-                  <a:lnTo>
-                    <a:pt x="5794352" y="2567209"/>
-                  </a:lnTo>
-                  <a:lnTo>
-                    <a:pt x="5868112" y="2564817"/>
-                  </a:lnTo>
-                  <a:lnTo>
-                    <a:pt x="5941872" y="2562419"/>
-                  </a:lnTo>
-                  <a:lnTo>
-                    <a:pt x="6015632" y="2560015"/>
-                  </a:lnTo>
-                  <a:lnTo>
-                    <a:pt x="6089392" y="2557604"/>
-                  </a:lnTo>
-                  <a:lnTo>
-                    <a:pt x="6163152" y="2555187"/>
-                  </a:lnTo>
-                  <a:lnTo>
-                    <a:pt x="6236912" y="2552764"/>
-                  </a:lnTo>
-                  <a:lnTo>
-                    <a:pt x="6310672" y="2550335"/>
-                  </a:lnTo>
-                  <a:lnTo>
-                    <a:pt x="6384432" y="2547899"/>
-                  </a:lnTo>
-                  <a:lnTo>
-                    <a:pt x="6458192" y="2545457"/>
-                  </a:lnTo>
-                  <a:lnTo>
-                    <a:pt x="6531952" y="2543009"/>
-                  </a:lnTo>
-                  <a:lnTo>
-                    <a:pt x="6605712" y="2540554"/>
-                  </a:lnTo>
-                  <a:lnTo>
-                    <a:pt x="6679472" y="2538093"/>
-                  </a:lnTo>
-                  <a:lnTo>
-                    <a:pt x="6753232" y="2535625"/>
+                    <a:pt x="7019007" y="689920"/>
+                  </a:lnTo>
+                  <a:lnTo>
+                    <a:pt x="6947385" y="684911"/>
+                  </a:lnTo>
+                  <a:lnTo>
+                    <a:pt x="6875762" y="679719"/>
+                  </a:lnTo>
+                  <a:lnTo>
+                    <a:pt x="6804139" y="674340"/>
+                  </a:lnTo>
+                  <a:lnTo>
+                    <a:pt x="6732517" y="668765"/>
+                  </a:lnTo>
+                  <a:lnTo>
+                    <a:pt x="6660894" y="662987"/>
+                  </a:lnTo>
+                  <a:lnTo>
+                    <a:pt x="6589272" y="657000"/>
+                  </a:lnTo>
+                  <a:lnTo>
+                    <a:pt x="6517649" y="650796"/>
+                  </a:lnTo>
+                  <a:lnTo>
+                    <a:pt x="6446027" y="644366"/>
+                  </a:lnTo>
+                  <a:lnTo>
+                    <a:pt x="6374404" y="637704"/>
+                  </a:lnTo>
+                  <a:lnTo>
+                    <a:pt x="6302782" y="630799"/>
+                  </a:lnTo>
+                  <a:lnTo>
+                    <a:pt x="6231159" y="623644"/>
+                  </a:lnTo>
+                  <a:lnTo>
+                    <a:pt x="6159537" y="616229"/>
+                  </a:lnTo>
+                  <a:lnTo>
+                    <a:pt x="6087914" y="608545"/>
+                  </a:lnTo>
+                  <a:lnTo>
+                    <a:pt x="6016292" y="600582"/>
+                  </a:lnTo>
+                  <a:lnTo>
+                    <a:pt x="5944669" y="592331"/>
+                  </a:lnTo>
+                  <a:lnTo>
+                    <a:pt x="5873047" y="583779"/>
+                  </a:lnTo>
+                  <a:lnTo>
+                    <a:pt x="5801424" y="574918"/>
+                  </a:lnTo>
+                  <a:lnTo>
+                    <a:pt x="5729802" y="565735"/>
+                  </a:lnTo>
+                  <a:lnTo>
+                    <a:pt x="5658179" y="556218"/>
+                  </a:lnTo>
+                  <a:lnTo>
+                    <a:pt x="5586557" y="546357"/>
+                  </a:lnTo>
+                  <a:lnTo>
+                    <a:pt x="5514934" y="536137"/>
+                  </a:lnTo>
+                  <a:lnTo>
+                    <a:pt x="5443311" y="525546"/>
+                  </a:lnTo>
+                  <a:lnTo>
+                    <a:pt x="5371689" y="514571"/>
+                  </a:lnTo>
+                  <a:lnTo>
+                    <a:pt x="5300066" y="503198"/>
+                  </a:lnTo>
+                  <a:lnTo>
+                    <a:pt x="5228444" y="491412"/>
+                  </a:lnTo>
+                  <a:lnTo>
+                    <a:pt x="5156821" y="479199"/>
+                  </a:lnTo>
+                  <a:lnTo>
+                    <a:pt x="5085199" y="466542"/>
+                  </a:lnTo>
+                  <a:lnTo>
+                    <a:pt x="5013576" y="453426"/>
+                  </a:lnTo>
+                  <a:lnTo>
+                    <a:pt x="4941954" y="439833"/>
+                  </a:lnTo>
+                  <a:lnTo>
+                    <a:pt x="4870331" y="425748"/>
+                  </a:lnTo>
+                  <a:lnTo>
+                    <a:pt x="4798709" y="411151"/>
+                  </a:lnTo>
+                  <a:lnTo>
+                    <a:pt x="4727086" y="396025"/>
+                  </a:lnTo>
+                  <a:lnTo>
+                    <a:pt x="4655464" y="380349"/>
+                  </a:lnTo>
+                  <a:lnTo>
+                    <a:pt x="4583841" y="364105"/>
+                  </a:lnTo>
+                  <a:lnTo>
+                    <a:pt x="4512219" y="347271"/>
+                  </a:lnTo>
+                  <a:lnTo>
+                    <a:pt x="4440596" y="329827"/>
+                  </a:lnTo>
+                  <a:lnTo>
+                    <a:pt x="4368974" y="311749"/>
+                  </a:lnTo>
+                  <a:lnTo>
+                    <a:pt x="4297351" y="293015"/>
+                  </a:lnTo>
+                  <a:lnTo>
+                    <a:pt x="4225729" y="273602"/>
+                  </a:lnTo>
+                  <a:lnTo>
+                    <a:pt x="4154106" y="253483"/>
+                  </a:lnTo>
+                  <a:lnTo>
+                    <a:pt x="4082483" y="232635"/>
+                  </a:lnTo>
+                  <a:lnTo>
+                    <a:pt x="4010861" y="211030"/>
+                  </a:lnTo>
+                  <a:lnTo>
+                    <a:pt x="3939238" y="188641"/>
+                  </a:lnTo>
+                  <a:lnTo>
+                    <a:pt x="3867616" y="165440"/>
+                  </a:lnTo>
+                  <a:lnTo>
+                    <a:pt x="3795993" y="141396"/>
+                  </a:lnTo>
+                  <a:lnTo>
+                    <a:pt x="3724371" y="116480"/>
+                  </a:lnTo>
+                  <a:lnTo>
+                    <a:pt x="3652748" y="90660"/>
+                  </a:lnTo>
+                  <a:lnTo>
+                    <a:pt x="3581126" y="63902"/>
+                  </a:lnTo>
+                  <a:lnTo>
+                    <a:pt x="3509503" y="36174"/>
+                  </a:lnTo>
+                  <a:lnTo>
+                    <a:pt x="3437881" y="7439"/>
+                  </a:lnTo>
+                  <a:lnTo>
+                    <a:pt x="3366258" y="0"/>
+                  </a:lnTo>
+                  <a:lnTo>
+                    <a:pt x="3294636" y="2154"/>
+                  </a:lnTo>
+                  <a:lnTo>
+                    <a:pt x="3223013" y="4304"/>
+                  </a:lnTo>
+                  <a:lnTo>
+                    <a:pt x="3151391" y="6448"/>
+                  </a:lnTo>
+                  <a:lnTo>
+                    <a:pt x="3079768" y="8586"/>
+                  </a:lnTo>
+                  <a:lnTo>
+                    <a:pt x="3008146" y="10718"/>
+                  </a:lnTo>
+                  <a:lnTo>
+                    <a:pt x="2936523" y="12845"/>
+                  </a:lnTo>
+                  <a:lnTo>
+                    <a:pt x="2864901" y="14967"/>
+                  </a:lnTo>
+                  <a:lnTo>
+                    <a:pt x="2793278" y="17083"/>
+                  </a:lnTo>
+                  <a:lnTo>
+                    <a:pt x="2721655" y="19193"/>
+                  </a:lnTo>
+                  <a:lnTo>
+                    <a:pt x="2650033" y="21298"/>
+                  </a:lnTo>
+                  <a:lnTo>
+                    <a:pt x="2578410" y="23398"/>
+                  </a:lnTo>
+                  <a:lnTo>
+                    <a:pt x="2506788" y="25492"/>
+                  </a:lnTo>
+                  <a:lnTo>
+                    <a:pt x="2435165" y="27580"/>
+                  </a:lnTo>
+                  <a:lnTo>
+                    <a:pt x="2363543" y="29664"/>
+                  </a:lnTo>
+                  <a:lnTo>
+                    <a:pt x="2291920" y="31741"/>
+                  </a:lnTo>
+                  <a:lnTo>
+                    <a:pt x="2220298" y="33814"/>
+                  </a:lnTo>
+                  <a:lnTo>
+                    <a:pt x="2148675" y="35881"/>
+                  </a:lnTo>
+                  <a:lnTo>
+                    <a:pt x="2077053" y="37942"/>
+                  </a:lnTo>
+                  <a:lnTo>
+                    <a:pt x="2005430" y="39998"/>
+                  </a:lnTo>
+                  <a:lnTo>
+                    <a:pt x="1933808" y="42049"/>
+                  </a:lnTo>
+                  <a:lnTo>
+                    <a:pt x="1862185" y="44095"/>
+                  </a:lnTo>
+                  <a:lnTo>
+                    <a:pt x="1790563" y="46135"/>
+                  </a:lnTo>
+                  <a:lnTo>
+                    <a:pt x="1718940" y="48170"/>
+                  </a:lnTo>
+                  <a:lnTo>
+                    <a:pt x="1647318" y="50199"/>
+                  </a:lnTo>
+                  <a:lnTo>
+                    <a:pt x="1575695" y="52223"/>
+                  </a:lnTo>
+                  <a:lnTo>
+                    <a:pt x="1504073" y="54242"/>
+                  </a:lnTo>
+                  <a:lnTo>
+                    <a:pt x="1432450" y="56256"/>
+                  </a:lnTo>
+                  <a:lnTo>
+                    <a:pt x="1360827" y="58265"/>
+                  </a:lnTo>
+                  <a:lnTo>
+                    <a:pt x="1289205" y="60268"/>
+                  </a:lnTo>
+                  <a:lnTo>
+                    <a:pt x="1217582" y="62266"/>
+                  </a:lnTo>
+                  <a:lnTo>
+                    <a:pt x="1145960" y="64259"/>
+                  </a:lnTo>
+                  <a:lnTo>
+                    <a:pt x="1074337" y="66247"/>
+                  </a:lnTo>
+                  <a:lnTo>
+                    <a:pt x="1002715" y="68229"/>
+                  </a:lnTo>
+                  <a:lnTo>
+                    <a:pt x="931092" y="70207"/>
+                  </a:lnTo>
+                  <a:lnTo>
+                    <a:pt x="859470" y="72179"/>
+                  </a:lnTo>
+                  <a:lnTo>
+                    <a:pt x="787847" y="74146"/>
+                  </a:lnTo>
+                  <a:lnTo>
+                    <a:pt x="716225" y="76108"/>
+                  </a:lnTo>
+                  <a:lnTo>
+                    <a:pt x="644602" y="78065"/>
+                  </a:lnTo>
+                  <a:lnTo>
+                    <a:pt x="572980" y="80016"/>
+                  </a:lnTo>
+                  <a:lnTo>
+                    <a:pt x="501357" y="81963"/>
+                  </a:lnTo>
+                  <a:lnTo>
+                    <a:pt x="429735" y="83905"/>
+                  </a:lnTo>
+                  <a:lnTo>
+                    <a:pt x="358112" y="85841"/>
+                  </a:lnTo>
+                  <a:lnTo>
+                    <a:pt x="286490" y="87773"/>
+                  </a:lnTo>
+                  <a:lnTo>
+                    <a:pt x="214867" y="89699"/>
+                  </a:lnTo>
+                  <a:lnTo>
+                    <a:pt x="143245" y="91621"/>
+                  </a:lnTo>
+                  <a:lnTo>
+                    <a:pt x="71622" y="93537"/>
+                  </a:lnTo>
+                  <a:lnTo>
+                    <a:pt x="0" y="95449"/>
                   </a:lnTo>
                 </a:path>
               </a:pathLst>
@@ -3916,637 +4198,312 @@
           </p:nvSpPr>
           <p:spPr>
             <a:xfrm>
-              <a:off x="817517" y="4729289"/>
-              <a:ext cx="7235830" cy="694755"/>
+              <a:off x="1172049" y="3733298"/>
+              <a:ext cx="7090630" cy="1468570"/>
             </a:xfrm>
             <a:custGeom>
               <a:avLst/>
               <a:pathLst>
-                <a:path w="7235830" h="694755">
-                  <a:moveTo>
-                    <a:pt x="7235830" y="694755"/>
-                  </a:moveTo>
-                  <a:lnTo>
-                    <a:pt x="7162070" y="689920"/>
-                  </a:lnTo>
-                  <a:lnTo>
-                    <a:pt x="7088310" y="684911"/>
-                  </a:lnTo>
-                  <a:lnTo>
-                    <a:pt x="7014550" y="679719"/>
-                  </a:lnTo>
-                  <a:lnTo>
-                    <a:pt x="6940789" y="674340"/>
-                  </a:lnTo>
-                  <a:lnTo>
-                    <a:pt x="6867029" y="668765"/>
-                  </a:lnTo>
-                  <a:lnTo>
-                    <a:pt x="6793269" y="662987"/>
-                  </a:lnTo>
-                  <a:lnTo>
-                    <a:pt x="6719509" y="657000"/>
-                  </a:lnTo>
-                  <a:lnTo>
-                    <a:pt x="6645749" y="650796"/>
-                  </a:lnTo>
-                  <a:lnTo>
-                    <a:pt x="6571989" y="644366"/>
-                  </a:lnTo>
-                  <a:lnTo>
-                    <a:pt x="6498229" y="637704"/>
-                  </a:lnTo>
-                  <a:lnTo>
-                    <a:pt x="6424469" y="630799"/>
-                  </a:lnTo>
-                  <a:lnTo>
-                    <a:pt x="6350709" y="623644"/>
-                  </a:lnTo>
-                  <a:lnTo>
-                    <a:pt x="6276949" y="616229"/>
-                  </a:lnTo>
-                  <a:lnTo>
-                    <a:pt x="6203189" y="608545"/>
-                  </a:lnTo>
-                  <a:lnTo>
-                    <a:pt x="6129429" y="600582"/>
-                  </a:lnTo>
-                  <a:lnTo>
-                    <a:pt x="6055669" y="592331"/>
-                  </a:lnTo>
-                  <a:lnTo>
-                    <a:pt x="5981909" y="583779"/>
-                  </a:lnTo>
-                  <a:lnTo>
-                    <a:pt x="5908149" y="574918"/>
-                  </a:lnTo>
-                  <a:lnTo>
-                    <a:pt x="5834389" y="565735"/>
-                  </a:lnTo>
-                  <a:lnTo>
-                    <a:pt x="5760629" y="556218"/>
-                  </a:lnTo>
-                  <a:lnTo>
-                    <a:pt x="5686869" y="546357"/>
-                  </a:lnTo>
-                  <a:lnTo>
-                    <a:pt x="5613109" y="536137"/>
-                  </a:lnTo>
-                  <a:lnTo>
-                    <a:pt x="5539349" y="525546"/>
-                  </a:lnTo>
-                  <a:lnTo>
-                    <a:pt x="5465589" y="514571"/>
-                  </a:lnTo>
-                  <a:lnTo>
-                    <a:pt x="5391829" y="503198"/>
-                  </a:lnTo>
-                  <a:lnTo>
-                    <a:pt x="5318069" y="491412"/>
-                  </a:lnTo>
-                  <a:lnTo>
-                    <a:pt x="5244309" y="479199"/>
-                  </a:lnTo>
-                  <a:lnTo>
-                    <a:pt x="5170549" y="466542"/>
-                  </a:lnTo>
-                  <a:lnTo>
-                    <a:pt x="5096789" y="453426"/>
-                  </a:lnTo>
-                  <a:lnTo>
-                    <a:pt x="5023029" y="439833"/>
-                  </a:lnTo>
-                  <a:lnTo>
-                    <a:pt x="4949269" y="425748"/>
-                  </a:lnTo>
-                  <a:lnTo>
-                    <a:pt x="4875509" y="411151"/>
-                  </a:lnTo>
-                  <a:lnTo>
-                    <a:pt x="4801749" y="396025"/>
-                  </a:lnTo>
-                  <a:lnTo>
-                    <a:pt x="4727989" y="380349"/>
-                  </a:lnTo>
-                  <a:lnTo>
-                    <a:pt x="4654229" y="364105"/>
-                  </a:lnTo>
-                  <a:lnTo>
-                    <a:pt x="4580469" y="347271"/>
-                  </a:lnTo>
-                  <a:lnTo>
-                    <a:pt x="4506709" y="329827"/>
-                  </a:lnTo>
-                  <a:lnTo>
-                    <a:pt x="4432949" y="311749"/>
-                  </a:lnTo>
-                  <a:lnTo>
-                    <a:pt x="4359189" y="293015"/>
-                  </a:lnTo>
-                  <a:lnTo>
-                    <a:pt x="4285429" y="273602"/>
-                  </a:lnTo>
-                  <a:lnTo>
-                    <a:pt x="4211669" y="253483"/>
-                  </a:lnTo>
-                  <a:lnTo>
-                    <a:pt x="4137909" y="232635"/>
-                  </a:lnTo>
-                  <a:lnTo>
-                    <a:pt x="4064149" y="211030"/>
-                  </a:lnTo>
-                  <a:lnTo>
-                    <a:pt x="3990388" y="188641"/>
-                  </a:lnTo>
-                  <a:lnTo>
-                    <a:pt x="3916628" y="165440"/>
-                  </a:lnTo>
-                  <a:lnTo>
-                    <a:pt x="3842868" y="141396"/>
-                  </a:lnTo>
-                  <a:lnTo>
-                    <a:pt x="3769108" y="116480"/>
-                  </a:lnTo>
-                  <a:lnTo>
-                    <a:pt x="3695348" y="90660"/>
-                  </a:lnTo>
-                  <a:lnTo>
-                    <a:pt x="3621588" y="63902"/>
-                  </a:lnTo>
-                  <a:lnTo>
-                    <a:pt x="3547828" y="36174"/>
-                  </a:lnTo>
-                  <a:lnTo>
-                    <a:pt x="3474068" y="7439"/>
-                  </a:lnTo>
-                  <a:lnTo>
-                    <a:pt x="3400308" y="0"/>
-                  </a:lnTo>
-                  <a:lnTo>
-                    <a:pt x="3326548" y="2154"/>
-                  </a:lnTo>
-                  <a:lnTo>
-                    <a:pt x="3252788" y="4304"/>
-                  </a:lnTo>
-                  <a:lnTo>
-                    <a:pt x="3179028" y="6448"/>
-                  </a:lnTo>
-                  <a:lnTo>
-                    <a:pt x="3105268" y="8586"/>
-                  </a:lnTo>
-                  <a:lnTo>
-                    <a:pt x="3031508" y="10718"/>
-                  </a:lnTo>
-                  <a:lnTo>
-                    <a:pt x="2957748" y="12845"/>
-                  </a:lnTo>
-                  <a:lnTo>
-                    <a:pt x="2883988" y="14967"/>
-                  </a:lnTo>
-                  <a:lnTo>
-                    <a:pt x="2810228" y="17083"/>
-                  </a:lnTo>
-                  <a:lnTo>
-                    <a:pt x="2736468" y="19193"/>
-                  </a:lnTo>
-                  <a:lnTo>
-                    <a:pt x="2662708" y="21298"/>
-                  </a:lnTo>
-                  <a:lnTo>
-                    <a:pt x="2588948" y="23398"/>
-                  </a:lnTo>
-                  <a:lnTo>
-                    <a:pt x="2515188" y="25492"/>
-                  </a:lnTo>
-                  <a:lnTo>
-                    <a:pt x="2441428" y="27580"/>
-                  </a:lnTo>
-                  <a:lnTo>
-                    <a:pt x="2367668" y="29664"/>
-                  </a:lnTo>
-                  <a:lnTo>
-                    <a:pt x="2293908" y="31741"/>
-                  </a:lnTo>
-                  <a:lnTo>
-                    <a:pt x="2220148" y="33814"/>
-                  </a:lnTo>
-                  <a:lnTo>
-                    <a:pt x="2146388" y="35881"/>
-                  </a:lnTo>
-                  <a:lnTo>
-                    <a:pt x="2072628" y="37942"/>
-                  </a:lnTo>
-                  <a:lnTo>
-                    <a:pt x="1998868" y="39998"/>
-                  </a:lnTo>
-                  <a:lnTo>
-                    <a:pt x="1925108" y="42049"/>
-                  </a:lnTo>
-                  <a:lnTo>
-                    <a:pt x="1851348" y="44095"/>
-                  </a:lnTo>
-                  <a:lnTo>
-                    <a:pt x="1777588" y="46135"/>
-                  </a:lnTo>
-                  <a:lnTo>
-                    <a:pt x="1703828" y="48170"/>
-                  </a:lnTo>
-                  <a:lnTo>
-                    <a:pt x="1630068" y="50199"/>
-                  </a:lnTo>
-                  <a:lnTo>
-                    <a:pt x="1556308" y="52223"/>
-                  </a:lnTo>
-                  <a:lnTo>
-                    <a:pt x="1482548" y="54242"/>
-                  </a:lnTo>
-                  <a:lnTo>
-                    <a:pt x="1408788" y="56256"/>
-                  </a:lnTo>
-                  <a:lnTo>
-                    <a:pt x="1335028" y="58265"/>
-                  </a:lnTo>
-                  <a:lnTo>
-                    <a:pt x="1261268" y="60268"/>
-                  </a:lnTo>
-                  <a:lnTo>
-                    <a:pt x="1187508" y="62266"/>
-                  </a:lnTo>
-                  <a:lnTo>
-                    <a:pt x="1113747" y="64259"/>
-                  </a:lnTo>
-                  <a:lnTo>
-                    <a:pt x="1039987" y="66247"/>
-                  </a:lnTo>
-                  <a:lnTo>
-                    <a:pt x="966227" y="68229"/>
-                  </a:lnTo>
-                  <a:lnTo>
-                    <a:pt x="892467" y="70207"/>
-                  </a:lnTo>
-                  <a:lnTo>
-                    <a:pt x="818707" y="72179"/>
-                  </a:lnTo>
-                  <a:lnTo>
-                    <a:pt x="744947" y="74146"/>
-                  </a:lnTo>
-                  <a:lnTo>
-                    <a:pt x="671187" y="76108"/>
-                  </a:lnTo>
-                  <a:lnTo>
-                    <a:pt x="597427" y="78065"/>
-                  </a:lnTo>
-                  <a:lnTo>
-                    <a:pt x="523667" y="80016"/>
-                  </a:lnTo>
-                  <a:lnTo>
-                    <a:pt x="449907" y="81963"/>
-                  </a:lnTo>
-                  <a:lnTo>
-                    <a:pt x="376147" y="83905"/>
-                  </a:lnTo>
-                  <a:lnTo>
-                    <a:pt x="302387" y="85841"/>
-                  </a:lnTo>
-                  <a:lnTo>
-                    <a:pt x="228627" y="87773"/>
-                  </a:lnTo>
-                  <a:lnTo>
-                    <a:pt x="154867" y="89699"/>
-                  </a:lnTo>
-                  <a:lnTo>
-                    <a:pt x="81107" y="91621"/>
-                  </a:lnTo>
-                  <a:lnTo>
-                    <a:pt x="7347" y="93537"/>
-                  </a:lnTo>
-                  <a:lnTo>
-                    <a:pt x="0" y="93728"/>
-                  </a:lnTo>
-                </a:path>
-              </a:pathLst>
-            </a:custGeom>
-          </p:spPr>
-          <p:txBody>
-            <a:bodyPr/>
-            <a:lstStyle/>
-            <a:p/>
-          </p:txBody>
-        </p:sp>
-        <p:sp>
-          <p:nvSpPr>
-            <p:cNvPr id="24" name="pl24"/>
-            <p:cNvSpPr/>
-            <p:nvPr/>
-          </p:nvSpPr>
-          <p:spPr>
-            <a:xfrm>
-              <a:off x="817517" y="3760207"/>
-              <a:ext cx="7235830" cy="1441662"/>
-            </a:xfrm>
-            <a:custGeom>
-              <a:avLst/>
-              <a:pathLst>
-                <a:path w="7235830" h="1441662">
+                <a:path w="7090630" h="1468570">
                   <a:moveTo>
                     <a:pt x="0" y="0"/>
                   </a:moveTo>
                   <a:lnTo>
-                    <a:pt x="7347" y="2977"/>
-                  </a:lnTo>
-                  <a:lnTo>
-                    <a:pt x="81107" y="32373"/>
-                  </a:lnTo>
-                  <a:lnTo>
-                    <a:pt x="154867" y="61287"/>
-                  </a:lnTo>
-                  <a:lnTo>
-                    <a:pt x="228627" y="89728"/>
-                  </a:lnTo>
-                  <a:lnTo>
-                    <a:pt x="302387" y="117703"/>
-                  </a:lnTo>
-                  <a:lnTo>
-                    <a:pt x="376147" y="145219"/>
-                  </a:lnTo>
-                  <a:lnTo>
-                    <a:pt x="449907" y="172284"/>
-                  </a:lnTo>
-                  <a:lnTo>
-                    <a:pt x="523667" y="198906"/>
-                  </a:lnTo>
-                  <a:lnTo>
-                    <a:pt x="597427" y="225092"/>
-                  </a:lnTo>
-                  <a:lnTo>
-                    <a:pt x="671187" y="250849"/>
-                  </a:lnTo>
-                  <a:lnTo>
-                    <a:pt x="744947" y="276184"/>
-                  </a:lnTo>
-                  <a:lnTo>
-                    <a:pt x="818707" y="301103"/>
-                  </a:lnTo>
-                  <a:lnTo>
-                    <a:pt x="892467" y="325614"/>
-                  </a:lnTo>
-                  <a:lnTo>
-                    <a:pt x="966227" y="349724"/>
-                  </a:lnTo>
-                  <a:lnTo>
-                    <a:pt x="1039987" y="373439"/>
-                  </a:lnTo>
-                  <a:lnTo>
-                    <a:pt x="1113747" y="396765"/>
-                  </a:lnTo>
-                  <a:lnTo>
-                    <a:pt x="1187508" y="419709"/>
-                  </a:lnTo>
-                  <a:lnTo>
-                    <a:pt x="1261268" y="442276"/>
-                  </a:lnTo>
-                  <a:lnTo>
-                    <a:pt x="1335028" y="464475"/>
-                  </a:lnTo>
-                  <a:lnTo>
-                    <a:pt x="1408788" y="486309"/>
-                  </a:lnTo>
-                  <a:lnTo>
-                    <a:pt x="1482548" y="507786"/>
-                  </a:lnTo>
-                  <a:lnTo>
-                    <a:pt x="1556308" y="528910"/>
-                  </a:lnTo>
-                  <a:lnTo>
-                    <a:pt x="1630068" y="549689"/>
-                  </a:lnTo>
-                  <a:lnTo>
-                    <a:pt x="1703828" y="570127"/>
-                  </a:lnTo>
-                  <a:lnTo>
-                    <a:pt x="1777588" y="590230"/>
-                  </a:lnTo>
-                  <a:lnTo>
-                    <a:pt x="1851348" y="610004"/>
-                  </a:lnTo>
-                  <a:lnTo>
-                    <a:pt x="1925108" y="629454"/>
-                  </a:lnTo>
-                  <a:lnTo>
-                    <a:pt x="1998868" y="648585"/>
-                  </a:lnTo>
-                  <a:lnTo>
-                    <a:pt x="2072628" y="667403"/>
-                  </a:lnTo>
-                  <a:lnTo>
-                    <a:pt x="2146388" y="685912"/>
-                  </a:lnTo>
-                  <a:lnTo>
-                    <a:pt x="2220148" y="704118"/>
-                  </a:lnTo>
-                  <a:lnTo>
-                    <a:pt x="2293908" y="722026"/>
-                  </a:lnTo>
-                  <a:lnTo>
-                    <a:pt x="2367668" y="739641"/>
-                  </a:lnTo>
-                  <a:lnTo>
-                    <a:pt x="2441428" y="756966"/>
-                  </a:lnTo>
-                  <a:lnTo>
-                    <a:pt x="2515188" y="774008"/>
-                  </a:lnTo>
-                  <a:lnTo>
-                    <a:pt x="2588948" y="790771"/>
-                  </a:lnTo>
-                  <a:lnTo>
-                    <a:pt x="2662708" y="807259"/>
-                  </a:lnTo>
-                  <a:lnTo>
-                    <a:pt x="2736468" y="823477"/>
-                  </a:lnTo>
-                  <a:lnTo>
-                    <a:pt x="2810228" y="839429"/>
-                  </a:lnTo>
-                  <a:lnTo>
-                    <a:pt x="2883988" y="855119"/>
-                  </a:lnTo>
-                  <a:lnTo>
-                    <a:pt x="2957748" y="870553"/>
-                  </a:lnTo>
-                  <a:lnTo>
-                    <a:pt x="3031508" y="885734"/>
-                  </a:lnTo>
-                  <a:lnTo>
-                    <a:pt x="3105268" y="900666"/>
-                  </a:lnTo>
-                  <a:lnTo>
-                    <a:pt x="3179028" y="915353"/>
-                  </a:lnTo>
-                  <a:lnTo>
-                    <a:pt x="3252788" y="929800"/>
-                  </a:lnTo>
-                  <a:lnTo>
-                    <a:pt x="3326548" y="944010"/>
-                  </a:lnTo>
-                  <a:lnTo>
-                    <a:pt x="3400308" y="957987"/>
-                  </a:lnTo>
-                  <a:lnTo>
-                    <a:pt x="3474068" y="971735"/>
-                  </a:lnTo>
-                  <a:lnTo>
-                    <a:pt x="3547828" y="985258"/>
-                  </a:lnTo>
-                  <a:lnTo>
-                    <a:pt x="3621588" y="998559"/>
-                  </a:lnTo>
-                  <a:lnTo>
-                    <a:pt x="3695348" y="1011642"/>
-                  </a:lnTo>
-                  <a:lnTo>
-                    <a:pt x="3769108" y="1024511"/>
-                  </a:lnTo>
-                  <a:lnTo>
-                    <a:pt x="3842868" y="1037169"/>
-                  </a:lnTo>
-                  <a:lnTo>
-                    <a:pt x="3916628" y="1049620"/>
-                  </a:lnTo>
-                  <a:lnTo>
-                    <a:pt x="3990388" y="1061867"/>
-                  </a:lnTo>
-                  <a:lnTo>
-                    <a:pt x="4064149" y="1073913"/>
-                  </a:lnTo>
-                  <a:lnTo>
-                    <a:pt x="4137909" y="1085761"/>
-                  </a:lnTo>
-                  <a:lnTo>
-                    <a:pt x="4211669" y="1097416"/>
-                  </a:lnTo>
-                  <a:lnTo>
-                    <a:pt x="4285429" y="1108879"/>
-                  </a:lnTo>
-                  <a:lnTo>
-                    <a:pt x="4359189" y="1120155"/>
-                  </a:lnTo>
-                  <a:lnTo>
-                    <a:pt x="4432949" y="1131246"/>
-                  </a:lnTo>
-                  <a:lnTo>
-                    <a:pt x="4506709" y="1142155"/>
-                  </a:lnTo>
-                  <a:lnTo>
-                    <a:pt x="4580469" y="1152885"/>
-                  </a:lnTo>
-                  <a:lnTo>
-                    <a:pt x="4654229" y="1163440"/>
-                  </a:lnTo>
-                  <a:lnTo>
-                    <a:pt x="4727989" y="1173822"/>
-                  </a:lnTo>
-                  <a:lnTo>
-                    <a:pt x="4801749" y="1184033"/>
-                  </a:lnTo>
-                  <a:lnTo>
-                    <a:pt x="4875509" y="1194078"/>
-                  </a:lnTo>
-                  <a:lnTo>
-                    <a:pt x="4949269" y="1203957"/>
-                  </a:lnTo>
-                  <a:lnTo>
-                    <a:pt x="5023029" y="1213675"/>
-                  </a:lnTo>
-                  <a:lnTo>
-                    <a:pt x="5096789" y="1223234"/>
-                  </a:lnTo>
-                  <a:lnTo>
-                    <a:pt x="5170549" y="1232636"/>
-                  </a:lnTo>
-                  <a:lnTo>
-                    <a:pt x="5244309" y="1241884"/>
-                  </a:lnTo>
-                  <a:lnTo>
-                    <a:pt x="5318069" y="1250980"/>
-                  </a:lnTo>
-                  <a:lnTo>
-                    <a:pt x="5391829" y="1259927"/>
-                  </a:lnTo>
-                  <a:lnTo>
-                    <a:pt x="5465589" y="1268728"/>
-                  </a:lnTo>
-                  <a:lnTo>
-                    <a:pt x="5539349" y="1277385"/>
-                  </a:lnTo>
-                  <a:lnTo>
-                    <a:pt x="5613109" y="1285899"/>
-                  </a:lnTo>
-                  <a:lnTo>
-                    <a:pt x="5686869" y="1294274"/>
-                  </a:lnTo>
-                  <a:lnTo>
-                    <a:pt x="5760629" y="1302512"/>
-                  </a:lnTo>
-                  <a:lnTo>
-                    <a:pt x="5834389" y="1310615"/>
-                  </a:lnTo>
-                  <a:lnTo>
-                    <a:pt x="5908149" y="1318586"/>
-                  </a:lnTo>
-                  <a:lnTo>
-                    <a:pt x="5981909" y="1326425"/>
-                  </a:lnTo>
-                  <a:lnTo>
-                    <a:pt x="6055669" y="1334136"/>
-                  </a:lnTo>
-                  <a:lnTo>
-                    <a:pt x="6129429" y="1341721"/>
-                  </a:lnTo>
-                  <a:lnTo>
-                    <a:pt x="6203189" y="1349182"/>
-                  </a:lnTo>
-                  <a:lnTo>
-                    <a:pt x="6276949" y="1356520"/>
-                  </a:lnTo>
-                  <a:lnTo>
-                    <a:pt x="6350709" y="1363738"/>
-                  </a:lnTo>
-                  <a:lnTo>
-                    <a:pt x="6424469" y="1370838"/>
-                  </a:lnTo>
-                  <a:lnTo>
-                    <a:pt x="6498229" y="1377821"/>
-                  </a:lnTo>
-                  <a:lnTo>
-                    <a:pt x="6571989" y="1384690"/>
-                  </a:lnTo>
-                  <a:lnTo>
-                    <a:pt x="6645749" y="1391447"/>
-                  </a:lnTo>
-                  <a:lnTo>
-                    <a:pt x="6719509" y="1398092"/>
-                  </a:lnTo>
-                  <a:lnTo>
-                    <a:pt x="6793269" y="1404629"/>
-                  </a:lnTo>
-                  <a:lnTo>
-                    <a:pt x="6867029" y="1411059"/>
-                  </a:lnTo>
-                  <a:lnTo>
-                    <a:pt x="6940789" y="1417384"/>
-                  </a:lnTo>
-                  <a:lnTo>
-                    <a:pt x="7014550" y="1423604"/>
-                  </a:lnTo>
-                  <a:lnTo>
-                    <a:pt x="7088310" y="1429723"/>
-                  </a:lnTo>
-                  <a:lnTo>
-                    <a:pt x="7162070" y="1435742"/>
-                  </a:lnTo>
-                  <a:lnTo>
-                    <a:pt x="7235830" y="1441662"/>
+                    <a:pt x="71622" y="29885"/>
+                  </a:lnTo>
+                  <a:lnTo>
+                    <a:pt x="143245" y="59281"/>
+                  </a:lnTo>
+                  <a:lnTo>
+                    <a:pt x="214867" y="88196"/>
+                  </a:lnTo>
+                  <a:lnTo>
+                    <a:pt x="286490" y="116637"/>
+                  </a:lnTo>
+                  <a:lnTo>
+                    <a:pt x="358112" y="144611"/>
+                  </a:lnTo>
+                  <a:lnTo>
+                    <a:pt x="429735" y="172128"/>
+                  </a:lnTo>
+                  <a:lnTo>
+                    <a:pt x="501357" y="199193"/>
+                  </a:lnTo>
+                  <a:lnTo>
+                    <a:pt x="572980" y="225815"/>
+                  </a:lnTo>
+                  <a:lnTo>
+                    <a:pt x="644602" y="252001"/>
+                  </a:lnTo>
+                  <a:lnTo>
+                    <a:pt x="716225" y="277758"/>
+                  </a:lnTo>
+                  <a:lnTo>
+                    <a:pt x="787847" y="303092"/>
+                  </a:lnTo>
+                  <a:lnTo>
+                    <a:pt x="859470" y="328012"/>
+                  </a:lnTo>
+                  <a:lnTo>
+                    <a:pt x="931092" y="352523"/>
+                  </a:lnTo>
+                  <a:lnTo>
+                    <a:pt x="1002715" y="376633"/>
+                  </a:lnTo>
+                  <a:lnTo>
+                    <a:pt x="1074337" y="400347"/>
+                  </a:lnTo>
+                  <a:lnTo>
+                    <a:pt x="1145960" y="423673"/>
+                  </a:lnTo>
+                  <a:lnTo>
+                    <a:pt x="1217582" y="446617"/>
+                  </a:lnTo>
+                  <a:lnTo>
+                    <a:pt x="1289205" y="469185"/>
+                  </a:lnTo>
+                  <a:lnTo>
+                    <a:pt x="1360827" y="491383"/>
+                  </a:lnTo>
+                  <a:lnTo>
+                    <a:pt x="1432450" y="513218"/>
+                  </a:lnTo>
+                  <a:lnTo>
+                    <a:pt x="1504073" y="534694"/>
+                  </a:lnTo>
+                  <a:lnTo>
+                    <a:pt x="1575695" y="555819"/>
+                  </a:lnTo>
+                  <a:lnTo>
+                    <a:pt x="1647318" y="576598"/>
+                  </a:lnTo>
+                  <a:lnTo>
+                    <a:pt x="1718940" y="597036"/>
+                  </a:lnTo>
+                  <a:lnTo>
+                    <a:pt x="1790563" y="617139"/>
+                  </a:lnTo>
+                  <a:lnTo>
+                    <a:pt x="1862185" y="636913"/>
+                  </a:lnTo>
+                  <a:lnTo>
+                    <a:pt x="1933808" y="656363"/>
+                  </a:lnTo>
+                  <a:lnTo>
+                    <a:pt x="2005430" y="675494"/>
+                  </a:lnTo>
+                  <a:lnTo>
+                    <a:pt x="2077053" y="694312"/>
+                  </a:lnTo>
+                  <a:lnTo>
+                    <a:pt x="2148675" y="712821"/>
+                  </a:lnTo>
+                  <a:lnTo>
+                    <a:pt x="2220298" y="731027"/>
+                  </a:lnTo>
+                  <a:lnTo>
+                    <a:pt x="2291920" y="748935"/>
+                  </a:lnTo>
+                  <a:lnTo>
+                    <a:pt x="2363543" y="766549"/>
+                  </a:lnTo>
+                  <a:lnTo>
+                    <a:pt x="2435165" y="783875"/>
+                  </a:lnTo>
+                  <a:lnTo>
+                    <a:pt x="2506788" y="800917"/>
+                  </a:lnTo>
+                  <a:lnTo>
+                    <a:pt x="2578410" y="817680"/>
+                  </a:lnTo>
+                  <a:lnTo>
+                    <a:pt x="2650033" y="834167"/>
+                  </a:lnTo>
+                  <a:lnTo>
+                    <a:pt x="2721655" y="850385"/>
+                  </a:lnTo>
+                  <a:lnTo>
+                    <a:pt x="2793278" y="866337"/>
+                  </a:lnTo>
+                  <a:lnTo>
+                    <a:pt x="2864901" y="882028"/>
+                  </a:lnTo>
+                  <a:lnTo>
+                    <a:pt x="2936523" y="897462"/>
+                  </a:lnTo>
+                  <a:lnTo>
+                    <a:pt x="3008146" y="912642"/>
+                  </a:lnTo>
+                  <a:lnTo>
+                    <a:pt x="3079768" y="927574"/>
+                  </a:lnTo>
+                  <a:lnTo>
+                    <a:pt x="3151391" y="942262"/>
+                  </a:lnTo>
+                  <a:lnTo>
+                    <a:pt x="3223013" y="956708"/>
+                  </a:lnTo>
+                  <a:lnTo>
+                    <a:pt x="3294636" y="970918"/>
+                  </a:lnTo>
+                  <a:lnTo>
+                    <a:pt x="3366258" y="984895"/>
+                  </a:lnTo>
+                  <a:lnTo>
+                    <a:pt x="3437881" y="998643"/>
+                  </a:lnTo>
+                  <a:lnTo>
+                    <a:pt x="3509503" y="1012166"/>
+                  </a:lnTo>
+                  <a:lnTo>
+                    <a:pt x="3581126" y="1025468"/>
+                  </a:lnTo>
+                  <a:lnTo>
+                    <a:pt x="3652748" y="1038551"/>
+                  </a:lnTo>
+                  <a:lnTo>
+                    <a:pt x="3724371" y="1051420"/>
+                  </a:lnTo>
+                  <a:lnTo>
+                    <a:pt x="3795993" y="1064078"/>
+                  </a:lnTo>
+                  <a:lnTo>
+                    <a:pt x="3867616" y="1076529"/>
+                  </a:lnTo>
+                  <a:lnTo>
+                    <a:pt x="3939238" y="1088775"/>
+                  </a:lnTo>
+                  <a:lnTo>
+                    <a:pt x="4010861" y="1100821"/>
+                  </a:lnTo>
+                  <a:lnTo>
+                    <a:pt x="4082483" y="1112670"/>
+                  </a:lnTo>
+                  <a:lnTo>
+                    <a:pt x="4154106" y="1124324"/>
+                  </a:lnTo>
+                  <a:lnTo>
+                    <a:pt x="4225729" y="1135788"/>
+                  </a:lnTo>
+                  <a:lnTo>
+                    <a:pt x="4297351" y="1147064"/>
+                  </a:lnTo>
+                  <a:lnTo>
+                    <a:pt x="4368974" y="1158155"/>
+                  </a:lnTo>
+                  <a:lnTo>
+                    <a:pt x="4440596" y="1169064"/>
+                  </a:lnTo>
+                  <a:lnTo>
+                    <a:pt x="4512219" y="1179794"/>
+                  </a:lnTo>
+                  <a:lnTo>
+                    <a:pt x="4583841" y="1190349"/>
+                  </a:lnTo>
+                  <a:lnTo>
+                    <a:pt x="4655464" y="1200731"/>
+                  </a:lnTo>
+                  <a:lnTo>
+                    <a:pt x="4727086" y="1210942"/>
+                  </a:lnTo>
+                  <a:lnTo>
+                    <a:pt x="4798709" y="1220986"/>
+                  </a:lnTo>
+                  <a:lnTo>
+                    <a:pt x="4870331" y="1230866"/>
+                  </a:lnTo>
+                  <a:lnTo>
+                    <a:pt x="4941954" y="1240584"/>
+                  </a:lnTo>
+                  <a:lnTo>
+                    <a:pt x="5013576" y="1250142"/>
+                  </a:lnTo>
+                  <a:lnTo>
+                    <a:pt x="5085199" y="1259544"/>
+                  </a:lnTo>
+                  <a:lnTo>
+                    <a:pt x="5156821" y="1268792"/>
+                  </a:lnTo>
+                  <a:lnTo>
+                    <a:pt x="5228444" y="1277889"/>
+                  </a:lnTo>
+                  <a:lnTo>
+                    <a:pt x="5300066" y="1286836"/>
+                  </a:lnTo>
+                  <a:lnTo>
+                    <a:pt x="5371689" y="1295637"/>
+                  </a:lnTo>
+                  <a:lnTo>
+                    <a:pt x="5443311" y="1304293"/>
+                  </a:lnTo>
+                  <a:lnTo>
+                    <a:pt x="5514934" y="1312808"/>
+                  </a:lnTo>
+                  <a:lnTo>
+                    <a:pt x="5586557" y="1321183"/>
+                  </a:lnTo>
+                  <a:lnTo>
+                    <a:pt x="5658179" y="1329421"/>
+                  </a:lnTo>
+                  <a:lnTo>
+                    <a:pt x="5729802" y="1337524"/>
+                  </a:lnTo>
+                  <a:lnTo>
+                    <a:pt x="5801424" y="1345494"/>
+                  </a:lnTo>
+                  <a:lnTo>
+                    <a:pt x="5873047" y="1353334"/>
+                  </a:lnTo>
+                  <a:lnTo>
+                    <a:pt x="5944669" y="1361045"/>
+                  </a:lnTo>
+                  <a:lnTo>
+                    <a:pt x="6016292" y="1368630"/>
+                  </a:lnTo>
+                  <a:lnTo>
+                    <a:pt x="6087914" y="1376090"/>
+                  </a:lnTo>
+                  <a:lnTo>
+                    <a:pt x="6159537" y="1383429"/>
+                  </a:lnTo>
+                  <a:lnTo>
+                    <a:pt x="6231159" y="1390647"/>
+                  </a:lnTo>
+                  <a:lnTo>
+                    <a:pt x="6302782" y="1397747"/>
+                  </a:lnTo>
+                  <a:lnTo>
+                    <a:pt x="6374404" y="1404730"/>
+                  </a:lnTo>
+                  <a:lnTo>
+                    <a:pt x="6446027" y="1411599"/>
+                  </a:lnTo>
+                  <a:lnTo>
+                    <a:pt x="6517649" y="1418355"/>
+                  </a:lnTo>
+                  <a:lnTo>
+                    <a:pt x="6589272" y="1425001"/>
+                  </a:lnTo>
+                  <a:lnTo>
+                    <a:pt x="6660894" y="1431538"/>
+                  </a:lnTo>
+                  <a:lnTo>
+                    <a:pt x="6732517" y="1437968"/>
+                  </a:lnTo>
+                  <a:lnTo>
+                    <a:pt x="6804139" y="1444292"/>
+                  </a:lnTo>
+                  <a:lnTo>
+                    <a:pt x="6875762" y="1450513"/>
+                  </a:lnTo>
+                  <a:lnTo>
+                    <a:pt x="6947385" y="1456632"/>
+                  </a:lnTo>
+                  <a:lnTo>
+                    <a:pt x="7019007" y="1462650"/>
+                  </a:lnTo>
+                  <a:lnTo>
+                    <a:pt x="7090630" y="1468570"/>
                   </a:lnTo>
                 </a:path>
               </a:pathLst>
@@ -4569,7 +4526,7 @@
         </p:sp>
         <p:sp>
           <p:nvSpPr>
-            <p:cNvPr id="25" name="pl25"/>
+            <p:cNvPr id="24" name="pl24"/>
             <p:cNvSpPr/>
             <p:nvPr/>
           </p:nvSpPr>
@@ -4612,13 +4569,13 @@
         </p:sp>
         <p:sp>
           <p:nvSpPr>
-            <p:cNvPr id="26" name="pl26"/>
+            <p:cNvPr id="25" name="pl25"/>
             <p:cNvSpPr/>
             <p:nvPr/>
           </p:nvSpPr>
           <p:spPr>
             <a:xfrm>
-              <a:off x="4269157" y="2073503"/>
+              <a:off x="4588151" y="2073503"/>
               <a:ext cx="0" cy="3649639"/>
             </a:xfrm>
             <a:custGeom>
@@ -4655,7 +4612,7 @@
         </p:sp>
         <p:sp>
           <p:nvSpPr>
-            <p:cNvPr id="27" name="tx27"/>
+            <p:cNvPr id="26" name="tx26"/>
             <p:cNvSpPr/>
             <p:nvPr/>
           </p:nvSpPr>
@@ -4701,7 +4658,7 @@
         </p:sp>
         <p:sp>
           <p:nvSpPr>
-            <p:cNvPr id="28" name="tx28"/>
+            <p:cNvPr id="27" name="tx27"/>
             <p:cNvSpPr/>
             <p:nvPr/>
           </p:nvSpPr>
@@ -4747,7 +4704,7 @@
         </p:sp>
         <p:sp>
           <p:nvSpPr>
-            <p:cNvPr id="29" name="tx29"/>
+            <p:cNvPr id="28" name="tx28"/>
             <p:cNvSpPr/>
             <p:nvPr/>
           </p:nvSpPr>
@@ -4793,7 +4750,7 @@
         </p:sp>
         <p:sp>
           <p:nvSpPr>
-            <p:cNvPr id="30" name="tx30"/>
+            <p:cNvPr id="29" name="tx29"/>
             <p:cNvSpPr/>
             <p:nvPr/>
           </p:nvSpPr>
@@ -4839,7 +4796,7 @@
         </p:sp>
         <p:sp>
           <p:nvSpPr>
-            <p:cNvPr id="31" name="tx31"/>
+            <p:cNvPr id="30" name="tx30"/>
             <p:cNvSpPr/>
             <p:nvPr/>
           </p:nvSpPr>
@@ -4885,14 +4842,14 @@
         </p:sp>
         <p:sp>
           <p:nvSpPr>
-            <p:cNvPr id="32" name="tx32"/>
+            <p:cNvPr id="31" name="tx31"/>
             <p:cNvSpPr/>
             <p:nvPr/>
           </p:nvSpPr>
           <p:spPr>
             <a:xfrm>
-              <a:off x="2423864" y="5785772"/>
-              <a:ext cx="155356" cy="80101"/>
+              <a:off x="2360651" y="5785772"/>
+              <a:ext cx="161574" cy="80101"/>
             </a:xfrm>
             <a:prstGeom prst="rect">
               <a:avLst/>
@@ -4924,21 +4881,21 @@
                   <a:latin typeface="Helvetica"/>
                   <a:cs typeface="Helvetica"/>
                 </a:rPr>
-                <a:t>0.8</a:t>
+                <a:t>-25</a:t>
               </a:r>
             </a:p>
           </p:txBody>
         </p:sp>
         <p:sp>
           <p:nvSpPr>
-            <p:cNvPr id="33" name="tx33"/>
+            <p:cNvPr id="32" name="tx32"/>
             <p:cNvSpPr/>
             <p:nvPr/>
           </p:nvSpPr>
           <p:spPr>
             <a:xfrm>
-              <a:off x="4196521" y="5785772"/>
-              <a:ext cx="155356" cy="80101"/>
+              <a:off x="4561958" y="5785772"/>
+              <a:ext cx="62179" cy="80101"/>
             </a:xfrm>
             <a:prstGeom prst="rect">
               <a:avLst/>
@@ -4970,21 +4927,21 @@
                   <a:latin typeface="Helvetica"/>
                   <a:cs typeface="Helvetica"/>
                 </a:rPr>
-                <a:t>1.0</a:t>
+                <a:t>0</a:t>
               </a:r>
             </a:p>
           </p:txBody>
         </p:sp>
         <p:sp>
           <p:nvSpPr>
-            <p:cNvPr id="34" name="tx34"/>
+            <p:cNvPr id="33" name="tx33"/>
             <p:cNvSpPr/>
             <p:nvPr/>
           </p:nvSpPr>
           <p:spPr>
             <a:xfrm>
-              <a:off x="5969179" y="5785772"/>
-              <a:ext cx="155356" cy="80101"/>
+              <a:off x="6682478" y="5785772"/>
+              <a:ext cx="124358" cy="80101"/>
             </a:xfrm>
             <a:prstGeom prst="rect">
               <a:avLst/>
@@ -5016,67 +4973,21 @@
                   <a:latin typeface="Helvetica"/>
                   <a:cs typeface="Helvetica"/>
                 </a:rPr>
-                <a:t>1.2</a:t>
+                <a:t>25</a:t>
               </a:r>
             </a:p>
           </p:txBody>
         </p:sp>
         <p:sp>
           <p:nvSpPr>
-            <p:cNvPr id="35" name="tx35"/>
+            <p:cNvPr id="34" name="tx34"/>
             <p:cNvSpPr/>
             <p:nvPr/>
           </p:nvSpPr>
           <p:spPr>
             <a:xfrm>
-              <a:off x="7741836" y="5785772"/>
-              <a:ext cx="155356" cy="80101"/>
-            </a:xfrm>
-            <a:prstGeom prst="rect">
-              <a:avLst/>
-            </a:prstGeom>
-            <a:noFill/>
-          </p:spPr>
-          <p:txBody>
-            <a:bodyPr lIns="0" rIns="0" tIns="0" bIns="0" anchorCtr="1" anchor="ctr" wrap="none"/>
-            <a:lstStyle/>
-            <a:p>
-              <a:pPr algn="l" marL="0" marR="0" indent="0">
-                <a:lnSpc>
-                  <a:spcPts val="880"/>
-                </a:lnSpc>
-                <a:spcBef>
-                  <a:spcPts val="0"/>
-                </a:spcBef>
-                <a:spcAft>
-                  <a:spcPts val="0"/>
-                </a:spcAft>
-              </a:pPr>
-              <a:r>
-                <a:rPr sz="880">
-                  <a:solidFill>
-                    <a:srgbClr val="4D4D4D">
-                      <a:alpha val="100000"/>
-                    </a:srgbClr>
-                  </a:solidFill>
-                  <a:latin typeface="Helvetica"/>
-                  <a:cs typeface="Helvetica"/>
-                </a:rPr>
-                <a:t>1.4</a:t>
-              </a:r>
-            </a:p>
-          </p:txBody>
-        </p:sp>
-        <p:sp>
-          <p:nvSpPr>
-            <p:cNvPr id="36" name="tx36"/>
-            <p:cNvSpPr/>
-            <p:nvPr/>
-          </p:nvSpPr>
-          <p:spPr>
-            <a:xfrm>
-              <a:off x="3879271" y="5925448"/>
-              <a:ext cx="1676186" cy="100218"/>
+              <a:off x="2928340" y="5925448"/>
+              <a:ext cx="3578047" cy="100218"/>
             </a:xfrm>
             <a:prstGeom prst="rect">
               <a:avLst/>
@@ -5108,14 +5019,14 @@
                   <a:latin typeface="Helvetica"/>
                   <a:cs typeface="Helvetica"/>
                 </a:rPr>
-                <a:t>CKD-EPI Cr-Cys / CG ratio</a:t>
+                <a:t>eGFR difference (%): 100 × (CKD-EPI Cr-Cys − CG) / CG</a:t>
               </a:r>
             </a:p>
           </p:txBody>
         </p:sp>
         <p:sp>
           <p:nvSpPr>
-            <p:cNvPr id="37" name="tx37"/>
+            <p:cNvPr id="35" name="tx35"/>
             <p:cNvSpPr/>
             <p:nvPr/>
           </p:nvSpPr>
@@ -5161,14 +5072,14 @@
         </p:sp>
         <p:sp>
           <p:nvSpPr>
-            <p:cNvPr id="38" name="tx38"/>
+            <p:cNvPr id="36" name="tx36"/>
             <p:cNvSpPr/>
             <p:nvPr/>
           </p:nvSpPr>
           <p:spPr>
             <a:xfrm>
               <a:off x="817517" y="1896563"/>
-              <a:ext cx="6169365" cy="82021"/>
+              <a:ext cx="6321612" cy="82021"/>
             </a:xfrm>
             <a:prstGeom prst="rect">
               <a:avLst/>
@@ -5200,14 +5111,14 @@
                   <a:latin typeface="Helvetica"/>
                   <a:cs typeface="Helvetica"/>
                 </a:rPr>
-                <a:t>subHR per 0.1 ratio decline: 1.22 (0.97-1.53), p = 0.090  |  per IQR decline (Δ = 0.29): 1.79 (0.91-3.50)  |  IQR: [0.85, 1.15]</a:t>
+                <a:t>subHR per 10 % decline: 1.22 (0.97-1.53), p = 0.090  |  per IQR decline (Δ = 29.3 %): 1.79 (0.91-3.50)  |  IQR: [-14.6, 14.7] %</a:t>
               </a:r>
             </a:p>
           </p:txBody>
         </p:sp>
         <p:sp>
           <p:nvSpPr>
-            <p:cNvPr id="39" name="tx39"/>
+            <p:cNvPr id="37" name="tx37"/>
             <p:cNvSpPr/>
             <p:nvPr/>
           </p:nvSpPr>

--- a/docs/pptx/whole/jx-linsubhr-ratio-hosp1.pptx
+++ b/docs/pptx/whole/jx-linsubhr-ratio-hosp1.pptx
@@ -2265,34 +2265,26 @@
         </p:sp>
         <p:sp>
           <p:nvSpPr>
-            <p:cNvPr id="4" name="pl4"/>
+            <p:cNvPr id="4" name="rc4"/>
             <p:cNvSpPr/>
             <p:nvPr/>
           </p:nvSpPr>
           <p:spPr>
             <a:xfrm>
-              <a:off x="817517" y="5142518"/>
-              <a:ext cx="7799693" cy="0"/>
+              <a:off x="457200" y="1600200"/>
+              <a:ext cx="8229600" cy="4525962"/>
             </a:xfrm>
-            <a:custGeom>
+            <a:prstGeom prst="rect">
               <a:avLst/>
-              <a:pathLst>
-                <a:path w="7799693" h="0">
-                  <a:moveTo>
-                    <a:pt x="0" y="0"/>
-                  </a:moveTo>
-                  <a:lnTo>
-                    <a:pt x="7799693" y="0"/>
-                  </a:lnTo>
-                  <a:lnTo>
-                    <a:pt x="7799693" y="0"/>
-                  </a:lnTo>
-                </a:path>
-              </a:pathLst>
-            </a:custGeom>
-            <a:ln w="6775" cap="flat">
+            </a:prstGeom>
+            <a:solidFill>
+              <a:srgbClr val="FFFFFF">
+                <a:alpha val="100000"/>
+              </a:srgbClr>
+            </a:solidFill>
+            <a:ln w="13550" cap="rnd">
               <a:solidFill>
-                <a:srgbClr val="EBEBEB">
+                <a:srgbClr val="FFFFFF">
                   <a:alpha val="100000"/>
                 </a:srgbClr>
               </a:solidFill>
@@ -2314,21 +2306,21 @@
           </p:nvSpPr>
           <p:spPr>
             <a:xfrm>
-              <a:off x="817517" y="4313054"/>
-              <a:ext cx="7799693" cy="0"/>
+              <a:off x="887106" y="3250627"/>
+              <a:ext cx="7660515" cy="0"/>
             </a:xfrm>
             <a:custGeom>
               <a:avLst/>
               <a:pathLst>
-                <a:path w="7799693" h="0">
+                <a:path w="7660515" h="0">
                   <a:moveTo>
                     <a:pt x="0" y="0"/>
                   </a:moveTo>
                   <a:lnTo>
-                    <a:pt x="7799693" y="0"/>
-                  </a:lnTo>
-                  <a:lnTo>
-                    <a:pt x="7799693" y="0"/>
+                    <a:pt x="7660515" y="0"/>
+                  </a:lnTo>
+                  <a:lnTo>
+                    <a:pt x="7660515" y="0"/>
                   </a:lnTo>
                 </a:path>
               </a:pathLst>
@@ -2357,21 +2349,21 @@
           </p:nvSpPr>
           <p:spPr>
             <a:xfrm>
-              <a:off x="817517" y="3483591"/>
-              <a:ext cx="7799693" cy="0"/>
+              <a:off x="887106" y="2951293"/>
+              <a:ext cx="7660515" cy="0"/>
             </a:xfrm>
             <a:custGeom>
               <a:avLst/>
               <a:pathLst>
-                <a:path w="7799693" h="0">
+                <a:path w="7660515" h="0">
                   <a:moveTo>
                     <a:pt x="0" y="0"/>
                   </a:moveTo>
                   <a:lnTo>
-                    <a:pt x="7799693" y="0"/>
-                  </a:lnTo>
-                  <a:lnTo>
-                    <a:pt x="7799693" y="0"/>
+                    <a:pt x="7660515" y="0"/>
+                  </a:lnTo>
+                  <a:lnTo>
+                    <a:pt x="7660515" y="0"/>
                   </a:lnTo>
                 </a:path>
               </a:pathLst>
@@ -2400,21 +2392,21 @@
           </p:nvSpPr>
           <p:spPr>
             <a:xfrm>
-              <a:off x="817517" y="2654127"/>
-              <a:ext cx="7799693" cy="0"/>
+              <a:off x="887106" y="2651959"/>
+              <a:ext cx="7660515" cy="0"/>
             </a:xfrm>
             <a:custGeom>
               <a:avLst/>
               <a:pathLst>
-                <a:path w="7799693" h="0">
+                <a:path w="7660515" h="0">
                   <a:moveTo>
                     <a:pt x="0" y="0"/>
                   </a:moveTo>
                   <a:lnTo>
-                    <a:pt x="7799693" y="0"/>
-                  </a:lnTo>
-                  <a:lnTo>
-                    <a:pt x="7799693" y="0"/>
+                    <a:pt x="7660515" y="0"/>
+                  </a:lnTo>
+                  <a:lnTo>
+                    <a:pt x="7660515" y="0"/>
                   </a:lnTo>
                 </a:path>
               </a:pathLst>
@@ -2443,21 +2435,21 @@
           </p:nvSpPr>
           <p:spPr>
             <a:xfrm>
-              <a:off x="1365633" y="2073503"/>
-              <a:ext cx="0" cy="3649639"/>
+              <a:off x="887106" y="2352625"/>
+              <a:ext cx="7660515" cy="0"/>
             </a:xfrm>
             <a:custGeom>
               <a:avLst/>
               <a:pathLst>
-                <a:path w="0" h="3649639">
+                <a:path w="7660515" h="0">
                   <a:moveTo>
-                    <a:pt x="0" y="3649639"/>
+                    <a:pt x="0" y="0"/>
                   </a:moveTo>
                   <a:lnTo>
-                    <a:pt x="0" y="0"/>
-                  </a:lnTo>
-                  <a:lnTo>
-                    <a:pt x="0" y="0"/>
+                    <a:pt x="7660515" y="0"/>
+                  </a:lnTo>
+                  <a:lnTo>
+                    <a:pt x="7660515" y="0"/>
                   </a:lnTo>
                 </a:path>
               </a:pathLst>
@@ -2486,15 +2478,15 @@
           </p:nvSpPr>
           <p:spPr>
             <a:xfrm>
-              <a:off x="3517243" y="2073503"/>
-              <a:ext cx="0" cy="3649639"/>
+              <a:off x="1425442" y="2143092"/>
+              <a:ext cx="0" cy="1317069"/>
             </a:xfrm>
             <a:custGeom>
               <a:avLst/>
               <a:pathLst>
-                <a:path w="0" h="3649639">
+                <a:path w="0" h="1317069">
                   <a:moveTo>
-                    <a:pt x="0" y="3649639"/>
+                    <a:pt x="0" y="1317069"/>
                   </a:moveTo>
                   <a:lnTo>
                     <a:pt x="0" y="0"/>
@@ -2529,15 +2521,15 @@
           </p:nvSpPr>
           <p:spPr>
             <a:xfrm>
-              <a:off x="5668852" y="2073503"/>
-              <a:ext cx="0" cy="3649639"/>
+              <a:off x="3538658" y="2143092"/>
+              <a:ext cx="0" cy="1317069"/>
             </a:xfrm>
             <a:custGeom>
               <a:avLst/>
               <a:pathLst>
-                <a:path w="0" h="3649639">
+                <a:path w="0" h="1317069">
                   <a:moveTo>
-                    <a:pt x="0" y="3649639"/>
+                    <a:pt x="0" y="1317069"/>
                   </a:moveTo>
                   <a:lnTo>
                     <a:pt x="0" y="0"/>
@@ -2572,15 +2564,15 @@
           </p:nvSpPr>
           <p:spPr>
             <a:xfrm>
-              <a:off x="7820461" y="2073503"/>
-              <a:ext cx="0" cy="3649639"/>
+              <a:off x="5651874" y="2143092"/>
+              <a:ext cx="0" cy="1317069"/>
             </a:xfrm>
             <a:custGeom>
               <a:avLst/>
               <a:pathLst>
-                <a:path w="0" h="3649639">
+                <a:path w="0" h="1317069">
                   <a:moveTo>
-                    <a:pt x="0" y="3649639"/>
+                    <a:pt x="0" y="1317069"/>
                   </a:moveTo>
                   <a:lnTo>
                     <a:pt x="0" y="0"/>
@@ -2615,26 +2607,26 @@
           </p:nvSpPr>
           <p:spPr>
             <a:xfrm>
-              <a:off x="817517" y="5557249"/>
-              <a:ext cx="7799693" cy="0"/>
+              <a:off x="7765090" y="2143092"/>
+              <a:ext cx="0" cy="1317069"/>
             </a:xfrm>
             <a:custGeom>
               <a:avLst/>
               <a:pathLst>
-                <a:path w="7799693" h="0">
+                <a:path w="0" h="1317069">
                   <a:moveTo>
+                    <a:pt x="0" y="1317069"/>
+                  </a:moveTo>
+                  <a:lnTo>
                     <a:pt x="0" y="0"/>
-                  </a:moveTo>
-                  <a:lnTo>
-                    <a:pt x="7799693" y="0"/>
-                  </a:lnTo>
-                  <a:lnTo>
-                    <a:pt x="7799693" y="0"/>
+                  </a:lnTo>
+                  <a:lnTo>
+                    <a:pt x="0" y="0"/>
                   </a:lnTo>
                 </a:path>
               </a:pathLst>
             </a:custGeom>
-            <a:ln w="13550" cap="flat">
+            <a:ln w="6775" cap="flat">
               <a:solidFill>
                 <a:srgbClr val="EBEBEB">
                   <a:alpha val="100000"/>
@@ -2658,21 +2650,21 @@
           </p:nvSpPr>
           <p:spPr>
             <a:xfrm>
-              <a:off x="817517" y="4727786"/>
-              <a:ext cx="7799693" cy="0"/>
+              <a:off x="887106" y="3400294"/>
+              <a:ext cx="7660515" cy="0"/>
             </a:xfrm>
             <a:custGeom>
               <a:avLst/>
               <a:pathLst>
-                <a:path w="7799693" h="0">
+                <a:path w="7660515" h="0">
                   <a:moveTo>
                     <a:pt x="0" y="0"/>
                   </a:moveTo>
                   <a:lnTo>
-                    <a:pt x="7799693" y="0"/>
-                  </a:lnTo>
-                  <a:lnTo>
-                    <a:pt x="7799693" y="0"/>
+                    <a:pt x="7660515" y="0"/>
+                  </a:lnTo>
+                  <a:lnTo>
+                    <a:pt x="7660515" y="0"/>
                   </a:lnTo>
                 </a:path>
               </a:pathLst>
@@ -2701,21 +2693,21 @@
           </p:nvSpPr>
           <p:spPr>
             <a:xfrm>
-              <a:off x="817517" y="3898322"/>
-              <a:ext cx="7799693" cy="0"/>
+              <a:off x="887106" y="3100960"/>
+              <a:ext cx="7660515" cy="0"/>
             </a:xfrm>
             <a:custGeom>
               <a:avLst/>
               <a:pathLst>
-                <a:path w="7799693" h="0">
+                <a:path w="7660515" h="0">
                   <a:moveTo>
                     <a:pt x="0" y="0"/>
                   </a:moveTo>
                   <a:lnTo>
-                    <a:pt x="7799693" y="0"/>
-                  </a:lnTo>
-                  <a:lnTo>
-                    <a:pt x="7799693" y="0"/>
+                    <a:pt x="7660515" y="0"/>
+                  </a:lnTo>
+                  <a:lnTo>
+                    <a:pt x="7660515" y="0"/>
                   </a:lnTo>
                 </a:path>
               </a:pathLst>
@@ -2744,21 +2736,21 @@
           </p:nvSpPr>
           <p:spPr>
             <a:xfrm>
-              <a:off x="817517" y="3068859"/>
-              <a:ext cx="7799693" cy="0"/>
+              <a:off x="887106" y="2801626"/>
+              <a:ext cx="7660515" cy="0"/>
             </a:xfrm>
             <a:custGeom>
               <a:avLst/>
               <a:pathLst>
-                <a:path w="7799693" h="0">
+                <a:path w="7660515" h="0">
                   <a:moveTo>
                     <a:pt x="0" y="0"/>
                   </a:moveTo>
                   <a:lnTo>
-                    <a:pt x="7799693" y="0"/>
-                  </a:lnTo>
-                  <a:lnTo>
-                    <a:pt x="7799693" y="0"/>
+                    <a:pt x="7660515" y="0"/>
+                  </a:lnTo>
+                  <a:lnTo>
+                    <a:pt x="7660515" y="0"/>
                   </a:lnTo>
                 </a:path>
               </a:pathLst>
@@ -2787,21 +2779,21 @@
           </p:nvSpPr>
           <p:spPr>
             <a:xfrm>
-              <a:off x="817517" y="2239395"/>
-              <a:ext cx="7799693" cy="0"/>
+              <a:off x="887106" y="2502292"/>
+              <a:ext cx="7660515" cy="0"/>
             </a:xfrm>
             <a:custGeom>
               <a:avLst/>
               <a:pathLst>
-                <a:path w="7799693" h="0">
+                <a:path w="7660515" h="0">
                   <a:moveTo>
                     <a:pt x="0" y="0"/>
                   </a:moveTo>
                   <a:lnTo>
-                    <a:pt x="7799693" y="0"/>
-                  </a:lnTo>
-                  <a:lnTo>
-                    <a:pt x="7799693" y="0"/>
+                    <a:pt x="7660515" y="0"/>
+                  </a:lnTo>
+                  <a:lnTo>
+                    <a:pt x="7660515" y="0"/>
                   </a:lnTo>
                 </a:path>
               </a:pathLst>
@@ -2830,21 +2822,21 @@
           </p:nvSpPr>
           <p:spPr>
             <a:xfrm>
-              <a:off x="2441438" y="2073503"/>
-              <a:ext cx="0" cy="3649639"/>
+              <a:off x="887106" y="2202958"/>
+              <a:ext cx="7660515" cy="0"/>
             </a:xfrm>
             <a:custGeom>
               <a:avLst/>
               <a:pathLst>
-                <a:path w="0" h="3649639">
+                <a:path w="7660515" h="0">
                   <a:moveTo>
-                    <a:pt x="0" y="3649639"/>
+                    <a:pt x="0" y="0"/>
                   </a:moveTo>
                   <a:lnTo>
-                    <a:pt x="0" y="0"/>
-                  </a:lnTo>
-                  <a:lnTo>
-                    <a:pt x="0" y="0"/>
+                    <a:pt x="7660515" y="0"/>
+                  </a:lnTo>
+                  <a:lnTo>
+                    <a:pt x="7660515" y="0"/>
                   </a:lnTo>
                 </a:path>
               </a:pathLst>
@@ -2873,15 +2865,15 @@
           </p:nvSpPr>
           <p:spPr>
             <a:xfrm>
-              <a:off x="4593047" y="2073503"/>
-              <a:ext cx="0" cy="3649639"/>
+              <a:off x="2482050" y="2143092"/>
+              <a:ext cx="0" cy="1317069"/>
             </a:xfrm>
             <a:custGeom>
               <a:avLst/>
               <a:pathLst>
-                <a:path w="0" h="3649639">
+                <a:path w="0" h="1317069">
                   <a:moveTo>
-                    <a:pt x="0" y="3649639"/>
+                    <a:pt x="0" y="1317069"/>
                   </a:moveTo>
                   <a:lnTo>
                     <a:pt x="0" y="0"/>
@@ -2916,15 +2908,15 @@
           </p:nvSpPr>
           <p:spPr>
             <a:xfrm>
-              <a:off x="6744657" y="2073503"/>
-              <a:ext cx="0" cy="3649639"/>
+              <a:off x="4595266" y="2143092"/>
+              <a:ext cx="0" cy="1317069"/>
             </a:xfrm>
             <a:custGeom>
               <a:avLst/>
               <a:pathLst>
-                <a:path w="0" h="3649639">
+                <a:path w="0" h="1317069">
                   <a:moveTo>
-                    <a:pt x="0" y="3649639"/>
+                    <a:pt x="0" y="1317069"/>
                   </a:moveTo>
                   <a:lnTo>
                     <a:pt x="0" y="0"/>
@@ -2953,597 +2945,640 @@
         </p:sp>
         <p:sp>
           <p:nvSpPr>
-            <p:cNvPr id="20" name="pg20"/>
+            <p:cNvPr id="20" name="pl20"/>
             <p:cNvSpPr/>
             <p:nvPr/>
           </p:nvSpPr>
           <p:spPr>
             <a:xfrm>
-              <a:off x="1172049" y="2073503"/>
-              <a:ext cx="7090630" cy="3350541"/>
+              <a:off x="6708482" y="2143092"/>
+              <a:ext cx="0" cy="1317069"/>
             </a:xfrm>
             <a:custGeom>
               <a:avLst/>
               <a:pathLst>
-                <a:path w="7090630" h="3350541">
+                <a:path w="0" h="1317069">
                   <a:moveTo>
-                    <a:pt x="533100" y="0"/>
+                    <a:pt x="0" y="1317069"/>
                   </a:moveTo>
                   <a:lnTo>
-                    <a:pt x="572980" y="69002"/>
-                  </a:lnTo>
-                  <a:lnTo>
-                    <a:pt x="644602" y="188586"/>
-                  </a:lnTo>
-                  <a:lnTo>
-                    <a:pt x="716225" y="303983"/>
-                  </a:lnTo>
-                  <a:lnTo>
-                    <a:pt x="787847" y="415338"/>
-                  </a:lnTo>
-                  <a:lnTo>
-                    <a:pt x="859470" y="522794"/>
-                  </a:lnTo>
-                  <a:lnTo>
-                    <a:pt x="931092" y="626487"/>
-                  </a:lnTo>
-                  <a:lnTo>
-                    <a:pt x="1002715" y="726548"/>
-                  </a:lnTo>
-                  <a:lnTo>
-                    <a:pt x="1074337" y="823106"/>
-                  </a:lnTo>
-                  <a:lnTo>
-                    <a:pt x="1145960" y="916281"/>
-                  </a:lnTo>
-                  <a:lnTo>
-                    <a:pt x="1217582" y="1006194"/>
-                  </a:lnTo>
-                  <a:lnTo>
-                    <a:pt x="1289205" y="1092958"/>
-                  </a:lnTo>
-                  <a:lnTo>
-                    <a:pt x="1360827" y="1176684"/>
-                  </a:lnTo>
-                  <a:lnTo>
-                    <a:pt x="1432450" y="1257477"/>
-                  </a:lnTo>
-                  <a:lnTo>
-                    <a:pt x="1504073" y="1335441"/>
-                  </a:lnTo>
-                  <a:lnTo>
-                    <a:pt x="1575695" y="1410675"/>
-                  </a:lnTo>
-                  <a:lnTo>
-                    <a:pt x="1647318" y="1483274"/>
-                  </a:lnTo>
-                  <a:lnTo>
-                    <a:pt x="1718940" y="1553331"/>
-                  </a:lnTo>
-                  <a:lnTo>
-                    <a:pt x="1790563" y="1620934"/>
-                  </a:lnTo>
-                  <a:lnTo>
-                    <a:pt x="1862185" y="1686170"/>
-                  </a:lnTo>
-                  <a:lnTo>
-                    <a:pt x="1933808" y="1749121"/>
-                  </a:lnTo>
-                  <a:lnTo>
-                    <a:pt x="2005430" y="1809868"/>
-                  </a:lnTo>
-                  <a:lnTo>
-                    <a:pt x="2077053" y="1868487"/>
-                  </a:lnTo>
-                  <a:lnTo>
-                    <a:pt x="2148675" y="1925054"/>
-                  </a:lnTo>
-                  <a:lnTo>
-                    <a:pt x="2220298" y="1979639"/>
-                  </a:lnTo>
-                  <a:lnTo>
-                    <a:pt x="2291920" y="2032313"/>
-                  </a:lnTo>
-                  <a:lnTo>
-                    <a:pt x="2363543" y="2083142"/>
-                  </a:lnTo>
-                  <a:lnTo>
-                    <a:pt x="2435165" y="2132192"/>
-                  </a:lnTo>
-                  <a:lnTo>
-                    <a:pt x="2506788" y="2179523"/>
-                  </a:lnTo>
-                  <a:lnTo>
-                    <a:pt x="2578410" y="2225197"/>
-                  </a:lnTo>
-                  <a:lnTo>
-                    <a:pt x="2650033" y="2269272"/>
-                  </a:lnTo>
-                  <a:lnTo>
-                    <a:pt x="2721655" y="2311803"/>
-                  </a:lnTo>
-                  <a:lnTo>
-                    <a:pt x="2793278" y="2352844"/>
-                  </a:lnTo>
-                  <a:lnTo>
-                    <a:pt x="2864901" y="2392448"/>
-                  </a:lnTo>
-                  <a:lnTo>
-                    <a:pt x="2936523" y="2430666"/>
-                  </a:lnTo>
-                  <a:lnTo>
-                    <a:pt x="3008146" y="2467545"/>
-                  </a:lnTo>
-                  <a:lnTo>
-                    <a:pt x="3079768" y="2503132"/>
-                  </a:lnTo>
-                  <a:lnTo>
-                    <a:pt x="3151391" y="2537473"/>
-                  </a:lnTo>
-                  <a:lnTo>
-                    <a:pt x="3223013" y="2570612"/>
-                  </a:lnTo>
-                  <a:lnTo>
-                    <a:pt x="3294636" y="2602590"/>
-                  </a:lnTo>
-                  <a:lnTo>
-                    <a:pt x="3366258" y="2633448"/>
-                  </a:lnTo>
-                  <a:lnTo>
-                    <a:pt x="3437881" y="2653625"/>
-                  </a:lnTo>
-                  <a:lnTo>
-                    <a:pt x="3509503" y="2651459"/>
-                  </a:lnTo>
-                  <a:lnTo>
-                    <a:pt x="3581126" y="2649287"/>
-                  </a:lnTo>
-                  <a:lnTo>
-                    <a:pt x="3652748" y="2647110"/>
-                  </a:lnTo>
-                  <a:lnTo>
-                    <a:pt x="3724371" y="2644927"/>
-                  </a:lnTo>
-                  <a:lnTo>
-                    <a:pt x="3795993" y="2642738"/>
-                  </a:lnTo>
-                  <a:lnTo>
-                    <a:pt x="3867616" y="2640543"/>
-                  </a:lnTo>
-                  <a:lnTo>
-                    <a:pt x="3939238" y="2638343"/>
-                  </a:lnTo>
-                  <a:lnTo>
-                    <a:pt x="4010861" y="2636137"/>
-                  </a:lnTo>
-                  <a:lnTo>
-                    <a:pt x="4082483" y="2633925"/>
-                  </a:lnTo>
-                  <a:lnTo>
-                    <a:pt x="4154106" y="2631707"/>
-                  </a:lnTo>
-                  <a:lnTo>
-                    <a:pt x="4225729" y="2629484"/>
-                  </a:lnTo>
-                  <a:lnTo>
-                    <a:pt x="4297351" y="2627255"/>
-                  </a:lnTo>
-                  <a:lnTo>
-                    <a:pt x="4368974" y="2625020"/>
-                  </a:lnTo>
-                  <a:lnTo>
-                    <a:pt x="4440596" y="2622779"/>
-                  </a:lnTo>
-                  <a:lnTo>
-                    <a:pt x="4512219" y="2620532"/>
-                  </a:lnTo>
-                  <a:lnTo>
-                    <a:pt x="4583841" y="2618279"/>
-                  </a:lnTo>
-                  <a:lnTo>
-                    <a:pt x="4655464" y="2616021"/>
-                  </a:lnTo>
-                  <a:lnTo>
-                    <a:pt x="4727086" y="2613757"/>
-                  </a:lnTo>
-                  <a:lnTo>
-                    <a:pt x="4798709" y="2611486"/>
-                  </a:lnTo>
-                  <a:lnTo>
-                    <a:pt x="4870331" y="2609210"/>
-                  </a:lnTo>
-                  <a:lnTo>
-                    <a:pt x="4941954" y="2606928"/>
-                  </a:lnTo>
-                  <a:lnTo>
-                    <a:pt x="5013576" y="2604640"/>
-                  </a:lnTo>
-                  <a:lnTo>
-                    <a:pt x="5085199" y="2602346"/>
-                  </a:lnTo>
-                  <a:lnTo>
-                    <a:pt x="5156821" y="2600046"/>
-                  </a:lnTo>
-                  <a:lnTo>
-                    <a:pt x="5228444" y="2597740"/>
-                  </a:lnTo>
-                  <a:lnTo>
-                    <a:pt x="5300066" y="2595428"/>
-                  </a:lnTo>
-                  <a:lnTo>
-                    <a:pt x="5371689" y="2593110"/>
-                  </a:lnTo>
-                  <a:lnTo>
-                    <a:pt x="5443311" y="2590786"/>
-                  </a:lnTo>
-                  <a:lnTo>
-                    <a:pt x="5514934" y="2588456"/>
-                  </a:lnTo>
-                  <a:lnTo>
-                    <a:pt x="5586557" y="2586119"/>
-                  </a:lnTo>
-                  <a:lnTo>
-                    <a:pt x="5658179" y="2583777"/>
-                  </a:lnTo>
-                  <a:lnTo>
-                    <a:pt x="5729802" y="2581429"/>
-                  </a:lnTo>
-                  <a:lnTo>
-                    <a:pt x="5801424" y="2579074"/>
-                  </a:lnTo>
-                  <a:lnTo>
-                    <a:pt x="5873047" y="2576713"/>
-                  </a:lnTo>
-                  <a:lnTo>
-                    <a:pt x="5944669" y="2574346"/>
-                  </a:lnTo>
-                  <a:lnTo>
-                    <a:pt x="6016292" y="2571973"/>
-                  </a:lnTo>
-                  <a:lnTo>
-                    <a:pt x="6087914" y="2569594"/>
-                  </a:lnTo>
-                  <a:lnTo>
-                    <a:pt x="6159537" y="2567209"/>
-                  </a:lnTo>
-                  <a:lnTo>
-                    <a:pt x="6231159" y="2564817"/>
-                  </a:lnTo>
-                  <a:lnTo>
-                    <a:pt x="6302782" y="2562419"/>
-                  </a:lnTo>
-                  <a:lnTo>
-                    <a:pt x="6374404" y="2560015"/>
-                  </a:lnTo>
-                  <a:lnTo>
-                    <a:pt x="6446027" y="2557604"/>
-                  </a:lnTo>
-                  <a:lnTo>
-                    <a:pt x="6517649" y="2555187"/>
-                  </a:lnTo>
-                  <a:lnTo>
-                    <a:pt x="6589272" y="2552764"/>
-                  </a:lnTo>
-                  <a:lnTo>
-                    <a:pt x="6660894" y="2550335"/>
-                  </a:lnTo>
-                  <a:lnTo>
-                    <a:pt x="6732517" y="2547899"/>
-                  </a:lnTo>
-                  <a:lnTo>
-                    <a:pt x="6804139" y="2545457"/>
-                  </a:lnTo>
-                  <a:lnTo>
-                    <a:pt x="6875762" y="2543009"/>
-                  </a:lnTo>
-                  <a:lnTo>
-                    <a:pt x="6947385" y="2540554"/>
-                  </a:lnTo>
-                  <a:lnTo>
-                    <a:pt x="7019007" y="2538093"/>
-                  </a:lnTo>
-                  <a:lnTo>
-                    <a:pt x="7090630" y="2535625"/>
-                  </a:lnTo>
-                  <a:lnTo>
-                    <a:pt x="7090630" y="3350541"/>
-                  </a:lnTo>
-                  <a:lnTo>
-                    <a:pt x="7019007" y="3345707"/>
-                  </a:lnTo>
-                  <a:lnTo>
-                    <a:pt x="6947385" y="3340697"/>
-                  </a:lnTo>
-                  <a:lnTo>
-                    <a:pt x="6875762" y="3335506"/>
-                  </a:lnTo>
-                  <a:lnTo>
-                    <a:pt x="6804139" y="3330126"/>
-                  </a:lnTo>
-                  <a:lnTo>
-                    <a:pt x="6732517" y="3324551"/>
-                  </a:lnTo>
-                  <a:lnTo>
-                    <a:pt x="6660894" y="3318774"/>
-                  </a:lnTo>
-                  <a:lnTo>
-                    <a:pt x="6589272" y="3312787"/>
-                  </a:lnTo>
-                  <a:lnTo>
-                    <a:pt x="6517649" y="3306582"/>
-                  </a:lnTo>
-                  <a:lnTo>
-                    <a:pt x="6446027" y="3300153"/>
-                  </a:lnTo>
-                  <a:lnTo>
-                    <a:pt x="6374404" y="3293490"/>
-                  </a:lnTo>
-                  <a:lnTo>
-                    <a:pt x="6302782" y="3286585"/>
-                  </a:lnTo>
-                  <a:lnTo>
-                    <a:pt x="6231159" y="3279430"/>
-                  </a:lnTo>
-                  <a:lnTo>
-                    <a:pt x="6159537" y="3272015"/>
-                  </a:lnTo>
-                  <a:lnTo>
-                    <a:pt x="6087914" y="3264331"/>
-                  </a:lnTo>
-                  <a:lnTo>
-                    <a:pt x="6016292" y="3256369"/>
-                  </a:lnTo>
-                  <a:lnTo>
-                    <a:pt x="5944669" y="3248117"/>
-                  </a:lnTo>
-                  <a:lnTo>
-                    <a:pt x="5873047" y="3239566"/>
-                  </a:lnTo>
-                  <a:lnTo>
-                    <a:pt x="5801424" y="3230704"/>
-                  </a:lnTo>
-                  <a:lnTo>
-                    <a:pt x="5729802" y="3221521"/>
-                  </a:lnTo>
-                  <a:lnTo>
-                    <a:pt x="5658179" y="3212005"/>
-                  </a:lnTo>
-                  <a:lnTo>
-                    <a:pt x="5586557" y="3202143"/>
-                  </a:lnTo>
-                  <a:lnTo>
-                    <a:pt x="5514934" y="3191923"/>
-                  </a:lnTo>
-                  <a:lnTo>
-                    <a:pt x="5443311" y="3181333"/>
-                  </a:lnTo>
-                  <a:lnTo>
-                    <a:pt x="5371689" y="3170358"/>
-                  </a:lnTo>
-                  <a:lnTo>
-                    <a:pt x="5300066" y="3158985"/>
-                  </a:lnTo>
-                  <a:lnTo>
-                    <a:pt x="5228444" y="3147199"/>
-                  </a:lnTo>
-                  <a:lnTo>
-                    <a:pt x="5156821" y="3134985"/>
-                  </a:lnTo>
-                  <a:lnTo>
-                    <a:pt x="5085199" y="3122328"/>
-                  </a:lnTo>
-                  <a:lnTo>
-                    <a:pt x="5013576" y="3109212"/>
-                  </a:lnTo>
-                  <a:lnTo>
-                    <a:pt x="4941954" y="3095620"/>
-                  </a:lnTo>
-                  <a:lnTo>
-                    <a:pt x="4870331" y="3081534"/>
-                  </a:lnTo>
-                  <a:lnTo>
-                    <a:pt x="4798709" y="3066937"/>
-                  </a:lnTo>
-                  <a:lnTo>
-                    <a:pt x="4727086" y="3051811"/>
-                  </a:lnTo>
-                  <a:lnTo>
-                    <a:pt x="4655464" y="3036136"/>
-                  </a:lnTo>
-                  <a:lnTo>
-                    <a:pt x="4583841" y="3019891"/>
-                  </a:lnTo>
-                  <a:lnTo>
-                    <a:pt x="4512219" y="3003058"/>
-                  </a:lnTo>
-                  <a:lnTo>
-                    <a:pt x="4440596" y="2985613"/>
-                  </a:lnTo>
-                  <a:lnTo>
-                    <a:pt x="4368974" y="2967535"/>
-                  </a:lnTo>
-                  <a:lnTo>
-                    <a:pt x="4297351" y="2948802"/>
-                  </a:lnTo>
-                  <a:lnTo>
-                    <a:pt x="4225729" y="2929388"/>
-                  </a:lnTo>
-                  <a:lnTo>
-                    <a:pt x="4154106" y="2909270"/>
-                  </a:lnTo>
-                  <a:lnTo>
-                    <a:pt x="4082483" y="2888421"/>
-                  </a:lnTo>
-                  <a:lnTo>
-                    <a:pt x="4010861" y="2866816"/>
-                  </a:lnTo>
-                  <a:lnTo>
-                    <a:pt x="3939238" y="2844427"/>
-                  </a:lnTo>
-                  <a:lnTo>
-                    <a:pt x="3867616" y="2821226"/>
-                  </a:lnTo>
-                  <a:lnTo>
-                    <a:pt x="3795993" y="2797182"/>
-                  </a:lnTo>
-                  <a:lnTo>
-                    <a:pt x="3724371" y="2772266"/>
-                  </a:lnTo>
-                  <a:lnTo>
-                    <a:pt x="3652748" y="2746446"/>
-                  </a:lnTo>
-                  <a:lnTo>
-                    <a:pt x="3581126" y="2719689"/>
-                  </a:lnTo>
-                  <a:lnTo>
-                    <a:pt x="3509503" y="2691960"/>
-                  </a:lnTo>
-                  <a:lnTo>
-                    <a:pt x="3437881" y="2663226"/>
-                  </a:lnTo>
-                  <a:lnTo>
-                    <a:pt x="3366258" y="2655786"/>
-                  </a:lnTo>
-                  <a:lnTo>
-                    <a:pt x="3294636" y="2657941"/>
-                  </a:lnTo>
-                  <a:lnTo>
-                    <a:pt x="3223013" y="2660090"/>
-                  </a:lnTo>
-                  <a:lnTo>
-                    <a:pt x="3151391" y="2662234"/>
-                  </a:lnTo>
-                  <a:lnTo>
-                    <a:pt x="3079768" y="2664372"/>
-                  </a:lnTo>
-                  <a:lnTo>
-                    <a:pt x="3008146" y="2666505"/>
-                  </a:lnTo>
-                  <a:lnTo>
-                    <a:pt x="2936523" y="2668632"/>
-                  </a:lnTo>
-                  <a:lnTo>
-                    <a:pt x="2864901" y="2670753"/>
-                  </a:lnTo>
-                  <a:lnTo>
-                    <a:pt x="2793278" y="2672869"/>
-                  </a:lnTo>
-                  <a:lnTo>
-                    <a:pt x="2721655" y="2674980"/>
-                  </a:lnTo>
-                  <a:lnTo>
-                    <a:pt x="2650033" y="2677085"/>
-                  </a:lnTo>
-                  <a:lnTo>
-                    <a:pt x="2578410" y="2679184"/>
-                  </a:lnTo>
-                  <a:lnTo>
-                    <a:pt x="2506788" y="2681278"/>
-                  </a:lnTo>
-                  <a:lnTo>
-                    <a:pt x="2435165" y="2683367"/>
-                  </a:lnTo>
-                  <a:lnTo>
-                    <a:pt x="2363543" y="2685450"/>
-                  </a:lnTo>
-                  <a:lnTo>
-                    <a:pt x="2291920" y="2687528"/>
-                  </a:lnTo>
-                  <a:lnTo>
-                    <a:pt x="2220298" y="2689600"/>
-                  </a:lnTo>
-                  <a:lnTo>
-                    <a:pt x="2148675" y="2691667"/>
-                  </a:lnTo>
-                  <a:lnTo>
-                    <a:pt x="2077053" y="2693728"/>
-                  </a:lnTo>
-                  <a:lnTo>
-                    <a:pt x="2005430" y="2695785"/>
-                  </a:lnTo>
-                  <a:lnTo>
-                    <a:pt x="1933808" y="2697835"/>
-                  </a:lnTo>
-                  <a:lnTo>
-                    <a:pt x="1862185" y="2699881"/>
-                  </a:lnTo>
-                  <a:lnTo>
-                    <a:pt x="1790563" y="2701921"/>
-                  </a:lnTo>
-                  <a:lnTo>
-                    <a:pt x="1718940" y="2703956"/>
-                  </a:lnTo>
-                  <a:lnTo>
-                    <a:pt x="1647318" y="2705986"/>
-                  </a:lnTo>
-                  <a:lnTo>
-                    <a:pt x="1575695" y="2708010"/>
-                  </a:lnTo>
-                  <a:lnTo>
-                    <a:pt x="1504073" y="2710029"/>
-                  </a:lnTo>
-                  <a:lnTo>
-                    <a:pt x="1432450" y="2712043"/>
-                  </a:lnTo>
-                  <a:lnTo>
-                    <a:pt x="1360827" y="2714051"/>
-                  </a:lnTo>
-                  <a:lnTo>
-                    <a:pt x="1289205" y="2716054"/>
-                  </a:lnTo>
-                  <a:lnTo>
-                    <a:pt x="1217582" y="2718052"/>
-                  </a:lnTo>
-                  <a:lnTo>
-                    <a:pt x="1145960" y="2720045"/>
-                  </a:lnTo>
-                  <a:lnTo>
-                    <a:pt x="1074337" y="2722033"/>
-                  </a:lnTo>
-                  <a:lnTo>
-                    <a:pt x="1002715" y="2724016"/>
-                  </a:lnTo>
-                  <a:lnTo>
-                    <a:pt x="931092" y="2725993"/>
-                  </a:lnTo>
-                  <a:lnTo>
-                    <a:pt x="859470" y="2727965"/>
-                  </a:lnTo>
-                  <a:lnTo>
-                    <a:pt x="787847" y="2729932"/>
-                  </a:lnTo>
-                  <a:lnTo>
-                    <a:pt x="716225" y="2731894"/>
-                  </a:lnTo>
-                  <a:lnTo>
-                    <a:pt x="644602" y="2733851"/>
-                  </a:lnTo>
-                  <a:lnTo>
-                    <a:pt x="572980" y="2735803"/>
-                  </a:lnTo>
-                  <a:lnTo>
-                    <a:pt x="501357" y="2737749"/>
-                  </a:lnTo>
-                  <a:lnTo>
-                    <a:pt x="429735" y="2739691"/>
-                  </a:lnTo>
-                  <a:lnTo>
-                    <a:pt x="358112" y="2741628"/>
-                  </a:lnTo>
-                  <a:lnTo>
-                    <a:pt x="286490" y="2743559"/>
-                  </a:lnTo>
-                  <a:lnTo>
-                    <a:pt x="214867" y="2745486"/>
-                  </a:lnTo>
-                  <a:lnTo>
-                    <a:pt x="143245" y="2747407"/>
-                  </a:lnTo>
-                  <a:lnTo>
-                    <a:pt x="71622" y="2749324"/>
-                  </a:lnTo>
-                  <a:lnTo>
-                    <a:pt x="0" y="2751235"/>
+                    <a:pt x="0" y="0"/>
+                  </a:lnTo>
+                  <a:lnTo>
+                    <a:pt x="0" y="0"/>
+                  </a:lnTo>
+                </a:path>
+              </a:pathLst>
+            </a:custGeom>
+            <a:ln w="13550" cap="flat">
+              <a:solidFill>
+                <a:srgbClr val="EBEBEB">
+                  <a:alpha val="100000"/>
+                </a:srgbClr>
+              </a:solidFill>
+              <a:prstDash val="solid"/>
+              <a:round/>
+            </a:ln>
+          </p:spPr>
+          <p:txBody>
+            <a:bodyPr/>
+            <a:lstStyle/>
+            <a:p/>
+          </p:txBody>
+        </p:sp>
+        <p:sp>
+          <p:nvSpPr>
+            <p:cNvPr id="21" name="pg21"/>
+            <p:cNvSpPr/>
+            <p:nvPr/>
+          </p:nvSpPr>
+          <p:spPr>
+            <a:xfrm>
+              <a:off x="1235312" y="2143092"/>
+              <a:ext cx="6964104" cy="1209131"/>
+            </a:xfrm>
+            <a:custGeom>
+              <a:avLst/>
+              <a:pathLst>
+                <a:path w="6964104" h="1209131">
+                  <a:moveTo>
+                    <a:pt x="523587" y="0"/>
+                  </a:moveTo>
+                  <a:lnTo>
+                    <a:pt x="562755" y="24901"/>
+                  </a:lnTo>
+                  <a:lnTo>
+                    <a:pt x="633100" y="68056"/>
+                  </a:lnTo>
+                  <a:lnTo>
+                    <a:pt x="703444" y="109700"/>
+                  </a:lnTo>
+                  <a:lnTo>
+                    <a:pt x="773789" y="149886"/>
+                  </a:lnTo>
+                  <a:lnTo>
+                    <a:pt x="844133" y="188664"/>
+                  </a:lnTo>
+                  <a:lnTo>
+                    <a:pt x="914478" y="226084"/>
+                  </a:lnTo>
+                  <a:lnTo>
+                    <a:pt x="984822" y="262194"/>
+                  </a:lnTo>
+                  <a:lnTo>
+                    <a:pt x="1055167" y="297039"/>
+                  </a:lnTo>
+                  <a:lnTo>
+                    <a:pt x="1125511" y="330664"/>
+                  </a:lnTo>
+                  <a:lnTo>
+                    <a:pt x="1195856" y="363111"/>
+                  </a:lnTo>
+                  <a:lnTo>
+                    <a:pt x="1266200" y="394423"/>
+                  </a:lnTo>
+                  <a:lnTo>
+                    <a:pt x="1336545" y="424637"/>
+                  </a:lnTo>
+                  <a:lnTo>
+                    <a:pt x="1406889" y="453794"/>
+                  </a:lnTo>
+                  <a:lnTo>
+                    <a:pt x="1477234" y="481929"/>
+                  </a:lnTo>
+                  <a:lnTo>
+                    <a:pt x="1547578" y="509079"/>
+                  </a:lnTo>
+                  <a:lnTo>
+                    <a:pt x="1617923" y="535278"/>
+                  </a:lnTo>
+                  <a:lnTo>
+                    <a:pt x="1688267" y="560560"/>
+                  </a:lnTo>
+                  <a:lnTo>
+                    <a:pt x="1758612" y="584957"/>
+                  </a:lnTo>
+                  <a:lnTo>
+                    <a:pt x="1828956" y="608499"/>
+                  </a:lnTo>
+                  <a:lnTo>
+                    <a:pt x="1899301" y="631216"/>
+                  </a:lnTo>
+                  <a:lnTo>
+                    <a:pt x="1969645" y="653138"/>
+                  </a:lnTo>
+                  <a:lnTo>
+                    <a:pt x="2039990" y="674293"/>
+                  </a:lnTo>
+                  <a:lnTo>
+                    <a:pt x="2110334" y="694706"/>
+                  </a:lnTo>
+                  <a:lnTo>
+                    <a:pt x="2180679" y="714405"/>
+                  </a:lnTo>
+                  <a:lnTo>
+                    <a:pt x="2251023" y="733414"/>
+                  </a:lnTo>
+                  <a:lnTo>
+                    <a:pt x="2321368" y="751757"/>
+                  </a:lnTo>
+                  <a:lnTo>
+                    <a:pt x="2391712" y="769457"/>
+                  </a:lnTo>
+                  <a:lnTo>
+                    <a:pt x="2462057" y="786538"/>
+                  </a:lnTo>
+                  <a:lnTo>
+                    <a:pt x="2532401" y="803021"/>
+                  </a:lnTo>
+                  <a:lnTo>
+                    <a:pt x="2602746" y="818926"/>
+                  </a:lnTo>
+                  <a:lnTo>
+                    <a:pt x="2673090" y="834275"/>
+                  </a:lnTo>
+                  <a:lnTo>
+                    <a:pt x="2743435" y="849086"/>
+                  </a:lnTo>
+                  <a:lnTo>
+                    <a:pt x="2813779" y="863378"/>
+                  </a:lnTo>
+                  <a:lnTo>
+                    <a:pt x="2884124" y="877170"/>
+                  </a:lnTo>
+                  <a:lnTo>
+                    <a:pt x="2954468" y="890479"/>
+                  </a:lnTo>
+                  <a:lnTo>
+                    <a:pt x="3024813" y="903321"/>
+                  </a:lnTo>
+                  <a:lnTo>
+                    <a:pt x="3095157" y="915714"/>
+                  </a:lnTo>
+                  <a:lnTo>
+                    <a:pt x="3165502" y="927673"/>
+                  </a:lnTo>
+                  <a:lnTo>
+                    <a:pt x="3235846" y="939213"/>
+                  </a:lnTo>
+                  <a:lnTo>
+                    <a:pt x="3306191" y="950349"/>
+                  </a:lnTo>
+                  <a:lnTo>
+                    <a:pt x="3376535" y="957631"/>
+                  </a:lnTo>
+                  <a:lnTo>
+                    <a:pt x="3446880" y="956849"/>
+                  </a:lnTo>
+                  <a:lnTo>
+                    <a:pt x="3517224" y="956065"/>
+                  </a:lnTo>
+                  <a:lnTo>
+                    <a:pt x="3587569" y="955279"/>
+                  </a:lnTo>
+                  <a:lnTo>
+                    <a:pt x="3657913" y="954491"/>
+                  </a:lnTo>
+                  <a:lnTo>
+                    <a:pt x="3728257" y="953702"/>
+                  </a:lnTo>
+                  <a:lnTo>
+                    <a:pt x="3798602" y="952910"/>
+                  </a:lnTo>
+                  <a:lnTo>
+                    <a:pt x="3868946" y="952115"/>
+                  </a:lnTo>
+                  <a:lnTo>
+                    <a:pt x="3939291" y="951319"/>
+                  </a:lnTo>
+                  <a:lnTo>
+                    <a:pt x="4009635" y="950521"/>
+                  </a:lnTo>
+                  <a:lnTo>
+                    <a:pt x="4079980" y="949721"/>
+                  </a:lnTo>
+                  <a:lnTo>
+                    <a:pt x="4150324" y="948918"/>
+                  </a:lnTo>
+                  <a:lnTo>
+                    <a:pt x="4220669" y="948114"/>
+                  </a:lnTo>
+                  <a:lnTo>
+                    <a:pt x="4291013" y="947307"/>
+                  </a:lnTo>
+                  <a:lnTo>
+                    <a:pt x="4361358" y="946499"/>
+                  </a:lnTo>
+                  <a:lnTo>
+                    <a:pt x="4431702" y="945688"/>
+                  </a:lnTo>
+                  <a:lnTo>
+                    <a:pt x="4502047" y="944875"/>
+                  </a:lnTo>
+                  <a:lnTo>
+                    <a:pt x="4572391" y="944060"/>
+                  </a:lnTo>
+                  <a:lnTo>
+                    <a:pt x="4642736" y="943243"/>
+                  </a:lnTo>
+                  <a:lnTo>
+                    <a:pt x="4713080" y="942424"/>
+                  </a:lnTo>
+                  <a:lnTo>
+                    <a:pt x="4783425" y="941602"/>
+                  </a:lnTo>
+                  <a:lnTo>
+                    <a:pt x="4853769" y="940779"/>
+                  </a:lnTo>
+                  <a:lnTo>
+                    <a:pt x="4924114" y="939953"/>
+                  </a:lnTo>
+                  <a:lnTo>
+                    <a:pt x="4994458" y="939125"/>
+                  </a:lnTo>
+                  <a:lnTo>
+                    <a:pt x="5064803" y="938295"/>
+                  </a:lnTo>
+                  <a:lnTo>
+                    <a:pt x="5135147" y="937463"/>
+                  </a:lnTo>
+                  <a:lnTo>
+                    <a:pt x="5205492" y="936629"/>
+                  </a:lnTo>
+                  <a:lnTo>
+                    <a:pt x="5275836" y="935792"/>
+                  </a:lnTo>
+                  <a:lnTo>
+                    <a:pt x="5346181" y="934953"/>
+                  </a:lnTo>
+                  <a:lnTo>
+                    <a:pt x="5416525" y="934112"/>
+                  </a:lnTo>
+                  <a:lnTo>
+                    <a:pt x="5486870" y="933269"/>
+                  </a:lnTo>
+                  <a:lnTo>
+                    <a:pt x="5557214" y="932424"/>
+                  </a:lnTo>
+                  <a:lnTo>
+                    <a:pt x="5627559" y="931577"/>
+                  </a:lnTo>
+                  <a:lnTo>
+                    <a:pt x="5697903" y="930727"/>
+                  </a:lnTo>
+                  <a:lnTo>
+                    <a:pt x="5768248" y="929875"/>
+                  </a:lnTo>
+                  <a:lnTo>
+                    <a:pt x="5838592" y="929021"/>
+                  </a:lnTo>
+                  <a:lnTo>
+                    <a:pt x="5908937" y="928164"/>
+                  </a:lnTo>
+                  <a:lnTo>
+                    <a:pt x="5979281" y="927306"/>
+                  </a:lnTo>
+                  <a:lnTo>
+                    <a:pt x="6049626" y="926445"/>
+                  </a:lnTo>
+                  <a:lnTo>
+                    <a:pt x="6119970" y="925582"/>
+                  </a:lnTo>
+                  <a:lnTo>
+                    <a:pt x="6190315" y="924716"/>
+                  </a:lnTo>
+                  <a:lnTo>
+                    <a:pt x="6260659" y="923849"/>
+                  </a:lnTo>
+                  <a:lnTo>
+                    <a:pt x="6331004" y="922979"/>
+                  </a:lnTo>
+                  <a:lnTo>
+                    <a:pt x="6401348" y="922107"/>
+                  </a:lnTo>
+                  <a:lnTo>
+                    <a:pt x="6471693" y="921232"/>
+                  </a:lnTo>
+                  <a:lnTo>
+                    <a:pt x="6542037" y="920356"/>
+                  </a:lnTo>
+                  <a:lnTo>
+                    <a:pt x="6612382" y="919477"/>
+                  </a:lnTo>
+                  <a:lnTo>
+                    <a:pt x="6682726" y="918595"/>
+                  </a:lnTo>
+                  <a:lnTo>
+                    <a:pt x="6753071" y="917712"/>
+                  </a:lnTo>
+                  <a:lnTo>
+                    <a:pt x="6823415" y="916826"/>
+                  </a:lnTo>
+                  <a:lnTo>
+                    <a:pt x="6893760" y="915938"/>
+                  </a:lnTo>
+                  <a:lnTo>
+                    <a:pt x="6964104" y="915047"/>
+                  </a:lnTo>
+                  <a:lnTo>
+                    <a:pt x="6964104" y="1209131"/>
+                  </a:lnTo>
+                  <a:lnTo>
+                    <a:pt x="6893760" y="1207387"/>
+                  </a:lnTo>
+                  <a:lnTo>
+                    <a:pt x="6823415" y="1205579"/>
+                  </a:lnTo>
+                  <a:lnTo>
+                    <a:pt x="6753071" y="1203705"/>
+                  </a:lnTo>
+                  <a:lnTo>
+                    <a:pt x="6682726" y="1201764"/>
+                  </a:lnTo>
+                  <a:lnTo>
+                    <a:pt x="6612382" y="1199752"/>
+                  </a:lnTo>
+                  <a:lnTo>
+                    <a:pt x="6542037" y="1197667"/>
+                  </a:lnTo>
+                  <a:lnTo>
+                    <a:pt x="6471693" y="1195506"/>
+                  </a:lnTo>
+                  <a:lnTo>
+                    <a:pt x="6401348" y="1193267"/>
+                  </a:lnTo>
+                  <a:lnTo>
+                    <a:pt x="6331004" y="1190947"/>
+                  </a:lnTo>
+                  <a:lnTo>
+                    <a:pt x="6260659" y="1188543"/>
+                  </a:lnTo>
+                  <a:lnTo>
+                    <a:pt x="6190315" y="1186051"/>
+                  </a:lnTo>
+                  <a:lnTo>
+                    <a:pt x="6119970" y="1183469"/>
+                  </a:lnTo>
+                  <a:lnTo>
+                    <a:pt x="6049626" y="1180793"/>
+                  </a:lnTo>
+                  <a:lnTo>
+                    <a:pt x="5979281" y="1178020"/>
+                  </a:lnTo>
+                  <a:lnTo>
+                    <a:pt x="5908937" y="1175147"/>
+                  </a:lnTo>
+                  <a:lnTo>
+                    <a:pt x="5838592" y="1172169"/>
+                  </a:lnTo>
+                  <a:lnTo>
+                    <a:pt x="5768248" y="1169083"/>
+                  </a:lnTo>
+                  <a:lnTo>
+                    <a:pt x="5697903" y="1165885"/>
+                  </a:lnTo>
+                  <a:lnTo>
+                    <a:pt x="5627559" y="1162571"/>
+                  </a:lnTo>
+                  <a:lnTo>
+                    <a:pt x="5557214" y="1159137"/>
+                  </a:lnTo>
+                  <a:lnTo>
+                    <a:pt x="5486870" y="1155578"/>
+                  </a:lnTo>
+                  <a:lnTo>
+                    <a:pt x="5416525" y="1151890"/>
+                  </a:lnTo>
+                  <a:lnTo>
+                    <a:pt x="5346181" y="1148068"/>
+                  </a:lnTo>
+                  <a:lnTo>
+                    <a:pt x="5275836" y="1144107"/>
+                  </a:lnTo>
+                  <a:lnTo>
+                    <a:pt x="5205492" y="1140003"/>
+                  </a:lnTo>
+                  <a:lnTo>
+                    <a:pt x="5135147" y="1135750"/>
+                  </a:lnTo>
+                  <a:lnTo>
+                    <a:pt x="5064803" y="1131342"/>
+                  </a:lnTo>
+                  <a:lnTo>
+                    <a:pt x="4994458" y="1126774"/>
+                  </a:lnTo>
+                  <a:lnTo>
+                    <a:pt x="4924114" y="1122041"/>
+                  </a:lnTo>
+                  <a:lnTo>
+                    <a:pt x="4853769" y="1117136"/>
+                  </a:lnTo>
+                  <a:lnTo>
+                    <a:pt x="4783425" y="1112053"/>
+                  </a:lnTo>
+                  <a:lnTo>
+                    <a:pt x="4713080" y="1106785"/>
+                  </a:lnTo>
+                  <a:lnTo>
+                    <a:pt x="4642736" y="1101326"/>
+                  </a:lnTo>
+                  <a:lnTo>
+                    <a:pt x="4572391" y="1095670"/>
+                  </a:lnTo>
+                  <a:lnTo>
+                    <a:pt x="4502047" y="1089807"/>
+                  </a:lnTo>
+                  <a:lnTo>
+                    <a:pt x="4431702" y="1083733"/>
+                  </a:lnTo>
+                  <a:lnTo>
+                    <a:pt x="4361358" y="1077437"/>
+                  </a:lnTo>
+                  <a:lnTo>
+                    <a:pt x="4291013" y="1070913"/>
+                  </a:lnTo>
+                  <a:lnTo>
+                    <a:pt x="4220669" y="1064153"/>
+                  </a:lnTo>
+                  <a:lnTo>
+                    <a:pt x="4150324" y="1057147"/>
+                  </a:lnTo>
+                  <a:lnTo>
+                    <a:pt x="4079980" y="1049887"/>
+                  </a:lnTo>
+                  <a:lnTo>
+                    <a:pt x="4009635" y="1042363"/>
+                  </a:lnTo>
+                  <a:lnTo>
+                    <a:pt x="3939291" y="1034566"/>
+                  </a:lnTo>
+                  <a:lnTo>
+                    <a:pt x="3868946" y="1026487"/>
+                  </a:lnTo>
+                  <a:lnTo>
+                    <a:pt x="3798602" y="1018114"/>
+                  </a:lnTo>
+                  <a:lnTo>
+                    <a:pt x="3728257" y="1009437"/>
+                  </a:lnTo>
+                  <a:lnTo>
+                    <a:pt x="3657913" y="1000445"/>
+                  </a:lnTo>
+                  <a:lnTo>
+                    <a:pt x="3587569" y="991127"/>
+                  </a:lnTo>
+                  <a:lnTo>
+                    <a:pt x="3517224" y="981471"/>
+                  </a:lnTo>
+                  <a:lnTo>
+                    <a:pt x="3446880" y="971465"/>
+                  </a:lnTo>
+                  <a:lnTo>
+                    <a:pt x="3376535" y="961095"/>
+                  </a:lnTo>
+                  <a:lnTo>
+                    <a:pt x="3306191" y="958410"/>
+                  </a:lnTo>
+                  <a:lnTo>
+                    <a:pt x="3235846" y="959188"/>
+                  </a:lnTo>
+                  <a:lnTo>
+                    <a:pt x="3165502" y="959964"/>
+                  </a:lnTo>
+                  <a:lnTo>
+                    <a:pt x="3095157" y="960737"/>
+                  </a:lnTo>
+                  <a:lnTo>
+                    <a:pt x="3024813" y="961509"/>
+                  </a:lnTo>
+                  <a:lnTo>
+                    <a:pt x="2954468" y="962278"/>
+                  </a:lnTo>
+                  <a:lnTo>
+                    <a:pt x="2884124" y="963046"/>
+                  </a:lnTo>
+                  <a:lnTo>
+                    <a:pt x="2813779" y="963812"/>
+                  </a:lnTo>
+                  <a:lnTo>
+                    <a:pt x="2743435" y="964575"/>
+                  </a:lnTo>
+                  <a:lnTo>
+                    <a:pt x="2673090" y="965337"/>
+                  </a:lnTo>
+                  <a:lnTo>
+                    <a:pt x="2602746" y="966097"/>
+                  </a:lnTo>
+                  <a:lnTo>
+                    <a:pt x="2532401" y="966854"/>
+                  </a:lnTo>
+                  <a:lnTo>
+                    <a:pt x="2462057" y="967610"/>
+                  </a:lnTo>
+                  <a:lnTo>
+                    <a:pt x="2391712" y="968364"/>
+                  </a:lnTo>
+                  <a:lnTo>
+                    <a:pt x="2321368" y="969115"/>
+                  </a:lnTo>
+                  <a:lnTo>
+                    <a:pt x="2251023" y="969865"/>
+                  </a:lnTo>
+                  <a:lnTo>
+                    <a:pt x="2180679" y="970613"/>
+                  </a:lnTo>
+                  <a:lnTo>
+                    <a:pt x="2110334" y="971359"/>
+                  </a:lnTo>
+                  <a:lnTo>
+                    <a:pt x="2039990" y="972103"/>
+                  </a:lnTo>
+                  <a:lnTo>
+                    <a:pt x="1969645" y="972845"/>
+                  </a:lnTo>
+                  <a:lnTo>
+                    <a:pt x="1899301" y="973585"/>
+                  </a:lnTo>
+                  <a:lnTo>
+                    <a:pt x="1828956" y="974323"/>
+                  </a:lnTo>
+                  <a:lnTo>
+                    <a:pt x="1758612" y="975059"/>
+                  </a:lnTo>
+                  <a:lnTo>
+                    <a:pt x="1688267" y="975794"/>
+                  </a:lnTo>
+                  <a:lnTo>
+                    <a:pt x="1617923" y="976526"/>
+                  </a:lnTo>
+                  <a:lnTo>
+                    <a:pt x="1547578" y="977257"/>
+                  </a:lnTo>
+                  <a:lnTo>
+                    <a:pt x="1477234" y="977985"/>
+                  </a:lnTo>
+                  <a:lnTo>
+                    <a:pt x="1406889" y="978712"/>
+                  </a:lnTo>
+                  <a:lnTo>
+                    <a:pt x="1336545" y="979437"/>
+                  </a:lnTo>
+                  <a:lnTo>
+                    <a:pt x="1266200" y="980160"/>
+                  </a:lnTo>
+                  <a:lnTo>
+                    <a:pt x="1195856" y="980881"/>
+                  </a:lnTo>
+                  <a:lnTo>
+                    <a:pt x="1125511" y="981600"/>
+                  </a:lnTo>
+                  <a:lnTo>
+                    <a:pt x="1055167" y="982317"/>
+                  </a:lnTo>
+                  <a:lnTo>
+                    <a:pt x="984822" y="983033"/>
+                  </a:lnTo>
+                  <a:lnTo>
+                    <a:pt x="914478" y="983746"/>
+                  </a:lnTo>
+                  <a:lnTo>
+                    <a:pt x="844133" y="984458"/>
+                  </a:lnTo>
+                  <a:lnTo>
+                    <a:pt x="773789" y="985168"/>
+                  </a:lnTo>
+                  <a:lnTo>
+                    <a:pt x="703444" y="985876"/>
+                  </a:lnTo>
+                  <a:lnTo>
+                    <a:pt x="633100" y="986582"/>
+                  </a:lnTo>
+                  <a:lnTo>
+                    <a:pt x="562755" y="987287"/>
+                  </a:lnTo>
+                  <a:lnTo>
+                    <a:pt x="492411" y="987989"/>
+                  </a:lnTo>
+                  <a:lnTo>
+                    <a:pt x="422066" y="988690"/>
+                  </a:lnTo>
+                  <a:lnTo>
+                    <a:pt x="351722" y="989389"/>
+                  </a:lnTo>
+                  <a:lnTo>
+                    <a:pt x="281377" y="990086"/>
+                  </a:lnTo>
+                  <a:lnTo>
+                    <a:pt x="211033" y="990781"/>
+                  </a:lnTo>
+                  <a:lnTo>
+                    <a:pt x="140688" y="991474"/>
+                  </a:lnTo>
+                  <a:lnTo>
+                    <a:pt x="70344" y="992166"/>
+                  </a:lnTo>
+                  <a:lnTo>
+                    <a:pt x="0" y="992856"/>
                   </a:lnTo>
                   <a:close/>
                 </a:path>
@@ -3563,622 +3598,297 @@
         </p:sp>
         <p:sp>
           <p:nvSpPr>
-            <p:cNvPr id="21" name="pl21"/>
-            <p:cNvSpPr/>
-            <p:nvPr/>
-          </p:nvSpPr>
-          <p:spPr>
-            <a:xfrm>
-              <a:off x="1705149" y="2073503"/>
-              <a:ext cx="6557529" cy="2653625"/>
-            </a:xfrm>
-            <a:custGeom>
-              <a:avLst/>
-              <a:pathLst>
-                <a:path w="6557529" h="2653625">
-                  <a:moveTo>
-                    <a:pt x="0" y="0"/>
-                  </a:moveTo>
-                  <a:lnTo>
-                    <a:pt x="39879" y="69002"/>
-                  </a:lnTo>
-                  <a:lnTo>
-                    <a:pt x="111502" y="188586"/>
-                  </a:lnTo>
-                  <a:lnTo>
-                    <a:pt x="183125" y="303983"/>
-                  </a:lnTo>
-                  <a:lnTo>
-                    <a:pt x="254747" y="415338"/>
-                  </a:lnTo>
-                  <a:lnTo>
-                    <a:pt x="326370" y="522794"/>
-                  </a:lnTo>
-                  <a:lnTo>
-                    <a:pt x="397992" y="626487"/>
-                  </a:lnTo>
-                  <a:lnTo>
-                    <a:pt x="469615" y="726548"/>
-                  </a:lnTo>
-                  <a:lnTo>
-                    <a:pt x="541237" y="823106"/>
-                  </a:lnTo>
-                  <a:lnTo>
-                    <a:pt x="612860" y="916281"/>
-                  </a:lnTo>
-                  <a:lnTo>
-                    <a:pt x="684482" y="1006194"/>
-                  </a:lnTo>
-                  <a:lnTo>
-                    <a:pt x="756105" y="1092958"/>
-                  </a:lnTo>
-                  <a:lnTo>
-                    <a:pt x="827727" y="1176684"/>
-                  </a:lnTo>
-                  <a:lnTo>
-                    <a:pt x="899350" y="1257477"/>
-                  </a:lnTo>
-                  <a:lnTo>
-                    <a:pt x="970972" y="1335441"/>
-                  </a:lnTo>
-                  <a:lnTo>
-                    <a:pt x="1042595" y="1410675"/>
-                  </a:lnTo>
-                  <a:lnTo>
-                    <a:pt x="1114217" y="1483274"/>
-                  </a:lnTo>
-                  <a:lnTo>
-                    <a:pt x="1185840" y="1553331"/>
-                  </a:lnTo>
-                  <a:lnTo>
-                    <a:pt x="1257462" y="1620934"/>
-                  </a:lnTo>
-                  <a:lnTo>
-                    <a:pt x="1329085" y="1686170"/>
-                  </a:lnTo>
-                  <a:lnTo>
-                    <a:pt x="1400707" y="1749121"/>
-                  </a:lnTo>
-                  <a:lnTo>
-                    <a:pt x="1472330" y="1809868"/>
-                  </a:lnTo>
-                  <a:lnTo>
-                    <a:pt x="1543953" y="1868487"/>
-                  </a:lnTo>
-                  <a:lnTo>
-                    <a:pt x="1615575" y="1925054"/>
-                  </a:lnTo>
-                  <a:lnTo>
-                    <a:pt x="1687198" y="1979639"/>
-                  </a:lnTo>
-                  <a:lnTo>
-                    <a:pt x="1758820" y="2032313"/>
-                  </a:lnTo>
-                  <a:lnTo>
-                    <a:pt x="1830443" y="2083142"/>
-                  </a:lnTo>
-                  <a:lnTo>
-                    <a:pt x="1902065" y="2132192"/>
-                  </a:lnTo>
-                  <a:lnTo>
-                    <a:pt x="1973688" y="2179523"/>
-                  </a:lnTo>
-                  <a:lnTo>
-                    <a:pt x="2045310" y="2225197"/>
-                  </a:lnTo>
-                  <a:lnTo>
-                    <a:pt x="2116933" y="2269272"/>
-                  </a:lnTo>
-                  <a:lnTo>
-                    <a:pt x="2188555" y="2311803"/>
-                  </a:lnTo>
-                  <a:lnTo>
-                    <a:pt x="2260178" y="2352844"/>
-                  </a:lnTo>
-                  <a:lnTo>
-                    <a:pt x="2331800" y="2392448"/>
-                  </a:lnTo>
-                  <a:lnTo>
-                    <a:pt x="2403423" y="2430666"/>
-                  </a:lnTo>
-                  <a:lnTo>
-                    <a:pt x="2475045" y="2467545"/>
-                  </a:lnTo>
-                  <a:lnTo>
-                    <a:pt x="2546668" y="2503132"/>
-                  </a:lnTo>
-                  <a:lnTo>
-                    <a:pt x="2618290" y="2537473"/>
-                  </a:lnTo>
-                  <a:lnTo>
-                    <a:pt x="2689913" y="2570612"/>
-                  </a:lnTo>
-                  <a:lnTo>
-                    <a:pt x="2761535" y="2602590"/>
-                  </a:lnTo>
-                  <a:lnTo>
-                    <a:pt x="2833158" y="2633448"/>
-                  </a:lnTo>
-                  <a:lnTo>
-                    <a:pt x="2904781" y="2653625"/>
-                  </a:lnTo>
-                  <a:lnTo>
-                    <a:pt x="2976403" y="2651459"/>
-                  </a:lnTo>
-                  <a:lnTo>
-                    <a:pt x="3048026" y="2649287"/>
-                  </a:lnTo>
-                  <a:lnTo>
-                    <a:pt x="3119648" y="2647110"/>
-                  </a:lnTo>
-                  <a:lnTo>
-                    <a:pt x="3191271" y="2644927"/>
-                  </a:lnTo>
-                  <a:lnTo>
-                    <a:pt x="3262893" y="2642738"/>
-                  </a:lnTo>
-                  <a:lnTo>
-                    <a:pt x="3334516" y="2640543"/>
-                  </a:lnTo>
-                  <a:lnTo>
-                    <a:pt x="3406138" y="2638343"/>
-                  </a:lnTo>
-                  <a:lnTo>
-                    <a:pt x="3477761" y="2636137"/>
-                  </a:lnTo>
-                  <a:lnTo>
-                    <a:pt x="3549383" y="2633925"/>
-                  </a:lnTo>
-                  <a:lnTo>
-                    <a:pt x="3621006" y="2631707"/>
-                  </a:lnTo>
-                  <a:lnTo>
-                    <a:pt x="3692628" y="2629484"/>
-                  </a:lnTo>
-                  <a:lnTo>
-                    <a:pt x="3764251" y="2627255"/>
-                  </a:lnTo>
-                  <a:lnTo>
-                    <a:pt x="3835873" y="2625020"/>
-                  </a:lnTo>
-                  <a:lnTo>
-                    <a:pt x="3907496" y="2622779"/>
-                  </a:lnTo>
-                  <a:lnTo>
-                    <a:pt x="3979118" y="2620532"/>
-                  </a:lnTo>
-                  <a:lnTo>
-                    <a:pt x="4050741" y="2618279"/>
-                  </a:lnTo>
-                  <a:lnTo>
-                    <a:pt x="4122363" y="2616021"/>
-                  </a:lnTo>
-                  <a:lnTo>
-                    <a:pt x="4193986" y="2613757"/>
-                  </a:lnTo>
-                  <a:lnTo>
-                    <a:pt x="4265609" y="2611486"/>
-                  </a:lnTo>
-                  <a:lnTo>
-                    <a:pt x="4337231" y="2609210"/>
-                  </a:lnTo>
-                  <a:lnTo>
-                    <a:pt x="4408854" y="2606928"/>
-                  </a:lnTo>
-                  <a:lnTo>
-                    <a:pt x="4480476" y="2604640"/>
-                  </a:lnTo>
-                  <a:lnTo>
-                    <a:pt x="4552099" y="2602346"/>
-                  </a:lnTo>
-                  <a:lnTo>
-                    <a:pt x="4623721" y="2600046"/>
-                  </a:lnTo>
-                  <a:lnTo>
-                    <a:pt x="4695344" y="2597740"/>
-                  </a:lnTo>
-                  <a:lnTo>
-                    <a:pt x="4766966" y="2595428"/>
-                  </a:lnTo>
-                  <a:lnTo>
-                    <a:pt x="4838589" y="2593110"/>
-                  </a:lnTo>
-                  <a:lnTo>
-                    <a:pt x="4910211" y="2590786"/>
-                  </a:lnTo>
-                  <a:lnTo>
-                    <a:pt x="4981834" y="2588456"/>
-                  </a:lnTo>
-                  <a:lnTo>
-                    <a:pt x="5053456" y="2586119"/>
-                  </a:lnTo>
-                  <a:lnTo>
-                    <a:pt x="5125079" y="2583777"/>
-                  </a:lnTo>
-                  <a:lnTo>
-                    <a:pt x="5196701" y="2581429"/>
-                  </a:lnTo>
-                  <a:lnTo>
-                    <a:pt x="5268324" y="2579074"/>
-                  </a:lnTo>
-                  <a:lnTo>
-                    <a:pt x="5339946" y="2576713"/>
-                  </a:lnTo>
-                  <a:lnTo>
-                    <a:pt x="5411569" y="2574346"/>
-                  </a:lnTo>
-                  <a:lnTo>
-                    <a:pt x="5483191" y="2571973"/>
-                  </a:lnTo>
-                  <a:lnTo>
-                    <a:pt x="5554814" y="2569594"/>
-                  </a:lnTo>
-                  <a:lnTo>
-                    <a:pt x="5626437" y="2567209"/>
-                  </a:lnTo>
-                  <a:lnTo>
-                    <a:pt x="5698059" y="2564817"/>
-                  </a:lnTo>
-                  <a:lnTo>
-                    <a:pt x="5769682" y="2562419"/>
-                  </a:lnTo>
-                  <a:lnTo>
-                    <a:pt x="5841304" y="2560015"/>
-                  </a:lnTo>
-                  <a:lnTo>
-                    <a:pt x="5912927" y="2557604"/>
-                  </a:lnTo>
-                  <a:lnTo>
-                    <a:pt x="5984549" y="2555187"/>
-                  </a:lnTo>
-                  <a:lnTo>
-                    <a:pt x="6056172" y="2552764"/>
-                  </a:lnTo>
-                  <a:lnTo>
-                    <a:pt x="6127794" y="2550335"/>
-                  </a:lnTo>
-                  <a:lnTo>
-                    <a:pt x="6199417" y="2547899"/>
-                  </a:lnTo>
-                  <a:lnTo>
-                    <a:pt x="6271039" y="2545457"/>
-                  </a:lnTo>
-                  <a:lnTo>
-                    <a:pt x="6342662" y="2543009"/>
-                  </a:lnTo>
-                  <a:lnTo>
-                    <a:pt x="6414284" y="2540554"/>
-                  </a:lnTo>
-                  <a:lnTo>
-                    <a:pt x="6485907" y="2538093"/>
-                  </a:lnTo>
-                  <a:lnTo>
-                    <a:pt x="6557529" y="2535625"/>
-                  </a:lnTo>
-                </a:path>
-              </a:pathLst>
-            </a:custGeom>
-          </p:spPr>
-          <p:txBody>
-            <a:bodyPr/>
-            <a:lstStyle/>
-            <a:p/>
-          </p:txBody>
-        </p:sp>
-        <p:sp>
-          <p:nvSpPr>
             <p:cNvPr id="22" name="pl22"/>
             <p:cNvSpPr/>
             <p:nvPr/>
           </p:nvSpPr>
           <p:spPr>
             <a:xfrm>
-              <a:off x="1172049" y="4729289"/>
-              <a:ext cx="7090630" cy="694755"/>
+              <a:off x="1758899" y="2143092"/>
+              <a:ext cx="6440516" cy="957631"/>
             </a:xfrm>
             <a:custGeom>
               <a:avLst/>
               <a:pathLst>
-                <a:path w="7090630" h="694755">
+                <a:path w="6440516" h="957631">
                   <a:moveTo>
-                    <a:pt x="7090630" y="694755"/>
+                    <a:pt x="0" y="0"/>
                   </a:moveTo>
                   <a:lnTo>
-                    <a:pt x="7019007" y="689920"/>
-                  </a:lnTo>
-                  <a:lnTo>
-                    <a:pt x="6947385" y="684911"/>
-                  </a:lnTo>
-                  <a:lnTo>
-                    <a:pt x="6875762" y="679719"/>
-                  </a:lnTo>
-                  <a:lnTo>
-                    <a:pt x="6804139" y="674340"/>
-                  </a:lnTo>
-                  <a:lnTo>
-                    <a:pt x="6732517" y="668765"/>
-                  </a:lnTo>
-                  <a:lnTo>
-                    <a:pt x="6660894" y="662987"/>
-                  </a:lnTo>
-                  <a:lnTo>
-                    <a:pt x="6589272" y="657000"/>
-                  </a:lnTo>
-                  <a:lnTo>
-                    <a:pt x="6517649" y="650796"/>
-                  </a:lnTo>
-                  <a:lnTo>
-                    <a:pt x="6446027" y="644366"/>
-                  </a:lnTo>
-                  <a:lnTo>
-                    <a:pt x="6374404" y="637704"/>
-                  </a:lnTo>
-                  <a:lnTo>
-                    <a:pt x="6302782" y="630799"/>
-                  </a:lnTo>
-                  <a:lnTo>
-                    <a:pt x="6231159" y="623644"/>
-                  </a:lnTo>
-                  <a:lnTo>
-                    <a:pt x="6159537" y="616229"/>
-                  </a:lnTo>
-                  <a:lnTo>
-                    <a:pt x="6087914" y="608545"/>
-                  </a:lnTo>
-                  <a:lnTo>
-                    <a:pt x="6016292" y="600582"/>
-                  </a:lnTo>
-                  <a:lnTo>
-                    <a:pt x="5944669" y="592331"/>
-                  </a:lnTo>
-                  <a:lnTo>
-                    <a:pt x="5873047" y="583779"/>
-                  </a:lnTo>
-                  <a:lnTo>
-                    <a:pt x="5801424" y="574918"/>
-                  </a:lnTo>
-                  <a:lnTo>
-                    <a:pt x="5729802" y="565735"/>
-                  </a:lnTo>
-                  <a:lnTo>
-                    <a:pt x="5658179" y="556218"/>
-                  </a:lnTo>
-                  <a:lnTo>
-                    <a:pt x="5586557" y="546357"/>
-                  </a:lnTo>
-                  <a:lnTo>
-                    <a:pt x="5514934" y="536137"/>
-                  </a:lnTo>
-                  <a:lnTo>
-                    <a:pt x="5443311" y="525546"/>
-                  </a:lnTo>
-                  <a:lnTo>
-                    <a:pt x="5371689" y="514571"/>
-                  </a:lnTo>
-                  <a:lnTo>
-                    <a:pt x="5300066" y="503198"/>
-                  </a:lnTo>
-                  <a:lnTo>
-                    <a:pt x="5228444" y="491412"/>
-                  </a:lnTo>
-                  <a:lnTo>
-                    <a:pt x="5156821" y="479199"/>
-                  </a:lnTo>
-                  <a:lnTo>
-                    <a:pt x="5085199" y="466542"/>
-                  </a:lnTo>
-                  <a:lnTo>
-                    <a:pt x="5013576" y="453426"/>
-                  </a:lnTo>
-                  <a:lnTo>
-                    <a:pt x="4941954" y="439833"/>
-                  </a:lnTo>
-                  <a:lnTo>
-                    <a:pt x="4870331" y="425748"/>
-                  </a:lnTo>
-                  <a:lnTo>
-                    <a:pt x="4798709" y="411151"/>
-                  </a:lnTo>
-                  <a:lnTo>
-                    <a:pt x="4727086" y="396025"/>
-                  </a:lnTo>
-                  <a:lnTo>
-                    <a:pt x="4655464" y="380349"/>
-                  </a:lnTo>
-                  <a:lnTo>
-                    <a:pt x="4583841" y="364105"/>
-                  </a:lnTo>
-                  <a:lnTo>
-                    <a:pt x="4512219" y="347271"/>
-                  </a:lnTo>
-                  <a:lnTo>
-                    <a:pt x="4440596" y="329827"/>
-                  </a:lnTo>
-                  <a:lnTo>
-                    <a:pt x="4368974" y="311749"/>
-                  </a:lnTo>
-                  <a:lnTo>
-                    <a:pt x="4297351" y="293015"/>
-                  </a:lnTo>
-                  <a:lnTo>
-                    <a:pt x="4225729" y="273602"/>
-                  </a:lnTo>
-                  <a:lnTo>
-                    <a:pt x="4154106" y="253483"/>
-                  </a:lnTo>
-                  <a:lnTo>
-                    <a:pt x="4082483" y="232635"/>
-                  </a:lnTo>
-                  <a:lnTo>
-                    <a:pt x="4010861" y="211030"/>
-                  </a:lnTo>
-                  <a:lnTo>
-                    <a:pt x="3939238" y="188641"/>
-                  </a:lnTo>
-                  <a:lnTo>
-                    <a:pt x="3867616" y="165440"/>
-                  </a:lnTo>
-                  <a:lnTo>
-                    <a:pt x="3795993" y="141396"/>
-                  </a:lnTo>
-                  <a:lnTo>
-                    <a:pt x="3724371" y="116480"/>
-                  </a:lnTo>
-                  <a:lnTo>
-                    <a:pt x="3652748" y="90660"/>
-                  </a:lnTo>
-                  <a:lnTo>
-                    <a:pt x="3581126" y="63902"/>
-                  </a:lnTo>
-                  <a:lnTo>
-                    <a:pt x="3509503" y="36174"/>
-                  </a:lnTo>
-                  <a:lnTo>
-                    <a:pt x="3437881" y="7439"/>
-                  </a:lnTo>
-                  <a:lnTo>
-                    <a:pt x="3366258" y="0"/>
-                  </a:lnTo>
-                  <a:lnTo>
-                    <a:pt x="3294636" y="2154"/>
-                  </a:lnTo>
-                  <a:lnTo>
-                    <a:pt x="3223013" y="4304"/>
-                  </a:lnTo>
-                  <a:lnTo>
-                    <a:pt x="3151391" y="6448"/>
-                  </a:lnTo>
-                  <a:lnTo>
-                    <a:pt x="3079768" y="8586"/>
-                  </a:lnTo>
-                  <a:lnTo>
-                    <a:pt x="3008146" y="10718"/>
-                  </a:lnTo>
-                  <a:lnTo>
-                    <a:pt x="2936523" y="12845"/>
-                  </a:lnTo>
-                  <a:lnTo>
-                    <a:pt x="2864901" y="14967"/>
-                  </a:lnTo>
-                  <a:lnTo>
-                    <a:pt x="2793278" y="17083"/>
-                  </a:lnTo>
-                  <a:lnTo>
-                    <a:pt x="2721655" y="19193"/>
-                  </a:lnTo>
-                  <a:lnTo>
-                    <a:pt x="2650033" y="21298"/>
-                  </a:lnTo>
-                  <a:lnTo>
-                    <a:pt x="2578410" y="23398"/>
-                  </a:lnTo>
-                  <a:lnTo>
-                    <a:pt x="2506788" y="25492"/>
-                  </a:lnTo>
-                  <a:lnTo>
-                    <a:pt x="2435165" y="27580"/>
-                  </a:lnTo>
-                  <a:lnTo>
-                    <a:pt x="2363543" y="29664"/>
-                  </a:lnTo>
-                  <a:lnTo>
-                    <a:pt x="2291920" y="31741"/>
-                  </a:lnTo>
-                  <a:lnTo>
-                    <a:pt x="2220298" y="33814"/>
-                  </a:lnTo>
-                  <a:lnTo>
-                    <a:pt x="2148675" y="35881"/>
-                  </a:lnTo>
-                  <a:lnTo>
-                    <a:pt x="2077053" y="37942"/>
-                  </a:lnTo>
-                  <a:lnTo>
-                    <a:pt x="2005430" y="39998"/>
-                  </a:lnTo>
-                  <a:lnTo>
-                    <a:pt x="1933808" y="42049"/>
-                  </a:lnTo>
-                  <a:lnTo>
-                    <a:pt x="1862185" y="44095"/>
-                  </a:lnTo>
-                  <a:lnTo>
-                    <a:pt x="1790563" y="46135"/>
-                  </a:lnTo>
-                  <a:lnTo>
-                    <a:pt x="1718940" y="48170"/>
-                  </a:lnTo>
-                  <a:lnTo>
-                    <a:pt x="1647318" y="50199"/>
-                  </a:lnTo>
-                  <a:lnTo>
-                    <a:pt x="1575695" y="52223"/>
-                  </a:lnTo>
-                  <a:lnTo>
-                    <a:pt x="1504073" y="54242"/>
-                  </a:lnTo>
-                  <a:lnTo>
-                    <a:pt x="1432450" y="56256"/>
-                  </a:lnTo>
-                  <a:lnTo>
-                    <a:pt x="1360827" y="58265"/>
-                  </a:lnTo>
-                  <a:lnTo>
-                    <a:pt x="1289205" y="60268"/>
-                  </a:lnTo>
-                  <a:lnTo>
-                    <a:pt x="1217582" y="62266"/>
-                  </a:lnTo>
-                  <a:lnTo>
-                    <a:pt x="1145960" y="64259"/>
-                  </a:lnTo>
-                  <a:lnTo>
-                    <a:pt x="1074337" y="66247"/>
-                  </a:lnTo>
-                  <a:lnTo>
-                    <a:pt x="1002715" y="68229"/>
-                  </a:lnTo>
-                  <a:lnTo>
-                    <a:pt x="931092" y="70207"/>
-                  </a:lnTo>
-                  <a:lnTo>
-                    <a:pt x="859470" y="72179"/>
-                  </a:lnTo>
-                  <a:lnTo>
-                    <a:pt x="787847" y="74146"/>
-                  </a:lnTo>
-                  <a:lnTo>
-                    <a:pt x="716225" y="76108"/>
-                  </a:lnTo>
-                  <a:lnTo>
-                    <a:pt x="644602" y="78065"/>
-                  </a:lnTo>
-                  <a:lnTo>
-                    <a:pt x="572980" y="80016"/>
-                  </a:lnTo>
-                  <a:lnTo>
-                    <a:pt x="501357" y="81963"/>
-                  </a:lnTo>
-                  <a:lnTo>
-                    <a:pt x="429735" y="83905"/>
-                  </a:lnTo>
-                  <a:lnTo>
-                    <a:pt x="358112" y="85841"/>
-                  </a:lnTo>
-                  <a:lnTo>
-                    <a:pt x="286490" y="87773"/>
-                  </a:lnTo>
-                  <a:lnTo>
-                    <a:pt x="214867" y="89699"/>
-                  </a:lnTo>
-                  <a:lnTo>
-                    <a:pt x="143245" y="91621"/>
-                  </a:lnTo>
-                  <a:lnTo>
-                    <a:pt x="71622" y="93537"/>
-                  </a:lnTo>
-                  <a:lnTo>
-                    <a:pt x="0" y="95449"/>
+                    <a:pt x="39168" y="24901"/>
+                  </a:lnTo>
+                  <a:lnTo>
+                    <a:pt x="109512" y="68056"/>
+                  </a:lnTo>
+                  <a:lnTo>
+                    <a:pt x="179857" y="109700"/>
+                  </a:lnTo>
+                  <a:lnTo>
+                    <a:pt x="250201" y="149886"/>
+                  </a:lnTo>
+                  <a:lnTo>
+                    <a:pt x="320546" y="188664"/>
+                  </a:lnTo>
+                  <a:lnTo>
+                    <a:pt x="390890" y="226084"/>
+                  </a:lnTo>
+                  <a:lnTo>
+                    <a:pt x="461235" y="262194"/>
+                  </a:lnTo>
+                  <a:lnTo>
+                    <a:pt x="531579" y="297039"/>
+                  </a:lnTo>
+                  <a:lnTo>
+                    <a:pt x="601924" y="330664"/>
+                  </a:lnTo>
+                  <a:lnTo>
+                    <a:pt x="672268" y="363111"/>
+                  </a:lnTo>
+                  <a:lnTo>
+                    <a:pt x="742613" y="394423"/>
+                  </a:lnTo>
+                  <a:lnTo>
+                    <a:pt x="812957" y="424637"/>
+                  </a:lnTo>
+                  <a:lnTo>
+                    <a:pt x="883302" y="453794"/>
+                  </a:lnTo>
+                  <a:lnTo>
+                    <a:pt x="953646" y="481929"/>
+                  </a:lnTo>
+                  <a:lnTo>
+                    <a:pt x="1023991" y="509079"/>
+                  </a:lnTo>
+                  <a:lnTo>
+                    <a:pt x="1094335" y="535278"/>
+                  </a:lnTo>
+                  <a:lnTo>
+                    <a:pt x="1164680" y="560560"/>
+                  </a:lnTo>
+                  <a:lnTo>
+                    <a:pt x="1235024" y="584957"/>
+                  </a:lnTo>
+                  <a:lnTo>
+                    <a:pt x="1305369" y="608499"/>
+                  </a:lnTo>
+                  <a:lnTo>
+                    <a:pt x="1375713" y="631216"/>
+                  </a:lnTo>
+                  <a:lnTo>
+                    <a:pt x="1446058" y="653138"/>
+                  </a:lnTo>
+                  <a:lnTo>
+                    <a:pt x="1516402" y="674293"/>
+                  </a:lnTo>
+                  <a:lnTo>
+                    <a:pt x="1586747" y="694706"/>
+                  </a:lnTo>
+                  <a:lnTo>
+                    <a:pt x="1657091" y="714405"/>
+                  </a:lnTo>
+                  <a:lnTo>
+                    <a:pt x="1727436" y="733414"/>
+                  </a:lnTo>
+                  <a:lnTo>
+                    <a:pt x="1797780" y="751757"/>
+                  </a:lnTo>
+                  <a:lnTo>
+                    <a:pt x="1868125" y="769457"/>
+                  </a:lnTo>
+                  <a:lnTo>
+                    <a:pt x="1938469" y="786538"/>
+                  </a:lnTo>
+                  <a:lnTo>
+                    <a:pt x="2008814" y="803021"/>
+                  </a:lnTo>
+                  <a:lnTo>
+                    <a:pt x="2079158" y="818926"/>
+                  </a:lnTo>
+                  <a:lnTo>
+                    <a:pt x="2149503" y="834275"/>
+                  </a:lnTo>
+                  <a:lnTo>
+                    <a:pt x="2219847" y="849086"/>
+                  </a:lnTo>
+                  <a:lnTo>
+                    <a:pt x="2290192" y="863378"/>
+                  </a:lnTo>
+                  <a:lnTo>
+                    <a:pt x="2360536" y="877170"/>
+                  </a:lnTo>
+                  <a:lnTo>
+                    <a:pt x="2430881" y="890479"/>
+                  </a:lnTo>
+                  <a:lnTo>
+                    <a:pt x="2501225" y="903321"/>
+                  </a:lnTo>
+                  <a:lnTo>
+                    <a:pt x="2571570" y="915714"/>
+                  </a:lnTo>
+                  <a:lnTo>
+                    <a:pt x="2641914" y="927673"/>
+                  </a:lnTo>
+                  <a:lnTo>
+                    <a:pt x="2712258" y="939213"/>
+                  </a:lnTo>
+                  <a:lnTo>
+                    <a:pt x="2782603" y="950349"/>
+                  </a:lnTo>
+                  <a:lnTo>
+                    <a:pt x="2852947" y="957631"/>
+                  </a:lnTo>
+                  <a:lnTo>
+                    <a:pt x="2923292" y="956849"/>
+                  </a:lnTo>
+                  <a:lnTo>
+                    <a:pt x="2993636" y="956065"/>
+                  </a:lnTo>
+                  <a:lnTo>
+                    <a:pt x="3063981" y="955279"/>
+                  </a:lnTo>
+                  <a:lnTo>
+                    <a:pt x="3134325" y="954491"/>
+                  </a:lnTo>
+                  <a:lnTo>
+                    <a:pt x="3204670" y="953702"/>
+                  </a:lnTo>
+                  <a:lnTo>
+                    <a:pt x="3275014" y="952910"/>
+                  </a:lnTo>
+                  <a:lnTo>
+                    <a:pt x="3345359" y="952115"/>
+                  </a:lnTo>
+                  <a:lnTo>
+                    <a:pt x="3415703" y="951319"/>
+                  </a:lnTo>
+                  <a:lnTo>
+                    <a:pt x="3486048" y="950521"/>
+                  </a:lnTo>
+                  <a:lnTo>
+                    <a:pt x="3556392" y="949721"/>
+                  </a:lnTo>
+                  <a:lnTo>
+                    <a:pt x="3626737" y="948918"/>
+                  </a:lnTo>
+                  <a:lnTo>
+                    <a:pt x="3697081" y="948114"/>
+                  </a:lnTo>
+                  <a:lnTo>
+                    <a:pt x="3767426" y="947307"/>
+                  </a:lnTo>
+                  <a:lnTo>
+                    <a:pt x="3837770" y="946499"/>
+                  </a:lnTo>
+                  <a:lnTo>
+                    <a:pt x="3908115" y="945688"/>
+                  </a:lnTo>
+                  <a:lnTo>
+                    <a:pt x="3978459" y="944875"/>
+                  </a:lnTo>
+                  <a:lnTo>
+                    <a:pt x="4048804" y="944060"/>
+                  </a:lnTo>
+                  <a:lnTo>
+                    <a:pt x="4119148" y="943243"/>
+                  </a:lnTo>
+                  <a:lnTo>
+                    <a:pt x="4189493" y="942424"/>
+                  </a:lnTo>
+                  <a:lnTo>
+                    <a:pt x="4259837" y="941602"/>
+                  </a:lnTo>
+                  <a:lnTo>
+                    <a:pt x="4330182" y="940779"/>
+                  </a:lnTo>
+                  <a:lnTo>
+                    <a:pt x="4400526" y="939953"/>
+                  </a:lnTo>
+                  <a:lnTo>
+                    <a:pt x="4470871" y="939125"/>
+                  </a:lnTo>
+                  <a:lnTo>
+                    <a:pt x="4541215" y="938295"/>
+                  </a:lnTo>
+                  <a:lnTo>
+                    <a:pt x="4611560" y="937463"/>
+                  </a:lnTo>
+                  <a:lnTo>
+                    <a:pt x="4681904" y="936629"/>
+                  </a:lnTo>
+                  <a:lnTo>
+                    <a:pt x="4752249" y="935792"/>
+                  </a:lnTo>
+                  <a:lnTo>
+                    <a:pt x="4822593" y="934953"/>
+                  </a:lnTo>
+                  <a:lnTo>
+                    <a:pt x="4892938" y="934112"/>
+                  </a:lnTo>
+                  <a:lnTo>
+                    <a:pt x="4963282" y="933269"/>
+                  </a:lnTo>
+                  <a:lnTo>
+                    <a:pt x="5033627" y="932424"/>
+                  </a:lnTo>
+                  <a:lnTo>
+                    <a:pt x="5103971" y="931577"/>
+                  </a:lnTo>
+                  <a:lnTo>
+                    <a:pt x="5174316" y="930727"/>
+                  </a:lnTo>
+                  <a:lnTo>
+                    <a:pt x="5244660" y="929875"/>
+                  </a:lnTo>
+                  <a:lnTo>
+                    <a:pt x="5315005" y="929021"/>
+                  </a:lnTo>
+                  <a:lnTo>
+                    <a:pt x="5385349" y="928164"/>
+                  </a:lnTo>
+                  <a:lnTo>
+                    <a:pt x="5455694" y="927306"/>
+                  </a:lnTo>
+                  <a:lnTo>
+                    <a:pt x="5526038" y="926445"/>
+                  </a:lnTo>
+                  <a:lnTo>
+                    <a:pt x="5596383" y="925582"/>
+                  </a:lnTo>
+                  <a:lnTo>
+                    <a:pt x="5666727" y="924716"/>
+                  </a:lnTo>
+                  <a:lnTo>
+                    <a:pt x="5737072" y="923849"/>
+                  </a:lnTo>
+                  <a:lnTo>
+                    <a:pt x="5807416" y="922979"/>
+                  </a:lnTo>
+                  <a:lnTo>
+                    <a:pt x="5877761" y="922107"/>
+                  </a:lnTo>
+                  <a:lnTo>
+                    <a:pt x="5948105" y="921232"/>
+                  </a:lnTo>
+                  <a:lnTo>
+                    <a:pt x="6018450" y="920356"/>
+                  </a:lnTo>
+                  <a:lnTo>
+                    <a:pt x="6088794" y="919477"/>
+                  </a:lnTo>
+                  <a:lnTo>
+                    <a:pt x="6159139" y="918595"/>
+                  </a:lnTo>
+                  <a:lnTo>
+                    <a:pt x="6229483" y="917712"/>
+                  </a:lnTo>
+                  <a:lnTo>
+                    <a:pt x="6299828" y="916826"/>
+                  </a:lnTo>
+                  <a:lnTo>
+                    <a:pt x="6370172" y="915938"/>
+                  </a:lnTo>
+                  <a:lnTo>
+                    <a:pt x="6440516" y="915047"/>
                   </a:lnTo>
                 </a:path>
               </a:pathLst>
@@ -4198,312 +3908,637 @@
           </p:nvSpPr>
           <p:spPr>
             <a:xfrm>
-              <a:off x="1172049" y="3733298"/>
-              <a:ext cx="7090630" cy="1468570"/>
+              <a:off x="1235312" y="3101502"/>
+              <a:ext cx="6964104" cy="250720"/>
             </a:xfrm>
             <a:custGeom>
               <a:avLst/>
               <a:pathLst>
-                <a:path w="7090630" h="1468570">
+                <a:path w="6964104" h="250720">
+                  <a:moveTo>
+                    <a:pt x="6964104" y="250720"/>
+                  </a:moveTo>
+                  <a:lnTo>
+                    <a:pt x="6893760" y="248976"/>
+                  </a:lnTo>
+                  <a:lnTo>
+                    <a:pt x="6823415" y="247168"/>
+                  </a:lnTo>
+                  <a:lnTo>
+                    <a:pt x="6753071" y="245294"/>
+                  </a:lnTo>
+                  <a:lnTo>
+                    <a:pt x="6682726" y="243353"/>
+                  </a:lnTo>
+                  <a:lnTo>
+                    <a:pt x="6612382" y="241341"/>
+                  </a:lnTo>
+                  <a:lnTo>
+                    <a:pt x="6542037" y="239256"/>
+                  </a:lnTo>
+                  <a:lnTo>
+                    <a:pt x="6471693" y="237096"/>
+                  </a:lnTo>
+                  <a:lnTo>
+                    <a:pt x="6401348" y="234857"/>
+                  </a:lnTo>
+                  <a:lnTo>
+                    <a:pt x="6331004" y="232536"/>
+                  </a:lnTo>
+                  <a:lnTo>
+                    <a:pt x="6260659" y="230132"/>
+                  </a:lnTo>
+                  <a:lnTo>
+                    <a:pt x="6190315" y="227640"/>
+                  </a:lnTo>
+                  <a:lnTo>
+                    <a:pt x="6119970" y="225058"/>
+                  </a:lnTo>
+                  <a:lnTo>
+                    <a:pt x="6049626" y="222382"/>
+                  </a:lnTo>
+                  <a:lnTo>
+                    <a:pt x="5979281" y="219609"/>
+                  </a:lnTo>
+                  <a:lnTo>
+                    <a:pt x="5908937" y="216736"/>
+                  </a:lnTo>
+                  <a:lnTo>
+                    <a:pt x="5838592" y="213758"/>
+                  </a:lnTo>
+                  <a:lnTo>
+                    <a:pt x="5768248" y="210672"/>
+                  </a:lnTo>
+                  <a:lnTo>
+                    <a:pt x="5697903" y="207474"/>
+                  </a:lnTo>
+                  <a:lnTo>
+                    <a:pt x="5627559" y="204160"/>
+                  </a:lnTo>
+                  <a:lnTo>
+                    <a:pt x="5557214" y="200726"/>
+                  </a:lnTo>
+                  <a:lnTo>
+                    <a:pt x="5486870" y="197167"/>
+                  </a:lnTo>
+                  <a:lnTo>
+                    <a:pt x="5416525" y="193479"/>
+                  </a:lnTo>
+                  <a:lnTo>
+                    <a:pt x="5346181" y="189657"/>
+                  </a:lnTo>
+                  <a:lnTo>
+                    <a:pt x="5275836" y="185696"/>
+                  </a:lnTo>
+                  <a:lnTo>
+                    <a:pt x="5205492" y="181592"/>
+                  </a:lnTo>
+                  <a:lnTo>
+                    <a:pt x="5135147" y="177339"/>
+                  </a:lnTo>
+                  <a:lnTo>
+                    <a:pt x="5064803" y="172931"/>
+                  </a:lnTo>
+                  <a:lnTo>
+                    <a:pt x="4994458" y="168364"/>
+                  </a:lnTo>
+                  <a:lnTo>
+                    <a:pt x="4924114" y="163630"/>
+                  </a:lnTo>
+                  <a:lnTo>
+                    <a:pt x="4853769" y="158725"/>
+                  </a:lnTo>
+                  <a:lnTo>
+                    <a:pt x="4783425" y="153642"/>
+                  </a:lnTo>
+                  <a:lnTo>
+                    <a:pt x="4713080" y="148374"/>
+                  </a:lnTo>
+                  <a:lnTo>
+                    <a:pt x="4642736" y="142916"/>
+                  </a:lnTo>
+                  <a:lnTo>
+                    <a:pt x="4572391" y="137259"/>
+                  </a:lnTo>
+                  <a:lnTo>
+                    <a:pt x="4502047" y="131397"/>
+                  </a:lnTo>
+                  <a:lnTo>
+                    <a:pt x="4431702" y="125322"/>
+                  </a:lnTo>
+                  <a:lnTo>
+                    <a:pt x="4361358" y="119026"/>
+                  </a:lnTo>
+                  <a:lnTo>
+                    <a:pt x="4291013" y="112503"/>
+                  </a:lnTo>
+                  <a:lnTo>
+                    <a:pt x="4220669" y="105742"/>
+                  </a:lnTo>
+                  <a:lnTo>
+                    <a:pt x="4150324" y="98736"/>
+                  </a:lnTo>
+                  <a:lnTo>
+                    <a:pt x="4079980" y="91476"/>
+                  </a:lnTo>
+                  <a:lnTo>
+                    <a:pt x="4009635" y="83952"/>
+                  </a:lnTo>
+                  <a:lnTo>
+                    <a:pt x="3939291" y="76155"/>
+                  </a:lnTo>
+                  <a:lnTo>
+                    <a:pt x="3868946" y="68076"/>
+                  </a:lnTo>
+                  <a:lnTo>
+                    <a:pt x="3798602" y="59703"/>
+                  </a:lnTo>
+                  <a:lnTo>
+                    <a:pt x="3728257" y="51026"/>
+                  </a:lnTo>
+                  <a:lnTo>
+                    <a:pt x="3657913" y="42035"/>
+                  </a:lnTo>
+                  <a:lnTo>
+                    <a:pt x="3587569" y="32717"/>
+                  </a:lnTo>
+                  <a:lnTo>
+                    <a:pt x="3517224" y="23061"/>
+                  </a:lnTo>
+                  <a:lnTo>
+                    <a:pt x="3446880" y="13054"/>
+                  </a:lnTo>
+                  <a:lnTo>
+                    <a:pt x="3376535" y="2684"/>
+                  </a:lnTo>
+                  <a:lnTo>
+                    <a:pt x="3306191" y="0"/>
+                  </a:lnTo>
+                  <a:lnTo>
+                    <a:pt x="3235846" y="777"/>
+                  </a:lnTo>
+                  <a:lnTo>
+                    <a:pt x="3165502" y="1553"/>
+                  </a:lnTo>
+                  <a:lnTo>
+                    <a:pt x="3095157" y="2326"/>
+                  </a:lnTo>
+                  <a:lnTo>
+                    <a:pt x="3024813" y="3098"/>
+                  </a:lnTo>
+                  <a:lnTo>
+                    <a:pt x="2954468" y="3868"/>
+                  </a:lnTo>
+                  <a:lnTo>
+                    <a:pt x="2884124" y="4635"/>
+                  </a:lnTo>
+                  <a:lnTo>
+                    <a:pt x="2813779" y="5401"/>
+                  </a:lnTo>
+                  <a:lnTo>
+                    <a:pt x="2743435" y="6164"/>
+                  </a:lnTo>
+                  <a:lnTo>
+                    <a:pt x="2673090" y="6926"/>
+                  </a:lnTo>
+                  <a:lnTo>
+                    <a:pt x="2602746" y="7686"/>
+                  </a:lnTo>
+                  <a:lnTo>
+                    <a:pt x="2532401" y="8443"/>
+                  </a:lnTo>
+                  <a:lnTo>
+                    <a:pt x="2462057" y="9199"/>
+                  </a:lnTo>
+                  <a:lnTo>
+                    <a:pt x="2391712" y="9953"/>
+                  </a:lnTo>
+                  <a:lnTo>
+                    <a:pt x="2321368" y="10705"/>
+                  </a:lnTo>
+                  <a:lnTo>
+                    <a:pt x="2251023" y="11454"/>
+                  </a:lnTo>
+                  <a:lnTo>
+                    <a:pt x="2180679" y="12202"/>
+                  </a:lnTo>
+                  <a:lnTo>
+                    <a:pt x="2110334" y="12948"/>
+                  </a:lnTo>
+                  <a:lnTo>
+                    <a:pt x="2039990" y="13692"/>
+                  </a:lnTo>
+                  <a:lnTo>
+                    <a:pt x="1969645" y="14434"/>
+                  </a:lnTo>
+                  <a:lnTo>
+                    <a:pt x="1899301" y="15174"/>
+                  </a:lnTo>
+                  <a:lnTo>
+                    <a:pt x="1828956" y="15912"/>
+                  </a:lnTo>
+                  <a:lnTo>
+                    <a:pt x="1758612" y="16649"/>
+                  </a:lnTo>
+                  <a:lnTo>
+                    <a:pt x="1688267" y="17383"/>
+                  </a:lnTo>
+                  <a:lnTo>
+                    <a:pt x="1617923" y="18115"/>
+                  </a:lnTo>
+                  <a:lnTo>
+                    <a:pt x="1547578" y="18846"/>
+                  </a:lnTo>
+                  <a:lnTo>
+                    <a:pt x="1477234" y="19575"/>
+                  </a:lnTo>
+                  <a:lnTo>
+                    <a:pt x="1406889" y="20301"/>
+                  </a:lnTo>
+                  <a:lnTo>
+                    <a:pt x="1336545" y="21026"/>
+                  </a:lnTo>
+                  <a:lnTo>
+                    <a:pt x="1266200" y="21749"/>
+                  </a:lnTo>
+                  <a:lnTo>
+                    <a:pt x="1195856" y="22470"/>
+                  </a:lnTo>
+                  <a:lnTo>
+                    <a:pt x="1125511" y="23189"/>
+                  </a:lnTo>
+                  <a:lnTo>
+                    <a:pt x="1055167" y="23907"/>
+                  </a:lnTo>
+                  <a:lnTo>
+                    <a:pt x="984822" y="24622"/>
+                  </a:lnTo>
+                  <a:lnTo>
+                    <a:pt x="914478" y="25336"/>
+                  </a:lnTo>
+                  <a:lnTo>
+                    <a:pt x="844133" y="26047"/>
+                  </a:lnTo>
+                  <a:lnTo>
+                    <a:pt x="773789" y="26757"/>
+                  </a:lnTo>
+                  <a:lnTo>
+                    <a:pt x="703444" y="27465"/>
+                  </a:lnTo>
+                  <a:lnTo>
+                    <a:pt x="633100" y="28171"/>
+                  </a:lnTo>
+                  <a:lnTo>
+                    <a:pt x="562755" y="28876"/>
+                  </a:lnTo>
+                  <a:lnTo>
+                    <a:pt x="492411" y="29578"/>
+                  </a:lnTo>
+                  <a:lnTo>
+                    <a:pt x="422066" y="30279"/>
+                  </a:lnTo>
+                  <a:lnTo>
+                    <a:pt x="351722" y="30978"/>
+                  </a:lnTo>
+                  <a:lnTo>
+                    <a:pt x="281377" y="31675"/>
+                  </a:lnTo>
+                  <a:lnTo>
+                    <a:pt x="211033" y="32370"/>
+                  </a:lnTo>
+                  <a:lnTo>
+                    <a:pt x="140688" y="33063"/>
+                  </a:lnTo>
+                  <a:lnTo>
+                    <a:pt x="70344" y="33755"/>
+                  </a:lnTo>
+                  <a:lnTo>
+                    <a:pt x="0" y="34445"/>
+                  </a:lnTo>
+                </a:path>
+              </a:pathLst>
+            </a:custGeom>
+          </p:spPr>
+          <p:txBody>
+            <a:bodyPr/>
+            <a:lstStyle/>
+            <a:p/>
+          </p:txBody>
+        </p:sp>
+        <p:sp>
+          <p:nvSpPr>
+            <p:cNvPr id="24" name="pl24"/>
+            <p:cNvSpPr/>
+            <p:nvPr/>
+          </p:nvSpPr>
+          <p:spPr>
+            <a:xfrm>
+              <a:off x="1235312" y="2742073"/>
+              <a:ext cx="6964104" cy="529972"/>
+            </a:xfrm>
+            <a:custGeom>
+              <a:avLst/>
+              <a:pathLst>
+                <a:path w="6964104" h="529972">
                   <a:moveTo>
                     <a:pt x="0" y="0"/>
                   </a:moveTo>
                   <a:lnTo>
-                    <a:pt x="71622" y="29885"/>
-                  </a:lnTo>
-                  <a:lnTo>
-                    <a:pt x="143245" y="59281"/>
-                  </a:lnTo>
-                  <a:lnTo>
-                    <a:pt x="214867" y="88196"/>
-                  </a:lnTo>
-                  <a:lnTo>
-                    <a:pt x="286490" y="116637"/>
-                  </a:lnTo>
-                  <a:lnTo>
-                    <a:pt x="358112" y="144611"/>
-                  </a:lnTo>
-                  <a:lnTo>
-                    <a:pt x="429735" y="172128"/>
-                  </a:lnTo>
-                  <a:lnTo>
-                    <a:pt x="501357" y="199193"/>
-                  </a:lnTo>
-                  <a:lnTo>
-                    <a:pt x="572980" y="225815"/>
-                  </a:lnTo>
-                  <a:lnTo>
-                    <a:pt x="644602" y="252001"/>
-                  </a:lnTo>
-                  <a:lnTo>
-                    <a:pt x="716225" y="277758"/>
-                  </a:lnTo>
-                  <a:lnTo>
-                    <a:pt x="787847" y="303092"/>
-                  </a:lnTo>
-                  <a:lnTo>
-                    <a:pt x="859470" y="328012"/>
-                  </a:lnTo>
-                  <a:lnTo>
-                    <a:pt x="931092" y="352523"/>
-                  </a:lnTo>
-                  <a:lnTo>
-                    <a:pt x="1002715" y="376633"/>
-                  </a:lnTo>
-                  <a:lnTo>
-                    <a:pt x="1074337" y="400347"/>
-                  </a:lnTo>
-                  <a:lnTo>
-                    <a:pt x="1145960" y="423673"/>
-                  </a:lnTo>
-                  <a:lnTo>
-                    <a:pt x="1217582" y="446617"/>
-                  </a:lnTo>
-                  <a:lnTo>
-                    <a:pt x="1289205" y="469185"/>
-                  </a:lnTo>
-                  <a:lnTo>
-                    <a:pt x="1360827" y="491383"/>
-                  </a:lnTo>
-                  <a:lnTo>
-                    <a:pt x="1432450" y="513218"/>
-                  </a:lnTo>
-                  <a:lnTo>
-                    <a:pt x="1504073" y="534694"/>
-                  </a:lnTo>
-                  <a:lnTo>
-                    <a:pt x="1575695" y="555819"/>
-                  </a:lnTo>
-                  <a:lnTo>
-                    <a:pt x="1647318" y="576598"/>
-                  </a:lnTo>
-                  <a:lnTo>
-                    <a:pt x="1718940" y="597036"/>
-                  </a:lnTo>
-                  <a:lnTo>
-                    <a:pt x="1790563" y="617139"/>
-                  </a:lnTo>
-                  <a:lnTo>
-                    <a:pt x="1862185" y="636913"/>
-                  </a:lnTo>
-                  <a:lnTo>
-                    <a:pt x="1933808" y="656363"/>
-                  </a:lnTo>
-                  <a:lnTo>
-                    <a:pt x="2005430" y="675494"/>
-                  </a:lnTo>
-                  <a:lnTo>
-                    <a:pt x="2077053" y="694312"/>
-                  </a:lnTo>
-                  <a:lnTo>
-                    <a:pt x="2148675" y="712821"/>
-                  </a:lnTo>
-                  <a:lnTo>
-                    <a:pt x="2220298" y="731027"/>
-                  </a:lnTo>
-                  <a:lnTo>
-                    <a:pt x="2291920" y="748935"/>
-                  </a:lnTo>
-                  <a:lnTo>
-                    <a:pt x="2363543" y="766549"/>
-                  </a:lnTo>
-                  <a:lnTo>
-                    <a:pt x="2435165" y="783875"/>
-                  </a:lnTo>
-                  <a:lnTo>
-                    <a:pt x="2506788" y="800917"/>
-                  </a:lnTo>
-                  <a:lnTo>
-                    <a:pt x="2578410" y="817680"/>
-                  </a:lnTo>
-                  <a:lnTo>
-                    <a:pt x="2650033" y="834167"/>
-                  </a:lnTo>
-                  <a:lnTo>
-                    <a:pt x="2721655" y="850385"/>
-                  </a:lnTo>
-                  <a:lnTo>
-                    <a:pt x="2793278" y="866337"/>
-                  </a:lnTo>
-                  <a:lnTo>
-                    <a:pt x="2864901" y="882028"/>
-                  </a:lnTo>
-                  <a:lnTo>
-                    <a:pt x="2936523" y="897462"/>
-                  </a:lnTo>
-                  <a:lnTo>
-                    <a:pt x="3008146" y="912642"/>
-                  </a:lnTo>
-                  <a:lnTo>
-                    <a:pt x="3079768" y="927574"/>
-                  </a:lnTo>
-                  <a:lnTo>
-                    <a:pt x="3151391" y="942262"/>
-                  </a:lnTo>
-                  <a:lnTo>
-                    <a:pt x="3223013" y="956708"/>
-                  </a:lnTo>
-                  <a:lnTo>
-                    <a:pt x="3294636" y="970918"/>
-                  </a:lnTo>
-                  <a:lnTo>
-                    <a:pt x="3366258" y="984895"/>
-                  </a:lnTo>
-                  <a:lnTo>
-                    <a:pt x="3437881" y="998643"/>
-                  </a:lnTo>
-                  <a:lnTo>
-                    <a:pt x="3509503" y="1012166"/>
-                  </a:lnTo>
-                  <a:lnTo>
-                    <a:pt x="3581126" y="1025468"/>
-                  </a:lnTo>
-                  <a:lnTo>
-                    <a:pt x="3652748" y="1038551"/>
-                  </a:lnTo>
-                  <a:lnTo>
-                    <a:pt x="3724371" y="1051420"/>
-                  </a:lnTo>
-                  <a:lnTo>
-                    <a:pt x="3795993" y="1064078"/>
-                  </a:lnTo>
-                  <a:lnTo>
-                    <a:pt x="3867616" y="1076529"/>
-                  </a:lnTo>
-                  <a:lnTo>
-                    <a:pt x="3939238" y="1088775"/>
-                  </a:lnTo>
-                  <a:lnTo>
-                    <a:pt x="4010861" y="1100821"/>
-                  </a:lnTo>
-                  <a:lnTo>
-                    <a:pt x="4082483" y="1112670"/>
-                  </a:lnTo>
-                  <a:lnTo>
-                    <a:pt x="4154106" y="1124324"/>
-                  </a:lnTo>
-                  <a:lnTo>
-                    <a:pt x="4225729" y="1135788"/>
-                  </a:lnTo>
-                  <a:lnTo>
-                    <a:pt x="4297351" y="1147064"/>
-                  </a:lnTo>
-                  <a:lnTo>
-                    <a:pt x="4368974" y="1158155"/>
-                  </a:lnTo>
-                  <a:lnTo>
-                    <a:pt x="4440596" y="1169064"/>
-                  </a:lnTo>
-                  <a:lnTo>
-                    <a:pt x="4512219" y="1179794"/>
-                  </a:lnTo>
-                  <a:lnTo>
-                    <a:pt x="4583841" y="1190349"/>
-                  </a:lnTo>
-                  <a:lnTo>
-                    <a:pt x="4655464" y="1200731"/>
-                  </a:lnTo>
-                  <a:lnTo>
-                    <a:pt x="4727086" y="1210942"/>
-                  </a:lnTo>
-                  <a:lnTo>
-                    <a:pt x="4798709" y="1220986"/>
-                  </a:lnTo>
-                  <a:lnTo>
-                    <a:pt x="4870331" y="1230866"/>
-                  </a:lnTo>
-                  <a:lnTo>
-                    <a:pt x="4941954" y="1240584"/>
-                  </a:lnTo>
-                  <a:lnTo>
-                    <a:pt x="5013576" y="1250142"/>
-                  </a:lnTo>
-                  <a:lnTo>
-                    <a:pt x="5085199" y="1259544"/>
-                  </a:lnTo>
-                  <a:lnTo>
-                    <a:pt x="5156821" y="1268792"/>
-                  </a:lnTo>
-                  <a:lnTo>
-                    <a:pt x="5228444" y="1277889"/>
-                  </a:lnTo>
-                  <a:lnTo>
-                    <a:pt x="5300066" y="1286836"/>
-                  </a:lnTo>
-                  <a:lnTo>
-                    <a:pt x="5371689" y="1295637"/>
-                  </a:lnTo>
-                  <a:lnTo>
-                    <a:pt x="5443311" y="1304293"/>
-                  </a:lnTo>
-                  <a:lnTo>
-                    <a:pt x="5514934" y="1312808"/>
-                  </a:lnTo>
-                  <a:lnTo>
-                    <a:pt x="5586557" y="1321183"/>
-                  </a:lnTo>
-                  <a:lnTo>
-                    <a:pt x="5658179" y="1329421"/>
-                  </a:lnTo>
-                  <a:lnTo>
-                    <a:pt x="5729802" y="1337524"/>
-                  </a:lnTo>
-                  <a:lnTo>
-                    <a:pt x="5801424" y="1345494"/>
-                  </a:lnTo>
-                  <a:lnTo>
-                    <a:pt x="5873047" y="1353334"/>
-                  </a:lnTo>
-                  <a:lnTo>
-                    <a:pt x="5944669" y="1361045"/>
-                  </a:lnTo>
-                  <a:lnTo>
-                    <a:pt x="6016292" y="1368630"/>
-                  </a:lnTo>
-                  <a:lnTo>
-                    <a:pt x="6087914" y="1376090"/>
-                  </a:lnTo>
-                  <a:lnTo>
-                    <a:pt x="6159537" y="1383429"/>
-                  </a:lnTo>
-                  <a:lnTo>
-                    <a:pt x="6231159" y="1390647"/>
-                  </a:lnTo>
-                  <a:lnTo>
-                    <a:pt x="6302782" y="1397747"/>
-                  </a:lnTo>
-                  <a:lnTo>
-                    <a:pt x="6374404" y="1404730"/>
-                  </a:lnTo>
-                  <a:lnTo>
-                    <a:pt x="6446027" y="1411599"/>
-                  </a:lnTo>
-                  <a:lnTo>
-                    <a:pt x="6517649" y="1418355"/>
-                  </a:lnTo>
-                  <a:lnTo>
-                    <a:pt x="6589272" y="1425001"/>
-                  </a:lnTo>
-                  <a:lnTo>
-                    <a:pt x="6660894" y="1431538"/>
-                  </a:lnTo>
-                  <a:lnTo>
-                    <a:pt x="6732517" y="1437968"/>
-                  </a:lnTo>
-                  <a:lnTo>
-                    <a:pt x="6804139" y="1444292"/>
-                  </a:lnTo>
-                  <a:lnTo>
-                    <a:pt x="6875762" y="1450513"/>
-                  </a:lnTo>
-                  <a:lnTo>
-                    <a:pt x="6947385" y="1456632"/>
-                  </a:lnTo>
-                  <a:lnTo>
-                    <a:pt x="7019007" y="1462650"/>
-                  </a:lnTo>
-                  <a:lnTo>
-                    <a:pt x="7090630" y="1468570"/>
+                    <a:pt x="70344" y="10785"/>
+                  </a:lnTo>
+                  <a:lnTo>
+                    <a:pt x="140688" y="21393"/>
+                  </a:lnTo>
+                  <a:lnTo>
+                    <a:pt x="211033" y="31828"/>
+                  </a:lnTo>
+                  <a:lnTo>
+                    <a:pt x="281377" y="42091"/>
+                  </a:lnTo>
+                  <a:lnTo>
+                    <a:pt x="351722" y="52187"/>
+                  </a:lnTo>
+                  <a:lnTo>
+                    <a:pt x="422066" y="62117"/>
+                  </a:lnTo>
+                  <a:lnTo>
+                    <a:pt x="492411" y="71884"/>
+                  </a:lnTo>
+                  <a:lnTo>
+                    <a:pt x="562755" y="81491"/>
+                  </a:lnTo>
+                  <a:lnTo>
+                    <a:pt x="633100" y="90941"/>
+                  </a:lnTo>
+                  <a:lnTo>
+                    <a:pt x="703444" y="100236"/>
+                  </a:lnTo>
+                  <a:lnTo>
+                    <a:pt x="773789" y="109379"/>
+                  </a:lnTo>
+                  <a:lnTo>
+                    <a:pt x="844133" y="118371"/>
+                  </a:lnTo>
+                  <a:lnTo>
+                    <a:pt x="914478" y="127217"/>
+                  </a:lnTo>
+                  <a:lnTo>
+                    <a:pt x="984822" y="135918"/>
+                  </a:lnTo>
+                  <a:lnTo>
+                    <a:pt x="1055167" y="144476"/>
+                  </a:lnTo>
+                  <a:lnTo>
+                    <a:pt x="1125511" y="152893"/>
+                  </a:lnTo>
+                  <a:lnTo>
+                    <a:pt x="1195856" y="161173"/>
+                  </a:lnTo>
+                  <a:lnTo>
+                    <a:pt x="1266200" y="169318"/>
+                  </a:lnTo>
+                  <a:lnTo>
+                    <a:pt x="1336545" y="177328"/>
+                  </a:lnTo>
+                  <a:lnTo>
+                    <a:pt x="1406889" y="185208"/>
+                  </a:lnTo>
+                  <a:lnTo>
+                    <a:pt x="1477234" y="192958"/>
+                  </a:lnTo>
+                  <a:lnTo>
+                    <a:pt x="1547578" y="200582"/>
+                  </a:lnTo>
+                  <a:lnTo>
+                    <a:pt x="1617923" y="208080"/>
+                  </a:lnTo>
+                  <a:lnTo>
+                    <a:pt x="1688267" y="215456"/>
+                  </a:lnTo>
+                  <a:lnTo>
+                    <a:pt x="1758612" y="222711"/>
+                  </a:lnTo>
+                  <a:lnTo>
+                    <a:pt x="1828956" y="229847"/>
+                  </a:lnTo>
+                  <a:lnTo>
+                    <a:pt x="1899301" y="236866"/>
+                  </a:lnTo>
+                  <a:lnTo>
+                    <a:pt x="1969645" y="243770"/>
+                  </a:lnTo>
+                  <a:lnTo>
+                    <a:pt x="2039990" y="250560"/>
+                  </a:lnTo>
+                  <a:lnTo>
+                    <a:pt x="2110334" y="257240"/>
+                  </a:lnTo>
+                  <a:lnTo>
+                    <a:pt x="2180679" y="263810"/>
+                  </a:lnTo>
+                  <a:lnTo>
+                    <a:pt x="2251023" y="270273"/>
+                  </a:lnTo>
+                  <a:lnTo>
+                    <a:pt x="2321368" y="276629"/>
+                  </a:lnTo>
+                  <a:lnTo>
+                    <a:pt x="2391712" y="282882"/>
+                  </a:lnTo>
+                  <a:lnTo>
+                    <a:pt x="2462057" y="289032"/>
+                  </a:lnTo>
+                  <a:lnTo>
+                    <a:pt x="2532401" y="295081"/>
+                  </a:lnTo>
+                  <a:lnTo>
+                    <a:pt x="2602746" y="301031"/>
+                  </a:lnTo>
+                  <a:lnTo>
+                    <a:pt x="2673090" y="306884"/>
+                  </a:lnTo>
+                  <a:lnTo>
+                    <a:pt x="2743435" y="312640"/>
+                  </a:lnTo>
+                  <a:lnTo>
+                    <a:pt x="2813779" y="318303"/>
+                  </a:lnTo>
+                  <a:lnTo>
+                    <a:pt x="2884124" y="323872"/>
+                  </a:lnTo>
+                  <a:lnTo>
+                    <a:pt x="2954468" y="329351"/>
+                  </a:lnTo>
+                  <a:lnTo>
+                    <a:pt x="3024813" y="334739"/>
+                  </a:lnTo>
+                  <a:lnTo>
+                    <a:pt x="3095157" y="340040"/>
+                  </a:lnTo>
+                  <a:lnTo>
+                    <a:pt x="3165502" y="345253"/>
+                  </a:lnTo>
+                  <a:lnTo>
+                    <a:pt x="3235846" y="350381"/>
+                  </a:lnTo>
+                  <a:lnTo>
+                    <a:pt x="3306191" y="355425"/>
+                  </a:lnTo>
+                  <a:lnTo>
+                    <a:pt x="3376535" y="360387"/>
+                  </a:lnTo>
+                  <a:lnTo>
+                    <a:pt x="3446880" y="365267"/>
+                  </a:lnTo>
+                  <a:lnTo>
+                    <a:pt x="3517224" y="370067"/>
+                  </a:lnTo>
+                  <a:lnTo>
+                    <a:pt x="3587569" y="374788"/>
+                  </a:lnTo>
+                  <a:lnTo>
+                    <a:pt x="3657913" y="379432"/>
+                  </a:lnTo>
+                  <a:lnTo>
+                    <a:pt x="3728257" y="384000"/>
+                  </a:lnTo>
+                  <a:lnTo>
+                    <a:pt x="3798602" y="388494"/>
+                  </a:lnTo>
+                  <a:lnTo>
+                    <a:pt x="3868946" y="392913"/>
+                  </a:lnTo>
+                  <a:lnTo>
+                    <a:pt x="3939291" y="397260"/>
+                  </a:lnTo>
+                  <a:lnTo>
+                    <a:pt x="4009635" y="401536"/>
+                  </a:lnTo>
+                  <a:lnTo>
+                    <a:pt x="4079980" y="405742"/>
+                  </a:lnTo>
+                  <a:lnTo>
+                    <a:pt x="4150324" y="409879"/>
+                  </a:lnTo>
+                  <a:lnTo>
+                    <a:pt x="4220669" y="413948"/>
+                  </a:lnTo>
+                  <a:lnTo>
+                    <a:pt x="4291013" y="417950"/>
+                  </a:lnTo>
+                  <a:lnTo>
+                    <a:pt x="4361358" y="421887"/>
+                  </a:lnTo>
+                  <a:lnTo>
+                    <a:pt x="4431702" y="425760"/>
+                  </a:lnTo>
+                  <a:lnTo>
+                    <a:pt x="4502047" y="429569"/>
+                  </a:lnTo>
+                  <a:lnTo>
+                    <a:pt x="4572391" y="433315"/>
+                  </a:lnTo>
+                  <a:lnTo>
+                    <a:pt x="4642736" y="437000"/>
+                  </a:lnTo>
+                  <a:lnTo>
+                    <a:pt x="4713080" y="440625"/>
+                  </a:lnTo>
+                  <a:lnTo>
+                    <a:pt x="4783425" y="444190"/>
+                  </a:lnTo>
+                  <a:lnTo>
+                    <a:pt x="4853769" y="447697"/>
+                  </a:lnTo>
+                  <a:lnTo>
+                    <a:pt x="4924114" y="451147"/>
+                  </a:lnTo>
+                  <a:lnTo>
+                    <a:pt x="4994458" y="454540"/>
+                  </a:lnTo>
+                  <a:lnTo>
+                    <a:pt x="5064803" y="457877"/>
+                  </a:lnTo>
+                  <a:lnTo>
+                    <a:pt x="5135147" y="461160"/>
+                  </a:lnTo>
+                  <a:lnTo>
+                    <a:pt x="5205492" y="464389"/>
+                  </a:lnTo>
+                  <a:lnTo>
+                    <a:pt x="5275836" y="467565"/>
+                  </a:lnTo>
+                  <a:lnTo>
+                    <a:pt x="5346181" y="470688"/>
+                  </a:lnTo>
+                  <a:lnTo>
+                    <a:pt x="5416525" y="473761"/>
+                  </a:lnTo>
+                  <a:lnTo>
+                    <a:pt x="5486870" y="476784"/>
+                  </a:lnTo>
+                  <a:lnTo>
+                    <a:pt x="5557214" y="479757"/>
+                  </a:lnTo>
+                  <a:lnTo>
+                    <a:pt x="5627559" y="482681"/>
+                  </a:lnTo>
+                  <a:lnTo>
+                    <a:pt x="5697903" y="485557"/>
+                  </a:lnTo>
+                  <a:lnTo>
+                    <a:pt x="5768248" y="488386"/>
+                  </a:lnTo>
+                  <a:lnTo>
+                    <a:pt x="5838592" y="491169"/>
+                  </a:lnTo>
+                  <a:lnTo>
+                    <a:pt x="5908937" y="493906"/>
+                  </a:lnTo>
+                  <a:lnTo>
+                    <a:pt x="5979281" y="496598"/>
+                  </a:lnTo>
+                  <a:lnTo>
+                    <a:pt x="6049626" y="499247"/>
+                  </a:lnTo>
+                  <a:lnTo>
+                    <a:pt x="6119970" y="501851"/>
+                  </a:lnTo>
+                  <a:lnTo>
+                    <a:pt x="6190315" y="504414"/>
+                  </a:lnTo>
+                  <a:lnTo>
+                    <a:pt x="6260659" y="506934"/>
+                  </a:lnTo>
+                  <a:lnTo>
+                    <a:pt x="6331004" y="509413"/>
+                  </a:lnTo>
+                  <a:lnTo>
+                    <a:pt x="6401348" y="511851"/>
+                  </a:lnTo>
+                  <a:lnTo>
+                    <a:pt x="6471693" y="514249"/>
+                  </a:lnTo>
+                  <a:lnTo>
+                    <a:pt x="6542037" y="516608"/>
+                  </a:lnTo>
+                  <a:lnTo>
+                    <a:pt x="6612382" y="518928"/>
+                  </a:lnTo>
+                  <a:lnTo>
+                    <a:pt x="6682726" y="521211"/>
+                  </a:lnTo>
+                  <a:lnTo>
+                    <a:pt x="6753071" y="523456"/>
+                  </a:lnTo>
+                  <a:lnTo>
+                    <a:pt x="6823415" y="525664"/>
+                  </a:lnTo>
+                  <a:lnTo>
+                    <a:pt x="6893760" y="527836"/>
+                  </a:lnTo>
+                  <a:lnTo>
+                    <a:pt x="6964104" y="529972"/>
                   </a:lnTo>
                 </a:path>
               </a:pathLst>
@@ -4526,27 +4561,27 @@
         </p:sp>
         <p:sp>
           <p:nvSpPr>
-            <p:cNvPr id="24" name="pl24"/>
+            <p:cNvPr id="25" name="pl25"/>
             <p:cNvSpPr/>
             <p:nvPr/>
           </p:nvSpPr>
           <p:spPr>
             <a:xfrm>
-              <a:off x="817517" y="4727786"/>
-              <a:ext cx="7799693" cy="0"/>
+              <a:off x="887106" y="3100960"/>
+              <a:ext cx="7660515" cy="0"/>
             </a:xfrm>
             <a:custGeom>
               <a:avLst/>
               <a:pathLst>
-                <a:path w="7799693" h="0">
+                <a:path w="7660515" h="0">
                   <a:moveTo>
                     <a:pt x="0" y="0"/>
                   </a:moveTo>
                   <a:lnTo>
-                    <a:pt x="7799693" y="0"/>
-                  </a:lnTo>
-                  <a:lnTo>
-                    <a:pt x="7799693" y="0"/>
+                    <a:pt x="7660515" y="0"/>
+                  </a:lnTo>
+                  <a:lnTo>
+                    <a:pt x="7660515" y="0"/>
                   </a:lnTo>
                 </a:path>
               </a:pathLst>
@@ -4569,21 +4604,21 @@
         </p:sp>
         <p:sp>
           <p:nvSpPr>
-            <p:cNvPr id="25" name="pl25"/>
+            <p:cNvPr id="26" name="pl26"/>
             <p:cNvSpPr/>
             <p:nvPr/>
           </p:nvSpPr>
           <p:spPr>
             <a:xfrm>
-              <a:off x="4588151" y="2073503"/>
-              <a:ext cx="0" cy="3649639"/>
+              <a:off x="4590457" y="2143092"/>
+              <a:ext cx="0" cy="1317069"/>
             </a:xfrm>
             <a:custGeom>
               <a:avLst/>
               <a:pathLst>
-                <a:path w="0" h="3649639">
+                <a:path w="0" h="1317069">
                   <a:moveTo>
-                    <a:pt x="0" y="3649639"/>
+                    <a:pt x="0" y="1317069"/>
                   </a:moveTo>
                   <a:lnTo>
                     <a:pt x="0" y="0"/>
@@ -4612,13 +4647,13 @@
         </p:sp>
         <p:sp>
           <p:nvSpPr>
-            <p:cNvPr id="26" name="tx26"/>
+            <p:cNvPr id="27" name="tx27"/>
             <p:cNvSpPr/>
             <p:nvPr/>
           </p:nvSpPr>
           <p:spPr>
             <a:xfrm>
-              <a:off x="692708" y="5517199"/>
+              <a:off x="762297" y="3360243"/>
               <a:ext cx="62179" cy="80101"/>
             </a:xfrm>
             <a:prstGeom prst="rect">
@@ -4658,13 +4693,13 @@
         </p:sp>
         <p:sp>
           <p:nvSpPr>
-            <p:cNvPr id="27" name="tx27"/>
+            <p:cNvPr id="28" name="tx28"/>
             <p:cNvSpPr/>
             <p:nvPr/>
           </p:nvSpPr>
           <p:spPr>
             <a:xfrm>
-              <a:off x="692708" y="4687735"/>
+              <a:off x="762297" y="3060909"/>
               <a:ext cx="62179" cy="80101"/>
             </a:xfrm>
             <a:prstGeom prst="rect">
@@ -4704,13 +4739,13 @@
         </p:sp>
         <p:sp>
           <p:nvSpPr>
-            <p:cNvPr id="28" name="tx28"/>
+            <p:cNvPr id="29" name="tx29"/>
             <p:cNvSpPr/>
             <p:nvPr/>
           </p:nvSpPr>
           <p:spPr>
             <a:xfrm>
-              <a:off x="692708" y="3858272"/>
+              <a:off x="762297" y="2761575"/>
               <a:ext cx="62179" cy="80101"/>
             </a:xfrm>
             <a:prstGeom prst="rect">
@@ -4750,13 +4785,13 @@
         </p:sp>
         <p:sp>
           <p:nvSpPr>
-            <p:cNvPr id="29" name="tx29"/>
+            <p:cNvPr id="30" name="tx30"/>
             <p:cNvSpPr/>
             <p:nvPr/>
           </p:nvSpPr>
           <p:spPr>
             <a:xfrm>
-              <a:off x="692708" y="3028808"/>
+              <a:off x="762297" y="2462242"/>
               <a:ext cx="62179" cy="80101"/>
             </a:xfrm>
             <a:prstGeom prst="rect">
@@ -4796,13 +4831,13 @@
         </p:sp>
         <p:sp>
           <p:nvSpPr>
-            <p:cNvPr id="30" name="tx30"/>
+            <p:cNvPr id="31" name="tx31"/>
             <p:cNvSpPr/>
             <p:nvPr/>
           </p:nvSpPr>
           <p:spPr>
             <a:xfrm>
-              <a:off x="692708" y="2199345"/>
+              <a:off x="762297" y="2162908"/>
               <a:ext cx="62179" cy="80101"/>
             </a:xfrm>
             <a:prstGeom prst="rect">
@@ -4842,13 +4877,13 @@
         </p:sp>
         <p:sp>
           <p:nvSpPr>
-            <p:cNvPr id="31" name="tx31"/>
+            <p:cNvPr id="32" name="tx32"/>
             <p:cNvSpPr/>
             <p:nvPr/>
           </p:nvSpPr>
           <p:spPr>
             <a:xfrm>
-              <a:off x="2360651" y="5785772"/>
+              <a:off x="2401262" y="3522791"/>
               <a:ext cx="161574" cy="80101"/>
             </a:xfrm>
             <a:prstGeom prst="rect">
@@ -4888,13 +4923,13 @@
         </p:sp>
         <p:sp>
           <p:nvSpPr>
-            <p:cNvPr id="32" name="tx32"/>
+            <p:cNvPr id="33" name="tx33"/>
             <p:cNvSpPr/>
             <p:nvPr/>
           </p:nvSpPr>
           <p:spPr>
             <a:xfrm>
-              <a:off x="4561958" y="5785772"/>
+              <a:off x="4564176" y="3522791"/>
               <a:ext cx="62179" cy="80101"/>
             </a:xfrm>
             <a:prstGeom prst="rect">
@@ -4934,13 +4969,13 @@
         </p:sp>
         <p:sp>
           <p:nvSpPr>
-            <p:cNvPr id="33" name="tx33"/>
+            <p:cNvPr id="34" name="tx34"/>
             <p:cNvSpPr/>
             <p:nvPr/>
           </p:nvSpPr>
           <p:spPr>
             <a:xfrm>
-              <a:off x="6682478" y="5785772"/>
+              <a:off x="6646302" y="3522791"/>
               <a:ext cx="124358" cy="80101"/>
             </a:xfrm>
             <a:prstGeom prst="rect">
@@ -4980,13 +5015,13 @@
         </p:sp>
         <p:sp>
           <p:nvSpPr>
-            <p:cNvPr id="34" name="tx34"/>
+            <p:cNvPr id="35" name="tx35"/>
             <p:cNvSpPr/>
             <p:nvPr/>
           </p:nvSpPr>
           <p:spPr>
             <a:xfrm>
-              <a:off x="2928340" y="5925448"/>
+              <a:off x="2928340" y="3662467"/>
               <a:ext cx="3578047" cy="100218"/>
             </a:xfrm>
             <a:prstGeom prst="rect">
@@ -5026,13 +5061,13 @@
         </p:sp>
         <p:sp>
           <p:nvSpPr>
-            <p:cNvPr id="35" name="tx35"/>
+            <p:cNvPr id="36" name="tx36"/>
             <p:cNvSpPr/>
             <p:nvPr/>
           </p:nvSpPr>
           <p:spPr>
             <a:xfrm rot="-5400000">
-              <a:off x="68446" y="3848213"/>
+              <a:off x="138035" y="2751517"/>
               <a:ext cx="1016904" cy="100218"/>
             </a:xfrm>
             <a:prstGeom prst="rect">
@@ -5072,13 +5107,13 @@
         </p:sp>
         <p:sp>
           <p:nvSpPr>
-            <p:cNvPr id="36" name="tx36"/>
+            <p:cNvPr id="37" name="tx37"/>
             <p:cNvSpPr/>
             <p:nvPr/>
           </p:nvSpPr>
           <p:spPr>
             <a:xfrm>
-              <a:off x="817517" y="1896563"/>
+              <a:off x="887106" y="1966152"/>
               <a:ext cx="6321612" cy="82021"/>
             </a:xfrm>
             <a:prstGeom prst="rect">
@@ -5118,13 +5153,3661 @@
         </p:sp>
         <p:sp>
           <p:nvSpPr>
-            <p:cNvPr id="37" name="tx37"/>
+            <p:cNvPr id="38" name="tx38"/>
             <p:cNvSpPr/>
             <p:nvPr/>
           </p:nvSpPr>
           <p:spPr>
             <a:xfrm>
-              <a:off x="817517" y="1669789"/>
+              <a:off x="887106" y="1739378"/>
+              <a:ext cx="1499158" cy="120152"/>
+            </a:xfrm>
+            <a:prstGeom prst="rect">
+              <a:avLst/>
+            </a:prstGeom>
+            <a:noFill/>
+          </p:spPr>
+          <p:txBody>
+            <a:bodyPr lIns="0" rIns="0" tIns="0" bIns="0" anchorCtr="1" anchor="ctr" wrap="none"/>
+            <a:lstStyle/>
+            <a:p>
+              <a:pPr algn="l" marL="0" marR="0" indent="0">
+                <a:lnSpc>
+                  <a:spcPts val="1320"/>
+                </a:lnSpc>
+                <a:spcBef>
+                  <a:spcPts val="0"/>
+                </a:spcBef>
+                <a:spcAft>
+                  <a:spcPts val="0"/>
+                </a:spcAft>
+              </a:pPr>
+              <a:r>
+                <a:rPr sz="1320">
+                  <a:solidFill>
+                    <a:srgbClr val="000000">
+                      <a:alpha val="100000"/>
+                    </a:srgbClr>
+                  </a:solidFill>
+                  <a:latin typeface="Helvetica"/>
+                  <a:cs typeface="Helvetica"/>
+                </a:rPr>
+                <a:t>Nausea/Vomiting/GI</a:t>
+              </a:r>
+            </a:p>
+          </p:txBody>
+        </p:sp>
+        <p:sp>
+          <p:nvSpPr>
+            <p:cNvPr id="39" name="pl39"/>
+            <p:cNvSpPr/>
+            <p:nvPr/>
+          </p:nvSpPr>
+          <p:spPr>
+            <a:xfrm>
+              <a:off x="887106" y="5444019"/>
+              <a:ext cx="7660515" cy="0"/>
+            </a:xfrm>
+            <a:custGeom>
+              <a:avLst/>
+              <a:pathLst>
+                <a:path w="7660515" h="0">
+                  <a:moveTo>
+                    <a:pt x="0" y="0"/>
+                  </a:moveTo>
+                  <a:lnTo>
+                    <a:pt x="7660515" y="0"/>
+                  </a:lnTo>
+                  <a:lnTo>
+                    <a:pt x="7660515" y="0"/>
+                  </a:lnTo>
+                </a:path>
+              </a:pathLst>
+            </a:custGeom>
+            <a:ln w="6775" cap="flat">
+              <a:solidFill>
+                <a:srgbClr val="EBEBEB">
+                  <a:alpha val="100000"/>
+                </a:srgbClr>
+              </a:solidFill>
+              <a:prstDash val="solid"/>
+              <a:round/>
+            </a:ln>
+          </p:spPr>
+          <p:txBody>
+            <a:bodyPr/>
+            <a:lstStyle/>
+            <a:p/>
+          </p:txBody>
+        </p:sp>
+        <p:sp>
+          <p:nvSpPr>
+            <p:cNvPr id="40" name="pl40"/>
+            <p:cNvSpPr/>
+            <p:nvPr/>
+          </p:nvSpPr>
+          <p:spPr>
+            <a:xfrm>
+              <a:off x="887106" y="5144686"/>
+              <a:ext cx="7660515" cy="0"/>
+            </a:xfrm>
+            <a:custGeom>
+              <a:avLst/>
+              <a:pathLst>
+                <a:path w="7660515" h="0">
+                  <a:moveTo>
+                    <a:pt x="0" y="0"/>
+                  </a:moveTo>
+                  <a:lnTo>
+                    <a:pt x="7660515" y="0"/>
+                  </a:lnTo>
+                  <a:lnTo>
+                    <a:pt x="7660515" y="0"/>
+                  </a:lnTo>
+                </a:path>
+              </a:pathLst>
+            </a:custGeom>
+            <a:ln w="6775" cap="flat">
+              <a:solidFill>
+                <a:srgbClr val="EBEBEB">
+                  <a:alpha val="100000"/>
+                </a:srgbClr>
+              </a:solidFill>
+              <a:prstDash val="solid"/>
+              <a:round/>
+            </a:ln>
+          </p:spPr>
+          <p:txBody>
+            <a:bodyPr/>
+            <a:lstStyle/>
+            <a:p/>
+          </p:txBody>
+        </p:sp>
+        <p:sp>
+          <p:nvSpPr>
+            <p:cNvPr id="41" name="pl41"/>
+            <p:cNvSpPr/>
+            <p:nvPr/>
+          </p:nvSpPr>
+          <p:spPr>
+            <a:xfrm>
+              <a:off x="887106" y="4845352"/>
+              <a:ext cx="7660515" cy="0"/>
+            </a:xfrm>
+            <a:custGeom>
+              <a:avLst/>
+              <a:pathLst>
+                <a:path w="7660515" h="0">
+                  <a:moveTo>
+                    <a:pt x="0" y="0"/>
+                  </a:moveTo>
+                  <a:lnTo>
+                    <a:pt x="7660515" y="0"/>
+                  </a:lnTo>
+                  <a:lnTo>
+                    <a:pt x="7660515" y="0"/>
+                  </a:lnTo>
+                </a:path>
+              </a:pathLst>
+            </a:custGeom>
+            <a:ln w="6775" cap="flat">
+              <a:solidFill>
+                <a:srgbClr val="EBEBEB">
+                  <a:alpha val="100000"/>
+                </a:srgbClr>
+              </a:solidFill>
+              <a:prstDash val="solid"/>
+              <a:round/>
+            </a:ln>
+          </p:spPr>
+          <p:txBody>
+            <a:bodyPr/>
+            <a:lstStyle/>
+            <a:p/>
+          </p:txBody>
+        </p:sp>
+        <p:sp>
+          <p:nvSpPr>
+            <p:cNvPr id="42" name="pl42"/>
+            <p:cNvSpPr/>
+            <p:nvPr/>
+          </p:nvSpPr>
+          <p:spPr>
+            <a:xfrm>
+              <a:off x="887106" y="4546018"/>
+              <a:ext cx="7660515" cy="0"/>
+            </a:xfrm>
+            <a:custGeom>
+              <a:avLst/>
+              <a:pathLst>
+                <a:path w="7660515" h="0">
+                  <a:moveTo>
+                    <a:pt x="0" y="0"/>
+                  </a:moveTo>
+                  <a:lnTo>
+                    <a:pt x="7660515" y="0"/>
+                  </a:lnTo>
+                  <a:lnTo>
+                    <a:pt x="7660515" y="0"/>
+                  </a:lnTo>
+                </a:path>
+              </a:pathLst>
+            </a:custGeom>
+            <a:ln w="6775" cap="flat">
+              <a:solidFill>
+                <a:srgbClr val="EBEBEB">
+                  <a:alpha val="100000"/>
+                </a:srgbClr>
+              </a:solidFill>
+              <a:prstDash val="solid"/>
+              <a:round/>
+            </a:ln>
+          </p:spPr>
+          <p:txBody>
+            <a:bodyPr/>
+            <a:lstStyle/>
+            <a:p/>
+          </p:txBody>
+        </p:sp>
+        <p:sp>
+          <p:nvSpPr>
+            <p:cNvPr id="43" name="pl43"/>
+            <p:cNvSpPr/>
+            <p:nvPr/>
+          </p:nvSpPr>
+          <p:spPr>
+            <a:xfrm>
+              <a:off x="1636763" y="4336484"/>
+              <a:ext cx="0" cy="1317069"/>
+            </a:xfrm>
+            <a:custGeom>
+              <a:avLst/>
+              <a:pathLst>
+                <a:path w="0" h="1317069">
+                  <a:moveTo>
+                    <a:pt x="0" y="1317069"/>
+                  </a:moveTo>
+                  <a:lnTo>
+                    <a:pt x="0" y="0"/>
+                  </a:lnTo>
+                  <a:lnTo>
+                    <a:pt x="0" y="0"/>
+                  </a:lnTo>
+                </a:path>
+              </a:pathLst>
+            </a:custGeom>
+            <a:ln w="6775" cap="flat">
+              <a:solidFill>
+                <a:srgbClr val="EBEBEB">
+                  <a:alpha val="100000"/>
+                </a:srgbClr>
+              </a:solidFill>
+              <a:prstDash val="solid"/>
+              <a:round/>
+            </a:ln>
+          </p:spPr>
+          <p:txBody>
+            <a:bodyPr/>
+            <a:lstStyle/>
+            <a:p/>
+          </p:txBody>
+        </p:sp>
+        <p:sp>
+          <p:nvSpPr>
+            <p:cNvPr id="44" name="pl44"/>
+            <p:cNvSpPr/>
+            <p:nvPr/>
+          </p:nvSpPr>
+          <p:spPr>
+            <a:xfrm>
+              <a:off x="2482050" y="4336484"/>
+              <a:ext cx="0" cy="1317069"/>
+            </a:xfrm>
+            <a:custGeom>
+              <a:avLst/>
+              <a:pathLst>
+                <a:path w="0" h="1317069">
+                  <a:moveTo>
+                    <a:pt x="0" y="1317069"/>
+                  </a:moveTo>
+                  <a:lnTo>
+                    <a:pt x="0" y="0"/>
+                  </a:lnTo>
+                  <a:lnTo>
+                    <a:pt x="0" y="0"/>
+                  </a:lnTo>
+                </a:path>
+              </a:pathLst>
+            </a:custGeom>
+            <a:ln w="6775" cap="flat">
+              <a:solidFill>
+                <a:srgbClr val="EBEBEB">
+                  <a:alpha val="100000"/>
+                </a:srgbClr>
+              </a:solidFill>
+              <a:prstDash val="solid"/>
+              <a:round/>
+            </a:ln>
+          </p:spPr>
+          <p:txBody>
+            <a:bodyPr/>
+            <a:lstStyle/>
+            <a:p/>
+          </p:txBody>
+        </p:sp>
+        <p:sp>
+          <p:nvSpPr>
+            <p:cNvPr id="45" name="pl45"/>
+            <p:cNvSpPr/>
+            <p:nvPr/>
+          </p:nvSpPr>
+          <p:spPr>
+            <a:xfrm>
+              <a:off x="3327336" y="4336484"/>
+              <a:ext cx="0" cy="1317069"/>
+            </a:xfrm>
+            <a:custGeom>
+              <a:avLst/>
+              <a:pathLst>
+                <a:path w="0" h="1317069">
+                  <a:moveTo>
+                    <a:pt x="0" y="1317069"/>
+                  </a:moveTo>
+                  <a:lnTo>
+                    <a:pt x="0" y="0"/>
+                  </a:lnTo>
+                  <a:lnTo>
+                    <a:pt x="0" y="0"/>
+                  </a:lnTo>
+                </a:path>
+              </a:pathLst>
+            </a:custGeom>
+            <a:ln w="6775" cap="flat">
+              <a:solidFill>
+                <a:srgbClr val="EBEBEB">
+                  <a:alpha val="100000"/>
+                </a:srgbClr>
+              </a:solidFill>
+              <a:prstDash val="solid"/>
+              <a:round/>
+            </a:ln>
+          </p:spPr>
+          <p:txBody>
+            <a:bodyPr/>
+            <a:lstStyle/>
+            <a:p/>
+          </p:txBody>
+        </p:sp>
+        <p:sp>
+          <p:nvSpPr>
+            <p:cNvPr id="46" name="pl46"/>
+            <p:cNvSpPr/>
+            <p:nvPr/>
+          </p:nvSpPr>
+          <p:spPr>
+            <a:xfrm>
+              <a:off x="4172622" y="4336484"/>
+              <a:ext cx="0" cy="1317069"/>
+            </a:xfrm>
+            <a:custGeom>
+              <a:avLst/>
+              <a:pathLst>
+                <a:path w="0" h="1317069">
+                  <a:moveTo>
+                    <a:pt x="0" y="1317069"/>
+                  </a:moveTo>
+                  <a:lnTo>
+                    <a:pt x="0" y="0"/>
+                  </a:lnTo>
+                  <a:lnTo>
+                    <a:pt x="0" y="0"/>
+                  </a:lnTo>
+                </a:path>
+              </a:pathLst>
+            </a:custGeom>
+            <a:ln w="6775" cap="flat">
+              <a:solidFill>
+                <a:srgbClr val="EBEBEB">
+                  <a:alpha val="100000"/>
+                </a:srgbClr>
+              </a:solidFill>
+              <a:prstDash val="solid"/>
+              <a:round/>
+            </a:ln>
+          </p:spPr>
+          <p:txBody>
+            <a:bodyPr/>
+            <a:lstStyle/>
+            <a:p/>
+          </p:txBody>
+        </p:sp>
+        <p:sp>
+          <p:nvSpPr>
+            <p:cNvPr id="47" name="pl47"/>
+            <p:cNvSpPr/>
+            <p:nvPr/>
+          </p:nvSpPr>
+          <p:spPr>
+            <a:xfrm>
+              <a:off x="5017909" y="4336484"/>
+              <a:ext cx="0" cy="1317069"/>
+            </a:xfrm>
+            <a:custGeom>
+              <a:avLst/>
+              <a:pathLst>
+                <a:path w="0" h="1317069">
+                  <a:moveTo>
+                    <a:pt x="0" y="1317069"/>
+                  </a:moveTo>
+                  <a:lnTo>
+                    <a:pt x="0" y="0"/>
+                  </a:lnTo>
+                  <a:lnTo>
+                    <a:pt x="0" y="0"/>
+                  </a:lnTo>
+                </a:path>
+              </a:pathLst>
+            </a:custGeom>
+            <a:ln w="6775" cap="flat">
+              <a:solidFill>
+                <a:srgbClr val="EBEBEB">
+                  <a:alpha val="100000"/>
+                </a:srgbClr>
+              </a:solidFill>
+              <a:prstDash val="solid"/>
+              <a:round/>
+            </a:ln>
+          </p:spPr>
+          <p:txBody>
+            <a:bodyPr/>
+            <a:lstStyle/>
+            <a:p/>
+          </p:txBody>
+        </p:sp>
+        <p:sp>
+          <p:nvSpPr>
+            <p:cNvPr id="48" name="pl48"/>
+            <p:cNvSpPr/>
+            <p:nvPr/>
+          </p:nvSpPr>
+          <p:spPr>
+            <a:xfrm>
+              <a:off x="5863195" y="4336484"/>
+              <a:ext cx="0" cy="1317069"/>
+            </a:xfrm>
+            <a:custGeom>
+              <a:avLst/>
+              <a:pathLst>
+                <a:path w="0" h="1317069">
+                  <a:moveTo>
+                    <a:pt x="0" y="1317069"/>
+                  </a:moveTo>
+                  <a:lnTo>
+                    <a:pt x="0" y="0"/>
+                  </a:lnTo>
+                  <a:lnTo>
+                    <a:pt x="0" y="0"/>
+                  </a:lnTo>
+                </a:path>
+              </a:pathLst>
+            </a:custGeom>
+            <a:ln w="6775" cap="flat">
+              <a:solidFill>
+                <a:srgbClr val="EBEBEB">
+                  <a:alpha val="100000"/>
+                </a:srgbClr>
+              </a:solidFill>
+              <a:prstDash val="solid"/>
+              <a:round/>
+            </a:ln>
+          </p:spPr>
+          <p:txBody>
+            <a:bodyPr/>
+            <a:lstStyle/>
+            <a:p/>
+          </p:txBody>
+        </p:sp>
+        <p:sp>
+          <p:nvSpPr>
+            <p:cNvPr id="49" name="pl49"/>
+            <p:cNvSpPr/>
+            <p:nvPr/>
+          </p:nvSpPr>
+          <p:spPr>
+            <a:xfrm>
+              <a:off x="6708482" y="4336484"/>
+              <a:ext cx="0" cy="1317069"/>
+            </a:xfrm>
+            <a:custGeom>
+              <a:avLst/>
+              <a:pathLst>
+                <a:path w="0" h="1317069">
+                  <a:moveTo>
+                    <a:pt x="0" y="1317069"/>
+                  </a:moveTo>
+                  <a:lnTo>
+                    <a:pt x="0" y="0"/>
+                  </a:lnTo>
+                  <a:lnTo>
+                    <a:pt x="0" y="0"/>
+                  </a:lnTo>
+                </a:path>
+              </a:pathLst>
+            </a:custGeom>
+            <a:ln w="6775" cap="flat">
+              <a:solidFill>
+                <a:srgbClr val="EBEBEB">
+                  <a:alpha val="100000"/>
+                </a:srgbClr>
+              </a:solidFill>
+              <a:prstDash val="solid"/>
+              <a:round/>
+            </a:ln>
+          </p:spPr>
+          <p:txBody>
+            <a:bodyPr/>
+            <a:lstStyle/>
+            <a:p/>
+          </p:txBody>
+        </p:sp>
+        <p:sp>
+          <p:nvSpPr>
+            <p:cNvPr id="50" name="pl50"/>
+            <p:cNvSpPr/>
+            <p:nvPr/>
+          </p:nvSpPr>
+          <p:spPr>
+            <a:xfrm>
+              <a:off x="7553768" y="4336484"/>
+              <a:ext cx="0" cy="1317069"/>
+            </a:xfrm>
+            <a:custGeom>
+              <a:avLst/>
+              <a:pathLst>
+                <a:path w="0" h="1317069">
+                  <a:moveTo>
+                    <a:pt x="0" y="1317069"/>
+                  </a:moveTo>
+                  <a:lnTo>
+                    <a:pt x="0" y="0"/>
+                  </a:lnTo>
+                  <a:lnTo>
+                    <a:pt x="0" y="0"/>
+                  </a:lnTo>
+                </a:path>
+              </a:pathLst>
+            </a:custGeom>
+            <a:ln w="6775" cap="flat">
+              <a:solidFill>
+                <a:srgbClr val="EBEBEB">
+                  <a:alpha val="100000"/>
+                </a:srgbClr>
+              </a:solidFill>
+              <a:prstDash val="solid"/>
+              <a:round/>
+            </a:ln>
+          </p:spPr>
+          <p:txBody>
+            <a:bodyPr/>
+            <a:lstStyle/>
+            <a:p/>
+          </p:txBody>
+        </p:sp>
+        <p:sp>
+          <p:nvSpPr>
+            <p:cNvPr id="51" name="pl51"/>
+            <p:cNvSpPr/>
+            <p:nvPr/>
+          </p:nvSpPr>
+          <p:spPr>
+            <a:xfrm>
+              <a:off x="8399054" y="4336484"/>
+              <a:ext cx="0" cy="1317069"/>
+            </a:xfrm>
+            <a:custGeom>
+              <a:avLst/>
+              <a:pathLst>
+                <a:path w="0" h="1317069">
+                  <a:moveTo>
+                    <a:pt x="0" y="1317069"/>
+                  </a:moveTo>
+                  <a:lnTo>
+                    <a:pt x="0" y="0"/>
+                  </a:lnTo>
+                  <a:lnTo>
+                    <a:pt x="0" y="0"/>
+                  </a:lnTo>
+                </a:path>
+              </a:pathLst>
+            </a:custGeom>
+            <a:ln w="6775" cap="flat">
+              <a:solidFill>
+                <a:srgbClr val="EBEBEB">
+                  <a:alpha val="100000"/>
+                </a:srgbClr>
+              </a:solidFill>
+              <a:prstDash val="solid"/>
+              <a:round/>
+            </a:ln>
+          </p:spPr>
+          <p:txBody>
+            <a:bodyPr/>
+            <a:lstStyle/>
+            <a:p/>
+          </p:txBody>
+        </p:sp>
+        <p:sp>
+          <p:nvSpPr>
+            <p:cNvPr id="52" name="pl52"/>
+            <p:cNvSpPr/>
+            <p:nvPr/>
+          </p:nvSpPr>
+          <p:spPr>
+            <a:xfrm>
+              <a:off x="887106" y="5593686"/>
+              <a:ext cx="7660515" cy="0"/>
+            </a:xfrm>
+            <a:custGeom>
+              <a:avLst/>
+              <a:pathLst>
+                <a:path w="7660515" h="0">
+                  <a:moveTo>
+                    <a:pt x="0" y="0"/>
+                  </a:moveTo>
+                  <a:lnTo>
+                    <a:pt x="7660515" y="0"/>
+                  </a:lnTo>
+                  <a:lnTo>
+                    <a:pt x="7660515" y="0"/>
+                  </a:lnTo>
+                </a:path>
+              </a:pathLst>
+            </a:custGeom>
+            <a:ln w="13550" cap="flat">
+              <a:solidFill>
+                <a:srgbClr val="EBEBEB">
+                  <a:alpha val="100000"/>
+                </a:srgbClr>
+              </a:solidFill>
+              <a:prstDash val="solid"/>
+              <a:round/>
+            </a:ln>
+          </p:spPr>
+          <p:txBody>
+            <a:bodyPr/>
+            <a:lstStyle/>
+            <a:p/>
+          </p:txBody>
+        </p:sp>
+        <p:sp>
+          <p:nvSpPr>
+            <p:cNvPr id="53" name="pl53"/>
+            <p:cNvSpPr/>
+            <p:nvPr/>
+          </p:nvSpPr>
+          <p:spPr>
+            <a:xfrm>
+              <a:off x="887106" y="5294352"/>
+              <a:ext cx="7660515" cy="0"/>
+            </a:xfrm>
+            <a:custGeom>
+              <a:avLst/>
+              <a:pathLst>
+                <a:path w="7660515" h="0">
+                  <a:moveTo>
+                    <a:pt x="0" y="0"/>
+                  </a:moveTo>
+                  <a:lnTo>
+                    <a:pt x="7660515" y="0"/>
+                  </a:lnTo>
+                  <a:lnTo>
+                    <a:pt x="7660515" y="0"/>
+                  </a:lnTo>
+                </a:path>
+              </a:pathLst>
+            </a:custGeom>
+            <a:ln w="13550" cap="flat">
+              <a:solidFill>
+                <a:srgbClr val="EBEBEB">
+                  <a:alpha val="100000"/>
+                </a:srgbClr>
+              </a:solidFill>
+              <a:prstDash val="solid"/>
+              <a:round/>
+            </a:ln>
+          </p:spPr>
+          <p:txBody>
+            <a:bodyPr/>
+            <a:lstStyle/>
+            <a:p/>
+          </p:txBody>
+        </p:sp>
+        <p:sp>
+          <p:nvSpPr>
+            <p:cNvPr id="54" name="pl54"/>
+            <p:cNvSpPr/>
+            <p:nvPr/>
+          </p:nvSpPr>
+          <p:spPr>
+            <a:xfrm>
+              <a:off x="887106" y="4995019"/>
+              <a:ext cx="7660515" cy="0"/>
+            </a:xfrm>
+            <a:custGeom>
+              <a:avLst/>
+              <a:pathLst>
+                <a:path w="7660515" h="0">
+                  <a:moveTo>
+                    <a:pt x="0" y="0"/>
+                  </a:moveTo>
+                  <a:lnTo>
+                    <a:pt x="7660515" y="0"/>
+                  </a:lnTo>
+                  <a:lnTo>
+                    <a:pt x="7660515" y="0"/>
+                  </a:lnTo>
+                </a:path>
+              </a:pathLst>
+            </a:custGeom>
+            <a:ln w="13550" cap="flat">
+              <a:solidFill>
+                <a:srgbClr val="EBEBEB">
+                  <a:alpha val="100000"/>
+                </a:srgbClr>
+              </a:solidFill>
+              <a:prstDash val="solid"/>
+              <a:round/>
+            </a:ln>
+          </p:spPr>
+          <p:txBody>
+            <a:bodyPr/>
+            <a:lstStyle/>
+            <a:p/>
+          </p:txBody>
+        </p:sp>
+        <p:sp>
+          <p:nvSpPr>
+            <p:cNvPr id="55" name="pl55"/>
+            <p:cNvSpPr/>
+            <p:nvPr/>
+          </p:nvSpPr>
+          <p:spPr>
+            <a:xfrm>
+              <a:off x="887106" y="4695685"/>
+              <a:ext cx="7660515" cy="0"/>
+            </a:xfrm>
+            <a:custGeom>
+              <a:avLst/>
+              <a:pathLst>
+                <a:path w="7660515" h="0">
+                  <a:moveTo>
+                    <a:pt x="0" y="0"/>
+                  </a:moveTo>
+                  <a:lnTo>
+                    <a:pt x="7660515" y="0"/>
+                  </a:lnTo>
+                  <a:lnTo>
+                    <a:pt x="7660515" y="0"/>
+                  </a:lnTo>
+                </a:path>
+              </a:pathLst>
+            </a:custGeom>
+            <a:ln w="13550" cap="flat">
+              <a:solidFill>
+                <a:srgbClr val="EBEBEB">
+                  <a:alpha val="100000"/>
+                </a:srgbClr>
+              </a:solidFill>
+              <a:prstDash val="solid"/>
+              <a:round/>
+            </a:ln>
+          </p:spPr>
+          <p:txBody>
+            <a:bodyPr/>
+            <a:lstStyle/>
+            <a:p/>
+          </p:txBody>
+        </p:sp>
+        <p:sp>
+          <p:nvSpPr>
+            <p:cNvPr id="56" name="pl56"/>
+            <p:cNvSpPr/>
+            <p:nvPr/>
+          </p:nvSpPr>
+          <p:spPr>
+            <a:xfrm>
+              <a:off x="887106" y="4396351"/>
+              <a:ext cx="7660515" cy="0"/>
+            </a:xfrm>
+            <a:custGeom>
+              <a:avLst/>
+              <a:pathLst>
+                <a:path w="7660515" h="0">
+                  <a:moveTo>
+                    <a:pt x="0" y="0"/>
+                  </a:moveTo>
+                  <a:lnTo>
+                    <a:pt x="7660515" y="0"/>
+                  </a:lnTo>
+                  <a:lnTo>
+                    <a:pt x="7660515" y="0"/>
+                  </a:lnTo>
+                </a:path>
+              </a:pathLst>
+            </a:custGeom>
+            <a:ln w="13550" cap="flat">
+              <a:solidFill>
+                <a:srgbClr val="EBEBEB">
+                  <a:alpha val="100000"/>
+                </a:srgbClr>
+              </a:solidFill>
+              <a:prstDash val="solid"/>
+              <a:round/>
+            </a:ln>
+          </p:spPr>
+          <p:txBody>
+            <a:bodyPr/>
+            <a:lstStyle/>
+            <a:p/>
+          </p:txBody>
+        </p:sp>
+        <p:sp>
+          <p:nvSpPr>
+            <p:cNvPr id="57" name="pl57"/>
+            <p:cNvSpPr/>
+            <p:nvPr/>
+          </p:nvSpPr>
+          <p:spPr>
+            <a:xfrm>
+              <a:off x="1214120" y="4336484"/>
+              <a:ext cx="0" cy="1317069"/>
+            </a:xfrm>
+            <a:custGeom>
+              <a:avLst/>
+              <a:pathLst>
+                <a:path w="0" h="1317069">
+                  <a:moveTo>
+                    <a:pt x="0" y="1317069"/>
+                  </a:moveTo>
+                  <a:lnTo>
+                    <a:pt x="0" y="0"/>
+                  </a:lnTo>
+                  <a:lnTo>
+                    <a:pt x="0" y="0"/>
+                  </a:lnTo>
+                </a:path>
+              </a:pathLst>
+            </a:custGeom>
+            <a:ln w="13550" cap="flat">
+              <a:solidFill>
+                <a:srgbClr val="EBEBEB">
+                  <a:alpha val="100000"/>
+                </a:srgbClr>
+              </a:solidFill>
+              <a:prstDash val="solid"/>
+              <a:round/>
+            </a:ln>
+          </p:spPr>
+          <p:txBody>
+            <a:bodyPr/>
+            <a:lstStyle/>
+            <a:p/>
+          </p:txBody>
+        </p:sp>
+        <p:sp>
+          <p:nvSpPr>
+            <p:cNvPr id="58" name="pl58"/>
+            <p:cNvSpPr/>
+            <p:nvPr/>
+          </p:nvSpPr>
+          <p:spPr>
+            <a:xfrm>
+              <a:off x="2059406" y="4336484"/>
+              <a:ext cx="0" cy="1317069"/>
+            </a:xfrm>
+            <a:custGeom>
+              <a:avLst/>
+              <a:pathLst>
+                <a:path w="0" h="1317069">
+                  <a:moveTo>
+                    <a:pt x="0" y="1317069"/>
+                  </a:moveTo>
+                  <a:lnTo>
+                    <a:pt x="0" y="0"/>
+                  </a:lnTo>
+                  <a:lnTo>
+                    <a:pt x="0" y="0"/>
+                  </a:lnTo>
+                </a:path>
+              </a:pathLst>
+            </a:custGeom>
+            <a:ln w="13550" cap="flat">
+              <a:solidFill>
+                <a:srgbClr val="EBEBEB">
+                  <a:alpha val="100000"/>
+                </a:srgbClr>
+              </a:solidFill>
+              <a:prstDash val="solid"/>
+              <a:round/>
+            </a:ln>
+          </p:spPr>
+          <p:txBody>
+            <a:bodyPr/>
+            <a:lstStyle/>
+            <a:p/>
+          </p:txBody>
+        </p:sp>
+        <p:sp>
+          <p:nvSpPr>
+            <p:cNvPr id="59" name="pl59"/>
+            <p:cNvSpPr/>
+            <p:nvPr/>
+          </p:nvSpPr>
+          <p:spPr>
+            <a:xfrm>
+              <a:off x="2904693" y="4336484"/>
+              <a:ext cx="0" cy="1317069"/>
+            </a:xfrm>
+            <a:custGeom>
+              <a:avLst/>
+              <a:pathLst>
+                <a:path w="0" h="1317069">
+                  <a:moveTo>
+                    <a:pt x="0" y="1317069"/>
+                  </a:moveTo>
+                  <a:lnTo>
+                    <a:pt x="0" y="0"/>
+                  </a:lnTo>
+                  <a:lnTo>
+                    <a:pt x="0" y="0"/>
+                  </a:lnTo>
+                </a:path>
+              </a:pathLst>
+            </a:custGeom>
+            <a:ln w="13550" cap="flat">
+              <a:solidFill>
+                <a:srgbClr val="EBEBEB">
+                  <a:alpha val="100000"/>
+                </a:srgbClr>
+              </a:solidFill>
+              <a:prstDash val="solid"/>
+              <a:round/>
+            </a:ln>
+          </p:spPr>
+          <p:txBody>
+            <a:bodyPr/>
+            <a:lstStyle/>
+            <a:p/>
+          </p:txBody>
+        </p:sp>
+        <p:sp>
+          <p:nvSpPr>
+            <p:cNvPr id="60" name="pl60"/>
+            <p:cNvSpPr/>
+            <p:nvPr/>
+          </p:nvSpPr>
+          <p:spPr>
+            <a:xfrm>
+              <a:off x="3749979" y="4336484"/>
+              <a:ext cx="0" cy="1317069"/>
+            </a:xfrm>
+            <a:custGeom>
+              <a:avLst/>
+              <a:pathLst>
+                <a:path w="0" h="1317069">
+                  <a:moveTo>
+                    <a:pt x="0" y="1317069"/>
+                  </a:moveTo>
+                  <a:lnTo>
+                    <a:pt x="0" y="0"/>
+                  </a:lnTo>
+                  <a:lnTo>
+                    <a:pt x="0" y="0"/>
+                  </a:lnTo>
+                </a:path>
+              </a:pathLst>
+            </a:custGeom>
+            <a:ln w="13550" cap="flat">
+              <a:solidFill>
+                <a:srgbClr val="EBEBEB">
+                  <a:alpha val="100000"/>
+                </a:srgbClr>
+              </a:solidFill>
+              <a:prstDash val="solid"/>
+              <a:round/>
+            </a:ln>
+          </p:spPr>
+          <p:txBody>
+            <a:bodyPr/>
+            <a:lstStyle/>
+            <a:p/>
+          </p:txBody>
+        </p:sp>
+        <p:sp>
+          <p:nvSpPr>
+            <p:cNvPr id="61" name="pl61"/>
+            <p:cNvSpPr/>
+            <p:nvPr/>
+          </p:nvSpPr>
+          <p:spPr>
+            <a:xfrm>
+              <a:off x="4595266" y="4336484"/>
+              <a:ext cx="0" cy="1317069"/>
+            </a:xfrm>
+            <a:custGeom>
+              <a:avLst/>
+              <a:pathLst>
+                <a:path w="0" h="1317069">
+                  <a:moveTo>
+                    <a:pt x="0" y="1317069"/>
+                  </a:moveTo>
+                  <a:lnTo>
+                    <a:pt x="0" y="0"/>
+                  </a:lnTo>
+                  <a:lnTo>
+                    <a:pt x="0" y="0"/>
+                  </a:lnTo>
+                </a:path>
+              </a:pathLst>
+            </a:custGeom>
+            <a:ln w="13550" cap="flat">
+              <a:solidFill>
+                <a:srgbClr val="EBEBEB">
+                  <a:alpha val="100000"/>
+                </a:srgbClr>
+              </a:solidFill>
+              <a:prstDash val="solid"/>
+              <a:round/>
+            </a:ln>
+          </p:spPr>
+          <p:txBody>
+            <a:bodyPr/>
+            <a:lstStyle/>
+            <a:p/>
+          </p:txBody>
+        </p:sp>
+        <p:sp>
+          <p:nvSpPr>
+            <p:cNvPr id="62" name="pl62"/>
+            <p:cNvSpPr/>
+            <p:nvPr/>
+          </p:nvSpPr>
+          <p:spPr>
+            <a:xfrm>
+              <a:off x="5440552" y="4336484"/>
+              <a:ext cx="0" cy="1317069"/>
+            </a:xfrm>
+            <a:custGeom>
+              <a:avLst/>
+              <a:pathLst>
+                <a:path w="0" h="1317069">
+                  <a:moveTo>
+                    <a:pt x="0" y="1317069"/>
+                  </a:moveTo>
+                  <a:lnTo>
+                    <a:pt x="0" y="0"/>
+                  </a:lnTo>
+                  <a:lnTo>
+                    <a:pt x="0" y="0"/>
+                  </a:lnTo>
+                </a:path>
+              </a:pathLst>
+            </a:custGeom>
+            <a:ln w="13550" cap="flat">
+              <a:solidFill>
+                <a:srgbClr val="EBEBEB">
+                  <a:alpha val="100000"/>
+                </a:srgbClr>
+              </a:solidFill>
+              <a:prstDash val="solid"/>
+              <a:round/>
+            </a:ln>
+          </p:spPr>
+          <p:txBody>
+            <a:bodyPr/>
+            <a:lstStyle/>
+            <a:p/>
+          </p:txBody>
+        </p:sp>
+        <p:sp>
+          <p:nvSpPr>
+            <p:cNvPr id="63" name="pl63"/>
+            <p:cNvSpPr/>
+            <p:nvPr/>
+          </p:nvSpPr>
+          <p:spPr>
+            <a:xfrm>
+              <a:off x="6285838" y="4336484"/>
+              <a:ext cx="0" cy="1317069"/>
+            </a:xfrm>
+            <a:custGeom>
+              <a:avLst/>
+              <a:pathLst>
+                <a:path w="0" h="1317069">
+                  <a:moveTo>
+                    <a:pt x="0" y="1317069"/>
+                  </a:moveTo>
+                  <a:lnTo>
+                    <a:pt x="0" y="0"/>
+                  </a:lnTo>
+                  <a:lnTo>
+                    <a:pt x="0" y="0"/>
+                  </a:lnTo>
+                </a:path>
+              </a:pathLst>
+            </a:custGeom>
+            <a:ln w="13550" cap="flat">
+              <a:solidFill>
+                <a:srgbClr val="EBEBEB">
+                  <a:alpha val="100000"/>
+                </a:srgbClr>
+              </a:solidFill>
+              <a:prstDash val="solid"/>
+              <a:round/>
+            </a:ln>
+          </p:spPr>
+          <p:txBody>
+            <a:bodyPr/>
+            <a:lstStyle/>
+            <a:p/>
+          </p:txBody>
+        </p:sp>
+        <p:sp>
+          <p:nvSpPr>
+            <p:cNvPr id="64" name="pl64"/>
+            <p:cNvSpPr/>
+            <p:nvPr/>
+          </p:nvSpPr>
+          <p:spPr>
+            <a:xfrm>
+              <a:off x="7131125" y="4336484"/>
+              <a:ext cx="0" cy="1317069"/>
+            </a:xfrm>
+            <a:custGeom>
+              <a:avLst/>
+              <a:pathLst>
+                <a:path w="0" h="1317069">
+                  <a:moveTo>
+                    <a:pt x="0" y="1317069"/>
+                  </a:moveTo>
+                  <a:lnTo>
+                    <a:pt x="0" y="0"/>
+                  </a:lnTo>
+                  <a:lnTo>
+                    <a:pt x="0" y="0"/>
+                  </a:lnTo>
+                </a:path>
+              </a:pathLst>
+            </a:custGeom>
+            <a:ln w="13550" cap="flat">
+              <a:solidFill>
+                <a:srgbClr val="EBEBEB">
+                  <a:alpha val="100000"/>
+                </a:srgbClr>
+              </a:solidFill>
+              <a:prstDash val="solid"/>
+              <a:round/>
+            </a:ln>
+          </p:spPr>
+          <p:txBody>
+            <a:bodyPr/>
+            <a:lstStyle/>
+            <a:p/>
+          </p:txBody>
+        </p:sp>
+        <p:sp>
+          <p:nvSpPr>
+            <p:cNvPr id="65" name="pl65"/>
+            <p:cNvSpPr/>
+            <p:nvPr/>
+          </p:nvSpPr>
+          <p:spPr>
+            <a:xfrm>
+              <a:off x="7976411" y="4336484"/>
+              <a:ext cx="0" cy="1317069"/>
+            </a:xfrm>
+            <a:custGeom>
+              <a:avLst/>
+              <a:pathLst>
+                <a:path w="0" h="1317069">
+                  <a:moveTo>
+                    <a:pt x="0" y="1317069"/>
+                  </a:moveTo>
+                  <a:lnTo>
+                    <a:pt x="0" y="0"/>
+                  </a:lnTo>
+                  <a:lnTo>
+                    <a:pt x="0" y="0"/>
+                  </a:lnTo>
+                </a:path>
+              </a:pathLst>
+            </a:custGeom>
+            <a:ln w="13550" cap="flat">
+              <a:solidFill>
+                <a:srgbClr val="EBEBEB">
+                  <a:alpha val="100000"/>
+                </a:srgbClr>
+              </a:solidFill>
+              <a:prstDash val="solid"/>
+              <a:round/>
+            </a:ln>
+          </p:spPr>
+          <p:txBody>
+            <a:bodyPr/>
+            <a:lstStyle/>
+            <a:p/>
+          </p:txBody>
+        </p:sp>
+        <p:sp>
+          <p:nvSpPr>
+            <p:cNvPr id="66" name="pg66"/>
+            <p:cNvSpPr/>
+            <p:nvPr/>
+          </p:nvSpPr>
+          <p:spPr>
+            <a:xfrm>
+              <a:off x="1235312" y="4336484"/>
+              <a:ext cx="6964104" cy="1209131"/>
+            </a:xfrm>
+            <a:custGeom>
+              <a:avLst/>
+              <a:pathLst>
+                <a:path w="6964104" h="1209131">
+                  <a:moveTo>
+                    <a:pt x="523587" y="0"/>
+                  </a:moveTo>
+                  <a:lnTo>
+                    <a:pt x="562755" y="24901"/>
+                  </a:lnTo>
+                  <a:lnTo>
+                    <a:pt x="633100" y="68056"/>
+                  </a:lnTo>
+                  <a:lnTo>
+                    <a:pt x="703444" y="109700"/>
+                  </a:lnTo>
+                  <a:lnTo>
+                    <a:pt x="773789" y="149886"/>
+                  </a:lnTo>
+                  <a:lnTo>
+                    <a:pt x="844133" y="188664"/>
+                  </a:lnTo>
+                  <a:lnTo>
+                    <a:pt x="914478" y="226084"/>
+                  </a:lnTo>
+                  <a:lnTo>
+                    <a:pt x="984822" y="262194"/>
+                  </a:lnTo>
+                  <a:lnTo>
+                    <a:pt x="1055167" y="297039"/>
+                  </a:lnTo>
+                  <a:lnTo>
+                    <a:pt x="1125511" y="330664"/>
+                  </a:lnTo>
+                  <a:lnTo>
+                    <a:pt x="1195856" y="363111"/>
+                  </a:lnTo>
+                  <a:lnTo>
+                    <a:pt x="1266200" y="394423"/>
+                  </a:lnTo>
+                  <a:lnTo>
+                    <a:pt x="1336545" y="424637"/>
+                  </a:lnTo>
+                  <a:lnTo>
+                    <a:pt x="1406889" y="453794"/>
+                  </a:lnTo>
+                  <a:lnTo>
+                    <a:pt x="1477234" y="481929"/>
+                  </a:lnTo>
+                  <a:lnTo>
+                    <a:pt x="1547578" y="509079"/>
+                  </a:lnTo>
+                  <a:lnTo>
+                    <a:pt x="1617923" y="535278"/>
+                  </a:lnTo>
+                  <a:lnTo>
+                    <a:pt x="1688267" y="560560"/>
+                  </a:lnTo>
+                  <a:lnTo>
+                    <a:pt x="1758612" y="584957"/>
+                  </a:lnTo>
+                  <a:lnTo>
+                    <a:pt x="1828956" y="608499"/>
+                  </a:lnTo>
+                  <a:lnTo>
+                    <a:pt x="1899301" y="631216"/>
+                  </a:lnTo>
+                  <a:lnTo>
+                    <a:pt x="1969645" y="653138"/>
+                  </a:lnTo>
+                  <a:lnTo>
+                    <a:pt x="2039990" y="674293"/>
+                  </a:lnTo>
+                  <a:lnTo>
+                    <a:pt x="2110334" y="694706"/>
+                  </a:lnTo>
+                  <a:lnTo>
+                    <a:pt x="2180679" y="714405"/>
+                  </a:lnTo>
+                  <a:lnTo>
+                    <a:pt x="2251023" y="733414"/>
+                  </a:lnTo>
+                  <a:lnTo>
+                    <a:pt x="2321368" y="751757"/>
+                  </a:lnTo>
+                  <a:lnTo>
+                    <a:pt x="2391712" y="769457"/>
+                  </a:lnTo>
+                  <a:lnTo>
+                    <a:pt x="2462057" y="786538"/>
+                  </a:lnTo>
+                  <a:lnTo>
+                    <a:pt x="2532401" y="803021"/>
+                  </a:lnTo>
+                  <a:lnTo>
+                    <a:pt x="2602746" y="818926"/>
+                  </a:lnTo>
+                  <a:lnTo>
+                    <a:pt x="2673090" y="834275"/>
+                  </a:lnTo>
+                  <a:lnTo>
+                    <a:pt x="2743435" y="849086"/>
+                  </a:lnTo>
+                  <a:lnTo>
+                    <a:pt x="2813779" y="863378"/>
+                  </a:lnTo>
+                  <a:lnTo>
+                    <a:pt x="2884124" y="877170"/>
+                  </a:lnTo>
+                  <a:lnTo>
+                    <a:pt x="2954468" y="890479"/>
+                  </a:lnTo>
+                  <a:lnTo>
+                    <a:pt x="3024813" y="903321"/>
+                  </a:lnTo>
+                  <a:lnTo>
+                    <a:pt x="3095157" y="915714"/>
+                  </a:lnTo>
+                  <a:lnTo>
+                    <a:pt x="3165502" y="927673"/>
+                  </a:lnTo>
+                  <a:lnTo>
+                    <a:pt x="3235846" y="939213"/>
+                  </a:lnTo>
+                  <a:lnTo>
+                    <a:pt x="3306191" y="950349"/>
+                  </a:lnTo>
+                  <a:lnTo>
+                    <a:pt x="3376535" y="957631"/>
+                  </a:lnTo>
+                  <a:lnTo>
+                    <a:pt x="3446880" y="956849"/>
+                  </a:lnTo>
+                  <a:lnTo>
+                    <a:pt x="3517224" y="956065"/>
+                  </a:lnTo>
+                  <a:lnTo>
+                    <a:pt x="3587569" y="955279"/>
+                  </a:lnTo>
+                  <a:lnTo>
+                    <a:pt x="3657913" y="954491"/>
+                  </a:lnTo>
+                  <a:lnTo>
+                    <a:pt x="3728257" y="953702"/>
+                  </a:lnTo>
+                  <a:lnTo>
+                    <a:pt x="3798602" y="952910"/>
+                  </a:lnTo>
+                  <a:lnTo>
+                    <a:pt x="3868946" y="952115"/>
+                  </a:lnTo>
+                  <a:lnTo>
+                    <a:pt x="3939291" y="951319"/>
+                  </a:lnTo>
+                  <a:lnTo>
+                    <a:pt x="4009635" y="950521"/>
+                  </a:lnTo>
+                  <a:lnTo>
+                    <a:pt x="4079980" y="949721"/>
+                  </a:lnTo>
+                  <a:lnTo>
+                    <a:pt x="4150324" y="948918"/>
+                  </a:lnTo>
+                  <a:lnTo>
+                    <a:pt x="4220669" y="948114"/>
+                  </a:lnTo>
+                  <a:lnTo>
+                    <a:pt x="4291013" y="947307"/>
+                  </a:lnTo>
+                  <a:lnTo>
+                    <a:pt x="4361358" y="946499"/>
+                  </a:lnTo>
+                  <a:lnTo>
+                    <a:pt x="4431702" y="945688"/>
+                  </a:lnTo>
+                  <a:lnTo>
+                    <a:pt x="4502047" y="944875"/>
+                  </a:lnTo>
+                  <a:lnTo>
+                    <a:pt x="4572391" y="944060"/>
+                  </a:lnTo>
+                  <a:lnTo>
+                    <a:pt x="4642736" y="943243"/>
+                  </a:lnTo>
+                  <a:lnTo>
+                    <a:pt x="4713080" y="942424"/>
+                  </a:lnTo>
+                  <a:lnTo>
+                    <a:pt x="4783425" y="941602"/>
+                  </a:lnTo>
+                  <a:lnTo>
+                    <a:pt x="4853769" y="940779"/>
+                  </a:lnTo>
+                  <a:lnTo>
+                    <a:pt x="4924114" y="939953"/>
+                  </a:lnTo>
+                  <a:lnTo>
+                    <a:pt x="4994458" y="939125"/>
+                  </a:lnTo>
+                  <a:lnTo>
+                    <a:pt x="5064803" y="938295"/>
+                  </a:lnTo>
+                  <a:lnTo>
+                    <a:pt x="5135147" y="937463"/>
+                  </a:lnTo>
+                  <a:lnTo>
+                    <a:pt x="5205492" y="936629"/>
+                  </a:lnTo>
+                  <a:lnTo>
+                    <a:pt x="5275836" y="935792"/>
+                  </a:lnTo>
+                  <a:lnTo>
+                    <a:pt x="5346181" y="934953"/>
+                  </a:lnTo>
+                  <a:lnTo>
+                    <a:pt x="5416525" y="934112"/>
+                  </a:lnTo>
+                  <a:lnTo>
+                    <a:pt x="5486870" y="933269"/>
+                  </a:lnTo>
+                  <a:lnTo>
+                    <a:pt x="5557214" y="932424"/>
+                  </a:lnTo>
+                  <a:lnTo>
+                    <a:pt x="5627559" y="931577"/>
+                  </a:lnTo>
+                  <a:lnTo>
+                    <a:pt x="5697903" y="930727"/>
+                  </a:lnTo>
+                  <a:lnTo>
+                    <a:pt x="5768248" y="929875"/>
+                  </a:lnTo>
+                  <a:lnTo>
+                    <a:pt x="5838592" y="929021"/>
+                  </a:lnTo>
+                  <a:lnTo>
+                    <a:pt x="5908937" y="928164"/>
+                  </a:lnTo>
+                  <a:lnTo>
+                    <a:pt x="5979281" y="927306"/>
+                  </a:lnTo>
+                  <a:lnTo>
+                    <a:pt x="6049626" y="926445"/>
+                  </a:lnTo>
+                  <a:lnTo>
+                    <a:pt x="6119970" y="925582"/>
+                  </a:lnTo>
+                  <a:lnTo>
+                    <a:pt x="6190315" y="924716"/>
+                  </a:lnTo>
+                  <a:lnTo>
+                    <a:pt x="6260659" y="923849"/>
+                  </a:lnTo>
+                  <a:lnTo>
+                    <a:pt x="6331004" y="922979"/>
+                  </a:lnTo>
+                  <a:lnTo>
+                    <a:pt x="6401348" y="922107"/>
+                  </a:lnTo>
+                  <a:lnTo>
+                    <a:pt x="6471693" y="921232"/>
+                  </a:lnTo>
+                  <a:lnTo>
+                    <a:pt x="6542037" y="920356"/>
+                  </a:lnTo>
+                  <a:lnTo>
+                    <a:pt x="6612382" y="919477"/>
+                  </a:lnTo>
+                  <a:lnTo>
+                    <a:pt x="6682726" y="918595"/>
+                  </a:lnTo>
+                  <a:lnTo>
+                    <a:pt x="6753071" y="917712"/>
+                  </a:lnTo>
+                  <a:lnTo>
+                    <a:pt x="6823415" y="916826"/>
+                  </a:lnTo>
+                  <a:lnTo>
+                    <a:pt x="6893760" y="915938"/>
+                  </a:lnTo>
+                  <a:lnTo>
+                    <a:pt x="6964104" y="915047"/>
+                  </a:lnTo>
+                  <a:lnTo>
+                    <a:pt x="6964104" y="1209131"/>
+                  </a:lnTo>
+                  <a:lnTo>
+                    <a:pt x="6893760" y="1207387"/>
+                  </a:lnTo>
+                  <a:lnTo>
+                    <a:pt x="6823415" y="1205579"/>
+                  </a:lnTo>
+                  <a:lnTo>
+                    <a:pt x="6753071" y="1203705"/>
+                  </a:lnTo>
+                  <a:lnTo>
+                    <a:pt x="6682726" y="1201764"/>
+                  </a:lnTo>
+                  <a:lnTo>
+                    <a:pt x="6612382" y="1199752"/>
+                  </a:lnTo>
+                  <a:lnTo>
+                    <a:pt x="6542037" y="1197667"/>
+                  </a:lnTo>
+                  <a:lnTo>
+                    <a:pt x="6471693" y="1195506"/>
+                  </a:lnTo>
+                  <a:lnTo>
+                    <a:pt x="6401348" y="1193267"/>
+                  </a:lnTo>
+                  <a:lnTo>
+                    <a:pt x="6331004" y="1190947"/>
+                  </a:lnTo>
+                  <a:lnTo>
+                    <a:pt x="6260659" y="1188543"/>
+                  </a:lnTo>
+                  <a:lnTo>
+                    <a:pt x="6190315" y="1186051"/>
+                  </a:lnTo>
+                  <a:lnTo>
+                    <a:pt x="6119970" y="1183469"/>
+                  </a:lnTo>
+                  <a:lnTo>
+                    <a:pt x="6049626" y="1180793"/>
+                  </a:lnTo>
+                  <a:lnTo>
+                    <a:pt x="5979281" y="1178020"/>
+                  </a:lnTo>
+                  <a:lnTo>
+                    <a:pt x="5908937" y="1175147"/>
+                  </a:lnTo>
+                  <a:lnTo>
+                    <a:pt x="5838592" y="1172169"/>
+                  </a:lnTo>
+                  <a:lnTo>
+                    <a:pt x="5768248" y="1169083"/>
+                  </a:lnTo>
+                  <a:lnTo>
+                    <a:pt x="5697903" y="1165885"/>
+                  </a:lnTo>
+                  <a:lnTo>
+                    <a:pt x="5627559" y="1162571"/>
+                  </a:lnTo>
+                  <a:lnTo>
+                    <a:pt x="5557214" y="1159137"/>
+                  </a:lnTo>
+                  <a:lnTo>
+                    <a:pt x="5486870" y="1155578"/>
+                  </a:lnTo>
+                  <a:lnTo>
+                    <a:pt x="5416525" y="1151890"/>
+                  </a:lnTo>
+                  <a:lnTo>
+                    <a:pt x="5346181" y="1148068"/>
+                  </a:lnTo>
+                  <a:lnTo>
+                    <a:pt x="5275836" y="1144107"/>
+                  </a:lnTo>
+                  <a:lnTo>
+                    <a:pt x="5205492" y="1140003"/>
+                  </a:lnTo>
+                  <a:lnTo>
+                    <a:pt x="5135147" y="1135750"/>
+                  </a:lnTo>
+                  <a:lnTo>
+                    <a:pt x="5064803" y="1131342"/>
+                  </a:lnTo>
+                  <a:lnTo>
+                    <a:pt x="4994458" y="1126774"/>
+                  </a:lnTo>
+                  <a:lnTo>
+                    <a:pt x="4924114" y="1122041"/>
+                  </a:lnTo>
+                  <a:lnTo>
+                    <a:pt x="4853769" y="1117136"/>
+                  </a:lnTo>
+                  <a:lnTo>
+                    <a:pt x="4783425" y="1112053"/>
+                  </a:lnTo>
+                  <a:lnTo>
+                    <a:pt x="4713080" y="1106785"/>
+                  </a:lnTo>
+                  <a:lnTo>
+                    <a:pt x="4642736" y="1101326"/>
+                  </a:lnTo>
+                  <a:lnTo>
+                    <a:pt x="4572391" y="1095670"/>
+                  </a:lnTo>
+                  <a:lnTo>
+                    <a:pt x="4502047" y="1089807"/>
+                  </a:lnTo>
+                  <a:lnTo>
+                    <a:pt x="4431702" y="1083733"/>
+                  </a:lnTo>
+                  <a:lnTo>
+                    <a:pt x="4361358" y="1077437"/>
+                  </a:lnTo>
+                  <a:lnTo>
+                    <a:pt x="4291013" y="1070913"/>
+                  </a:lnTo>
+                  <a:lnTo>
+                    <a:pt x="4220669" y="1064153"/>
+                  </a:lnTo>
+                  <a:lnTo>
+                    <a:pt x="4150324" y="1057147"/>
+                  </a:lnTo>
+                  <a:lnTo>
+                    <a:pt x="4079980" y="1049887"/>
+                  </a:lnTo>
+                  <a:lnTo>
+                    <a:pt x="4009635" y="1042363"/>
+                  </a:lnTo>
+                  <a:lnTo>
+                    <a:pt x="3939291" y="1034566"/>
+                  </a:lnTo>
+                  <a:lnTo>
+                    <a:pt x="3868946" y="1026487"/>
+                  </a:lnTo>
+                  <a:lnTo>
+                    <a:pt x="3798602" y="1018114"/>
+                  </a:lnTo>
+                  <a:lnTo>
+                    <a:pt x="3728257" y="1009437"/>
+                  </a:lnTo>
+                  <a:lnTo>
+                    <a:pt x="3657913" y="1000445"/>
+                  </a:lnTo>
+                  <a:lnTo>
+                    <a:pt x="3587569" y="991127"/>
+                  </a:lnTo>
+                  <a:lnTo>
+                    <a:pt x="3517224" y="981471"/>
+                  </a:lnTo>
+                  <a:lnTo>
+                    <a:pt x="3446880" y="971465"/>
+                  </a:lnTo>
+                  <a:lnTo>
+                    <a:pt x="3376535" y="961095"/>
+                  </a:lnTo>
+                  <a:lnTo>
+                    <a:pt x="3306191" y="958410"/>
+                  </a:lnTo>
+                  <a:lnTo>
+                    <a:pt x="3235846" y="959188"/>
+                  </a:lnTo>
+                  <a:lnTo>
+                    <a:pt x="3165502" y="959964"/>
+                  </a:lnTo>
+                  <a:lnTo>
+                    <a:pt x="3095157" y="960737"/>
+                  </a:lnTo>
+                  <a:lnTo>
+                    <a:pt x="3024813" y="961509"/>
+                  </a:lnTo>
+                  <a:lnTo>
+                    <a:pt x="2954468" y="962278"/>
+                  </a:lnTo>
+                  <a:lnTo>
+                    <a:pt x="2884124" y="963046"/>
+                  </a:lnTo>
+                  <a:lnTo>
+                    <a:pt x="2813779" y="963812"/>
+                  </a:lnTo>
+                  <a:lnTo>
+                    <a:pt x="2743435" y="964575"/>
+                  </a:lnTo>
+                  <a:lnTo>
+                    <a:pt x="2673090" y="965337"/>
+                  </a:lnTo>
+                  <a:lnTo>
+                    <a:pt x="2602746" y="966097"/>
+                  </a:lnTo>
+                  <a:lnTo>
+                    <a:pt x="2532401" y="966854"/>
+                  </a:lnTo>
+                  <a:lnTo>
+                    <a:pt x="2462057" y="967610"/>
+                  </a:lnTo>
+                  <a:lnTo>
+                    <a:pt x="2391712" y="968364"/>
+                  </a:lnTo>
+                  <a:lnTo>
+                    <a:pt x="2321368" y="969115"/>
+                  </a:lnTo>
+                  <a:lnTo>
+                    <a:pt x="2251023" y="969865"/>
+                  </a:lnTo>
+                  <a:lnTo>
+                    <a:pt x="2180679" y="970613"/>
+                  </a:lnTo>
+                  <a:lnTo>
+                    <a:pt x="2110334" y="971359"/>
+                  </a:lnTo>
+                  <a:lnTo>
+                    <a:pt x="2039990" y="972103"/>
+                  </a:lnTo>
+                  <a:lnTo>
+                    <a:pt x="1969645" y="972845"/>
+                  </a:lnTo>
+                  <a:lnTo>
+                    <a:pt x="1899301" y="973585"/>
+                  </a:lnTo>
+                  <a:lnTo>
+                    <a:pt x="1828956" y="974323"/>
+                  </a:lnTo>
+                  <a:lnTo>
+                    <a:pt x="1758612" y="975059"/>
+                  </a:lnTo>
+                  <a:lnTo>
+                    <a:pt x="1688267" y="975794"/>
+                  </a:lnTo>
+                  <a:lnTo>
+                    <a:pt x="1617923" y="976526"/>
+                  </a:lnTo>
+                  <a:lnTo>
+                    <a:pt x="1547578" y="977257"/>
+                  </a:lnTo>
+                  <a:lnTo>
+                    <a:pt x="1477234" y="977985"/>
+                  </a:lnTo>
+                  <a:lnTo>
+                    <a:pt x="1406889" y="978712"/>
+                  </a:lnTo>
+                  <a:lnTo>
+                    <a:pt x="1336545" y="979437"/>
+                  </a:lnTo>
+                  <a:lnTo>
+                    <a:pt x="1266200" y="980160"/>
+                  </a:lnTo>
+                  <a:lnTo>
+                    <a:pt x="1195856" y="980881"/>
+                  </a:lnTo>
+                  <a:lnTo>
+                    <a:pt x="1125511" y="981600"/>
+                  </a:lnTo>
+                  <a:lnTo>
+                    <a:pt x="1055167" y="982317"/>
+                  </a:lnTo>
+                  <a:lnTo>
+                    <a:pt x="984822" y="983033"/>
+                  </a:lnTo>
+                  <a:lnTo>
+                    <a:pt x="914478" y="983746"/>
+                  </a:lnTo>
+                  <a:lnTo>
+                    <a:pt x="844133" y="984458"/>
+                  </a:lnTo>
+                  <a:lnTo>
+                    <a:pt x="773789" y="985168"/>
+                  </a:lnTo>
+                  <a:lnTo>
+                    <a:pt x="703444" y="985876"/>
+                  </a:lnTo>
+                  <a:lnTo>
+                    <a:pt x="633100" y="986582"/>
+                  </a:lnTo>
+                  <a:lnTo>
+                    <a:pt x="562755" y="987287"/>
+                  </a:lnTo>
+                  <a:lnTo>
+                    <a:pt x="492411" y="987989"/>
+                  </a:lnTo>
+                  <a:lnTo>
+                    <a:pt x="422066" y="988690"/>
+                  </a:lnTo>
+                  <a:lnTo>
+                    <a:pt x="351722" y="989389"/>
+                  </a:lnTo>
+                  <a:lnTo>
+                    <a:pt x="281377" y="990086"/>
+                  </a:lnTo>
+                  <a:lnTo>
+                    <a:pt x="211033" y="990781"/>
+                  </a:lnTo>
+                  <a:lnTo>
+                    <a:pt x="140688" y="991474"/>
+                  </a:lnTo>
+                  <a:lnTo>
+                    <a:pt x="70344" y="992166"/>
+                  </a:lnTo>
+                  <a:lnTo>
+                    <a:pt x="0" y="992856"/>
+                  </a:lnTo>
+                  <a:close/>
+                </a:path>
+              </a:pathLst>
+            </a:custGeom>
+            <a:solidFill>
+              <a:srgbClr val="FF8C00">
+                <a:alpha val="20000"/>
+              </a:srgbClr>
+            </a:solidFill>
+          </p:spPr>
+          <p:txBody>
+            <a:bodyPr/>
+            <a:lstStyle/>
+            <a:p/>
+          </p:txBody>
+        </p:sp>
+        <p:sp>
+          <p:nvSpPr>
+            <p:cNvPr id="67" name="pl67"/>
+            <p:cNvSpPr/>
+            <p:nvPr/>
+          </p:nvSpPr>
+          <p:spPr>
+            <a:xfrm>
+              <a:off x="1758899" y="4336484"/>
+              <a:ext cx="6440516" cy="957631"/>
+            </a:xfrm>
+            <a:custGeom>
+              <a:avLst/>
+              <a:pathLst>
+                <a:path w="6440516" h="957631">
+                  <a:moveTo>
+                    <a:pt x="0" y="0"/>
+                  </a:moveTo>
+                  <a:lnTo>
+                    <a:pt x="39168" y="24901"/>
+                  </a:lnTo>
+                  <a:lnTo>
+                    <a:pt x="109512" y="68056"/>
+                  </a:lnTo>
+                  <a:lnTo>
+                    <a:pt x="179857" y="109700"/>
+                  </a:lnTo>
+                  <a:lnTo>
+                    <a:pt x="250201" y="149886"/>
+                  </a:lnTo>
+                  <a:lnTo>
+                    <a:pt x="320546" y="188664"/>
+                  </a:lnTo>
+                  <a:lnTo>
+                    <a:pt x="390890" y="226084"/>
+                  </a:lnTo>
+                  <a:lnTo>
+                    <a:pt x="461235" y="262194"/>
+                  </a:lnTo>
+                  <a:lnTo>
+                    <a:pt x="531579" y="297039"/>
+                  </a:lnTo>
+                  <a:lnTo>
+                    <a:pt x="601924" y="330664"/>
+                  </a:lnTo>
+                  <a:lnTo>
+                    <a:pt x="672268" y="363111"/>
+                  </a:lnTo>
+                  <a:lnTo>
+                    <a:pt x="742613" y="394423"/>
+                  </a:lnTo>
+                  <a:lnTo>
+                    <a:pt x="812957" y="424637"/>
+                  </a:lnTo>
+                  <a:lnTo>
+                    <a:pt x="883302" y="453794"/>
+                  </a:lnTo>
+                  <a:lnTo>
+                    <a:pt x="953646" y="481929"/>
+                  </a:lnTo>
+                  <a:lnTo>
+                    <a:pt x="1023991" y="509079"/>
+                  </a:lnTo>
+                  <a:lnTo>
+                    <a:pt x="1094335" y="535278"/>
+                  </a:lnTo>
+                  <a:lnTo>
+                    <a:pt x="1164680" y="560560"/>
+                  </a:lnTo>
+                  <a:lnTo>
+                    <a:pt x="1235024" y="584957"/>
+                  </a:lnTo>
+                  <a:lnTo>
+                    <a:pt x="1305369" y="608499"/>
+                  </a:lnTo>
+                  <a:lnTo>
+                    <a:pt x="1375713" y="631216"/>
+                  </a:lnTo>
+                  <a:lnTo>
+                    <a:pt x="1446058" y="653138"/>
+                  </a:lnTo>
+                  <a:lnTo>
+                    <a:pt x="1516402" y="674293"/>
+                  </a:lnTo>
+                  <a:lnTo>
+                    <a:pt x="1586747" y="694706"/>
+                  </a:lnTo>
+                  <a:lnTo>
+                    <a:pt x="1657091" y="714405"/>
+                  </a:lnTo>
+                  <a:lnTo>
+                    <a:pt x="1727436" y="733414"/>
+                  </a:lnTo>
+                  <a:lnTo>
+                    <a:pt x="1797780" y="751757"/>
+                  </a:lnTo>
+                  <a:lnTo>
+                    <a:pt x="1868125" y="769457"/>
+                  </a:lnTo>
+                  <a:lnTo>
+                    <a:pt x="1938469" y="786538"/>
+                  </a:lnTo>
+                  <a:lnTo>
+                    <a:pt x="2008814" y="803021"/>
+                  </a:lnTo>
+                  <a:lnTo>
+                    <a:pt x="2079158" y="818926"/>
+                  </a:lnTo>
+                  <a:lnTo>
+                    <a:pt x="2149503" y="834275"/>
+                  </a:lnTo>
+                  <a:lnTo>
+                    <a:pt x="2219847" y="849086"/>
+                  </a:lnTo>
+                  <a:lnTo>
+                    <a:pt x="2290192" y="863378"/>
+                  </a:lnTo>
+                  <a:lnTo>
+                    <a:pt x="2360536" y="877170"/>
+                  </a:lnTo>
+                  <a:lnTo>
+                    <a:pt x="2430881" y="890479"/>
+                  </a:lnTo>
+                  <a:lnTo>
+                    <a:pt x="2501225" y="903321"/>
+                  </a:lnTo>
+                  <a:lnTo>
+                    <a:pt x="2571570" y="915714"/>
+                  </a:lnTo>
+                  <a:lnTo>
+                    <a:pt x="2641914" y="927673"/>
+                  </a:lnTo>
+                  <a:lnTo>
+                    <a:pt x="2712258" y="939213"/>
+                  </a:lnTo>
+                  <a:lnTo>
+                    <a:pt x="2782603" y="950349"/>
+                  </a:lnTo>
+                  <a:lnTo>
+                    <a:pt x="2852947" y="957631"/>
+                  </a:lnTo>
+                  <a:lnTo>
+                    <a:pt x="2923292" y="956849"/>
+                  </a:lnTo>
+                  <a:lnTo>
+                    <a:pt x="2993636" y="956065"/>
+                  </a:lnTo>
+                  <a:lnTo>
+                    <a:pt x="3063981" y="955279"/>
+                  </a:lnTo>
+                  <a:lnTo>
+                    <a:pt x="3134325" y="954491"/>
+                  </a:lnTo>
+                  <a:lnTo>
+                    <a:pt x="3204670" y="953702"/>
+                  </a:lnTo>
+                  <a:lnTo>
+                    <a:pt x="3275014" y="952910"/>
+                  </a:lnTo>
+                  <a:lnTo>
+                    <a:pt x="3345359" y="952115"/>
+                  </a:lnTo>
+                  <a:lnTo>
+                    <a:pt x="3415703" y="951319"/>
+                  </a:lnTo>
+                  <a:lnTo>
+                    <a:pt x="3486048" y="950521"/>
+                  </a:lnTo>
+                  <a:lnTo>
+                    <a:pt x="3556392" y="949721"/>
+                  </a:lnTo>
+                  <a:lnTo>
+                    <a:pt x="3626737" y="948918"/>
+                  </a:lnTo>
+                  <a:lnTo>
+                    <a:pt x="3697081" y="948114"/>
+                  </a:lnTo>
+                  <a:lnTo>
+                    <a:pt x="3767426" y="947307"/>
+                  </a:lnTo>
+                  <a:lnTo>
+                    <a:pt x="3837770" y="946499"/>
+                  </a:lnTo>
+                  <a:lnTo>
+                    <a:pt x="3908115" y="945688"/>
+                  </a:lnTo>
+                  <a:lnTo>
+                    <a:pt x="3978459" y="944875"/>
+                  </a:lnTo>
+                  <a:lnTo>
+                    <a:pt x="4048804" y="944060"/>
+                  </a:lnTo>
+                  <a:lnTo>
+                    <a:pt x="4119148" y="943243"/>
+                  </a:lnTo>
+                  <a:lnTo>
+                    <a:pt x="4189493" y="942424"/>
+                  </a:lnTo>
+                  <a:lnTo>
+                    <a:pt x="4259837" y="941602"/>
+                  </a:lnTo>
+                  <a:lnTo>
+                    <a:pt x="4330182" y="940779"/>
+                  </a:lnTo>
+                  <a:lnTo>
+                    <a:pt x="4400526" y="939953"/>
+                  </a:lnTo>
+                  <a:lnTo>
+                    <a:pt x="4470871" y="939125"/>
+                  </a:lnTo>
+                  <a:lnTo>
+                    <a:pt x="4541215" y="938295"/>
+                  </a:lnTo>
+                  <a:lnTo>
+                    <a:pt x="4611560" y="937463"/>
+                  </a:lnTo>
+                  <a:lnTo>
+                    <a:pt x="4681904" y="936629"/>
+                  </a:lnTo>
+                  <a:lnTo>
+                    <a:pt x="4752249" y="935792"/>
+                  </a:lnTo>
+                  <a:lnTo>
+                    <a:pt x="4822593" y="934953"/>
+                  </a:lnTo>
+                  <a:lnTo>
+                    <a:pt x="4892938" y="934112"/>
+                  </a:lnTo>
+                  <a:lnTo>
+                    <a:pt x="4963282" y="933269"/>
+                  </a:lnTo>
+                  <a:lnTo>
+                    <a:pt x="5033627" y="932424"/>
+                  </a:lnTo>
+                  <a:lnTo>
+                    <a:pt x="5103971" y="931577"/>
+                  </a:lnTo>
+                  <a:lnTo>
+                    <a:pt x="5174316" y="930727"/>
+                  </a:lnTo>
+                  <a:lnTo>
+                    <a:pt x="5244660" y="929875"/>
+                  </a:lnTo>
+                  <a:lnTo>
+                    <a:pt x="5315005" y="929021"/>
+                  </a:lnTo>
+                  <a:lnTo>
+                    <a:pt x="5385349" y="928164"/>
+                  </a:lnTo>
+                  <a:lnTo>
+                    <a:pt x="5455694" y="927306"/>
+                  </a:lnTo>
+                  <a:lnTo>
+                    <a:pt x="5526038" y="926445"/>
+                  </a:lnTo>
+                  <a:lnTo>
+                    <a:pt x="5596383" y="925582"/>
+                  </a:lnTo>
+                  <a:lnTo>
+                    <a:pt x="5666727" y="924716"/>
+                  </a:lnTo>
+                  <a:lnTo>
+                    <a:pt x="5737072" y="923849"/>
+                  </a:lnTo>
+                  <a:lnTo>
+                    <a:pt x="5807416" y="922979"/>
+                  </a:lnTo>
+                  <a:lnTo>
+                    <a:pt x="5877761" y="922107"/>
+                  </a:lnTo>
+                  <a:lnTo>
+                    <a:pt x="5948105" y="921232"/>
+                  </a:lnTo>
+                  <a:lnTo>
+                    <a:pt x="6018450" y="920356"/>
+                  </a:lnTo>
+                  <a:lnTo>
+                    <a:pt x="6088794" y="919477"/>
+                  </a:lnTo>
+                  <a:lnTo>
+                    <a:pt x="6159139" y="918595"/>
+                  </a:lnTo>
+                  <a:lnTo>
+                    <a:pt x="6229483" y="917712"/>
+                  </a:lnTo>
+                  <a:lnTo>
+                    <a:pt x="6299828" y="916826"/>
+                  </a:lnTo>
+                  <a:lnTo>
+                    <a:pt x="6370172" y="915938"/>
+                  </a:lnTo>
+                  <a:lnTo>
+                    <a:pt x="6440516" y="915047"/>
+                  </a:lnTo>
+                </a:path>
+              </a:pathLst>
+            </a:custGeom>
+          </p:spPr>
+          <p:txBody>
+            <a:bodyPr/>
+            <a:lstStyle/>
+            <a:p/>
+          </p:txBody>
+        </p:sp>
+        <p:sp>
+          <p:nvSpPr>
+            <p:cNvPr id="68" name="pl68"/>
+            <p:cNvSpPr/>
+            <p:nvPr/>
+          </p:nvSpPr>
+          <p:spPr>
+            <a:xfrm>
+              <a:off x="1235312" y="5294895"/>
+              <a:ext cx="6964104" cy="250720"/>
+            </a:xfrm>
+            <a:custGeom>
+              <a:avLst/>
+              <a:pathLst>
+                <a:path w="6964104" h="250720">
+                  <a:moveTo>
+                    <a:pt x="6964104" y="250720"/>
+                  </a:moveTo>
+                  <a:lnTo>
+                    <a:pt x="6893760" y="248976"/>
+                  </a:lnTo>
+                  <a:lnTo>
+                    <a:pt x="6823415" y="247168"/>
+                  </a:lnTo>
+                  <a:lnTo>
+                    <a:pt x="6753071" y="245294"/>
+                  </a:lnTo>
+                  <a:lnTo>
+                    <a:pt x="6682726" y="243353"/>
+                  </a:lnTo>
+                  <a:lnTo>
+                    <a:pt x="6612382" y="241341"/>
+                  </a:lnTo>
+                  <a:lnTo>
+                    <a:pt x="6542037" y="239256"/>
+                  </a:lnTo>
+                  <a:lnTo>
+                    <a:pt x="6471693" y="237096"/>
+                  </a:lnTo>
+                  <a:lnTo>
+                    <a:pt x="6401348" y="234857"/>
+                  </a:lnTo>
+                  <a:lnTo>
+                    <a:pt x="6331004" y="232536"/>
+                  </a:lnTo>
+                  <a:lnTo>
+                    <a:pt x="6260659" y="230132"/>
+                  </a:lnTo>
+                  <a:lnTo>
+                    <a:pt x="6190315" y="227640"/>
+                  </a:lnTo>
+                  <a:lnTo>
+                    <a:pt x="6119970" y="225058"/>
+                  </a:lnTo>
+                  <a:lnTo>
+                    <a:pt x="6049626" y="222382"/>
+                  </a:lnTo>
+                  <a:lnTo>
+                    <a:pt x="5979281" y="219609"/>
+                  </a:lnTo>
+                  <a:lnTo>
+                    <a:pt x="5908937" y="216736"/>
+                  </a:lnTo>
+                  <a:lnTo>
+                    <a:pt x="5838592" y="213758"/>
+                  </a:lnTo>
+                  <a:lnTo>
+                    <a:pt x="5768248" y="210672"/>
+                  </a:lnTo>
+                  <a:lnTo>
+                    <a:pt x="5697903" y="207474"/>
+                  </a:lnTo>
+                  <a:lnTo>
+                    <a:pt x="5627559" y="204160"/>
+                  </a:lnTo>
+                  <a:lnTo>
+                    <a:pt x="5557214" y="200726"/>
+                  </a:lnTo>
+                  <a:lnTo>
+                    <a:pt x="5486870" y="197167"/>
+                  </a:lnTo>
+                  <a:lnTo>
+                    <a:pt x="5416525" y="193479"/>
+                  </a:lnTo>
+                  <a:lnTo>
+                    <a:pt x="5346181" y="189657"/>
+                  </a:lnTo>
+                  <a:lnTo>
+                    <a:pt x="5275836" y="185696"/>
+                  </a:lnTo>
+                  <a:lnTo>
+                    <a:pt x="5205492" y="181592"/>
+                  </a:lnTo>
+                  <a:lnTo>
+                    <a:pt x="5135147" y="177339"/>
+                  </a:lnTo>
+                  <a:lnTo>
+                    <a:pt x="5064803" y="172931"/>
+                  </a:lnTo>
+                  <a:lnTo>
+                    <a:pt x="4994458" y="168364"/>
+                  </a:lnTo>
+                  <a:lnTo>
+                    <a:pt x="4924114" y="163630"/>
+                  </a:lnTo>
+                  <a:lnTo>
+                    <a:pt x="4853769" y="158725"/>
+                  </a:lnTo>
+                  <a:lnTo>
+                    <a:pt x="4783425" y="153642"/>
+                  </a:lnTo>
+                  <a:lnTo>
+                    <a:pt x="4713080" y="148374"/>
+                  </a:lnTo>
+                  <a:lnTo>
+                    <a:pt x="4642736" y="142916"/>
+                  </a:lnTo>
+                  <a:lnTo>
+                    <a:pt x="4572391" y="137259"/>
+                  </a:lnTo>
+                  <a:lnTo>
+                    <a:pt x="4502047" y="131397"/>
+                  </a:lnTo>
+                  <a:lnTo>
+                    <a:pt x="4431702" y="125322"/>
+                  </a:lnTo>
+                  <a:lnTo>
+                    <a:pt x="4361358" y="119026"/>
+                  </a:lnTo>
+                  <a:lnTo>
+                    <a:pt x="4291013" y="112503"/>
+                  </a:lnTo>
+                  <a:lnTo>
+                    <a:pt x="4220669" y="105742"/>
+                  </a:lnTo>
+                  <a:lnTo>
+                    <a:pt x="4150324" y="98736"/>
+                  </a:lnTo>
+                  <a:lnTo>
+                    <a:pt x="4079980" y="91476"/>
+                  </a:lnTo>
+                  <a:lnTo>
+                    <a:pt x="4009635" y="83952"/>
+                  </a:lnTo>
+                  <a:lnTo>
+                    <a:pt x="3939291" y="76155"/>
+                  </a:lnTo>
+                  <a:lnTo>
+                    <a:pt x="3868946" y="68076"/>
+                  </a:lnTo>
+                  <a:lnTo>
+                    <a:pt x="3798602" y="59703"/>
+                  </a:lnTo>
+                  <a:lnTo>
+                    <a:pt x="3728257" y="51026"/>
+                  </a:lnTo>
+                  <a:lnTo>
+                    <a:pt x="3657913" y="42035"/>
+                  </a:lnTo>
+                  <a:lnTo>
+                    <a:pt x="3587569" y="32717"/>
+                  </a:lnTo>
+                  <a:lnTo>
+                    <a:pt x="3517224" y="23061"/>
+                  </a:lnTo>
+                  <a:lnTo>
+                    <a:pt x="3446880" y="13054"/>
+                  </a:lnTo>
+                  <a:lnTo>
+                    <a:pt x="3376535" y="2684"/>
+                  </a:lnTo>
+                  <a:lnTo>
+                    <a:pt x="3306191" y="0"/>
+                  </a:lnTo>
+                  <a:lnTo>
+                    <a:pt x="3235846" y="777"/>
+                  </a:lnTo>
+                  <a:lnTo>
+                    <a:pt x="3165502" y="1553"/>
+                  </a:lnTo>
+                  <a:lnTo>
+                    <a:pt x="3095157" y="2326"/>
+                  </a:lnTo>
+                  <a:lnTo>
+                    <a:pt x="3024813" y="3098"/>
+                  </a:lnTo>
+                  <a:lnTo>
+                    <a:pt x="2954468" y="3868"/>
+                  </a:lnTo>
+                  <a:lnTo>
+                    <a:pt x="2884124" y="4635"/>
+                  </a:lnTo>
+                  <a:lnTo>
+                    <a:pt x="2813779" y="5401"/>
+                  </a:lnTo>
+                  <a:lnTo>
+                    <a:pt x="2743435" y="6164"/>
+                  </a:lnTo>
+                  <a:lnTo>
+                    <a:pt x="2673090" y="6926"/>
+                  </a:lnTo>
+                  <a:lnTo>
+                    <a:pt x="2602746" y="7686"/>
+                  </a:lnTo>
+                  <a:lnTo>
+                    <a:pt x="2532401" y="8443"/>
+                  </a:lnTo>
+                  <a:lnTo>
+                    <a:pt x="2462057" y="9199"/>
+                  </a:lnTo>
+                  <a:lnTo>
+                    <a:pt x="2391712" y="9953"/>
+                  </a:lnTo>
+                  <a:lnTo>
+                    <a:pt x="2321368" y="10705"/>
+                  </a:lnTo>
+                  <a:lnTo>
+                    <a:pt x="2251023" y="11454"/>
+                  </a:lnTo>
+                  <a:lnTo>
+                    <a:pt x="2180679" y="12202"/>
+                  </a:lnTo>
+                  <a:lnTo>
+                    <a:pt x="2110334" y="12948"/>
+                  </a:lnTo>
+                  <a:lnTo>
+                    <a:pt x="2039990" y="13692"/>
+                  </a:lnTo>
+                  <a:lnTo>
+                    <a:pt x="1969645" y="14434"/>
+                  </a:lnTo>
+                  <a:lnTo>
+                    <a:pt x="1899301" y="15174"/>
+                  </a:lnTo>
+                  <a:lnTo>
+                    <a:pt x="1828956" y="15912"/>
+                  </a:lnTo>
+                  <a:lnTo>
+                    <a:pt x="1758612" y="16649"/>
+                  </a:lnTo>
+                  <a:lnTo>
+                    <a:pt x="1688267" y="17383"/>
+                  </a:lnTo>
+                  <a:lnTo>
+                    <a:pt x="1617923" y="18115"/>
+                  </a:lnTo>
+                  <a:lnTo>
+                    <a:pt x="1547578" y="18846"/>
+                  </a:lnTo>
+                  <a:lnTo>
+                    <a:pt x="1477234" y="19575"/>
+                  </a:lnTo>
+                  <a:lnTo>
+                    <a:pt x="1406889" y="20301"/>
+                  </a:lnTo>
+                  <a:lnTo>
+                    <a:pt x="1336545" y="21026"/>
+                  </a:lnTo>
+                  <a:lnTo>
+                    <a:pt x="1266200" y="21749"/>
+                  </a:lnTo>
+                  <a:lnTo>
+                    <a:pt x="1195856" y="22470"/>
+                  </a:lnTo>
+                  <a:lnTo>
+                    <a:pt x="1125511" y="23189"/>
+                  </a:lnTo>
+                  <a:lnTo>
+                    <a:pt x="1055167" y="23907"/>
+                  </a:lnTo>
+                  <a:lnTo>
+                    <a:pt x="984822" y="24622"/>
+                  </a:lnTo>
+                  <a:lnTo>
+                    <a:pt x="914478" y="25336"/>
+                  </a:lnTo>
+                  <a:lnTo>
+                    <a:pt x="844133" y="26047"/>
+                  </a:lnTo>
+                  <a:lnTo>
+                    <a:pt x="773789" y="26757"/>
+                  </a:lnTo>
+                  <a:lnTo>
+                    <a:pt x="703444" y="27465"/>
+                  </a:lnTo>
+                  <a:lnTo>
+                    <a:pt x="633100" y="28171"/>
+                  </a:lnTo>
+                  <a:lnTo>
+                    <a:pt x="562755" y="28876"/>
+                  </a:lnTo>
+                  <a:lnTo>
+                    <a:pt x="492411" y="29578"/>
+                  </a:lnTo>
+                  <a:lnTo>
+                    <a:pt x="422066" y="30279"/>
+                  </a:lnTo>
+                  <a:lnTo>
+                    <a:pt x="351722" y="30978"/>
+                  </a:lnTo>
+                  <a:lnTo>
+                    <a:pt x="281377" y="31675"/>
+                  </a:lnTo>
+                  <a:lnTo>
+                    <a:pt x="211033" y="32370"/>
+                  </a:lnTo>
+                  <a:lnTo>
+                    <a:pt x="140688" y="33063"/>
+                  </a:lnTo>
+                  <a:lnTo>
+                    <a:pt x="70344" y="33755"/>
+                  </a:lnTo>
+                  <a:lnTo>
+                    <a:pt x="0" y="34445"/>
+                  </a:lnTo>
+                </a:path>
+              </a:pathLst>
+            </a:custGeom>
+          </p:spPr>
+          <p:txBody>
+            <a:bodyPr/>
+            <a:lstStyle/>
+            <a:p/>
+          </p:txBody>
+        </p:sp>
+        <p:sp>
+          <p:nvSpPr>
+            <p:cNvPr id="69" name="pl69"/>
+            <p:cNvSpPr/>
+            <p:nvPr/>
+          </p:nvSpPr>
+          <p:spPr>
+            <a:xfrm>
+              <a:off x="1235312" y="4935465"/>
+              <a:ext cx="6964104" cy="529972"/>
+            </a:xfrm>
+            <a:custGeom>
+              <a:avLst/>
+              <a:pathLst>
+                <a:path w="6964104" h="529972">
+                  <a:moveTo>
+                    <a:pt x="0" y="0"/>
+                  </a:moveTo>
+                  <a:lnTo>
+                    <a:pt x="70344" y="10785"/>
+                  </a:lnTo>
+                  <a:lnTo>
+                    <a:pt x="140688" y="21393"/>
+                  </a:lnTo>
+                  <a:lnTo>
+                    <a:pt x="211033" y="31828"/>
+                  </a:lnTo>
+                  <a:lnTo>
+                    <a:pt x="281377" y="42091"/>
+                  </a:lnTo>
+                  <a:lnTo>
+                    <a:pt x="351722" y="52187"/>
+                  </a:lnTo>
+                  <a:lnTo>
+                    <a:pt x="422066" y="62117"/>
+                  </a:lnTo>
+                  <a:lnTo>
+                    <a:pt x="492411" y="71884"/>
+                  </a:lnTo>
+                  <a:lnTo>
+                    <a:pt x="562755" y="81491"/>
+                  </a:lnTo>
+                  <a:lnTo>
+                    <a:pt x="633100" y="90941"/>
+                  </a:lnTo>
+                  <a:lnTo>
+                    <a:pt x="703444" y="100236"/>
+                  </a:lnTo>
+                  <a:lnTo>
+                    <a:pt x="773789" y="109379"/>
+                  </a:lnTo>
+                  <a:lnTo>
+                    <a:pt x="844133" y="118371"/>
+                  </a:lnTo>
+                  <a:lnTo>
+                    <a:pt x="914478" y="127217"/>
+                  </a:lnTo>
+                  <a:lnTo>
+                    <a:pt x="984822" y="135918"/>
+                  </a:lnTo>
+                  <a:lnTo>
+                    <a:pt x="1055167" y="144476"/>
+                  </a:lnTo>
+                  <a:lnTo>
+                    <a:pt x="1125511" y="152893"/>
+                  </a:lnTo>
+                  <a:lnTo>
+                    <a:pt x="1195856" y="161173"/>
+                  </a:lnTo>
+                  <a:lnTo>
+                    <a:pt x="1266200" y="169318"/>
+                  </a:lnTo>
+                  <a:lnTo>
+                    <a:pt x="1336545" y="177328"/>
+                  </a:lnTo>
+                  <a:lnTo>
+                    <a:pt x="1406889" y="185208"/>
+                  </a:lnTo>
+                  <a:lnTo>
+                    <a:pt x="1477234" y="192958"/>
+                  </a:lnTo>
+                  <a:lnTo>
+                    <a:pt x="1547578" y="200582"/>
+                  </a:lnTo>
+                  <a:lnTo>
+                    <a:pt x="1617923" y="208080"/>
+                  </a:lnTo>
+                  <a:lnTo>
+                    <a:pt x="1688267" y="215456"/>
+                  </a:lnTo>
+                  <a:lnTo>
+                    <a:pt x="1758612" y="222711"/>
+                  </a:lnTo>
+                  <a:lnTo>
+                    <a:pt x="1828956" y="229847"/>
+                  </a:lnTo>
+                  <a:lnTo>
+                    <a:pt x="1899301" y="236866"/>
+                  </a:lnTo>
+                  <a:lnTo>
+                    <a:pt x="1969645" y="243770"/>
+                  </a:lnTo>
+                  <a:lnTo>
+                    <a:pt x="2039990" y="250560"/>
+                  </a:lnTo>
+                  <a:lnTo>
+                    <a:pt x="2110334" y="257240"/>
+                  </a:lnTo>
+                  <a:lnTo>
+                    <a:pt x="2180679" y="263810"/>
+                  </a:lnTo>
+                  <a:lnTo>
+                    <a:pt x="2251023" y="270273"/>
+                  </a:lnTo>
+                  <a:lnTo>
+                    <a:pt x="2321368" y="276629"/>
+                  </a:lnTo>
+                  <a:lnTo>
+                    <a:pt x="2391712" y="282882"/>
+                  </a:lnTo>
+                  <a:lnTo>
+                    <a:pt x="2462057" y="289032"/>
+                  </a:lnTo>
+                  <a:lnTo>
+                    <a:pt x="2532401" y="295081"/>
+                  </a:lnTo>
+                  <a:lnTo>
+                    <a:pt x="2602746" y="301031"/>
+                  </a:lnTo>
+                  <a:lnTo>
+                    <a:pt x="2673090" y="306884"/>
+                  </a:lnTo>
+                  <a:lnTo>
+                    <a:pt x="2743435" y="312640"/>
+                  </a:lnTo>
+                  <a:lnTo>
+                    <a:pt x="2813779" y="318303"/>
+                  </a:lnTo>
+                  <a:lnTo>
+                    <a:pt x="2884124" y="323872"/>
+                  </a:lnTo>
+                  <a:lnTo>
+                    <a:pt x="2954468" y="329351"/>
+                  </a:lnTo>
+                  <a:lnTo>
+                    <a:pt x="3024813" y="334739"/>
+                  </a:lnTo>
+                  <a:lnTo>
+                    <a:pt x="3095157" y="340040"/>
+                  </a:lnTo>
+                  <a:lnTo>
+                    <a:pt x="3165502" y="345253"/>
+                  </a:lnTo>
+                  <a:lnTo>
+                    <a:pt x="3235846" y="350381"/>
+                  </a:lnTo>
+                  <a:lnTo>
+                    <a:pt x="3306191" y="355425"/>
+                  </a:lnTo>
+                  <a:lnTo>
+                    <a:pt x="3376535" y="360387"/>
+                  </a:lnTo>
+                  <a:lnTo>
+                    <a:pt x="3446880" y="365267"/>
+                  </a:lnTo>
+                  <a:lnTo>
+                    <a:pt x="3517224" y="370067"/>
+                  </a:lnTo>
+                  <a:lnTo>
+                    <a:pt x="3587569" y="374788"/>
+                  </a:lnTo>
+                  <a:lnTo>
+                    <a:pt x="3657913" y="379432"/>
+                  </a:lnTo>
+                  <a:lnTo>
+                    <a:pt x="3728257" y="384000"/>
+                  </a:lnTo>
+                  <a:lnTo>
+                    <a:pt x="3798602" y="388494"/>
+                  </a:lnTo>
+                  <a:lnTo>
+                    <a:pt x="3868946" y="392913"/>
+                  </a:lnTo>
+                  <a:lnTo>
+                    <a:pt x="3939291" y="397260"/>
+                  </a:lnTo>
+                  <a:lnTo>
+                    <a:pt x="4009635" y="401536"/>
+                  </a:lnTo>
+                  <a:lnTo>
+                    <a:pt x="4079980" y="405742"/>
+                  </a:lnTo>
+                  <a:lnTo>
+                    <a:pt x="4150324" y="409879"/>
+                  </a:lnTo>
+                  <a:lnTo>
+                    <a:pt x="4220669" y="413948"/>
+                  </a:lnTo>
+                  <a:lnTo>
+                    <a:pt x="4291013" y="417950"/>
+                  </a:lnTo>
+                  <a:lnTo>
+                    <a:pt x="4361358" y="421887"/>
+                  </a:lnTo>
+                  <a:lnTo>
+                    <a:pt x="4431702" y="425760"/>
+                  </a:lnTo>
+                  <a:lnTo>
+                    <a:pt x="4502047" y="429569"/>
+                  </a:lnTo>
+                  <a:lnTo>
+                    <a:pt x="4572391" y="433315"/>
+                  </a:lnTo>
+                  <a:lnTo>
+                    <a:pt x="4642736" y="437000"/>
+                  </a:lnTo>
+                  <a:lnTo>
+                    <a:pt x="4713080" y="440625"/>
+                  </a:lnTo>
+                  <a:lnTo>
+                    <a:pt x="4783425" y="444190"/>
+                  </a:lnTo>
+                  <a:lnTo>
+                    <a:pt x="4853769" y="447697"/>
+                  </a:lnTo>
+                  <a:lnTo>
+                    <a:pt x="4924114" y="451147"/>
+                  </a:lnTo>
+                  <a:lnTo>
+                    <a:pt x="4994458" y="454540"/>
+                  </a:lnTo>
+                  <a:lnTo>
+                    <a:pt x="5064803" y="457877"/>
+                  </a:lnTo>
+                  <a:lnTo>
+                    <a:pt x="5135147" y="461160"/>
+                  </a:lnTo>
+                  <a:lnTo>
+                    <a:pt x="5205492" y="464389"/>
+                  </a:lnTo>
+                  <a:lnTo>
+                    <a:pt x="5275836" y="467565"/>
+                  </a:lnTo>
+                  <a:lnTo>
+                    <a:pt x="5346181" y="470688"/>
+                  </a:lnTo>
+                  <a:lnTo>
+                    <a:pt x="5416525" y="473761"/>
+                  </a:lnTo>
+                  <a:lnTo>
+                    <a:pt x="5486870" y="476784"/>
+                  </a:lnTo>
+                  <a:lnTo>
+                    <a:pt x="5557214" y="479757"/>
+                  </a:lnTo>
+                  <a:lnTo>
+                    <a:pt x="5627559" y="482681"/>
+                  </a:lnTo>
+                  <a:lnTo>
+                    <a:pt x="5697903" y="485557"/>
+                  </a:lnTo>
+                  <a:lnTo>
+                    <a:pt x="5768248" y="488386"/>
+                  </a:lnTo>
+                  <a:lnTo>
+                    <a:pt x="5838592" y="491169"/>
+                  </a:lnTo>
+                  <a:lnTo>
+                    <a:pt x="5908937" y="493906"/>
+                  </a:lnTo>
+                  <a:lnTo>
+                    <a:pt x="5979281" y="496598"/>
+                  </a:lnTo>
+                  <a:lnTo>
+                    <a:pt x="6049626" y="499247"/>
+                  </a:lnTo>
+                  <a:lnTo>
+                    <a:pt x="6119970" y="501851"/>
+                  </a:lnTo>
+                  <a:lnTo>
+                    <a:pt x="6190315" y="504414"/>
+                  </a:lnTo>
+                  <a:lnTo>
+                    <a:pt x="6260659" y="506934"/>
+                  </a:lnTo>
+                  <a:lnTo>
+                    <a:pt x="6331004" y="509413"/>
+                  </a:lnTo>
+                  <a:lnTo>
+                    <a:pt x="6401348" y="511851"/>
+                  </a:lnTo>
+                  <a:lnTo>
+                    <a:pt x="6471693" y="514249"/>
+                  </a:lnTo>
+                  <a:lnTo>
+                    <a:pt x="6542037" y="516608"/>
+                  </a:lnTo>
+                  <a:lnTo>
+                    <a:pt x="6612382" y="518928"/>
+                  </a:lnTo>
+                  <a:lnTo>
+                    <a:pt x="6682726" y="521211"/>
+                  </a:lnTo>
+                  <a:lnTo>
+                    <a:pt x="6753071" y="523456"/>
+                  </a:lnTo>
+                  <a:lnTo>
+                    <a:pt x="6823415" y="525664"/>
+                  </a:lnTo>
+                  <a:lnTo>
+                    <a:pt x="6893760" y="527836"/>
+                  </a:lnTo>
+                  <a:lnTo>
+                    <a:pt x="6964104" y="529972"/>
+                  </a:lnTo>
+                </a:path>
+              </a:pathLst>
+            </a:custGeom>
+            <a:ln w="27101" cap="flat">
+              <a:solidFill>
+                <a:srgbClr val="FF8C00">
+                  <a:alpha val="100000"/>
+                </a:srgbClr>
+              </a:solidFill>
+              <a:prstDash val="solid"/>
+              <a:round/>
+            </a:ln>
+          </p:spPr>
+          <p:txBody>
+            <a:bodyPr/>
+            <a:lstStyle/>
+            <a:p/>
+          </p:txBody>
+        </p:sp>
+        <p:sp>
+          <p:nvSpPr>
+            <p:cNvPr id="70" name="pl70"/>
+            <p:cNvSpPr/>
+            <p:nvPr/>
+          </p:nvSpPr>
+          <p:spPr>
+            <a:xfrm>
+              <a:off x="887106" y="5294352"/>
+              <a:ext cx="7660515" cy="0"/>
+            </a:xfrm>
+            <a:custGeom>
+              <a:avLst/>
+              <a:pathLst>
+                <a:path w="7660515" h="0">
+                  <a:moveTo>
+                    <a:pt x="0" y="0"/>
+                  </a:moveTo>
+                  <a:lnTo>
+                    <a:pt x="7660515" y="0"/>
+                  </a:lnTo>
+                  <a:lnTo>
+                    <a:pt x="7660515" y="0"/>
+                  </a:lnTo>
+                </a:path>
+              </a:pathLst>
+            </a:custGeom>
+            <a:ln w="13550" cap="flat">
+              <a:solidFill>
+                <a:srgbClr val="7F7F7F">
+                  <a:alpha val="100000"/>
+                </a:srgbClr>
+              </a:solidFill>
+              <a:prstDash val="dash"/>
+              <a:round/>
+            </a:ln>
+          </p:spPr>
+          <p:txBody>
+            <a:bodyPr/>
+            <a:lstStyle/>
+            <a:p/>
+          </p:txBody>
+        </p:sp>
+        <p:sp>
+          <p:nvSpPr>
+            <p:cNvPr id="71" name="pl71"/>
+            <p:cNvSpPr/>
+            <p:nvPr/>
+          </p:nvSpPr>
+          <p:spPr>
+            <a:xfrm>
+              <a:off x="4590457" y="4336484"/>
+              <a:ext cx="0" cy="1317069"/>
+            </a:xfrm>
+            <a:custGeom>
+              <a:avLst/>
+              <a:pathLst>
+                <a:path w="0" h="1317069">
+                  <a:moveTo>
+                    <a:pt x="0" y="1317069"/>
+                  </a:moveTo>
+                  <a:lnTo>
+                    <a:pt x="0" y="0"/>
+                  </a:lnTo>
+                  <a:lnTo>
+                    <a:pt x="0" y="0"/>
+                  </a:lnTo>
+                </a:path>
+              </a:pathLst>
+            </a:custGeom>
+            <a:ln w="13550" cap="flat">
+              <a:solidFill>
+                <a:srgbClr val="666666">
+                  <a:alpha val="100000"/>
+                </a:srgbClr>
+              </a:solidFill>
+              <a:prstDash val="dot"/>
+              <a:round/>
+            </a:ln>
+          </p:spPr>
+          <p:txBody>
+            <a:bodyPr/>
+            <a:lstStyle/>
+            <a:p/>
+          </p:txBody>
+        </p:sp>
+        <p:sp>
+          <p:nvSpPr>
+            <p:cNvPr id="72" name="tx72"/>
+            <p:cNvSpPr/>
+            <p:nvPr/>
+          </p:nvSpPr>
+          <p:spPr>
+            <a:xfrm>
+              <a:off x="762297" y="5553636"/>
+              <a:ext cx="62179" cy="80101"/>
+            </a:xfrm>
+            <a:prstGeom prst="rect">
+              <a:avLst/>
+            </a:prstGeom>
+            <a:noFill/>
+          </p:spPr>
+          <p:txBody>
+            <a:bodyPr lIns="0" rIns="0" tIns="0" bIns="0" anchorCtr="1" anchor="ctr" wrap="none"/>
+            <a:lstStyle/>
+            <a:p>
+              <a:pPr algn="l" marL="0" marR="0" indent="0">
+                <a:lnSpc>
+                  <a:spcPts val="880"/>
+                </a:lnSpc>
+                <a:spcBef>
+                  <a:spcPts val="0"/>
+                </a:spcBef>
+                <a:spcAft>
+                  <a:spcPts val="0"/>
+                </a:spcAft>
+              </a:pPr>
+              <a:r>
+                <a:rPr sz="880">
+                  <a:solidFill>
+                    <a:srgbClr val="4D4D4D">
+                      <a:alpha val="100000"/>
+                    </a:srgbClr>
+                  </a:solidFill>
+                  <a:latin typeface="Helvetica"/>
+                  <a:cs typeface="Helvetica"/>
+                </a:rPr>
+                <a:t>0</a:t>
+              </a:r>
+            </a:p>
+          </p:txBody>
+        </p:sp>
+        <p:sp>
+          <p:nvSpPr>
+            <p:cNvPr id="73" name="tx73"/>
+            <p:cNvSpPr/>
+            <p:nvPr/>
+          </p:nvSpPr>
+          <p:spPr>
+            <a:xfrm>
+              <a:off x="762297" y="5254302"/>
+              <a:ext cx="62179" cy="80101"/>
+            </a:xfrm>
+            <a:prstGeom prst="rect">
+              <a:avLst/>
+            </a:prstGeom>
+            <a:noFill/>
+          </p:spPr>
+          <p:txBody>
+            <a:bodyPr lIns="0" rIns="0" tIns="0" bIns="0" anchorCtr="1" anchor="ctr" wrap="none"/>
+            <a:lstStyle/>
+            <a:p>
+              <a:pPr algn="l" marL="0" marR="0" indent="0">
+                <a:lnSpc>
+                  <a:spcPts val="880"/>
+                </a:lnSpc>
+                <a:spcBef>
+                  <a:spcPts val="0"/>
+                </a:spcBef>
+                <a:spcAft>
+                  <a:spcPts val="0"/>
+                </a:spcAft>
+              </a:pPr>
+              <a:r>
+                <a:rPr sz="880">
+                  <a:solidFill>
+                    <a:srgbClr val="4D4D4D">
+                      <a:alpha val="100000"/>
+                    </a:srgbClr>
+                  </a:solidFill>
+                  <a:latin typeface="Helvetica"/>
+                  <a:cs typeface="Helvetica"/>
+                </a:rPr>
+                <a:t>1</a:t>
+              </a:r>
+            </a:p>
+          </p:txBody>
+        </p:sp>
+        <p:sp>
+          <p:nvSpPr>
+            <p:cNvPr id="74" name="tx74"/>
+            <p:cNvSpPr/>
+            <p:nvPr/>
+          </p:nvSpPr>
+          <p:spPr>
+            <a:xfrm>
+              <a:off x="762297" y="4954968"/>
+              <a:ext cx="62179" cy="80101"/>
+            </a:xfrm>
+            <a:prstGeom prst="rect">
+              <a:avLst/>
+            </a:prstGeom>
+            <a:noFill/>
+          </p:spPr>
+          <p:txBody>
+            <a:bodyPr lIns="0" rIns="0" tIns="0" bIns="0" anchorCtr="1" anchor="ctr" wrap="none"/>
+            <a:lstStyle/>
+            <a:p>
+              <a:pPr algn="l" marL="0" marR="0" indent="0">
+                <a:lnSpc>
+                  <a:spcPts val="880"/>
+                </a:lnSpc>
+                <a:spcBef>
+                  <a:spcPts val="0"/>
+                </a:spcBef>
+                <a:spcAft>
+                  <a:spcPts val="0"/>
+                </a:spcAft>
+              </a:pPr>
+              <a:r>
+                <a:rPr sz="880">
+                  <a:solidFill>
+                    <a:srgbClr val="4D4D4D">
+                      <a:alpha val="100000"/>
+                    </a:srgbClr>
+                  </a:solidFill>
+                  <a:latin typeface="Helvetica"/>
+                  <a:cs typeface="Helvetica"/>
+                </a:rPr>
+                <a:t>2</a:t>
+              </a:r>
+            </a:p>
+          </p:txBody>
+        </p:sp>
+        <p:sp>
+          <p:nvSpPr>
+            <p:cNvPr id="75" name="tx75"/>
+            <p:cNvSpPr/>
+            <p:nvPr/>
+          </p:nvSpPr>
+          <p:spPr>
+            <a:xfrm>
+              <a:off x="762297" y="4655634"/>
+              <a:ext cx="62179" cy="80101"/>
+            </a:xfrm>
+            <a:prstGeom prst="rect">
+              <a:avLst/>
+            </a:prstGeom>
+            <a:noFill/>
+          </p:spPr>
+          <p:txBody>
+            <a:bodyPr lIns="0" rIns="0" tIns="0" bIns="0" anchorCtr="1" anchor="ctr" wrap="none"/>
+            <a:lstStyle/>
+            <a:p>
+              <a:pPr algn="l" marL="0" marR="0" indent="0">
+                <a:lnSpc>
+                  <a:spcPts val="880"/>
+                </a:lnSpc>
+                <a:spcBef>
+                  <a:spcPts val="0"/>
+                </a:spcBef>
+                <a:spcAft>
+                  <a:spcPts val="0"/>
+                </a:spcAft>
+              </a:pPr>
+              <a:r>
+                <a:rPr sz="880">
+                  <a:solidFill>
+                    <a:srgbClr val="4D4D4D">
+                      <a:alpha val="100000"/>
+                    </a:srgbClr>
+                  </a:solidFill>
+                  <a:latin typeface="Helvetica"/>
+                  <a:cs typeface="Helvetica"/>
+                </a:rPr>
+                <a:t>3</a:t>
+              </a:r>
+            </a:p>
+          </p:txBody>
+        </p:sp>
+        <p:sp>
+          <p:nvSpPr>
+            <p:cNvPr id="76" name="tx76"/>
+            <p:cNvSpPr/>
+            <p:nvPr/>
+          </p:nvSpPr>
+          <p:spPr>
+            <a:xfrm>
+              <a:off x="762297" y="4356300"/>
+              <a:ext cx="62179" cy="80101"/>
+            </a:xfrm>
+            <a:prstGeom prst="rect">
+              <a:avLst/>
+            </a:prstGeom>
+            <a:noFill/>
+          </p:spPr>
+          <p:txBody>
+            <a:bodyPr lIns="0" rIns="0" tIns="0" bIns="0" anchorCtr="1" anchor="ctr" wrap="none"/>
+            <a:lstStyle/>
+            <a:p>
+              <a:pPr algn="l" marL="0" marR="0" indent="0">
+                <a:lnSpc>
+                  <a:spcPts val="880"/>
+                </a:lnSpc>
+                <a:spcBef>
+                  <a:spcPts val="0"/>
+                </a:spcBef>
+                <a:spcAft>
+                  <a:spcPts val="0"/>
+                </a:spcAft>
+              </a:pPr>
+              <a:r>
+                <a:rPr sz="880">
+                  <a:solidFill>
+                    <a:srgbClr val="4D4D4D">
+                      <a:alpha val="100000"/>
+                    </a:srgbClr>
+                  </a:solidFill>
+                  <a:latin typeface="Helvetica"/>
+                  <a:cs typeface="Helvetica"/>
+                </a:rPr>
+                <a:t>4</a:t>
+              </a:r>
+            </a:p>
+          </p:txBody>
+        </p:sp>
+        <p:sp>
+          <p:nvSpPr>
+            <p:cNvPr id="77" name="tx77"/>
+            <p:cNvSpPr/>
+            <p:nvPr/>
+          </p:nvSpPr>
+          <p:spPr>
+            <a:xfrm>
+              <a:off x="1133333" y="5716183"/>
+              <a:ext cx="161574" cy="80101"/>
+            </a:xfrm>
+            <a:prstGeom prst="rect">
+              <a:avLst/>
+            </a:prstGeom>
+            <a:noFill/>
+          </p:spPr>
+          <p:txBody>
+            <a:bodyPr lIns="0" rIns="0" tIns="0" bIns="0" anchorCtr="1" anchor="ctr" wrap="none"/>
+            <a:lstStyle/>
+            <a:p>
+              <a:pPr algn="l" marL="0" marR="0" indent="0">
+                <a:lnSpc>
+                  <a:spcPts val="880"/>
+                </a:lnSpc>
+                <a:spcBef>
+                  <a:spcPts val="0"/>
+                </a:spcBef>
+                <a:spcAft>
+                  <a:spcPts val="0"/>
+                </a:spcAft>
+              </a:pPr>
+              <a:r>
+                <a:rPr sz="880">
+                  <a:solidFill>
+                    <a:srgbClr val="4D4D4D">
+                      <a:alpha val="100000"/>
+                    </a:srgbClr>
+                  </a:solidFill>
+                  <a:latin typeface="Helvetica"/>
+                  <a:cs typeface="Helvetica"/>
+                </a:rPr>
+                <a:t>-40</a:t>
+              </a:r>
+            </a:p>
+          </p:txBody>
+        </p:sp>
+        <p:sp>
+          <p:nvSpPr>
+            <p:cNvPr id="78" name="tx78"/>
+            <p:cNvSpPr/>
+            <p:nvPr/>
+          </p:nvSpPr>
+          <p:spPr>
+            <a:xfrm>
+              <a:off x="1978619" y="5716183"/>
+              <a:ext cx="161574" cy="80101"/>
+            </a:xfrm>
+            <a:prstGeom prst="rect">
+              <a:avLst/>
+            </a:prstGeom>
+            <a:noFill/>
+          </p:spPr>
+          <p:txBody>
+            <a:bodyPr lIns="0" rIns="0" tIns="0" bIns="0" anchorCtr="1" anchor="ctr" wrap="none"/>
+            <a:lstStyle/>
+            <a:p>
+              <a:pPr algn="l" marL="0" marR="0" indent="0">
+                <a:lnSpc>
+                  <a:spcPts val="880"/>
+                </a:lnSpc>
+                <a:spcBef>
+                  <a:spcPts val="0"/>
+                </a:spcBef>
+                <a:spcAft>
+                  <a:spcPts val="0"/>
+                </a:spcAft>
+              </a:pPr>
+              <a:r>
+                <a:rPr sz="880">
+                  <a:solidFill>
+                    <a:srgbClr val="4D4D4D">
+                      <a:alpha val="100000"/>
+                    </a:srgbClr>
+                  </a:solidFill>
+                  <a:latin typeface="Helvetica"/>
+                  <a:cs typeface="Helvetica"/>
+                </a:rPr>
+                <a:t>-30</a:t>
+              </a:r>
+            </a:p>
+          </p:txBody>
+        </p:sp>
+        <p:sp>
+          <p:nvSpPr>
+            <p:cNvPr id="79" name="tx79"/>
+            <p:cNvSpPr/>
+            <p:nvPr/>
+          </p:nvSpPr>
+          <p:spPr>
+            <a:xfrm>
+              <a:off x="2823906" y="5716183"/>
+              <a:ext cx="161574" cy="80101"/>
+            </a:xfrm>
+            <a:prstGeom prst="rect">
+              <a:avLst/>
+            </a:prstGeom>
+            <a:noFill/>
+          </p:spPr>
+          <p:txBody>
+            <a:bodyPr lIns="0" rIns="0" tIns="0" bIns="0" anchorCtr="1" anchor="ctr" wrap="none"/>
+            <a:lstStyle/>
+            <a:p>
+              <a:pPr algn="l" marL="0" marR="0" indent="0">
+                <a:lnSpc>
+                  <a:spcPts val="880"/>
+                </a:lnSpc>
+                <a:spcBef>
+                  <a:spcPts val="0"/>
+                </a:spcBef>
+                <a:spcAft>
+                  <a:spcPts val="0"/>
+                </a:spcAft>
+              </a:pPr>
+              <a:r>
+                <a:rPr sz="880">
+                  <a:solidFill>
+                    <a:srgbClr val="4D4D4D">
+                      <a:alpha val="100000"/>
+                    </a:srgbClr>
+                  </a:solidFill>
+                  <a:latin typeface="Helvetica"/>
+                  <a:cs typeface="Helvetica"/>
+                </a:rPr>
+                <a:t>-20</a:t>
+              </a:r>
+            </a:p>
+          </p:txBody>
+        </p:sp>
+        <p:sp>
+          <p:nvSpPr>
+            <p:cNvPr id="80" name="tx80"/>
+            <p:cNvSpPr/>
+            <p:nvPr/>
+          </p:nvSpPr>
+          <p:spPr>
+            <a:xfrm>
+              <a:off x="3669192" y="5716183"/>
+              <a:ext cx="161574" cy="80101"/>
+            </a:xfrm>
+            <a:prstGeom prst="rect">
+              <a:avLst/>
+            </a:prstGeom>
+            <a:noFill/>
+          </p:spPr>
+          <p:txBody>
+            <a:bodyPr lIns="0" rIns="0" tIns="0" bIns="0" anchorCtr="1" anchor="ctr" wrap="none"/>
+            <a:lstStyle/>
+            <a:p>
+              <a:pPr algn="l" marL="0" marR="0" indent="0">
+                <a:lnSpc>
+                  <a:spcPts val="880"/>
+                </a:lnSpc>
+                <a:spcBef>
+                  <a:spcPts val="0"/>
+                </a:spcBef>
+                <a:spcAft>
+                  <a:spcPts val="0"/>
+                </a:spcAft>
+              </a:pPr>
+              <a:r>
+                <a:rPr sz="880">
+                  <a:solidFill>
+                    <a:srgbClr val="4D4D4D">
+                      <a:alpha val="100000"/>
+                    </a:srgbClr>
+                  </a:solidFill>
+                  <a:latin typeface="Helvetica"/>
+                  <a:cs typeface="Helvetica"/>
+                </a:rPr>
+                <a:t>-10</a:t>
+              </a:r>
+            </a:p>
+          </p:txBody>
+        </p:sp>
+        <p:sp>
+          <p:nvSpPr>
+            <p:cNvPr id="81" name="tx81"/>
+            <p:cNvSpPr/>
+            <p:nvPr/>
+          </p:nvSpPr>
+          <p:spPr>
+            <a:xfrm>
+              <a:off x="4564176" y="5716183"/>
+              <a:ext cx="62179" cy="80101"/>
+            </a:xfrm>
+            <a:prstGeom prst="rect">
+              <a:avLst/>
+            </a:prstGeom>
+            <a:noFill/>
+          </p:spPr>
+          <p:txBody>
+            <a:bodyPr lIns="0" rIns="0" tIns="0" bIns="0" anchorCtr="1" anchor="ctr" wrap="none"/>
+            <a:lstStyle/>
+            <a:p>
+              <a:pPr algn="l" marL="0" marR="0" indent="0">
+                <a:lnSpc>
+                  <a:spcPts val="880"/>
+                </a:lnSpc>
+                <a:spcBef>
+                  <a:spcPts val="0"/>
+                </a:spcBef>
+                <a:spcAft>
+                  <a:spcPts val="0"/>
+                </a:spcAft>
+              </a:pPr>
+              <a:r>
+                <a:rPr sz="880">
+                  <a:solidFill>
+                    <a:srgbClr val="4D4D4D">
+                      <a:alpha val="100000"/>
+                    </a:srgbClr>
+                  </a:solidFill>
+                  <a:latin typeface="Helvetica"/>
+                  <a:cs typeface="Helvetica"/>
+                </a:rPr>
+                <a:t>0</a:t>
+              </a:r>
+            </a:p>
+          </p:txBody>
+        </p:sp>
+        <p:sp>
+          <p:nvSpPr>
+            <p:cNvPr id="82" name="tx82"/>
+            <p:cNvSpPr/>
+            <p:nvPr/>
+          </p:nvSpPr>
+          <p:spPr>
+            <a:xfrm>
+              <a:off x="5378373" y="5716183"/>
+              <a:ext cx="124358" cy="80101"/>
+            </a:xfrm>
+            <a:prstGeom prst="rect">
+              <a:avLst/>
+            </a:prstGeom>
+            <a:noFill/>
+          </p:spPr>
+          <p:txBody>
+            <a:bodyPr lIns="0" rIns="0" tIns="0" bIns="0" anchorCtr="1" anchor="ctr" wrap="none"/>
+            <a:lstStyle/>
+            <a:p>
+              <a:pPr algn="l" marL="0" marR="0" indent="0">
+                <a:lnSpc>
+                  <a:spcPts val="880"/>
+                </a:lnSpc>
+                <a:spcBef>
+                  <a:spcPts val="0"/>
+                </a:spcBef>
+                <a:spcAft>
+                  <a:spcPts val="0"/>
+                </a:spcAft>
+              </a:pPr>
+              <a:r>
+                <a:rPr sz="880">
+                  <a:solidFill>
+                    <a:srgbClr val="4D4D4D">
+                      <a:alpha val="100000"/>
+                    </a:srgbClr>
+                  </a:solidFill>
+                  <a:latin typeface="Helvetica"/>
+                  <a:cs typeface="Helvetica"/>
+                </a:rPr>
+                <a:t>10</a:t>
+              </a:r>
+            </a:p>
+          </p:txBody>
+        </p:sp>
+        <p:sp>
+          <p:nvSpPr>
+            <p:cNvPr id="83" name="tx83"/>
+            <p:cNvSpPr/>
+            <p:nvPr/>
+          </p:nvSpPr>
+          <p:spPr>
+            <a:xfrm>
+              <a:off x="6223659" y="5716183"/>
+              <a:ext cx="124358" cy="80101"/>
+            </a:xfrm>
+            <a:prstGeom prst="rect">
+              <a:avLst/>
+            </a:prstGeom>
+            <a:noFill/>
+          </p:spPr>
+          <p:txBody>
+            <a:bodyPr lIns="0" rIns="0" tIns="0" bIns="0" anchorCtr="1" anchor="ctr" wrap="none"/>
+            <a:lstStyle/>
+            <a:p>
+              <a:pPr algn="l" marL="0" marR="0" indent="0">
+                <a:lnSpc>
+                  <a:spcPts val="880"/>
+                </a:lnSpc>
+                <a:spcBef>
+                  <a:spcPts val="0"/>
+                </a:spcBef>
+                <a:spcAft>
+                  <a:spcPts val="0"/>
+                </a:spcAft>
+              </a:pPr>
+              <a:r>
+                <a:rPr sz="880">
+                  <a:solidFill>
+                    <a:srgbClr val="4D4D4D">
+                      <a:alpha val="100000"/>
+                    </a:srgbClr>
+                  </a:solidFill>
+                  <a:latin typeface="Helvetica"/>
+                  <a:cs typeface="Helvetica"/>
+                </a:rPr>
+                <a:t>20</a:t>
+              </a:r>
+            </a:p>
+          </p:txBody>
+        </p:sp>
+        <p:sp>
+          <p:nvSpPr>
+            <p:cNvPr id="84" name="tx84"/>
+            <p:cNvSpPr/>
+            <p:nvPr/>
+          </p:nvSpPr>
+          <p:spPr>
+            <a:xfrm>
+              <a:off x="7068946" y="5716183"/>
+              <a:ext cx="124358" cy="80101"/>
+            </a:xfrm>
+            <a:prstGeom prst="rect">
+              <a:avLst/>
+            </a:prstGeom>
+            <a:noFill/>
+          </p:spPr>
+          <p:txBody>
+            <a:bodyPr lIns="0" rIns="0" tIns="0" bIns="0" anchorCtr="1" anchor="ctr" wrap="none"/>
+            <a:lstStyle/>
+            <a:p>
+              <a:pPr algn="l" marL="0" marR="0" indent="0">
+                <a:lnSpc>
+                  <a:spcPts val="880"/>
+                </a:lnSpc>
+                <a:spcBef>
+                  <a:spcPts val="0"/>
+                </a:spcBef>
+                <a:spcAft>
+                  <a:spcPts val="0"/>
+                </a:spcAft>
+              </a:pPr>
+              <a:r>
+                <a:rPr sz="880">
+                  <a:solidFill>
+                    <a:srgbClr val="4D4D4D">
+                      <a:alpha val="100000"/>
+                    </a:srgbClr>
+                  </a:solidFill>
+                  <a:latin typeface="Helvetica"/>
+                  <a:cs typeface="Helvetica"/>
+                </a:rPr>
+                <a:t>30</a:t>
+              </a:r>
+            </a:p>
+          </p:txBody>
+        </p:sp>
+        <p:sp>
+          <p:nvSpPr>
+            <p:cNvPr id="85" name="tx85"/>
+            <p:cNvSpPr/>
+            <p:nvPr/>
+          </p:nvSpPr>
+          <p:spPr>
+            <a:xfrm>
+              <a:off x="7914232" y="5716183"/>
+              <a:ext cx="124358" cy="80101"/>
+            </a:xfrm>
+            <a:prstGeom prst="rect">
+              <a:avLst/>
+            </a:prstGeom>
+            <a:noFill/>
+          </p:spPr>
+          <p:txBody>
+            <a:bodyPr lIns="0" rIns="0" tIns="0" bIns="0" anchorCtr="1" anchor="ctr" wrap="none"/>
+            <a:lstStyle/>
+            <a:p>
+              <a:pPr algn="l" marL="0" marR="0" indent="0">
+                <a:lnSpc>
+                  <a:spcPts val="880"/>
+                </a:lnSpc>
+                <a:spcBef>
+                  <a:spcPts val="0"/>
+                </a:spcBef>
+                <a:spcAft>
+                  <a:spcPts val="0"/>
+                </a:spcAft>
+              </a:pPr>
+              <a:r>
+                <a:rPr sz="880">
+                  <a:solidFill>
+                    <a:srgbClr val="4D4D4D">
+                      <a:alpha val="100000"/>
+                    </a:srgbClr>
+                  </a:solidFill>
+                  <a:latin typeface="Helvetica"/>
+                  <a:cs typeface="Helvetica"/>
+                </a:rPr>
+                <a:t>40</a:t>
+              </a:r>
+            </a:p>
+          </p:txBody>
+        </p:sp>
+        <p:sp>
+          <p:nvSpPr>
+            <p:cNvPr id="86" name="tx86"/>
+            <p:cNvSpPr/>
+            <p:nvPr/>
+          </p:nvSpPr>
+          <p:spPr>
+            <a:xfrm>
+              <a:off x="2928340" y="5855859"/>
+              <a:ext cx="3578047" cy="100218"/>
+            </a:xfrm>
+            <a:prstGeom prst="rect">
+              <a:avLst/>
+            </a:prstGeom>
+            <a:noFill/>
+          </p:spPr>
+          <p:txBody>
+            <a:bodyPr lIns="0" rIns="0" tIns="0" bIns="0" anchorCtr="1" anchor="ctr" wrap="none"/>
+            <a:lstStyle/>
+            <a:p>
+              <a:pPr algn="l" marL="0" marR="0" indent="0">
+                <a:lnSpc>
+                  <a:spcPts val="1100"/>
+                </a:lnSpc>
+                <a:spcBef>
+                  <a:spcPts val="0"/>
+                </a:spcBef>
+                <a:spcAft>
+                  <a:spcPts val="0"/>
+                </a:spcAft>
+              </a:pPr>
+              <a:r>
+                <a:rPr sz="1100">
+                  <a:solidFill>
+                    <a:srgbClr val="000000">
+                      <a:alpha val="100000"/>
+                    </a:srgbClr>
+                  </a:solidFill>
+                  <a:latin typeface="Helvetica"/>
+                  <a:cs typeface="Helvetica"/>
+                </a:rPr>
+                <a:t>eGFR difference (%): 100 × (CKD-EPI Cr-Cys − CG) / CG</a:t>
+              </a:r>
+            </a:p>
+          </p:txBody>
+        </p:sp>
+        <p:sp>
+          <p:nvSpPr>
+            <p:cNvPr id="87" name="tx87"/>
+            <p:cNvSpPr/>
+            <p:nvPr/>
+          </p:nvSpPr>
+          <p:spPr>
+            <a:xfrm rot="-5400000">
+              <a:off x="138035" y="4944909"/>
+              <a:ext cx="1016904" cy="100218"/>
+            </a:xfrm>
+            <a:prstGeom prst="rect">
+              <a:avLst/>
+            </a:prstGeom>
+            <a:noFill/>
+          </p:spPr>
+          <p:txBody>
+            <a:bodyPr lIns="0" rIns="0" tIns="0" bIns="0" anchorCtr="1" anchor="ctr" wrap="none"/>
+            <a:lstStyle/>
+            <a:p>
+              <a:pPr algn="l" marL="0" marR="0" indent="0">
+                <a:lnSpc>
+                  <a:spcPts val="1100"/>
+                </a:lnSpc>
+                <a:spcBef>
+                  <a:spcPts val="0"/>
+                </a:spcBef>
+                <a:spcAft>
+                  <a:spcPts val="0"/>
+                </a:spcAft>
+              </a:pPr>
+              <a:r>
+                <a:rPr sz="1100">
+                  <a:solidFill>
+                    <a:srgbClr val="000000">
+                      <a:alpha val="100000"/>
+                    </a:srgbClr>
+                  </a:solidFill>
+                  <a:latin typeface="Helvetica"/>
+                  <a:cs typeface="Helvetica"/>
+                </a:rPr>
+                <a:t>subHR (95% CI)</a:t>
+              </a:r>
+            </a:p>
+          </p:txBody>
+        </p:sp>
+        <p:sp>
+          <p:nvSpPr>
+            <p:cNvPr id="88" name="tx88"/>
+            <p:cNvSpPr/>
+            <p:nvPr/>
+          </p:nvSpPr>
+          <p:spPr>
+            <a:xfrm>
+              <a:off x="887106" y="4159544"/>
+              <a:ext cx="6321612" cy="82021"/>
+            </a:xfrm>
+            <a:prstGeom prst="rect">
+              <a:avLst/>
+            </a:prstGeom>
+            <a:noFill/>
+          </p:spPr>
+          <p:txBody>
+            <a:bodyPr lIns="0" rIns="0" tIns="0" bIns="0" anchorCtr="1" anchor="ctr" wrap="none"/>
+            <a:lstStyle/>
+            <a:p>
+              <a:pPr algn="l" marL="0" marR="0" indent="0">
+                <a:lnSpc>
+                  <a:spcPts val="900"/>
+                </a:lnSpc>
+                <a:spcBef>
+                  <a:spcPts val="0"/>
+                </a:spcBef>
+                <a:spcAft>
+                  <a:spcPts val="0"/>
+                </a:spcAft>
+              </a:pPr>
+              <a:r>
+                <a:rPr sz="900">
+                  <a:solidFill>
+                    <a:srgbClr val="404040">
+                      <a:alpha val="100000"/>
+                    </a:srgbClr>
+                  </a:solidFill>
+                  <a:latin typeface="Helvetica"/>
+                  <a:cs typeface="Helvetica"/>
+                </a:rPr>
+                <a:t>subHR per 10 % decline: 1.22 (0.97-1.53), p = 0.090  |  per IQR decline (Δ = 29.3 %): 1.79 (0.91-3.50)  |  IQR: [-14.6, 14.7] %</a:t>
+              </a:r>
+            </a:p>
+          </p:txBody>
+        </p:sp>
+        <p:sp>
+          <p:nvSpPr>
+            <p:cNvPr id="89" name="tx89"/>
+            <p:cNvSpPr/>
+            <p:nvPr/>
+          </p:nvSpPr>
+          <p:spPr>
+            <a:xfrm>
+              <a:off x="887106" y="3932770"/>
               <a:ext cx="1499158" cy="120152"/>
             </a:xfrm>
             <a:prstGeom prst="rect">
